--- a/presentation/DA1_Presentation.pptx
+++ b/presentation/DA1_Presentation.pptx
@@ -27,6 +27,17 @@
     <p:sldId id="275" r:id="rId26"/>
     <p:sldId id="276" r:id="rId27"/>
     <p:sldId id="277" r:id="rId28"/>
+    <p:sldId id="278" r:id="rId29"/>
+    <p:sldId id="279" r:id="rId30"/>
+    <p:sldId id="280" r:id="rId31"/>
+    <p:sldId id="281" r:id="rId32"/>
+    <p:sldId id="282" r:id="rId33"/>
+    <p:sldId id="283" r:id="rId34"/>
+    <p:sldId id="284" r:id="rId35"/>
+    <p:sldId id="285" r:id="rId36"/>
+    <p:sldId id="286" r:id="rId37"/>
+    <p:sldId id="287" r:id="rId38"/>
+    <p:sldId id="288" r:id="rId39"/>
   </p:sldIdLst>
   <p:sldSz cx="12191695" cy="6858000" type="screen4x3"/>
   <p:notesSz cx="6858000" cy="9144000"/>
@@ -3102,14 +3113,6 @@
 <file path=ppt/slides/slide1.xml><?xml version="1.0" encoding="utf-8"?>
 <p:sld xmlns:a="http://schemas.openxmlformats.org/drawingml/2006/main" xmlns:p="http://schemas.openxmlformats.org/presentationml/2006/main" xmlns:r="http://schemas.openxmlformats.org/officeDocument/2006/relationships">
   <p:cSld>
-    <p:bg>
-      <p:bgPr>
-        <a:solidFill>
-          <a:srgbClr val="1F3A5F"/>
-        </a:solidFill>
-        <a:effectLst/>
-      </p:bgPr>
-    </p:bg>
     <p:spTree>
       <p:nvGrpSpPr>
         <p:cNvPr id="1" name=""/>
@@ -3125,7 +3128,7 @@
         </p:nvSpPr>
         <p:spPr>
           <a:xfrm>
-            <a:off x="731520" y="1737360"/>
+            <a:off x="731520" y="1874519"/>
             <a:ext cx="10698480" cy="1554480"/>
           </a:xfrm>
           <a:prstGeom prst="rect">
@@ -3143,7 +3146,7 @@
             <a:r>
               <a:rPr sz="4000" b="1" i="0">
                 <a:solidFill>
-                  <a:srgbClr val="FFFFFF"/>
+                  <a:srgbClr val="000000"/>
                 </a:solidFill>
                 <a:latin typeface="Calibri"/>
               </a:rPr>
@@ -3154,151 +3157,20 @@
       </p:sp>
       <p:sp>
         <p:nvSpPr>
-          <p:cNvPr id="3" name="TextBox 2"/>
-          <p:cNvSpPr txBox="1"/>
-          <p:nvPr/>
-        </p:nvSpPr>
-        <p:spPr>
-          <a:xfrm>
-            <a:off x="731520" y="3337560"/>
-            <a:ext cx="10698480" cy="548640"/>
-          </a:xfrm>
-          <a:prstGeom prst="rect">
-            <a:avLst/>
-          </a:prstGeom>
-          <a:noFill/>
-        </p:spPr>
-        <p:txBody>
-          <a:bodyPr wrap="square">
-            <a:spAutoFit/>
-          </a:bodyPr>
-          <a:lstStyle/>
-          <a:p>
-            <a:pPr algn="ctr"/>
-            <a:r>
-              <a:rPr sz="2000" b="0" i="0">
-                <a:solidFill>
-                  <a:srgbClr val="CFE3DF"/>
-                </a:solidFill>
-                <a:latin typeface="Calibri"/>
-              </a:rPr>
-              <a:t>Digital Assignment 1  •  Database Management Systems</a:t>
-            </a:r>
-          </a:p>
-        </p:txBody>
-      </p:sp>
-      <p:sp>
-        <p:nvSpPr>
-          <p:cNvPr id="4" name="TextBox 3"/>
-          <p:cNvSpPr txBox="1"/>
-          <p:nvPr/>
-        </p:nvSpPr>
-        <p:spPr>
-          <a:xfrm>
-            <a:off x="731520" y="3977639"/>
-            <a:ext cx="10698480" cy="548640"/>
-          </a:xfrm>
-          <a:prstGeom prst="rect">
-            <a:avLst/>
-          </a:prstGeom>
-          <a:noFill/>
-        </p:spPr>
-        <p:txBody>
-          <a:bodyPr wrap="square">
-            <a:spAutoFit/>
-          </a:bodyPr>
-          <a:lstStyle/>
-          <a:p>
-            <a:pPr algn="ctr"/>
-            <a:r>
-              <a:rPr sz="1900" b="1" i="0">
-                <a:solidFill>
-                  <a:srgbClr val="2A9D8F"/>
-                </a:solidFill>
-                <a:latin typeface="Calibri"/>
-              </a:rPr>
-              <a:t>ER / EER Model and Normalization up to BCNF</a:t>
-            </a:r>
-          </a:p>
-        </p:txBody>
-      </p:sp>
-      <p:sp>
-        <p:nvSpPr>
-          <p:cNvPr id="5" name="TextBox 4"/>
-          <p:cNvSpPr txBox="1"/>
-          <p:nvPr/>
-        </p:nvSpPr>
-        <p:spPr>
-          <a:xfrm>
-            <a:off x="731520" y="5257800"/>
-            <a:ext cx="10698480" cy="822960"/>
-          </a:xfrm>
-          <a:prstGeom prst="rect">
-            <a:avLst/>
-          </a:prstGeom>
-          <a:noFill/>
-        </p:spPr>
-        <p:txBody>
-          <a:bodyPr wrap="square">
-            <a:spAutoFit/>
-          </a:bodyPr>
-          <a:lstStyle/>
-          <a:p>
-            <a:pPr algn="ctr"/>
-            <a:r>
-              <a:rPr sz="1500" b="1" i="0">
-                <a:solidFill>
-                  <a:srgbClr val="FFFFFF"/>
-                </a:solidFill>
-                <a:latin typeface="Calibri"/>
-              </a:rPr>
-              <a:t>Safwaan Mohamed S (25BCE1188)   •   Avi Dhandhania (25BCE1207)   •   Priyal Bhalla (25BCE1261)</a:t>
-            </a:r>
-          </a:p>
-        </p:txBody>
-      </p:sp>
-    </p:spTree>
-  </p:cSld>
-  <p:clrMapOvr>
-    <a:masterClrMapping/>
-  </p:clrMapOvr>
-</p:sld>
-</file>
-
-<file path=ppt/slides/slide10.xml><?xml version="1.0" encoding="utf-8"?>
-<p:sld xmlns:a="http://schemas.openxmlformats.org/drawingml/2006/main" xmlns:p="http://schemas.openxmlformats.org/presentationml/2006/main" xmlns:r="http://schemas.openxmlformats.org/officeDocument/2006/relationships">
-  <p:cSld>
-    <p:bg>
-      <p:bgPr>
-        <a:solidFill>
-          <a:srgbClr val="FFFFFF"/>
-        </a:solidFill>
-        <a:effectLst/>
-      </p:bgPr>
-    </p:bg>
-    <p:spTree>
-      <p:nvGrpSpPr>
-        <p:cNvPr id="1" name=""/>
-        <p:cNvGrpSpPr/>
-        <p:nvPr/>
-      </p:nvGrpSpPr>
-      <p:grpSpPr/>
-      <p:sp>
-        <p:nvSpPr>
-          <p:cNvPr id="2" name="Rectangle 1"/>
+          <p:cNvPr id="3" name="Rectangle 2"/>
           <p:cNvSpPr/>
           <p:nvPr/>
         </p:nvSpPr>
         <p:spPr>
           <a:xfrm>
-            <a:off x="0" y="0"/>
-            <a:ext cx="12191695" cy="1051560"/>
+            <a:off x="3108960" y="3310128"/>
+            <a:ext cx="5943600" cy="18288"/>
           </a:xfrm>
           <a:prstGeom prst="rect">
             <a:avLst/>
           </a:prstGeom>
           <a:solidFill>
-            <a:srgbClr val="1F3A5F"/>
+            <a:srgbClr val="000000"/>
           </a:solidFill>
           <a:ln>
             <a:noFill/>
@@ -3329,14 +3201,14 @@
       </p:sp>
       <p:sp>
         <p:nvSpPr>
-          <p:cNvPr id="3" name="TextBox 2"/>
+          <p:cNvPr id="4" name="TextBox 3"/>
           <p:cNvSpPr txBox="1"/>
           <p:nvPr/>
         </p:nvSpPr>
         <p:spPr>
           <a:xfrm>
-            <a:off x="457200" y="182880"/>
-            <a:ext cx="11338560" cy="731520"/>
+            <a:off x="731520" y="3474720"/>
+            <a:ext cx="10698480" cy="548640"/>
           </a:xfrm>
           <a:prstGeom prst="rect">
             <a:avLst/>
@@ -3349,29 +3221,29 @@
           </a:bodyPr>
           <a:lstStyle/>
           <a:p>
-            <a:pPr algn="l"/>
-            <a:r>
-              <a:rPr sz="2700" b="1" i="0">
-                <a:solidFill>
-                  <a:srgbClr val="FFFFFF"/>
-                </a:solidFill>
-                <a:latin typeface="Calibri"/>
-              </a:rPr>
-              <a:t>5. What EER Added, and Why</a:t>
-            </a:r>
-          </a:p>
-        </p:txBody>
-      </p:sp>
-      <p:sp>
-        <p:nvSpPr>
-          <p:cNvPr id="4" name="TextBox 3"/>
+            <a:pPr algn="ctr"/>
+            <a:r>
+              <a:rPr sz="2000" b="0" i="0">
+                <a:solidFill>
+                  <a:srgbClr val="444444"/>
+                </a:solidFill>
+                <a:latin typeface="Calibri"/>
+              </a:rPr>
+              <a:t>Digital Assignment 1, Database Management Systems</a:t>
+            </a:r>
+          </a:p>
+        </p:txBody>
+      </p:sp>
+      <p:sp>
+        <p:nvSpPr>
+          <p:cNvPr id="5" name="TextBox 4"/>
           <p:cNvSpPr txBox="1"/>
           <p:nvPr/>
         </p:nvSpPr>
         <p:spPr>
           <a:xfrm>
-            <a:off x="457200" y="1106424"/>
-            <a:ext cx="11338560" cy="411480"/>
+            <a:off x="731520" y="4069080"/>
+            <a:ext cx="10698480" cy="548640"/>
           </a:xfrm>
           <a:prstGeom prst="rect">
             <a:avLst/>
@@ -3384,11 +3256,178 @@
           </a:bodyPr>
           <a:lstStyle/>
           <a:p>
+            <a:pPr algn="ctr"/>
+            <a:r>
+              <a:rPr sz="1900" b="1" i="0">
+                <a:solidFill>
+                  <a:srgbClr val="000000"/>
+                </a:solidFill>
+                <a:latin typeface="Calibri"/>
+              </a:rPr>
+              <a:t>ER / EER Model and Normalization up to BCNF</a:t>
+            </a:r>
+          </a:p>
+        </p:txBody>
+      </p:sp>
+      <p:sp>
+        <p:nvSpPr>
+          <p:cNvPr id="6" name="TextBox 5"/>
+          <p:cNvSpPr txBox="1"/>
+          <p:nvPr/>
+        </p:nvSpPr>
+        <p:spPr>
+          <a:xfrm>
+            <a:off x="731520" y="5257800"/>
+            <a:ext cx="10698480" cy="822960"/>
+          </a:xfrm>
+          <a:prstGeom prst="rect">
+            <a:avLst/>
+          </a:prstGeom>
+          <a:noFill/>
+        </p:spPr>
+        <p:txBody>
+          <a:bodyPr wrap="square">
+            <a:spAutoFit/>
+          </a:bodyPr>
+          <a:lstStyle/>
+          <a:p>
+            <a:pPr algn="ctr"/>
+            <a:r>
+              <a:rPr sz="1500" b="1" i="0">
+                <a:solidFill>
+                  <a:srgbClr val="000000"/>
+                </a:solidFill>
+                <a:latin typeface="Calibri"/>
+              </a:rPr>
+              <a:t>Safwaan Mohamed S (25BCE1188)   |   Avi Dhandhania (25BCE1207)   |   Priyal Bhalla (25BCE1261)</a:t>
+            </a:r>
+          </a:p>
+        </p:txBody>
+      </p:sp>
+    </p:spTree>
+  </p:cSld>
+  <p:clrMapOvr>
+    <a:masterClrMapping/>
+  </p:clrMapOvr>
+</p:sld>
+</file>
+
+<file path=ppt/slides/slide10.xml><?xml version="1.0" encoding="utf-8"?>
+<p:sld xmlns:a="http://schemas.openxmlformats.org/drawingml/2006/main" xmlns:p="http://schemas.openxmlformats.org/presentationml/2006/main" xmlns:r="http://schemas.openxmlformats.org/officeDocument/2006/relationships">
+  <p:cSld>
+    <p:spTree>
+      <p:nvGrpSpPr>
+        <p:cNvPr id="1" name=""/>
+        <p:cNvGrpSpPr/>
+        <p:nvPr/>
+      </p:nvGrpSpPr>
+      <p:grpSpPr/>
+      <p:sp>
+        <p:nvSpPr>
+          <p:cNvPr id="2" name="TextBox 1"/>
+          <p:cNvSpPr txBox="1"/>
+          <p:nvPr/>
+        </p:nvSpPr>
+        <p:spPr>
+          <a:xfrm>
+            <a:off x="457200" y="292608"/>
+            <a:ext cx="11338560" cy="566928"/>
+          </a:xfrm>
+          <a:prstGeom prst="rect">
+            <a:avLst/>
+          </a:prstGeom>
+          <a:noFill/>
+        </p:spPr>
+        <p:txBody>
+          <a:bodyPr wrap="square">
+            <a:spAutoFit/>
+          </a:bodyPr>
+          <a:lstStyle/>
+          <a:p>
             <a:pPr algn="l"/>
             <a:r>
-              <a:rPr sz="1400" b="0" i="1">
-                <a:solidFill>
-                  <a:srgbClr val="2A9D8F"/>
+              <a:rPr sz="2600" b="1" i="0">
+                <a:solidFill>
+                  <a:srgbClr val="000000"/>
+                </a:solidFill>
+                <a:latin typeface="Calibri"/>
+              </a:rPr>
+              <a:t>5. What EER Added, and Why</a:t>
+            </a:r>
+          </a:p>
+        </p:txBody>
+      </p:sp>
+      <p:sp>
+        <p:nvSpPr>
+          <p:cNvPr id="3" name="Rectangle 2"/>
+          <p:cNvSpPr/>
+          <p:nvPr/>
+        </p:nvSpPr>
+        <p:spPr>
+          <a:xfrm>
+            <a:off x="457200" y="950976"/>
+            <a:ext cx="11338560" cy="18288"/>
+          </a:xfrm>
+          <a:prstGeom prst="rect">
+            <a:avLst/>
+          </a:prstGeom>
+          <a:solidFill>
+            <a:srgbClr val="000000"/>
+          </a:solidFill>
+          <a:ln>
+            <a:noFill/>
+          </a:ln>
+          <a:effectLst/>
+        </p:spPr>
+        <p:style>
+          <a:lnRef idx="1">
+            <a:schemeClr val="accent1"/>
+          </a:lnRef>
+          <a:fillRef idx="3">
+            <a:schemeClr val="accent1"/>
+          </a:fillRef>
+          <a:effectRef idx="2">
+            <a:schemeClr val="accent1"/>
+          </a:effectRef>
+          <a:fontRef idx="minor">
+            <a:schemeClr val="lt1"/>
+          </a:fontRef>
+        </p:style>
+        <p:txBody>
+          <a:bodyPr rtlCol="0" anchor="ctr"/>
+          <a:lstStyle/>
+          <a:p>
+            <a:pPr algn="ctr"/>
+          </a:p>
+        </p:txBody>
+      </p:sp>
+      <p:sp>
+        <p:nvSpPr>
+          <p:cNvPr id="4" name="TextBox 3"/>
+          <p:cNvSpPr txBox="1"/>
+          <p:nvPr/>
+        </p:nvSpPr>
+        <p:spPr>
+          <a:xfrm>
+            <a:off x="457200" y="1024128"/>
+            <a:ext cx="11338560" cy="384048"/>
+          </a:xfrm>
+          <a:prstGeom prst="rect">
+            <a:avLst/>
+          </a:prstGeom>
+          <a:noFill/>
+        </p:spPr>
+        <p:txBody>
+          <a:bodyPr wrap="square">
+            <a:spAutoFit/>
+          </a:bodyPr>
+          <a:lstStyle/>
+          <a:p>
+            <a:pPr algn="l"/>
+            <a:r>
+              <a:rPr sz="1350" b="0" i="1">
+                <a:solidFill>
+                  <a:srgbClr val="444444"/>
                 </a:solidFill>
                 <a:latin typeface="Calibri"/>
               </a:rPr>
@@ -3406,8 +3445,8 @@
           <p:nvPr/>
         </p:nvGraphicFramePr>
         <p:xfrm>
-          <a:off x="1432407" y="2546603"/>
-          <a:ext cx="9326880" cy="3364992"/>
+          <a:off x="1432407" y="2464308"/>
+          <a:ext cx="9326880" cy="3218688"/>
         </p:xfrm>
         <a:graphic>
           <a:graphicData uri="http://schemas.openxmlformats.org/drawingml/2006/table">
@@ -3419,7 +3458,7 @@
                 <a:gridCol w="4206240"/>
                 <a:gridCol w="5120640"/>
               </a:tblGrid>
-              <a:tr h="420624">
+              <a:tr h="402336">
                 <a:tc>
                   <a:txBody>
                     <a:bodyPr/>
@@ -3428,7 +3467,7 @@
                       <a:r>
                         <a:rPr sz="1300" b="1">
                           <a:solidFill>
-                            <a:srgbClr val="FFFFFF"/>
+                            <a:srgbClr val="000000"/>
                           </a:solidFill>
                         </a:rPr>
                         <a:t>EER feature</a:t>
@@ -3437,7 +3476,7 @@
                   </a:txBody>
                   <a:tcPr anchor="ctr">
                     <a:solidFill>
-                      <a:srgbClr val="1F3A5F"/>
+                      <a:srgbClr val="D9D9D9"/>
                     </a:solidFill>
                   </a:tcPr>
                 </a:tc>
@@ -3449,7 +3488,7 @@
                       <a:r>
                         <a:rPr sz="1300" b="1">
                           <a:solidFill>
-                            <a:srgbClr val="FFFFFF"/>
+                            <a:srgbClr val="000000"/>
                           </a:solidFill>
                         </a:rPr>
                         <a:t>Where</a:t>
@@ -3458,12 +3497,12 @@
                   </a:txBody>
                   <a:tcPr anchor="ctr">
                     <a:solidFill>
-                      <a:srgbClr val="1F3A5F"/>
+                      <a:srgbClr val="D9D9D9"/>
                     </a:solidFill>
                   </a:tcPr>
                 </a:tc>
               </a:tr>
-              <a:tr h="420624">
+              <a:tr h="402336">
                 <a:tc>
                   <a:txBody>
                     <a:bodyPr/>
@@ -3472,7 +3511,7 @@
                       <a:r>
                         <a:rPr sz="1200">
                           <a:solidFill>
-                            <a:srgbClr val="222222"/>
+                            <a:srgbClr val="000000"/>
                           </a:solidFill>
                         </a:rPr>
                         <a:t>Weak entity</a:t>
@@ -3481,7 +3520,7 @@
                   </a:txBody>
                   <a:tcPr anchor="ctr">
                     <a:solidFill>
-                      <a:srgbClr val="F2F6FB"/>
+                      <a:srgbClr val="F4F4F4"/>
                     </a:solidFill>
                   </a:tcPr>
                 </a:tc>
@@ -3493,7 +3532,7 @@
                       <a:r>
                         <a:rPr sz="1200">
                           <a:solidFill>
-                            <a:srgbClr val="222222"/>
+                            <a:srgbClr val="000000"/>
                           </a:solidFill>
                         </a:rPr>
                         <a:t>ORDER_ITEM</a:t>
@@ -3502,12 +3541,12 @@
                   </a:txBody>
                   <a:tcPr anchor="ctr">
                     <a:solidFill>
-                      <a:srgbClr val="F2F6FB"/>
+                      <a:srgbClr val="F4F4F4"/>
                     </a:solidFill>
                   </a:tcPr>
                 </a:tc>
               </a:tr>
-              <a:tr h="420624">
+              <a:tr h="402336">
                 <a:tc>
                   <a:txBody>
                     <a:bodyPr/>
@@ -3516,7 +3555,7 @@
                       <a:r>
                         <a:rPr sz="1200">
                           <a:solidFill>
-                            <a:srgbClr val="222222"/>
+                            <a:srgbClr val="000000"/>
                           </a:solidFill>
                         </a:rPr>
                         <a:t>Specialization (total, disjoint)</a:t>
@@ -3537,10 +3576,10 @@
                       <a:r>
                         <a:rPr sz="1200">
                           <a:solidFill>
-                            <a:srgbClr val="222222"/>
+                            <a:srgbClr val="000000"/>
                           </a:solidFill>
                         </a:rPr>
-                        <a:t>EMPLOYEE → MANAGER, DRIVER</a:t>
+                        <a:t>EMPLOYEE to MANAGER, DRIVER</a:t>
                       </a:r>
                     </a:p>
                   </a:txBody>
@@ -3551,7 +3590,7 @@
                   </a:tcPr>
                 </a:tc>
               </a:tr>
-              <a:tr h="420624">
+              <a:tr h="402336">
                 <a:tc>
                   <a:txBody>
                     <a:bodyPr/>
@@ -3560,7 +3599,7 @@
                       <a:r>
                         <a:rPr sz="1200">
                           <a:solidFill>
-                            <a:srgbClr val="222222"/>
+                            <a:srgbClr val="000000"/>
                           </a:solidFill>
                         </a:rPr>
                         <a:t>Specialization (partial)</a:t>
@@ -3569,7 +3608,7 @@
                   </a:txBody>
                   <a:tcPr anchor="ctr">
                     <a:solidFill>
-                      <a:srgbClr val="F2F6FB"/>
+                      <a:srgbClr val="F4F4F4"/>
                     </a:solidFill>
                   </a:tcPr>
                 </a:tc>
@@ -3581,21 +3620,21 @@
                       <a:r>
                         <a:rPr sz="1200">
                           <a:solidFill>
-                            <a:srgbClr val="222222"/>
+                            <a:srgbClr val="000000"/>
                           </a:solidFill>
                         </a:rPr>
-                        <a:t>PRODUCT → PERISHABLE_PRODUCT</a:t>
+                        <a:t>PRODUCT to PERISHABLE_PRODUCT</a:t>
                       </a:r>
                     </a:p>
                   </a:txBody>
                   <a:tcPr anchor="ctr">
                     <a:solidFill>
-                      <a:srgbClr val="F2F6FB"/>
+                      <a:srgbClr val="F4F4F4"/>
                     </a:solidFill>
                   </a:tcPr>
                 </a:tc>
               </a:tr>
-              <a:tr h="420624">
+              <a:tr h="402336">
                 <a:tc>
                   <a:txBody>
                     <a:bodyPr/>
@@ -3604,7 +3643,7 @@
                       <a:r>
                         <a:rPr sz="1200">
                           <a:solidFill>
-                            <a:srgbClr val="222222"/>
+                            <a:srgbClr val="000000"/>
                           </a:solidFill>
                         </a:rPr>
                         <a:t>Multivalued attribute</a:t>
@@ -3625,7 +3664,7 @@
                       <a:r>
                         <a:rPr sz="1200">
                           <a:solidFill>
-                            <a:srgbClr val="222222"/>
+                            <a:srgbClr val="000000"/>
                           </a:solidFill>
                         </a:rPr>
                         <a:t>SUPPLIER.Phone</a:t>
@@ -3639,7 +3678,7 @@
                   </a:tcPr>
                 </a:tc>
               </a:tr>
-              <a:tr h="420624">
+              <a:tr h="402336">
                 <a:tc>
                   <a:txBody>
                     <a:bodyPr/>
@@ -3648,7 +3687,7 @@
                       <a:r>
                         <a:rPr sz="1200">
                           <a:solidFill>
-                            <a:srgbClr val="222222"/>
+                            <a:srgbClr val="000000"/>
                           </a:solidFill>
                         </a:rPr>
                         <a:t>Composite attribute</a:t>
@@ -3657,7 +3696,7 @@
                   </a:txBody>
                   <a:tcPr anchor="ctr">
                     <a:solidFill>
-                      <a:srgbClr val="F2F6FB"/>
+                      <a:srgbClr val="F4F4F4"/>
                     </a:solidFill>
                   </a:tcPr>
                 </a:tc>
@@ -3669,7 +3708,7 @@
                       <a:r>
                         <a:rPr sz="1200">
                           <a:solidFill>
-                            <a:srgbClr val="222222"/>
+                            <a:srgbClr val="000000"/>
                           </a:solidFill>
                         </a:rPr>
                         <a:t>CUSTOMER.Address</a:t>
@@ -3678,12 +3717,12 @@
                   </a:txBody>
                   <a:tcPr anchor="ctr">
                     <a:solidFill>
-                      <a:srgbClr val="F2F6FB"/>
+                      <a:srgbClr val="F4F4F4"/>
                     </a:solidFill>
                   </a:tcPr>
                 </a:tc>
               </a:tr>
-              <a:tr h="420624">
+              <a:tr h="402336">
                 <a:tc>
                   <a:txBody>
                     <a:bodyPr/>
@@ -3692,7 +3731,7 @@
                       <a:r>
                         <a:rPr sz="1200">
                           <a:solidFill>
-                            <a:srgbClr val="222222"/>
+                            <a:srgbClr val="000000"/>
                           </a:solidFill>
                         </a:rPr>
                         <a:t>Derived attribute</a:t>
@@ -3713,7 +3752,7 @@
                       <a:r>
                         <a:rPr sz="1200">
                           <a:solidFill>
-                            <a:srgbClr val="222222"/>
+                            <a:srgbClr val="000000"/>
                           </a:solidFill>
                         </a:rPr>
                         <a:t>ORDERS.TotalAmt</a:t>
@@ -3727,7 +3766,7 @@
                   </a:tcPr>
                 </a:tc>
               </a:tr>
-              <a:tr h="420624">
+              <a:tr h="402336">
                 <a:tc>
                   <a:txBody>
                     <a:bodyPr/>
@@ -3736,7 +3775,7 @@
                       <a:r>
                         <a:rPr sz="1200">
                           <a:solidFill>
-                            <a:srgbClr val="222222"/>
+                            <a:srgbClr val="000000"/>
                           </a:solidFill>
                         </a:rPr>
                         <a:t>Recursive relationship</a:t>
@@ -3745,7 +3784,7 @@
                   </a:txBody>
                   <a:tcPr anchor="ctr">
                     <a:solidFill>
-                      <a:srgbClr val="F2F6FB"/>
+                      <a:srgbClr val="F4F4F4"/>
                     </a:solidFill>
                   </a:tcPr>
                 </a:tc>
@@ -3757,7 +3796,7 @@
                       <a:r>
                         <a:rPr sz="1200">
                           <a:solidFill>
-                            <a:srgbClr val="222222"/>
+                            <a:srgbClr val="000000"/>
                           </a:solidFill>
                         </a:rPr>
                         <a:t>EMPLOYEE SUPERVISES EMPLOYEE</a:t>
@@ -3766,7 +3805,7 @@
                   </a:txBody>
                   <a:tcPr anchor="ctr">
                     <a:solidFill>
-                      <a:srgbClr val="F2F6FB"/>
+                      <a:srgbClr val="F4F4F4"/>
                     </a:solidFill>
                   </a:tcPr>
                 </a:tc>
@@ -3786,14 +3825,6 @@
 <file path=ppt/slides/slide11.xml><?xml version="1.0" encoding="utf-8"?>
 <p:sld xmlns:a="http://schemas.openxmlformats.org/drawingml/2006/main" xmlns:p="http://schemas.openxmlformats.org/presentationml/2006/main" xmlns:r="http://schemas.openxmlformats.org/officeDocument/2006/relationships">
   <p:cSld>
-    <p:bg>
-      <p:bgPr>
-        <a:solidFill>
-          <a:srgbClr val="FFFFFF"/>
-        </a:solidFill>
-        <a:effectLst/>
-      </p:bgPr>
-    </p:bg>
     <p:spTree>
       <p:nvGrpSpPr>
         <p:cNvPr id="1" name=""/>
@@ -3803,20 +3834,55 @@
       <p:grpSpPr/>
       <p:sp>
         <p:nvSpPr>
-          <p:cNvPr id="2" name="Rectangle 1"/>
+          <p:cNvPr id="2" name="TextBox 1"/>
+          <p:cNvSpPr txBox="1"/>
+          <p:nvPr/>
+        </p:nvSpPr>
+        <p:spPr>
+          <a:xfrm>
+            <a:off x="457200" y="292608"/>
+            <a:ext cx="11338560" cy="566928"/>
+          </a:xfrm>
+          <a:prstGeom prst="rect">
+            <a:avLst/>
+          </a:prstGeom>
+          <a:noFill/>
+        </p:spPr>
+        <p:txBody>
+          <a:bodyPr wrap="square">
+            <a:spAutoFit/>
+          </a:bodyPr>
+          <a:lstStyle/>
+          <a:p>
+            <a:pPr algn="l"/>
+            <a:r>
+              <a:rPr sz="2600" b="1" i="0">
+                <a:solidFill>
+                  <a:srgbClr val="000000"/>
+                </a:solidFill>
+                <a:latin typeface="Calibri"/>
+              </a:rPr>
+              <a:t>5. The Weak Entity, in One Slide</a:t>
+            </a:r>
+          </a:p>
+        </p:txBody>
+      </p:sp>
+      <p:sp>
+        <p:nvSpPr>
+          <p:cNvPr id="3" name="Rectangle 2"/>
           <p:cNvSpPr/>
           <p:nvPr/>
         </p:nvSpPr>
         <p:spPr>
           <a:xfrm>
-            <a:off x="0" y="0"/>
-            <a:ext cx="12191695" cy="1051560"/>
+            <a:off x="457200" y="950976"/>
+            <a:ext cx="11338560" cy="18288"/>
           </a:xfrm>
           <a:prstGeom prst="rect">
             <a:avLst/>
           </a:prstGeom>
           <a:solidFill>
-            <a:srgbClr val="1F3A5F"/>
+            <a:srgbClr val="000000"/>
           </a:solidFill>
           <a:ln>
             <a:noFill/>
@@ -3847,14 +3913,14 @@
       </p:sp>
       <p:sp>
         <p:nvSpPr>
-          <p:cNvPr id="3" name="TextBox 2"/>
+          <p:cNvPr id="4" name="TextBox 3"/>
           <p:cNvSpPr txBox="1"/>
           <p:nvPr/>
         </p:nvSpPr>
         <p:spPr>
           <a:xfrm>
-            <a:off x="457200" y="182880"/>
-            <a:ext cx="11338560" cy="731520"/>
+            <a:off x="457200" y="1024128"/>
+            <a:ext cx="11338560" cy="384048"/>
           </a:xfrm>
           <a:prstGeom prst="rect">
             <a:avLst/>
@@ -3869,44 +3935,9 @@
           <a:p>
             <a:pPr algn="l"/>
             <a:r>
-              <a:rPr sz="2700" b="1" i="0">
-                <a:solidFill>
-                  <a:srgbClr val="FFFFFF"/>
-                </a:solidFill>
-                <a:latin typeface="Calibri"/>
-              </a:rPr>
-              <a:t>5. The Weak Entity, in One Slide</a:t>
-            </a:r>
-          </a:p>
-        </p:txBody>
-      </p:sp>
-      <p:sp>
-        <p:nvSpPr>
-          <p:cNvPr id="4" name="TextBox 3"/>
-          <p:cNvSpPr txBox="1"/>
-          <p:nvPr/>
-        </p:nvSpPr>
-        <p:spPr>
-          <a:xfrm>
-            <a:off x="457200" y="1106424"/>
-            <a:ext cx="11338560" cy="411480"/>
-          </a:xfrm>
-          <a:prstGeom prst="rect">
-            <a:avLst/>
-          </a:prstGeom>
-          <a:noFill/>
-        </p:spPr>
-        <p:txBody>
-          <a:bodyPr wrap="square">
-            <a:spAutoFit/>
-          </a:bodyPr>
-          <a:lstStyle/>
-          <a:p>
-            <a:pPr algn="l"/>
-            <a:r>
-              <a:rPr sz="1400" b="0" i="1">
-                <a:solidFill>
-                  <a:srgbClr val="2A9D8F"/>
+              <a:rPr sz="1350" b="0" i="1">
+                <a:solidFill>
+                  <a:srgbClr val="444444"/>
                 </a:solidFill>
                 <a:latin typeface="Calibri"/>
               </a:rPr>
@@ -3923,8 +3954,8 @@
         </p:nvSpPr>
         <p:spPr>
           <a:xfrm>
-            <a:off x="640080" y="1783080"/>
-            <a:ext cx="10972800" cy="4800600"/>
+            <a:off x="640080" y="1517904"/>
+            <a:ext cx="10972800" cy="5065776"/>
           </a:xfrm>
           <a:prstGeom prst="rect">
             <a:avLst/>
@@ -3945,11 +3976,11 @@
             <a:r>
               <a:rPr sz="1700">
                 <a:solidFill>
-                  <a:srgbClr val="222222"/>
-                </a:solidFill>
-                <a:latin typeface="Calibri"/>
-              </a:rPr>
-              <a:t>•  ORDER_ITEM cannot exist on its own — an order line means nothing without its order.</a:t>
+                  <a:srgbClr val="000000"/>
+                </a:solidFill>
+                <a:latin typeface="Calibri"/>
+              </a:rPr>
+              <a:t>•  ORDER_ITEM cannot exist on its own, an order line means nothing without its order.</a:t>
             </a:r>
           </a:p>
           <a:p>
@@ -3961,11 +3992,11 @@
             <a:r>
               <a:rPr sz="1700">
                 <a:solidFill>
-                  <a:srgbClr val="222222"/>
-                </a:solidFill>
-                <a:latin typeface="Calibri"/>
-              </a:rPr>
-              <a:t>•  ItemNo (1, 2, 3 …) is only unique inside one order, so it is a partial key — shown with a dashed underline.</a:t>
+                  <a:srgbClr val="000000"/>
+                </a:solidFill>
+                <a:latin typeface="Calibri"/>
+              </a:rPr>
+              <a:t>•  ItemNo (1, 2, 3 and so on) is only unique inside one order, so it is a partial key, shown with a dashed underline.</a:t>
             </a:r>
           </a:p>
           <a:p>
@@ -3977,7 +4008,7 @@
             <a:r>
               <a:rPr sz="1700">
                 <a:solidFill>
-                  <a:srgbClr val="222222"/>
+                  <a:srgbClr val="000000"/>
                 </a:solidFill>
                 <a:latin typeface="Calibri"/>
               </a:rPr>
@@ -3993,11 +4024,11 @@
             <a:r>
               <a:rPr sz="1700">
                 <a:solidFill>
-                  <a:srgbClr val="222222"/>
-                </a:solidFill>
-                <a:latin typeface="Calibri"/>
-              </a:rPr>
-              <a:t>•  Drawn with a double border; the diamond joining it to ORDERS is a double diamond, meaning that relationship gives it its identity.</a:t>
+                  <a:srgbClr val="000000"/>
+                </a:solidFill>
+                <a:latin typeface="Calibri"/>
+              </a:rPr>
+              <a:t>•  Drawn with a double border, and the diamond joining it to ORDERS is a double diamond, meaning that relationship gives it its identity.</a:t>
             </a:r>
           </a:p>
           <a:p>
@@ -4009,7 +4040,7 @@
             <a:r>
               <a:rPr sz="1700">
                 <a:solidFill>
-                  <a:srgbClr val="222222"/>
+                  <a:srgbClr val="000000"/>
                 </a:solidFill>
                 <a:latin typeface="Calibri"/>
               </a:rPr>
@@ -4029,14 +4060,6 @@
 <file path=ppt/slides/slide12.xml><?xml version="1.0" encoding="utf-8"?>
 <p:sld xmlns:a="http://schemas.openxmlformats.org/drawingml/2006/main" xmlns:p="http://schemas.openxmlformats.org/presentationml/2006/main" xmlns:r="http://schemas.openxmlformats.org/officeDocument/2006/relationships">
   <p:cSld>
-    <p:bg>
-      <p:bgPr>
-        <a:solidFill>
-          <a:srgbClr val="FFFFFF"/>
-        </a:solidFill>
-        <a:effectLst/>
-      </p:bgPr>
-    </p:bg>
     <p:spTree>
       <p:nvGrpSpPr>
         <p:cNvPr id="1" name=""/>
@@ -4046,20 +4069,55 @@
       <p:grpSpPr/>
       <p:sp>
         <p:nvSpPr>
-          <p:cNvPr id="2" name="Rectangle 1"/>
+          <p:cNvPr id="2" name="TextBox 1"/>
+          <p:cNvSpPr txBox="1"/>
+          <p:nvPr/>
+        </p:nvSpPr>
+        <p:spPr>
+          <a:xfrm>
+            <a:off x="457200" y="292608"/>
+            <a:ext cx="11338560" cy="566928"/>
+          </a:xfrm>
+          <a:prstGeom prst="rect">
+            <a:avLst/>
+          </a:prstGeom>
+          <a:noFill/>
+        </p:spPr>
+        <p:txBody>
+          <a:bodyPr wrap="square">
+            <a:spAutoFit/>
+          </a:bodyPr>
+          <a:lstStyle/>
+          <a:p>
+            <a:pPr algn="l"/>
+            <a:r>
+              <a:rPr sz="2600" b="1" i="0">
+                <a:solidFill>
+                  <a:srgbClr val="000000"/>
+                </a:solidFill>
+                <a:latin typeface="Calibri"/>
+              </a:rPr>
+              <a:t>6. Turning the Model into Tables</a:t>
+            </a:r>
+          </a:p>
+        </p:txBody>
+      </p:sp>
+      <p:sp>
+        <p:nvSpPr>
+          <p:cNvPr id="3" name="Rectangle 2"/>
           <p:cNvSpPr/>
           <p:nvPr/>
         </p:nvSpPr>
         <p:spPr>
           <a:xfrm>
-            <a:off x="0" y="0"/>
-            <a:ext cx="12191695" cy="1051560"/>
+            <a:off x="457200" y="950976"/>
+            <a:ext cx="11338560" cy="18288"/>
           </a:xfrm>
           <a:prstGeom prst="rect">
             <a:avLst/>
           </a:prstGeom>
           <a:solidFill>
-            <a:srgbClr val="1F3A5F"/>
+            <a:srgbClr val="000000"/>
           </a:solidFill>
           <a:ln>
             <a:noFill/>
@@ -4090,14 +4148,14 @@
       </p:sp>
       <p:sp>
         <p:nvSpPr>
-          <p:cNvPr id="3" name="TextBox 2"/>
+          <p:cNvPr id="4" name="TextBox 3"/>
           <p:cNvSpPr txBox="1"/>
           <p:nvPr/>
         </p:nvSpPr>
         <p:spPr>
           <a:xfrm>
-            <a:off x="457200" y="182880"/>
-            <a:ext cx="11338560" cy="731520"/>
+            <a:off x="457200" y="1024128"/>
+            <a:ext cx="11338560" cy="384048"/>
           </a:xfrm>
           <a:prstGeom prst="rect">
             <a:avLst/>
@@ -4112,48 +4170,13 @@
           <a:p>
             <a:pPr algn="l"/>
             <a:r>
-              <a:rPr sz="2700" b="1" i="0">
-                <a:solidFill>
-                  <a:srgbClr val="FFFFFF"/>
-                </a:solidFill>
-                <a:latin typeface="Calibri"/>
-              </a:rPr>
-              <a:t>6. Turning the Model into Tables</a:t>
-            </a:r>
-          </a:p>
-        </p:txBody>
-      </p:sp>
-      <p:sp>
-        <p:nvSpPr>
-          <p:cNvPr id="4" name="TextBox 3"/>
-          <p:cNvSpPr txBox="1"/>
-          <p:nvPr/>
-        </p:nvSpPr>
-        <p:spPr>
-          <a:xfrm>
-            <a:off x="457200" y="1106424"/>
-            <a:ext cx="11338560" cy="411480"/>
-          </a:xfrm>
-          <a:prstGeom prst="rect">
-            <a:avLst/>
-          </a:prstGeom>
-          <a:noFill/>
-        </p:spPr>
-        <p:txBody>
-          <a:bodyPr wrap="square">
-            <a:spAutoFit/>
-          </a:bodyPr>
-          <a:lstStyle/>
-          <a:p>
-            <a:pPr algn="l"/>
-            <a:r>
-              <a:rPr sz="1400" b="0" i="1">
-                <a:solidFill>
-                  <a:srgbClr val="2A9D8F"/>
-                </a:solidFill>
-                <a:latin typeface="Calibri"/>
-              </a:rPr>
-              <a:t>the standard mapping rules — they produce 16 tables</a:t>
+              <a:rPr sz="1350" b="0" i="1">
+                <a:solidFill>
+                  <a:srgbClr val="444444"/>
+                </a:solidFill>
+                <a:latin typeface="Calibri"/>
+              </a:rPr>
+              <a:t>the standard mapping rules</a:t>
             </a:r>
           </a:p>
         </p:txBody>
@@ -4166,8 +4189,8 @@
         </p:nvSpPr>
         <p:spPr>
           <a:xfrm>
-            <a:off x="640080" y="1783080"/>
-            <a:ext cx="10972800" cy="4800600"/>
+            <a:off x="640080" y="1517904"/>
+            <a:ext cx="10972800" cy="5065776"/>
           </a:xfrm>
           <a:prstGeom prst="rect">
             <a:avLst/>
@@ -4188,7 +4211,7 @@
             <a:r>
               <a:rPr sz="1600">
                 <a:solidFill>
-                  <a:srgbClr val="222222"/>
+                  <a:srgbClr val="000000"/>
                 </a:solidFill>
                 <a:latin typeface="Calibri"/>
               </a:rPr>
@@ -4204,7 +4227,7 @@
             <a:r>
               <a:rPr sz="1600">
                 <a:solidFill>
-                  <a:srgbClr val="222222"/>
+                  <a:srgbClr val="000000"/>
                 </a:solidFill>
                 <a:latin typeface="Calibri"/>
               </a:rPr>
@@ -4220,7 +4243,7 @@
             <a:r>
               <a:rPr sz="1600">
                 <a:solidFill>
-                  <a:srgbClr val="222222"/>
+                  <a:srgbClr val="000000"/>
                 </a:solidFill>
                 <a:latin typeface="Calibri"/>
               </a:rPr>
@@ -4236,7 +4259,7 @@
             <a:r>
               <a:rPr sz="1600">
                 <a:solidFill>
-                  <a:srgbClr val="222222"/>
+                  <a:srgbClr val="000000"/>
                 </a:solidFill>
                 <a:latin typeface="Calibri"/>
               </a:rPr>
@@ -4252,7 +4275,7 @@
             <a:r>
               <a:rPr sz="1600">
                 <a:solidFill>
-                  <a:srgbClr val="222222"/>
+                  <a:srgbClr val="000000"/>
                 </a:solidFill>
                 <a:latin typeface="Calibri"/>
               </a:rPr>
@@ -4268,11 +4291,11 @@
             <a:r>
               <a:rPr sz="1600">
                 <a:solidFill>
-                  <a:srgbClr val="222222"/>
-                </a:solidFill>
-                <a:latin typeface="Calibri"/>
-              </a:rPr>
-              <a:t>•  A derived attribute is not stored at all; it is calculated when needed.</a:t>
+                  <a:srgbClr val="000000"/>
+                </a:solidFill>
+                <a:latin typeface="Calibri"/>
+              </a:rPr>
+              <a:t>•  A derived attribute is not stored at all, it is calculated when needed.</a:t>
             </a:r>
           </a:p>
           <a:p>
@@ -4284,7 +4307,7 @@
             <a:r>
               <a:rPr sz="1600">
                 <a:solidFill>
-                  <a:srgbClr val="222222"/>
+                  <a:srgbClr val="000000"/>
                 </a:solidFill>
                 <a:latin typeface="Calibri"/>
               </a:rPr>
@@ -4300,7 +4323,7 @@
             <a:r>
               <a:rPr sz="1600">
                 <a:solidFill>
-                  <a:srgbClr val="222222"/>
+                  <a:srgbClr val="000000"/>
                 </a:solidFill>
                 <a:latin typeface="Calibri"/>
               </a:rPr>
@@ -4320,14 +4343,6 @@
 <file path=ppt/slides/slide13.xml><?xml version="1.0" encoding="utf-8"?>
 <p:sld xmlns:a="http://schemas.openxmlformats.org/drawingml/2006/main" xmlns:p="http://schemas.openxmlformats.org/presentationml/2006/main" xmlns:r="http://schemas.openxmlformats.org/officeDocument/2006/relationships">
   <p:cSld>
-    <p:bg>
-      <p:bgPr>
-        <a:solidFill>
-          <a:srgbClr val="FFFFFF"/>
-        </a:solidFill>
-        <a:effectLst/>
-      </p:bgPr>
-    </p:bg>
     <p:spTree>
       <p:nvGrpSpPr>
         <p:cNvPr id="1" name=""/>
@@ -4337,20 +4352,55 @@
       <p:grpSpPr/>
       <p:sp>
         <p:nvSpPr>
-          <p:cNvPr id="2" name="Rectangle 1"/>
+          <p:cNvPr id="2" name="TextBox 1"/>
+          <p:cNvSpPr txBox="1"/>
+          <p:nvPr/>
+        </p:nvSpPr>
+        <p:spPr>
+          <a:xfrm>
+            <a:off x="457200" y="292608"/>
+            <a:ext cx="11338560" cy="566928"/>
+          </a:xfrm>
+          <a:prstGeom prst="rect">
+            <a:avLst/>
+          </a:prstGeom>
+          <a:noFill/>
+        </p:spPr>
+        <p:txBody>
+          <a:bodyPr wrap="square">
+            <a:spAutoFit/>
+          </a:bodyPr>
+          <a:lstStyle/>
+          <a:p>
+            <a:pPr algn="l"/>
+            <a:r>
+              <a:rPr sz="2600" b="1" i="0">
+                <a:solidFill>
+                  <a:srgbClr val="000000"/>
+                </a:solidFill>
+                <a:latin typeface="Calibri"/>
+              </a:rPr>
+              <a:t>7. Why Sample Data Comes First</a:t>
+            </a:r>
+          </a:p>
+        </p:txBody>
+      </p:sp>
+      <p:sp>
+        <p:nvSpPr>
+          <p:cNvPr id="3" name="Rectangle 2"/>
           <p:cNvSpPr/>
           <p:nvPr/>
         </p:nvSpPr>
         <p:spPr>
           <a:xfrm>
-            <a:off x="0" y="0"/>
-            <a:ext cx="12191695" cy="1051560"/>
+            <a:off x="457200" y="950976"/>
+            <a:ext cx="11338560" cy="18288"/>
           </a:xfrm>
           <a:prstGeom prst="rect">
             <a:avLst/>
           </a:prstGeom>
           <a:solidFill>
-            <a:srgbClr val="1F3A5F"/>
+            <a:srgbClr val="000000"/>
           </a:solidFill>
           <a:ln>
             <a:noFill/>
@@ -4381,14 +4431,14 @@
       </p:sp>
       <p:sp>
         <p:nvSpPr>
-          <p:cNvPr id="3" name="TextBox 2"/>
+          <p:cNvPr id="4" name="TextBox 3"/>
           <p:cNvSpPr txBox="1"/>
           <p:nvPr/>
         </p:nvSpPr>
         <p:spPr>
           <a:xfrm>
-            <a:off x="457200" y="182880"/>
-            <a:ext cx="11338560" cy="731520"/>
+            <a:off x="457200" y="1024128"/>
+            <a:ext cx="11338560" cy="384048"/>
           </a:xfrm>
           <a:prstGeom prst="rect">
             <a:avLst/>
@@ -4403,48 +4453,13 @@
           <a:p>
             <a:pPr algn="l"/>
             <a:r>
-              <a:rPr sz="2700" b="1" i="0">
-                <a:solidFill>
-                  <a:srgbClr val="FFFFFF"/>
-                </a:solidFill>
-                <a:latin typeface="Calibri"/>
-              </a:rPr>
-              <a:t>7. How Normalization Works</a:t>
-            </a:r>
-          </a:p>
-        </p:txBody>
-      </p:sp>
-      <p:sp>
-        <p:nvSpPr>
-          <p:cNvPr id="4" name="TextBox 3"/>
-          <p:cNvSpPr txBox="1"/>
-          <p:nvPr/>
-        </p:nvSpPr>
-        <p:spPr>
-          <a:xfrm>
-            <a:off x="457200" y="1106424"/>
-            <a:ext cx="11338560" cy="411480"/>
-          </a:xfrm>
-          <a:prstGeom prst="rect">
-            <a:avLst/>
-          </a:prstGeom>
-          <a:noFill/>
-        </p:spPr>
-        <p:txBody>
-          <a:bodyPr wrap="square">
-            <a:spAutoFit/>
-          </a:bodyPr>
-          <a:lstStyle/>
-          <a:p>
-            <a:pPr algn="l"/>
-            <a:r>
-              <a:rPr sz="1400" b="0" i="1">
-                <a:solidFill>
-                  <a:srgbClr val="2A9D8F"/>
-                </a:solidFill>
-                <a:latin typeface="Calibri"/>
-              </a:rPr>
-              <a:t>start with one bad table, then split it one rule at a time</a:t>
+              <a:rPr sz="1350" b="0" i="1">
+                <a:solidFill>
+                  <a:srgbClr val="444444"/>
+                </a:solidFill>
+                <a:latin typeface="Calibri"/>
+              </a:rPr>
+              <a:t>the dependencies drive every split that follows</a:t>
             </a:r>
           </a:p>
         </p:txBody>
@@ -4457,8 +4472,8 @@
         </p:nvSpPr>
         <p:spPr>
           <a:xfrm>
-            <a:off x="640080" y="1783080"/>
-            <a:ext cx="10972800" cy="4800600"/>
+            <a:off x="640080" y="1517904"/>
+            <a:ext cx="10972800" cy="5065776"/>
           </a:xfrm>
           <a:prstGeom prst="rect">
             <a:avLst/>
@@ -4479,11 +4494,11 @@
             <a:r>
               <a:rPr sz="1700">
                 <a:solidFill>
-                  <a:srgbClr val="222222"/>
-                </a:solidFill>
-                <a:latin typeface="Calibri"/>
-              </a:rPr>
-              <a:t>•  A functional dependency X → Y means: if you know X, then Y is fixed.</a:t>
+                  <a:srgbClr val="000000"/>
+                </a:solidFill>
+                <a:latin typeface="Calibri"/>
+              </a:rPr>
+              <a:t>•  A functional dependency X -&gt; Y means: if you know X, then Y is fixed.</a:t>
             </a:r>
           </a:p>
           <a:p>
@@ -4495,11 +4510,11 @@
             <a:r>
               <a:rPr sz="1500">
                 <a:solidFill>
-                  <a:srgbClr val="555555"/>
-                </a:solidFill>
-                <a:latin typeface="Calibri"/>
-              </a:rPr>
-              <a:t>–  Example — CustID → CName: once you know the customer ID, the name is decided.</a:t>
+                  <a:srgbClr val="444444"/>
+                </a:solidFill>
+                <a:latin typeface="Calibri"/>
+              </a:rPr>
+              <a:t>-  Example, CustID -&gt; CName: once the customer ID is known, the name is decided.</a:t>
             </a:r>
           </a:p>
           <a:p>
@@ -4511,11 +4526,11 @@
             <a:r>
               <a:rPr sz="1700">
                 <a:solidFill>
-                  <a:srgbClr val="222222"/>
-                </a:solidFill>
-                <a:latin typeface="Calibri"/>
-              </a:rPr>
-              <a:t>•  Each normal form is a rule about which dependencies a table may contain.</a:t>
+                  <a:srgbClr val="000000"/>
+                </a:solidFill>
+                <a:latin typeface="Calibri"/>
+              </a:rPr>
+              <a:t>•  Each normal form is a rule about which dependencies a table may contain, so the dependencies have to be settled before any splitting starts.</a:t>
             </a:r>
           </a:p>
           <a:p>
@@ -4527,11 +4542,11 @@
             <a:r>
               <a:rPr sz="1700">
                 <a:solidFill>
-                  <a:srgbClr val="222222"/>
-                </a:solidFill>
-                <a:latin typeface="Calibri"/>
-              </a:rPr>
-              <a:t>•  1NF — every cell holds one value.</a:t>
+                  <a:srgbClr val="000000"/>
+                </a:solidFill>
+                <a:latin typeface="Calibri"/>
+              </a:rPr>
+              <a:t>•  Data cannot prove a dependency, but two rows can kill one: agree on X, disagree on Y, and X -&gt; Y is gone.</a:t>
             </a:r>
           </a:p>
           <a:p>
@@ -4543,43 +4558,11 @@
             <a:r>
               <a:rPr sz="1700">
                 <a:solidFill>
-                  <a:srgbClr val="222222"/>
-                </a:solidFill>
-                <a:latin typeface="Calibri"/>
-              </a:rPr>
-              <a:t>•  2NF — no column depends on only part of the key.</a:t>
-            </a:r>
-          </a:p>
-          <a:p>
-            <a:pPr>
-              <a:spcAft>
-                <a:spcPts val="900"/>
-              </a:spcAft>
-            </a:pPr>
-            <a:r>
-              <a:rPr sz="1700">
-                <a:solidFill>
-                  <a:srgbClr val="222222"/>
-                </a:solidFill>
-                <a:latin typeface="Calibri"/>
-              </a:rPr>
-              <a:t>•  3NF — no ordinary column decides another ordinary column.</a:t>
-            </a:r>
-          </a:p>
-          <a:p>
-            <a:pPr>
-              <a:spcAft>
-                <a:spcPts val="900"/>
-              </a:spcAft>
-            </a:pPr>
-            <a:r>
-              <a:rPr sz="1700">
-                <a:solidFill>
-                  <a:srgbClr val="222222"/>
-                </a:solidFill>
-                <a:latin typeface="Calibri"/>
-              </a:rPr>
-              <a:t>•  BCNF — the left side of every dependency must be a key.</a:t>
+                  <a:srgbClr val="000000"/>
+                </a:solidFill>
+                <a:latin typeface="Calibri"/>
+              </a:rPr>
+              <a:t>•  So every relation gets at least five rows, and every candidate dependency is checked against them.</a:t>
             </a:r>
           </a:p>
         </p:txBody>
@@ -4595,14 +4578,6 @@
 <file path=ppt/slides/slide14.xml><?xml version="1.0" encoding="utf-8"?>
 <p:sld xmlns:a="http://schemas.openxmlformats.org/drawingml/2006/main" xmlns:p="http://schemas.openxmlformats.org/presentationml/2006/main" xmlns:r="http://schemas.openxmlformats.org/officeDocument/2006/relationships">
   <p:cSld>
-    <p:bg>
-      <p:bgPr>
-        <a:solidFill>
-          <a:srgbClr val="FFFFFF"/>
-        </a:solidFill>
-        <a:effectLst/>
-      </p:bgPr>
-    </p:bg>
     <p:spTree>
       <p:nvGrpSpPr>
         <p:cNvPr id="1" name=""/>
@@ -4612,20 +4587,55 @@
       <p:grpSpPr/>
       <p:sp>
         <p:nvSpPr>
-          <p:cNvPr id="2" name="Rectangle 1"/>
+          <p:cNvPr id="2" name="TextBox 1"/>
+          <p:cNvSpPr txBox="1"/>
+          <p:nvPr/>
+        </p:nvSpPr>
+        <p:spPr>
+          <a:xfrm>
+            <a:off x="457200" y="237744"/>
+            <a:ext cx="11338560" cy="566928"/>
+          </a:xfrm>
+          <a:prstGeom prst="rect">
+            <a:avLst/>
+          </a:prstGeom>
+          <a:noFill/>
+        </p:spPr>
+        <p:txBody>
+          <a:bodyPr wrap="square">
+            <a:spAutoFit/>
+          </a:bodyPr>
+          <a:lstStyle/>
+          <a:p>
+            <a:pPr algn="l"/>
+            <a:r>
+              <a:rPr sz="2600" b="1" i="0">
+                <a:solidFill>
+                  <a:srgbClr val="000000"/>
+                </a:solidFill>
+                <a:latin typeface="Calibri"/>
+              </a:rPr>
+              <a:t>7. The Sample Rows</a:t>
+            </a:r>
+          </a:p>
+        </p:txBody>
+      </p:sp>
+      <p:sp>
+        <p:nvSpPr>
+          <p:cNvPr id="3" name="Rectangle 2"/>
           <p:cNvSpPr/>
           <p:nvPr/>
         </p:nvSpPr>
         <p:spPr>
           <a:xfrm>
-            <a:off x="0" y="0"/>
-            <a:ext cx="12191695" cy="914400"/>
+            <a:off x="457200" y="896112"/>
+            <a:ext cx="11338560" cy="18288"/>
           </a:xfrm>
           <a:prstGeom prst="rect">
             <a:avLst/>
           </a:prstGeom>
           <a:solidFill>
-            <a:srgbClr val="1F3A5F"/>
+            <a:srgbClr val="000000"/>
           </a:solidFill>
           <a:ln>
             <a:noFill/>
@@ -4656,14 +4666,14 @@
       </p:sp>
       <p:sp>
         <p:nvSpPr>
-          <p:cNvPr id="3" name="TextBox 2"/>
+          <p:cNvPr id="4" name="TextBox 3"/>
           <p:cNvSpPr txBox="1"/>
           <p:nvPr/>
         </p:nvSpPr>
         <p:spPr>
           <a:xfrm>
-            <a:off x="457200" y="182880"/>
-            <a:ext cx="11338560" cy="731520"/>
+            <a:off x="457200" y="969264"/>
+            <a:ext cx="11338560" cy="384048"/>
           </a:xfrm>
           <a:prstGeom prst="rect">
             <a:avLst/>
@@ -4678,14 +4688,2506 @@
           <a:p>
             <a:pPr algn="l"/>
             <a:r>
-              <a:rPr sz="2700" b="1" i="0">
-                <a:solidFill>
-                  <a:srgbClr val="FFFFFF"/>
-                </a:solidFill>
-                <a:latin typeface="Calibri"/>
-              </a:rPr>
-              <a:t>7. Where we start — Unnormalized Form (UNF)</a:t>
-            </a:r>
+              <a:rPr sz="1350" b="0" i="1">
+                <a:solidFill>
+                  <a:srgbClr val="444444"/>
+                </a:solidFill>
+                <a:latin typeface="Calibri"/>
+              </a:rPr>
+              <a:t>ORDER_LINE rows are numbered 1 to 7 from the top</a:t>
+            </a:r>
+          </a:p>
+        </p:txBody>
+      </p:sp>
+      <p:pic>
+        <p:nvPicPr>
+          <p:cNvPr id="5" name="Picture 4" descr="sample_data.png"/>
+          <p:cNvPicPr>
+            <a:picLocks noChangeAspect="1"/>
+          </p:cNvPicPr>
+          <p:nvPr/>
+        </p:nvPicPr>
+        <p:blipFill>
+          <a:blip r:embed="rId2"/>
+          <a:stretch>
+            <a:fillRect/>
+          </a:stretch>
+        </p:blipFill>
+        <p:spPr>
+          <a:xfrm>
+            <a:off x="1111421" y="1463040"/>
+            <a:ext cx="9968851" cy="5212079"/>
+          </a:xfrm>
+          <a:prstGeom prst="rect">
+            <a:avLst/>
+          </a:prstGeom>
+        </p:spPr>
+      </p:pic>
+    </p:spTree>
+  </p:cSld>
+  <p:clrMapOvr>
+    <a:masterClrMapping/>
+  </p:clrMapOvr>
+</p:sld>
+</file>
+
+<file path=ppt/slides/slide15.xml><?xml version="1.0" encoding="utf-8"?>
+<p:sld xmlns:a="http://schemas.openxmlformats.org/drawingml/2006/main" xmlns:p="http://schemas.openxmlformats.org/presentationml/2006/main" xmlns:r="http://schemas.openxmlformats.org/officeDocument/2006/relationships">
+  <p:cSld>
+    <p:spTree>
+      <p:nvGrpSpPr>
+        <p:cNvPr id="1" name=""/>
+        <p:cNvGrpSpPr/>
+        <p:nvPr/>
+      </p:nvGrpSpPr>
+      <p:grpSpPr/>
+      <p:sp>
+        <p:nvSpPr>
+          <p:cNvPr id="2" name="TextBox 1"/>
+          <p:cNvSpPr txBox="1"/>
+          <p:nvPr/>
+        </p:nvSpPr>
+        <p:spPr>
+          <a:xfrm>
+            <a:off x="457200" y="292608"/>
+            <a:ext cx="11338560" cy="566928"/>
+          </a:xfrm>
+          <a:prstGeom prst="rect">
+            <a:avLst/>
+          </a:prstGeom>
+          <a:noFill/>
+        </p:spPr>
+        <p:txBody>
+          <a:bodyPr wrap="square">
+            <a:spAutoFit/>
+          </a:bodyPr>
+          <a:lstStyle/>
+          <a:p>
+            <a:pPr algn="l"/>
+            <a:r>
+              <a:rPr sz="2600" b="1" i="0">
+                <a:solidFill>
+                  <a:srgbClr val="000000"/>
+                </a:solidFill>
+                <a:latin typeface="Calibri"/>
+              </a:rPr>
+              <a:t>7. Dependencies That Hold</a:t>
+            </a:r>
+          </a:p>
+        </p:txBody>
+      </p:sp>
+      <p:sp>
+        <p:nvSpPr>
+          <p:cNvPr id="3" name="Rectangle 2"/>
+          <p:cNvSpPr/>
+          <p:nvPr/>
+        </p:nvSpPr>
+        <p:spPr>
+          <a:xfrm>
+            <a:off x="457200" y="950976"/>
+            <a:ext cx="11338560" cy="18288"/>
+          </a:xfrm>
+          <a:prstGeom prst="rect">
+            <a:avLst/>
+          </a:prstGeom>
+          <a:solidFill>
+            <a:srgbClr val="000000"/>
+          </a:solidFill>
+          <a:ln>
+            <a:noFill/>
+          </a:ln>
+          <a:effectLst/>
+        </p:spPr>
+        <p:style>
+          <a:lnRef idx="1">
+            <a:schemeClr val="accent1"/>
+          </a:lnRef>
+          <a:fillRef idx="3">
+            <a:schemeClr val="accent1"/>
+          </a:fillRef>
+          <a:effectRef idx="2">
+            <a:schemeClr val="accent1"/>
+          </a:effectRef>
+          <a:fontRef idx="minor">
+            <a:schemeClr val="lt1"/>
+          </a:fontRef>
+        </p:style>
+        <p:txBody>
+          <a:bodyPr rtlCol="0" anchor="ctr"/>
+          <a:lstStyle/>
+          <a:p>
+            <a:pPr algn="ctr"/>
+          </a:p>
+        </p:txBody>
+      </p:sp>
+      <p:sp>
+        <p:nvSpPr>
+          <p:cNvPr id="4" name="TextBox 3"/>
+          <p:cNvSpPr txBox="1"/>
+          <p:nvPr/>
+        </p:nvSpPr>
+        <p:spPr>
+          <a:xfrm>
+            <a:off x="457200" y="1024128"/>
+            <a:ext cx="11338560" cy="384048"/>
+          </a:xfrm>
+          <a:prstGeom prst="rect">
+            <a:avLst/>
+          </a:prstGeom>
+          <a:noFill/>
+        </p:spPr>
+        <p:txBody>
+          <a:bodyPr wrap="square">
+            <a:spAutoFit/>
+          </a:bodyPr>
+          <a:lstStyle/>
+          <a:p>
+            <a:pPr algn="l"/>
+            <a:r>
+              <a:rPr sz="1350" b="0" i="1">
+                <a:solidFill>
+                  <a:srgbClr val="444444"/>
+                </a:solidFill>
+                <a:latin typeface="Calibri"/>
+              </a:rPr>
+              <a:t>each one survives every sample row</a:t>
+            </a:r>
+          </a:p>
+        </p:txBody>
+      </p:sp>
+      <p:graphicFrame>
+        <p:nvGraphicFramePr>
+          <p:cNvPr id="5" name="Table 4"/>
+          <p:cNvGraphicFramePr>
+            <a:graphicFrameLocks noGrp="1"/>
+          </p:cNvGraphicFramePr>
+          <p:nvPr/>
+        </p:nvGraphicFramePr>
+        <p:xfrm>
+          <a:off x="518007" y="2263140"/>
+          <a:ext cx="11155680" cy="3621024"/>
+        </p:xfrm>
+        <a:graphic>
+          <a:graphicData uri="http://schemas.openxmlformats.org/drawingml/2006/table">
+            <a:tbl>
+              <a:tblPr firstRow="1" bandRow="1">
+                <a:tableStyleId>{5C22544A-7EE6-4342-B048-85BDC9FD1C3A}</a:tableStyleId>
+              </a:tblPr>
+              <a:tblGrid>
+                <a:gridCol w="914400"/>
+                <a:gridCol w="3657600"/>
+                <a:gridCol w="6583680"/>
+              </a:tblGrid>
+              <a:tr h="402336">
+                <a:tc>
+                  <a:txBody>
+                    <a:bodyPr/>
+                    <a:lstStyle/>
+                    <a:p>
+                      <a:r>
+                        <a:rPr sz="1150" b="1">
+                          <a:solidFill>
+                            <a:srgbClr val="000000"/>
+                          </a:solidFill>
+                        </a:rPr>
+                        <a:t>Ref</a:t>
+                      </a:r>
+                    </a:p>
+                  </a:txBody>
+                  <a:tcPr anchor="ctr">
+                    <a:solidFill>
+                      <a:srgbClr val="D9D9D9"/>
+                    </a:solidFill>
+                  </a:tcPr>
+                </a:tc>
+                <a:tc>
+                  <a:txBody>
+                    <a:bodyPr/>
+                    <a:lstStyle/>
+                    <a:p>
+                      <a:r>
+                        <a:rPr sz="1150" b="1">
+                          <a:solidFill>
+                            <a:srgbClr val="000000"/>
+                          </a:solidFill>
+                        </a:rPr>
+                        <a:t>Dependency</a:t>
+                      </a:r>
+                    </a:p>
+                  </a:txBody>
+                  <a:tcPr anchor="ctr">
+                    <a:solidFill>
+                      <a:srgbClr val="D9D9D9"/>
+                    </a:solidFill>
+                  </a:tcPr>
+                </a:tc>
+                <a:tc>
+                  <a:txBody>
+                    <a:bodyPr/>
+                    <a:lstStyle/>
+                    <a:p>
+                      <a:r>
+                        <a:rPr sz="1150" b="1">
+                          <a:solidFill>
+                            <a:srgbClr val="000000"/>
+                          </a:solidFill>
+                        </a:rPr>
+                        <a:t>Read off</a:t>
+                      </a:r>
+                    </a:p>
+                  </a:txBody>
+                  <a:tcPr anchor="ctr">
+                    <a:solidFill>
+                      <a:srgbClr val="D9D9D9"/>
+                    </a:solidFill>
+                  </a:tcPr>
+                </a:tc>
+              </a:tr>
+              <a:tr h="402336">
+                <a:tc>
+                  <a:txBody>
+                    <a:bodyPr/>
+                    <a:lstStyle/>
+                    <a:p>
+                      <a:r>
+                        <a:rPr sz="1050">
+                          <a:solidFill>
+                            <a:srgbClr val="000000"/>
+                          </a:solidFill>
+                        </a:rPr>
+                        <a:t>F1</a:t>
+                      </a:r>
+                    </a:p>
+                  </a:txBody>
+                  <a:tcPr anchor="ctr">
+                    <a:solidFill>
+                      <a:srgbClr val="F4F4F4"/>
+                    </a:solidFill>
+                  </a:tcPr>
+                </a:tc>
+                <a:tc>
+                  <a:txBody>
+                    <a:bodyPr/>
+                    <a:lstStyle/>
+                    <a:p>
+                      <a:r>
+                        <a:rPr sz="1050">
+                          <a:solidFill>
+                            <a:srgbClr val="000000"/>
+                          </a:solidFill>
+                        </a:rPr>
+                        <a:t>OrderID -&gt; OrderDate, Status, CustID</a:t>
+                      </a:r>
+                    </a:p>
+                  </a:txBody>
+                  <a:tcPr anchor="ctr">
+                    <a:solidFill>
+                      <a:srgbClr val="F4F4F4"/>
+                    </a:solidFill>
+                  </a:tcPr>
+                </a:tc>
+                <a:tc>
+                  <a:txBody>
+                    <a:bodyPr/>
+                    <a:lstStyle/>
+                    <a:p>
+                      <a:r>
+                        <a:rPr sz="1050">
+                          <a:solidFill>
+                            <a:srgbClr val="000000"/>
+                          </a:solidFill>
+                        </a:rPr>
+                        <a:t>O-101 in rows 1 and 2, O-105 in rows 6 and 7</a:t>
+                      </a:r>
+                    </a:p>
+                  </a:txBody>
+                  <a:tcPr anchor="ctr">
+                    <a:solidFill>
+                      <a:srgbClr val="F4F4F4"/>
+                    </a:solidFill>
+                  </a:tcPr>
+                </a:tc>
+              </a:tr>
+              <a:tr h="402336">
+                <a:tc>
+                  <a:txBody>
+                    <a:bodyPr/>
+                    <a:lstStyle/>
+                    <a:p>
+                      <a:r>
+                        <a:rPr sz="1050">
+                          <a:solidFill>
+                            <a:srgbClr val="000000"/>
+                          </a:solidFill>
+                        </a:rPr>
+                        <a:t>F2</a:t>
+                      </a:r>
+                    </a:p>
+                  </a:txBody>
+                  <a:tcPr anchor="ctr">
+                    <a:solidFill>
+                      <a:srgbClr val="FFFFFF"/>
+                    </a:solidFill>
+                  </a:tcPr>
+                </a:tc>
+                <a:tc>
+                  <a:txBody>
+                    <a:bodyPr/>
+                    <a:lstStyle/>
+                    <a:p>
+                      <a:r>
+                        <a:rPr sz="1050">
+                          <a:solidFill>
+                            <a:srgbClr val="000000"/>
+                          </a:solidFill>
+                        </a:rPr>
+                        <a:t>CustID -&gt; CName, Street, City</a:t>
+                      </a:r>
+                    </a:p>
+                  </a:txBody>
+                  <a:tcPr anchor="ctr">
+                    <a:solidFill>
+                      <a:srgbClr val="FFFFFF"/>
+                    </a:solidFill>
+                  </a:tcPr>
+                </a:tc>
+                <a:tc>
+                  <a:txBody>
+                    <a:bodyPr/>
+                    <a:lstStyle/>
+                    <a:p>
+                      <a:r>
+                        <a:rPr sz="1050">
+                          <a:solidFill>
+                            <a:srgbClr val="000000"/>
+                          </a:solidFill>
+                        </a:rPr>
+                        <a:t>C-01 in rows 1, 2, 4; C-03 in rows 3, 6, 7</a:t>
+                      </a:r>
+                    </a:p>
+                  </a:txBody>
+                  <a:tcPr anchor="ctr">
+                    <a:solidFill>
+                      <a:srgbClr val="FFFFFF"/>
+                    </a:solidFill>
+                  </a:tcPr>
+                </a:tc>
+              </a:tr>
+              <a:tr h="402336">
+                <a:tc>
+                  <a:txBody>
+                    <a:bodyPr/>
+                    <a:lstStyle/>
+                    <a:p>
+                      <a:r>
+                        <a:rPr sz="1050">
+                          <a:solidFill>
+                            <a:srgbClr val="000000"/>
+                          </a:solidFill>
+                        </a:rPr>
+                        <a:t>F3</a:t>
+                      </a:r>
+                    </a:p>
+                  </a:txBody>
+                  <a:tcPr anchor="ctr">
+                    <a:solidFill>
+                      <a:srgbClr val="F4F4F4"/>
+                    </a:solidFill>
+                  </a:tcPr>
+                </a:tc>
+                <a:tc>
+                  <a:txBody>
+                    <a:bodyPr/>
+                    <a:lstStyle/>
+                    <a:p>
+                      <a:r>
+                        <a:rPr sz="1050">
+                          <a:solidFill>
+                            <a:srgbClr val="000000"/>
+                          </a:solidFill>
+                        </a:rPr>
+                        <a:t>City -&gt; State</a:t>
+                      </a:r>
+                    </a:p>
+                  </a:txBody>
+                  <a:tcPr anchor="ctr">
+                    <a:solidFill>
+                      <a:srgbClr val="F4F4F4"/>
+                    </a:solidFill>
+                  </a:tcPr>
+                </a:tc>
+                <a:tc>
+                  <a:txBody>
+                    <a:bodyPr/>
+                    <a:lstStyle/>
+                    <a:p>
+                      <a:r>
+                        <a:rPr sz="1050">
+                          <a:solidFill>
+                            <a:srgbClr val="000000"/>
+                          </a:solidFill>
+                        </a:rPr>
+                        <a:t>Chennai is always Tamil Nadu, Mumbai always Maharashtra</a:t>
+                      </a:r>
+                    </a:p>
+                  </a:txBody>
+                  <a:tcPr anchor="ctr">
+                    <a:solidFill>
+                      <a:srgbClr val="F4F4F4"/>
+                    </a:solidFill>
+                  </a:tcPr>
+                </a:tc>
+              </a:tr>
+              <a:tr h="402336">
+                <a:tc>
+                  <a:txBody>
+                    <a:bodyPr/>
+                    <a:lstStyle/>
+                    <a:p>
+                      <a:r>
+                        <a:rPr sz="1050">
+                          <a:solidFill>
+                            <a:srgbClr val="000000"/>
+                          </a:solidFill>
+                        </a:rPr>
+                        <a:t>F4</a:t>
+                      </a:r>
+                    </a:p>
+                  </a:txBody>
+                  <a:tcPr anchor="ctr">
+                    <a:solidFill>
+                      <a:srgbClr val="FFFFFF"/>
+                    </a:solidFill>
+                  </a:tcPr>
+                </a:tc>
+                <a:tc>
+                  <a:txBody>
+                    <a:bodyPr/>
+                    <a:lstStyle/>
+                    <a:p>
+                      <a:r>
+                        <a:rPr sz="1050">
+                          <a:solidFill>
+                            <a:srgbClr val="000000"/>
+                          </a:solidFill>
+                        </a:rPr>
+                        <a:t>ProductID -&gt; PName, Category, Price</a:t>
+                      </a:r>
+                    </a:p>
+                  </a:txBody>
+                  <a:tcPr anchor="ctr">
+                    <a:solidFill>
+                      <a:srgbClr val="FFFFFF"/>
+                    </a:solidFill>
+                  </a:tcPr>
+                </a:tc>
+                <a:tc>
+                  <a:txBody>
+                    <a:bodyPr/>
+                    <a:lstStyle/>
+                    <a:p>
+                      <a:r>
+                        <a:rPr sz="1050">
+                          <a:solidFill>
+                            <a:srgbClr val="000000"/>
+                          </a:solidFill>
+                        </a:rPr>
+                        <a:t>P-100 is 480 twice, P-104 is 132 twice, P-210 is 96 twice</a:t>
+                      </a:r>
+                    </a:p>
+                  </a:txBody>
+                  <a:tcPr anchor="ctr">
+                    <a:solidFill>
+                      <a:srgbClr val="FFFFFF"/>
+                    </a:solidFill>
+                  </a:tcPr>
+                </a:tc>
+              </a:tr>
+              <a:tr h="402336">
+                <a:tc>
+                  <a:txBody>
+                    <a:bodyPr/>
+                    <a:lstStyle/>
+                    <a:p>
+                      <a:r>
+                        <a:rPr sz="1050">
+                          <a:solidFill>
+                            <a:srgbClr val="000000"/>
+                          </a:solidFill>
+                        </a:rPr>
+                        <a:t>F5</a:t>
+                      </a:r>
+                    </a:p>
+                  </a:txBody>
+                  <a:tcPr anchor="ctr">
+                    <a:solidFill>
+                      <a:srgbClr val="F4F4F4"/>
+                    </a:solidFill>
+                  </a:tcPr>
+                </a:tc>
+                <a:tc>
+                  <a:txBody>
+                    <a:bodyPr/>
+                    <a:lstStyle/>
+                    <a:p>
+                      <a:r>
+                        <a:rPr sz="1050">
+                          <a:solidFill>
+                            <a:srgbClr val="000000"/>
+                          </a:solidFill>
+                        </a:rPr>
+                        <a:t>{OrderID, ProductID} -&gt; Qty</a:t>
+                      </a:r>
+                    </a:p>
+                  </a:txBody>
+                  <a:tcPr anchor="ctr">
+                    <a:solidFill>
+                      <a:srgbClr val="F4F4F4"/>
+                    </a:solidFill>
+                  </a:tcPr>
+                </a:tc>
+                <a:tc>
+                  <a:txBody>
+                    <a:bodyPr/>
+                    <a:lstStyle/>
+                    <a:p>
+                      <a:r>
+                        <a:rPr sz="1050">
+                          <a:solidFill>
+                            <a:srgbClr val="000000"/>
+                          </a:solidFill>
+                        </a:rPr>
+                        <a:t>the pair is unique, and neither half works alone</a:t>
+                      </a:r>
+                    </a:p>
+                  </a:txBody>
+                  <a:tcPr anchor="ctr">
+                    <a:solidFill>
+                      <a:srgbClr val="F4F4F4"/>
+                    </a:solidFill>
+                  </a:tcPr>
+                </a:tc>
+              </a:tr>
+              <a:tr h="402336">
+                <a:tc>
+                  <a:txBody>
+                    <a:bodyPr/>
+                    <a:lstStyle/>
+                    <a:p>
+                      <a:r>
+                        <a:rPr sz="1050">
+                          <a:solidFill>
+                            <a:srgbClr val="000000"/>
+                          </a:solidFill>
+                        </a:rPr>
+                        <a:t>F6</a:t>
+                      </a:r>
+                    </a:p>
+                  </a:txBody>
+                  <a:tcPr anchor="ctr">
+                    <a:solidFill>
+                      <a:srgbClr val="FFFFFF"/>
+                    </a:solidFill>
+                  </a:tcPr>
+                </a:tc>
+                <a:tc>
+                  <a:txBody>
+                    <a:bodyPr/>
+                    <a:lstStyle/>
+                    <a:p>
+                      <a:r>
+                        <a:rPr sz="1050">
+                          <a:solidFill>
+                            <a:srgbClr val="000000"/>
+                          </a:solidFill>
+                        </a:rPr>
+                        <a:t>DriverID -&gt; City</a:t>
+                      </a:r>
+                    </a:p>
+                  </a:txBody>
+                  <a:tcPr anchor="ctr">
+                    <a:solidFill>
+                      <a:srgbClr val="FFFFFF"/>
+                    </a:solidFill>
+                  </a:tcPr>
+                </a:tc>
+                <a:tc>
+                  <a:txBody>
+                    <a:bodyPr/>
+                    <a:lstStyle/>
+                    <a:p>
+                      <a:r>
+                        <a:rPr sz="1050">
+                          <a:solidFill>
+                            <a:srgbClr val="000000"/>
+                          </a:solidFill>
+                        </a:rPr>
+                        <a:t>D-05 is always Chennai, D-09 always Mumbai</a:t>
+                      </a:r>
+                    </a:p>
+                  </a:txBody>
+                  <a:tcPr anchor="ctr">
+                    <a:solidFill>
+                      <a:srgbClr val="FFFFFF"/>
+                    </a:solidFill>
+                  </a:tcPr>
+                </a:tc>
+              </a:tr>
+              <a:tr h="402336">
+                <a:tc>
+                  <a:txBody>
+                    <a:bodyPr/>
+                    <a:lstStyle/>
+                    <a:p>
+                      <a:r>
+                        <a:rPr sz="1050">
+                          <a:solidFill>
+                            <a:srgbClr val="000000"/>
+                          </a:solidFill>
+                        </a:rPr>
+                        <a:t>F7</a:t>
+                      </a:r>
+                    </a:p>
+                  </a:txBody>
+                  <a:tcPr anchor="ctr">
+                    <a:solidFill>
+                      <a:srgbClr val="F4F4F4"/>
+                    </a:solidFill>
+                  </a:tcPr>
+                </a:tc>
+                <a:tc>
+                  <a:txBody>
+                    <a:bodyPr/>
+                    <a:lstStyle/>
+                    <a:p>
+                      <a:r>
+                        <a:rPr sz="1050">
+                          <a:solidFill>
+                            <a:srgbClr val="000000"/>
+                          </a:solidFill>
+                        </a:rPr>
+                        <a:t>{OrderID, City} -&gt; DriverID</a:t>
+                      </a:r>
+                    </a:p>
+                  </a:txBody>
+                  <a:tcPr anchor="ctr">
+                    <a:solidFill>
+                      <a:srgbClr val="F4F4F4"/>
+                    </a:solidFill>
+                  </a:tcPr>
+                </a:tc>
+                <a:tc>
+                  <a:txBody>
+                    <a:bodyPr/>
+                    <a:lstStyle/>
+                    <a:p>
+                      <a:r>
+                        <a:rPr sz="1050">
+                          <a:solidFill>
+                            <a:srgbClr val="000000"/>
+                          </a:solidFill>
+                        </a:rPr>
+                        <a:t>no two rows share an OrderID and a City</a:t>
+                      </a:r>
+                    </a:p>
+                  </a:txBody>
+                  <a:tcPr anchor="ctr">
+                    <a:solidFill>
+                      <a:srgbClr val="F4F4F4"/>
+                    </a:solidFill>
+                  </a:tcPr>
+                </a:tc>
+              </a:tr>
+              <a:tr h="402336">
+                <a:tc>
+                  <a:txBody>
+                    <a:bodyPr/>
+                    <a:lstStyle/>
+                    <a:p>
+                      <a:r>
+                        <a:rPr sz="1050">
+                          <a:solidFill>
+                            <a:srgbClr val="000000"/>
+                          </a:solidFill>
+                        </a:rPr>
+                        <a:t>F8</a:t>
+                      </a:r>
+                    </a:p>
+                  </a:txBody>
+                  <a:tcPr anchor="ctr">
+                    <a:solidFill>
+                      <a:srgbClr val="FFFFFF"/>
+                    </a:solidFill>
+                  </a:tcPr>
+                </a:tc>
+                <a:tc>
+                  <a:txBody>
+                    <a:bodyPr/>
+                    <a:lstStyle/>
+                    <a:p>
+                      <a:r>
+                        <a:rPr sz="1050">
+                          <a:solidFill>
+                            <a:srgbClr val="000000"/>
+                          </a:solidFill>
+                        </a:rPr>
+                        <a:t>Phone -&gt; SupplierID</a:t>
+                      </a:r>
+                    </a:p>
+                  </a:txBody>
+                  <a:tcPr anchor="ctr">
+                    <a:solidFill>
+                      <a:srgbClr val="FFFFFF"/>
+                    </a:solidFill>
+                  </a:tcPr>
+                </a:tc>
+                <a:tc>
+                  <a:txBody>
+                    <a:bodyPr/>
+                    <a:lstStyle/>
+                    <a:p>
+                      <a:r>
+                        <a:rPr sz="1050">
+                          <a:solidFill>
+                            <a:srgbClr val="000000"/>
+                          </a:solidFill>
+                        </a:rPr>
+                        <a:t>each number belongs to one supplier</a:t>
+                      </a:r>
+                    </a:p>
+                  </a:txBody>
+                  <a:tcPr anchor="ctr">
+                    <a:solidFill>
+                      <a:srgbClr val="FFFFFF"/>
+                    </a:solidFill>
+                  </a:tcPr>
+                </a:tc>
+              </a:tr>
+            </a:tbl>
+          </a:graphicData>
+        </a:graphic>
+      </p:graphicFrame>
+    </p:spTree>
+  </p:cSld>
+  <p:clrMapOvr>
+    <a:masterClrMapping/>
+  </p:clrMapOvr>
+</p:sld>
+</file>
+
+<file path=ppt/slides/slide16.xml><?xml version="1.0" encoding="utf-8"?>
+<p:sld xmlns:a="http://schemas.openxmlformats.org/drawingml/2006/main" xmlns:p="http://schemas.openxmlformats.org/presentationml/2006/main" xmlns:r="http://schemas.openxmlformats.org/officeDocument/2006/relationships">
+  <p:cSld>
+    <p:spTree>
+      <p:nvGrpSpPr>
+        <p:cNvPr id="1" name=""/>
+        <p:cNvGrpSpPr/>
+        <p:nvPr/>
+      </p:nvGrpSpPr>
+      <p:grpSpPr/>
+      <p:sp>
+        <p:nvSpPr>
+          <p:cNvPr id="2" name="TextBox 1"/>
+          <p:cNvSpPr txBox="1"/>
+          <p:nvPr/>
+        </p:nvSpPr>
+        <p:spPr>
+          <a:xfrm>
+            <a:off x="457200" y="292608"/>
+            <a:ext cx="11338560" cy="566928"/>
+          </a:xfrm>
+          <a:prstGeom prst="rect">
+            <a:avLst/>
+          </a:prstGeom>
+          <a:noFill/>
+        </p:spPr>
+        <p:txBody>
+          <a:bodyPr wrap="square">
+            <a:spAutoFit/>
+          </a:bodyPr>
+          <a:lstStyle/>
+          <a:p>
+            <a:pPr algn="l"/>
+            <a:r>
+              <a:rPr sz="2600" b="1" i="0">
+                <a:solidFill>
+                  <a:srgbClr val="000000"/>
+                </a:solidFill>
+                <a:latin typeface="Calibri"/>
+              </a:rPr>
+              <a:t>7. Dependencies the Data Rules Out</a:t>
+            </a:r>
+          </a:p>
+        </p:txBody>
+      </p:sp>
+      <p:sp>
+        <p:nvSpPr>
+          <p:cNvPr id="3" name="Rectangle 2"/>
+          <p:cNvSpPr/>
+          <p:nvPr/>
+        </p:nvSpPr>
+        <p:spPr>
+          <a:xfrm>
+            <a:off x="457200" y="950976"/>
+            <a:ext cx="11338560" cy="18288"/>
+          </a:xfrm>
+          <a:prstGeom prst="rect">
+            <a:avLst/>
+          </a:prstGeom>
+          <a:solidFill>
+            <a:srgbClr val="000000"/>
+          </a:solidFill>
+          <a:ln>
+            <a:noFill/>
+          </a:ln>
+          <a:effectLst/>
+        </p:spPr>
+        <p:style>
+          <a:lnRef idx="1">
+            <a:schemeClr val="accent1"/>
+          </a:lnRef>
+          <a:fillRef idx="3">
+            <a:schemeClr val="accent1"/>
+          </a:fillRef>
+          <a:effectRef idx="2">
+            <a:schemeClr val="accent1"/>
+          </a:effectRef>
+          <a:fontRef idx="minor">
+            <a:schemeClr val="lt1"/>
+          </a:fontRef>
+        </p:style>
+        <p:txBody>
+          <a:bodyPr rtlCol="0" anchor="ctr"/>
+          <a:lstStyle/>
+          <a:p>
+            <a:pPr algn="ctr"/>
+          </a:p>
+        </p:txBody>
+      </p:sp>
+      <p:sp>
+        <p:nvSpPr>
+          <p:cNvPr id="4" name="TextBox 3"/>
+          <p:cNvSpPr txBox="1"/>
+          <p:nvPr/>
+        </p:nvSpPr>
+        <p:spPr>
+          <a:xfrm>
+            <a:off x="457200" y="1024128"/>
+            <a:ext cx="11338560" cy="384048"/>
+          </a:xfrm>
+          <a:prstGeom prst="rect">
+            <a:avLst/>
+          </a:prstGeom>
+          <a:noFill/>
+        </p:spPr>
+        <p:txBody>
+          <a:bodyPr wrap="square">
+            <a:spAutoFit/>
+          </a:bodyPr>
+          <a:lstStyle/>
+          <a:p>
+            <a:pPr algn="l"/>
+            <a:r>
+              <a:rPr sz="1350" b="0" i="1">
+                <a:solidFill>
+                  <a:srgbClr val="444444"/>
+                </a:solidFill>
+                <a:latin typeface="Calibri"/>
+              </a:rPr>
+              <a:t>two rows that agree on the left and disagree on the right</a:t>
+            </a:r>
+          </a:p>
+        </p:txBody>
+      </p:sp>
+      <p:graphicFrame>
+        <p:nvGraphicFramePr>
+          <p:cNvPr id="5" name="Table 4"/>
+          <p:cNvGraphicFramePr>
+            <a:graphicFrameLocks noGrp="1"/>
+          </p:cNvGraphicFramePr>
+          <p:nvPr/>
+        </p:nvGraphicFramePr>
+        <p:xfrm>
+          <a:off x="518007" y="2263140"/>
+          <a:ext cx="11155680" cy="3621024"/>
+        </p:xfrm>
+        <a:graphic>
+          <a:graphicData uri="http://schemas.openxmlformats.org/drawingml/2006/table">
+            <a:tbl>
+              <a:tblPr firstRow="1" bandRow="1">
+                <a:tableStyleId>{5C22544A-7EE6-4342-B048-85BDC9FD1C3A}</a:tableStyleId>
+              </a:tblPr>
+              <a:tblGrid>
+                <a:gridCol w="914400"/>
+                <a:gridCol w="3108960"/>
+                <a:gridCol w="7132320"/>
+              </a:tblGrid>
+              <a:tr h="402336">
+                <a:tc>
+                  <a:txBody>
+                    <a:bodyPr/>
+                    <a:lstStyle/>
+                    <a:p>
+                      <a:r>
+                        <a:rPr sz="1100" b="1">
+                          <a:solidFill>
+                            <a:srgbClr val="000000"/>
+                          </a:solidFill>
+                        </a:rPr>
+                        <a:t>Ref</a:t>
+                      </a:r>
+                    </a:p>
+                  </a:txBody>
+                  <a:tcPr anchor="ctr">
+                    <a:solidFill>
+                      <a:srgbClr val="D9D9D9"/>
+                    </a:solidFill>
+                  </a:tcPr>
+                </a:tc>
+                <a:tc>
+                  <a:txBody>
+                    <a:bodyPr/>
+                    <a:lstStyle/>
+                    <a:p>
+                      <a:r>
+                        <a:rPr sz="1100" b="1">
+                          <a:solidFill>
+                            <a:srgbClr val="000000"/>
+                          </a:solidFill>
+                        </a:rPr>
+                        <a:t>Rejected</a:t>
+                      </a:r>
+                    </a:p>
+                  </a:txBody>
+                  <a:tcPr anchor="ctr">
+                    <a:solidFill>
+                      <a:srgbClr val="D9D9D9"/>
+                    </a:solidFill>
+                  </a:tcPr>
+                </a:tc>
+                <a:tc>
+                  <a:txBody>
+                    <a:bodyPr/>
+                    <a:lstStyle/>
+                    <a:p>
+                      <a:r>
+                        <a:rPr sz="1100" b="1">
+                          <a:solidFill>
+                            <a:srgbClr val="000000"/>
+                          </a:solidFill>
+                        </a:rPr>
+                        <a:t>Counterexample</a:t>
+                      </a:r>
+                    </a:p>
+                  </a:txBody>
+                  <a:tcPr anchor="ctr">
+                    <a:solidFill>
+                      <a:srgbClr val="D9D9D9"/>
+                    </a:solidFill>
+                  </a:tcPr>
+                </a:tc>
+              </a:tr>
+              <a:tr h="402336">
+                <a:tc>
+                  <a:txBody>
+                    <a:bodyPr/>
+                    <a:lstStyle/>
+                    <a:p>
+                      <a:r>
+                        <a:rPr sz="1000">
+                          <a:solidFill>
+                            <a:srgbClr val="000000"/>
+                          </a:solidFill>
+                        </a:rPr>
+                        <a:t>N1</a:t>
+                      </a:r>
+                    </a:p>
+                  </a:txBody>
+                  <a:tcPr anchor="ctr">
+                    <a:solidFill>
+                      <a:srgbClr val="F4F4F4"/>
+                    </a:solidFill>
+                  </a:tcPr>
+                </a:tc>
+                <a:tc>
+                  <a:txBody>
+                    <a:bodyPr/>
+                    <a:lstStyle/>
+                    <a:p>
+                      <a:r>
+                        <a:rPr sz="1000">
+                          <a:solidFill>
+                            <a:srgbClr val="000000"/>
+                          </a:solidFill>
+                        </a:rPr>
+                        <a:t>ProductID -&gt; Qty</a:t>
+                      </a:r>
+                    </a:p>
+                  </a:txBody>
+                  <a:tcPr anchor="ctr">
+                    <a:solidFill>
+                      <a:srgbClr val="F4F4F4"/>
+                    </a:solidFill>
+                  </a:tcPr>
+                </a:tc>
+                <a:tc>
+                  <a:txBody>
+                    <a:bodyPr/>
+                    <a:lstStyle/>
+                    <a:p>
+                      <a:r>
+                        <a:rPr sz="1000">
+                          <a:solidFill>
+                            <a:srgbClr val="000000"/>
+                          </a:solidFill>
+                        </a:rPr>
+                        <a:t>Rows 1 and 4: P-100 is ordered 20 times on O-101 and 15 times on O-103.</a:t>
+                      </a:r>
+                    </a:p>
+                  </a:txBody>
+                  <a:tcPr anchor="ctr">
+                    <a:solidFill>
+                      <a:srgbClr val="F4F4F4"/>
+                    </a:solidFill>
+                  </a:tcPr>
+                </a:tc>
+              </a:tr>
+              <a:tr h="402336">
+                <a:tc>
+                  <a:txBody>
+                    <a:bodyPr/>
+                    <a:lstStyle/>
+                    <a:p>
+                      <a:r>
+                        <a:rPr sz="1000">
+                          <a:solidFill>
+                            <a:srgbClr val="000000"/>
+                          </a:solidFill>
+                        </a:rPr>
+                        <a:t>N2</a:t>
+                      </a:r>
+                    </a:p>
+                  </a:txBody>
+                  <a:tcPr anchor="ctr">
+                    <a:solidFill>
+                      <a:srgbClr val="FFFFFF"/>
+                    </a:solidFill>
+                  </a:tcPr>
+                </a:tc>
+                <a:tc>
+                  <a:txBody>
+                    <a:bodyPr/>
+                    <a:lstStyle/>
+                    <a:p>
+                      <a:r>
+                        <a:rPr sz="1000">
+                          <a:solidFill>
+                            <a:srgbClr val="000000"/>
+                          </a:solidFill>
+                        </a:rPr>
+                        <a:t>OrderID -&gt; ProductID</a:t>
+                      </a:r>
+                    </a:p>
+                  </a:txBody>
+                  <a:tcPr anchor="ctr">
+                    <a:solidFill>
+                      <a:srgbClr val="FFFFFF"/>
+                    </a:solidFill>
+                  </a:tcPr>
+                </a:tc>
+                <a:tc>
+                  <a:txBody>
+                    <a:bodyPr/>
+                    <a:lstStyle/>
+                    <a:p>
+                      <a:r>
+                        <a:rPr sz="1000">
+                          <a:solidFill>
+                            <a:srgbClr val="000000"/>
+                          </a:solidFill>
+                        </a:rPr>
+                        <a:t>Rows 1 and 2: O-101 holds both P-100 and P-104.</a:t>
+                      </a:r>
+                    </a:p>
+                  </a:txBody>
+                  <a:tcPr anchor="ctr">
+                    <a:solidFill>
+                      <a:srgbClr val="FFFFFF"/>
+                    </a:solidFill>
+                  </a:tcPr>
+                </a:tc>
+              </a:tr>
+              <a:tr h="402336">
+                <a:tc>
+                  <a:txBody>
+                    <a:bodyPr/>
+                    <a:lstStyle/>
+                    <a:p>
+                      <a:r>
+                        <a:rPr sz="1000">
+                          <a:solidFill>
+                            <a:srgbClr val="000000"/>
+                          </a:solidFill>
+                        </a:rPr>
+                        <a:t>N3</a:t>
+                      </a:r>
+                    </a:p>
+                  </a:txBody>
+                  <a:tcPr anchor="ctr">
+                    <a:solidFill>
+                      <a:srgbClr val="F4F4F4"/>
+                    </a:solidFill>
+                  </a:tcPr>
+                </a:tc>
+                <a:tc>
+                  <a:txBody>
+                    <a:bodyPr/>
+                    <a:lstStyle/>
+                    <a:p>
+                      <a:r>
+                        <a:rPr sz="1000">
+                          <a:solidFill>
+                            <a:srgbClr val="000000"/>
+                          </a:solidFill>
+                        </a:rPr>
+                        <a:t>City -&gt; CustID</a:t>
+                      </a:r>
+                    </a:p>
+                  </a:txBody>
+                  <a:tcPr anchor="ctr">
+                    <a:solidFill>
+                      <a:srgbClr val="F4F4F4"/>
+                    </a:solidFill>
+                  </a:tcPr>
+                </a:tc>
+                <a:tc>
+                  <a:txBody>
+                    <a:bodyPr/>
+                    <a:lstStyle/>
+                    <a:p>
+                      <a:r>
+                        <a:rPr sz="1000">
+                          <a:solidFill>
+                            <a:srgbClr val="000000"/>
+                          </a:solidFill>
+                        </a:rPr>
+                        <a:t>Rows 1 and 5: Chennai holds C-01 and also C-05.</a:t>
+                      </a:r>
+                    </a:p>
+                  </a:txBody>
+                  <a:tcPr anchor="ctr">
+                    <a:solidFill>
+                      <a:srgbClr val="F4F4F4"/>
+                    </a:solidFill>
+                  </a:tcPr>
+                </a:tc>
+              </a:tr>
+              <a:tr h="402336">
+                <a:tc>
+                  <a:txBody>
+                    <a:bodyPr/>
+                    <a:lstStyle/>
+                    <a:p>
+                      <a:r>
+                        <a:rPr sz="1000">
+                          <a:solidFill>
+                            <a:srgbClr val="000000"/>
+                          </a:solidFill>
+                        </a:rPr>
+                        <a:t>N4</a:t>
+                      </a:r>
+                    </a:p>
+                  </a:txBody>
+                  <a:tcPr anchor="ctr">
+                    <a:solidFill>
+                      <a:srgbClr val="FFFFFF"/>
+                    </a:solidFill>
+                  </a:tcPr>
+                </a:tc>
+                <a:tc>
+                  <a:txBody>
+                    <a:bodyPr/>
+                    <a:lstStyle/>
+                    <a:p>
+                      <a:r>
+                        <a:rPr sz="1000">
+                          <a:solidFill>
+                            <a:srgbClr val="000000"/>
+                          </a:solidFill>
+                        </a:rPr>
+                        <a:t>Category -&gt; ProductID</a:t>
+                      </a:r>
+                    </a:p>
+                  </a:txBody>
+                  <a:tcPr anchor="ctr">
+                    <a:solidFill>
+                      <a:srgbClr val="FFFFFF"/>
+                    </a:solidFill>
+                  </a:tcPr>
+                </a:tc>
+                <a:tc>
+                  <a:txBody>
+                    <a:bodyPr/>
+                    <a:lstStyle/>
+                    <a:p>
+                      <a:r>
+                        <a:rPr sz="1000">
+                          <a:solidFill>
+                            <a:srgbClr val="000000"/>
+                          </a:solidFill>
+                        </a:rPr>
+                        <a:t>Rows 1 and 5: Staples covers P-100 and also P-108.</a:t>
+                      </a:r>
+                    </a:p>
+                  </a:txBody>
+                  <a:tcPr anchor="ctr">
+                    <a:solidFill>
+                      <a:srgbClr val="FFFFFF"/>
+                    </a:solidFill>
+                  </a:tcPr>
+                </a:tc>
+              </a:tr>
+              <a:tr h="402336">
+                <a:tc>
+                  <a:txBody>
+                    <a:bodyPr/>
+                    <a:lstStyle/>
+                    <a:p>
+                      <a:r>
+                        <a:rPr sz="1000">
+                          <a:solidFill>
+                            <a:srgbClr val="000000"/>
+                          </a:solidFill>
+                        </a:rPr>
+                        <a:t>N5</a:t>
+                      </a:r>
+                    </a:p>
+                  </a:txBody>
+                  <a:tcPr anchor="ctr">
+                    <a:solidFill>
+                      <a:srgbClr val="F4F4F4"/>
+                    </a:solidFill>
+                  </a:tcPr>
+                </a:tc>
+                <a:tc>
+                  <a:txBody>
+                    <a:bodyPr/>
+                    <a:lstStyle/>
+                    <a:p>
+                      <a:r>
+                        <a:rPr sz="1000">
+                          <a:solidFill>
+                            <a:srgbClr val="000000"/>
+                          </a:solidFill>
+                        </a:rPr>
+                        <a:t>CName -&gt; OrderID</a:t>
+                      </a:r>
+                    </a:p>
+                  </a:txBody>
+                  <a:tcPr anchor="ctr">
+                    <a:solidFill>
+                      <a:srgbClr val="F4F4F4"/>
+                    </a:solidFill>
+                  </a:tcPr>
+                </a:tc>
+                <a:tc>
+                  <a:txBody>
+                    <a:bodyPr/>
+                    <a:lstStyle/>
+                    <a:p>
+                      <a:r>
+                        <a:rPr sz="1000">
+                          <a:solidFill>
+                            <a:srgbClr val="000000"/>
+                          </a:solidFill>
+                        </a:rPr>
+                        <a:t>Rows 1 and 4: Sharma Retail placed O-101 and also O-103.</a:t>
+                      </a:r>
+                    </a:p>
+                  </a:txBody>
+                  <a:tcPr anchor="ctr">
+                    <a:solidFill>
+                      <a:srgbClr val="F4F4F4"/>
+                    </a:solidFill>
+                  </a:tcPr>
+                </a:tc>
+              </a:tr>
+              <a:tr h="402336">
+                <a:tc>
+                  <a:txBody>
+                    <a:bodyPr/>
+                    <a:lstStyle/>
+                    <a:p>
+                      <a:r>
+                        <a:rPr sz="1000">
+                          <a:solidFill>
+                            <a:srgbClr val="000000"/>
+                          </a:solidFill>
+                        </a:rPr>
+                        <a:t>N6</a:t>
+                      </a:r>
+                    </a:p>
+                  </a:txBody>
+                  <a:tcPr anchor="ctr">
+                    <a:solidFill>
+                      <a:srgbClr val="FFFFFF"/>
+                    </a:solidFill>
+                  </a:tcPr>
+                </a:tc>
+                <a:tc>
+                  <a:txBody>
+                    <a:bodyPr/>
+                    <a:lstStyle/>
+                    <a:p>
+                      <a:r>
+                        <a:rPr sz="1000">
+                          <a:solidFill>
+                            <a:srgbClr val="000000"/>
+                          </a:solidFill>
+                        </a:rPr>
+                        <a:t>City -&gt; DriverID</a:t>
+                      </a:r>
+                    </a:p>
+                  </a:txBody>
+                  <a:tcPr anchor="ctr">
+                    <a:solidFill>
+                      <a:srgbClr val="FFFFFF"/>
+                    </a:solidFill>
+                  </a:tcPr>
+                </a:tc>
+                <a:tc>
+                  <a:txBody>
+                    <a:bodyPr/>
+                    <a:lstStyle/>
+                    <a:p>
+                      <a:r>
+                        <a:rPr sz="1000">
+                          <a:solidFill>
+                            <a:srgbClr val="000000"/>
+                          </a:solidFill>
+                        </a:rPr>
+                        <a:t>DELIVERY_DUTY rows 1 and 7: Chennai is covered by D-05 and by D-11.</a:t>
+                      </a:r>
+                    </a:p>
+                  </a:txBody>
+                  <a:tcPr anchor="ctr">
+                    <a:solidFill>
+                      <a:srgbClr val="FFFFFF"/>
+                    </a:solidFill>
+                  </a:tcPr>
+                </a:tc>
+              </a:tr>
+              <a:tr h="402336">
+                <a:tc>
+                  <a:txBody>
+                    <a:bodyPr/>
+                    <a:lstStyle/>
+                    <a:p>
+                      <a:r>
+                        <a:rPr sz="1000">
+                          <a:solidFill>
+                            <a:srgbClr val="000000"/>
+                          </a:solidFill>
+                        </a:rPr>
+                        <a:t>N7</a:t>
+                      </a:r>
+                    </a:p>
+                  </a:txBody>
+                  <a:tcPr anchor="ctr">
+                    <a:solidFill>
+                      <a:srgbClr val="F4F4F4"/>
+                    </a:solidFill>
+                  </a:tcPr>
+                </a:tc>
+                <a:tc>
+                  <a:txBody>
+                    <a:bodyPr/>
+                    <a:lstStyle/>
+                    <a:p>
+                      <a:r>
+                        <a:rPr sz="1000">
+                          <a:solidFill>
+                            <a:srgbClr val="000000"/>
+                          </a:solidFill>
+                        </a:rPr>
+                        <a:t>OrderID -&gt; DriverID</a:t>
+                      </a:r>
+                    </a:p>
+                  </a:txBody>
+                  <a:tcPr anchor="ctr">
+                    <a:solidFill>
+                      <a:srgbClr val="F4F4F4"/>
+                    </a:solidFill>
+                  </a:tcPr>
+                </a:tc>
+                <a:tc>
+                  <a:txBody>
+                    <a:bodyPr/>
+                    <a:lstStyle/>
+                    <a:p>
+                      <a:r>
+                        <a:rPr sz="1000">
+                          <a:solidFill>
+                            <a:srgbClr val="000000"/>
+                          </a:solidFill>
+                        </a:rPr>
+                        <a:t>DELIVERY_DUTY rows 1 and 2: O-101 is served by D-05 and by D-09.</a:t>
+                      </a:r>
+                    </a:p>
+                  </a:txBody>
+                  <a:tcPr anchor="ctr">
+                    <a:solidFill>
+                      <a:srgbClr val="F4F4F4"/>
+                    </a:solidFill>
+                  </a:tcPr>
+                </a:tc>
+              </a:tr>
+              <a:tr h="402336">
+                <a:tc>
+                  <a:txBody>
+                    <a:bodyPr/>
+                    <a:lstStyle/>
+                    <a:p>
+                      <a:r>
+                        <a:rPr sz="1000">
+                          <a:solidFill>
+                            <a:srgbClr val="000000"/>
+                          </a:solidFill>
+                        </a:rPr>
+                        <a:t>N8</a:t>
+                      </a:r>
+                    </a:p>
+                  </a:txBody>
+                  <a:tcPr anchor="ctr">
+                    <a:solidFill>
+                      <a:srgbClr val="FFFFFF"/>
+                    </a:solidFill>
+                  </a:tcPr>
+                </a:tc>
+                <a:tc>
+                  <a:txBody>
+                    <a:bodyPr/>
+                    <a:lstStyle/>
+                    <a:p>
+                      <a:r>
+                        <a:rPr sz="1000">
+                          <a:solidFill>
+                            <a:srgbClr val="000000"/>
+                          </a:solidFill>
+                        </a:rPr>
+                        <a:t>SupplierID -&gt; Phone</a:t>
+                      </a:r>
+                    </a:p>
+                  </a:txBody>
+                  <a:tcPr anchor="ctr">
+                    <a:solidFill>
+                      <a:srgbClr val="FFFFFF"/>
+                    </a:solidFill>
+                  </a:tcPr>
+                </a:tc>
+                <a:tc>
+                  <a:txBody>
+                    <a:bodyPr/>
+                    <a:lstStyle/>
+                    <a:p>
+                      <a:r>
+                        <a:rPr sz="1000">
+                          <a:solidFill>
+                            <a:srgbClr val="000000"/>
+                          </a:solidFill>
+                        </a:rPr>
+                        <a:t>SUPPLIER_PHONE rows 1 and 2: S-01 has two numbers.</a:t>
+                      </a:r>
+                    </a:p>
+                  </a:txBody>
+                  <a:tcPr anchor="ctr">
+                    <a:solidFill>
+                      <a:srgbClr val="FFFFFF"/>
+                    </a:solidFill>
+                  </a:tcPr>
+                </a:tc>
+              </a:tr>
+            </a:tbl>
+          </a:graphicData>
+        </a:graphic>
+      </p:graphicFrame>
+    </p:spTree>
+  </p:cSld>
+  <p:clrMapOvr>
+    <a:masterClrMapping/>
+  </p:clrMapOvr>
+</p:sld>
+</file>
+
+<file path=ppt/slides/slide17.xml><?xml version="1.0" encoding="utf-8"?>
+<p:sld xmlns:a="http://schemas.openxmlformats.org/drawingml/2006/main" xmlns:p="http://schemas.openxmlformats.org/presentationml/2006/main" xmlns:r="http://schemas.openxmlformats.org/officeDocument/2006/relationships">
+  <p:cSld>
+    <p:spTree>
+      <p:nvGrpSpPr>
+        <p:cNvPr id="1" name=""/>
+        <p:cNvGrpSpPr/>
+        <p:nvPr/>
+      </p:nvGrpSpPr>
+      <p:grpSpPr/>
+      <p:sp>
+        <p:nvSpPr>
+          <p:cNvPr id="2" name="TextBox 1"/>
+          <p:cNvSpPr txBox="1"/>
+          <p:nvPr/>
+        </p:nvSpPr>
+        <p:spPr>
+          <a:xfrm>
+            <a:off x="457200" y="292608"/>
+            <a:ext cx="11338560" cy="566928"/>
+          </a:xfrm>
+          <a:prstGeom prst="rect">
+            <a:avLst/>
+          </a:prstGeom>
+          <a:noFill/>
+        </p:spPr>
+        <p:txBody>
+          <a:bodyPr wrap="square">
+            <a:spAutoFit/>
+          </a:bodyPr>
+          <a:lstStyle/>
+          <a:p>
+            <a:pPr algn="l"/>
+            <a:r>
+              <a:rPr sz="2600" b="1" i="0">
+                <a:solidFill>
+                  <a:srgbClr val="000000"/>
+                </a:solidFill>
+                <a:latin typeface="Calibri"/>
+              </a:rPr>
+              <a:t>7. Candidate Keys</a:t>
+            </a:r>
+          </a:p>
+        </p:txBody>
+      </p:sp>
+      <p:sp>
+        <p:nvSpPr>
+          <p:cNvPr id="3" name="Rectangle 2"/>
+          <p:cNvSpPr/>
+          <p:nvPr/>
+        </p:nvSpPr>
+        <p:spPr>
+          <a:xfrm>
+            <a:off x="457200" y="950976"/>
+            <a:ext cx="11338560" cy="18288"/>
+          </a:xfrm>
+          <a:prstGeom prst="rect">
+            <a:avLst/>
+          </a:prstGeom>
+          <a:solidFill>
+            <a:srgbClr val="000000"/>
+          </a:solidFill>
+          <a:ln>
+            <a:noFill/>
+          </a:ln>
+          <a:effectLst/>
+        </p:spPr>
+        <p:style>
+          <a:lnRef idx="1">
+            <a:schemeClr val="accent1"/>
+          </a:lnRef>
+          <a:fillRef idx="3">
+            <a:schemeClr val="accent1"/>
+          </a:fillRef>
+          <a:effectRef idx="2">
+            <a:schemeClr val="accent1"/>
+          </a:effectRef>
+          <a:fontRef idx="minor">
+            <a:schemeClr val="lt1"/>
+          </a:fontRef>
+        </p:style>
+        <p:txBody>
+          <a:bodyPr rtlCol="0" anchor="ctr"/>
+          <a:lstStyle/>
+          <a:p>
+            <a:pPr algn="ctr"/>
+          </a:p>
+        </p:txBody>
+      </p:sp>
+      <p:sp>
+        <p:nvSpPr>
+          <p:cNvPr id="4" name="TextBox 3"/>
+          <p:cNvSpPr txBox="1"/>
+          <p:nvPr/>
+        </p:nvSpPr>
+        <p:spPr>
+          <a:xfrm>
+            <a:off x="640080" y="1133856"/>
+            <a:ext cx="10972800" cy="5449824"/>
+          </a:xfrm>
+          <a:prstGeom prst="rect">
+            <a:avLst/>
+          </a:prstGeom>
+          <a:noFill/>
+        </p:spPr>
+        <p:txBody>
+          <a:bodyPr wrap="square">
+            <a:spAutoFit/>
+          </a:bodyPr>
+          <a:lstStyle/>
+          <a:p>
+            <a:pPr>
+              <a:spcAft>
+                <a:spcPts val="900"/>
+              </a:spcAft>
+            </a:pPr>
+            <a:r>
+              <a:rPr sz="1600">
+                <a:solidFill>
+                  <a:srgbClr val="000000"/>
+                </a:solidFill>
+                <a:latin typeface="Calibri"/>
+              </a:rPr>
+              <a:t>•  ORDER_LINE: start from {OrderID, ProductID} and close it.</a:t>
+            </a:r>
+          </a:p>
+          <a:p>
+            <a:pPr lvl="1">
+              <a:spcAft>
+                <a:spcPts val="900"/>
+              </a:spcAft>
+            </a:pPr>
+            <a:r>
+              <a:rPr sz="1400">
+                <a:solidFill>
+                  <a:srgbClr val="444444"/>
+                </a:solidFill>
+                <a:latin typeface="Calibri"/>
+              </a:rPr>
+              <a:t>-  F1 adds OrderDate, Status, CustID. F2 adds CName, Street, City. F3 adds State. F4 adds PName, Category, Price. F5 adds Qty.</a:t>
+            </a:r>
+          </a:p>
+          <a:p>
+            <a:pPr lvl="1">
+              <a:spcAft>
+                <a:spcPts val="900"/>
+              </a:spcAft>
+            </a:pPr>
+            <a:r>
+              <a:rPr sz="1400">
+                <a:solidFill>
+                  <a:srgbClr val="444444"/>
+                </a:solidFill>
+                <a:latin typeface="Calibri"/>
+              </a:rPr>
+              <a:t>-  All thirteen columns are reached, and neither half works alone (N1, N2), so it is the only candidate key.</a:t>
+            </a:r>
+          </a:p>
+          <a:p>
+            <a:pPr>
+              <a:spcAft>
+                <a:spcPts val="900"/>
+              </a:spcAft>
+            </a:pPr>
+            <a:r>
+              <a:rPr sz="1600">
+                <a:solidFill>
+                  <a:srgbClr val="000000"/>
+                </a:solidFill>
+                <a:latin typeface="Calibri"/>
+              </a:rPr>
+              <a:t>•  DELIVERY_DUTY: two candidate keys, {OrderID, City} by F7 and {OrderID, DriverID} by F6.</a:t>
+            </a:r>
+          </a:p>
+          <a:p>
+            <a:pPr lvl="1">
+              <a:spcAft>
+                <a:spcPts val="900"/>
+              </a:spcAft>
+            </a:pPr>
+            <a:r>
+              <a:rPr sz="1400">
+                <a:solidFill>
+                  <a:srgbClr val="444444"/>
+                </a:solidFill>
+                <a:latin typeface="Calibri"/>
+              </a:rPr>
+              <a:t>-  That second key is exactly why it passes 3NF and still fails BCNF.</a:t>
+            </a:r>
+          </a:p>
+          <a:p>
+            <a:pPr>
+              <a:spcAft>
+                <a:spcPts val="900"/>
+              </a:spcAft>
+            </a:pPr>
+            <a:r>
+              <a:rPr sz="1600">
+                <a:solidFill>
+                  <a:srgbClr val="000000"/>
+                </a:solidFill>
+                <a:latin typeface="Calibri"/>
+              </a:rPr>
+              <a:t>•  SUPPLIER_PHONE: {SupplierID, Phone}, and Phone alone by F8.</a:t>
+            </a:r>
+          </a:p>
+        </p:txBody>
+      </p:sp>
+    </p:spTree>
+  </p:cSld>
+  <p:clrMapOvr>
+    <a:masterClrMapping/>
+  </p:clrMapOvr>
+</p:sld>
+</file>
+
+<file path=ppt/slides/slide18.xml><?xml version="1.0" encoding="utf-8"?>
+<p:sld xmlns:a="http://schemas.openxmlformats.org/drawingml/2006/main" xmlns:p="http://schemas.openxmlformats.org/presentationml/2006/main" xmlns:r="http://schemas.openxmlformats.org/officeDocument/2006/relationships">
+  <p:cSld>
+    <p:spTree>
+      <p:nvGrpSpPr>
+        <p:cNvPr id="1" name=""/>
+        <p:cNvGrpSpPr/>
+        <p:nvPr/>
+      </p:nvGrpSpPr>
+      <p:grpSpPr/>
+      <p:sp>
+        <p:nvSpPr>
+          <p:cNvPr id="2" name="TextBox 1"/>
+          <p:cNvSpPr txBox="1"/>
+          <p:nvPr/>
+        </p:nvSpPr>
+        <p:spPr>
+          <a:xfrm>
+            <a:off x="457200" y="292608"/>
+            <a:ext cx="11338560" cy="566928"/>
+          </a:xfrm>
+          <a:prstGeom prst="rect">
+            <a:avLst/>
+          </a:prstGeom>
+          <a:noFill/>
+        </p:spPr>
+        <p:txBody>
+          <a:bodyPr wrap="square">
+            <a:spAutoFit/>
+          </a:bodyPr>
+          <a:lstStyle/>
+          <a:p>
+            <a:pPr algn="l"/>
+            <a:r>
+              <a:rPr sz="2600" b="1" i="0">
+                <a:solidFill>
+                  <a:srgbClr val="000000"/>
+                </a:solidFill>
+                <a:latin typeface="Calibri"/>
+              </a:rPr>
+              <a:t>8. The Four Rules</a:t>
+            </a:r>
+          </a:p>
+        </p:txBody>
+      </p:sp>
+      <p:sp>
+        <p:nvSpPr>
+          <p:cNvPr id="3" name="Rectangle 2"/>
+          <p:cNvSpPr/>
+          <p:nvPr/>
+        </p:nvSpPr>
+        <p:spPr>
+          <a:xfrm>
+            <a:off x="457200" y="950976"/>
+            <a:ext cx="11338560" cy="18288"/>
+          </a:xfrm>
+          <a:prstGeom prst="rect">
+            <a:avLst/>
+          </a:prstGeom>
+          <a:solidFill>
+            <a:srgbClr val="000000"/>
+          </a:solidFill>
+          <a:ln>
+            <a:noFill/>
+          </a:ln>
+          <a:effectLst/>
+        </p:spPr>
+        <p:style>
+          <a:lnRef idx="1">
+            <a:schemeClr val="accent1"/>
+          </a:lnRef>
+          <a:fillRef idx="3">
+            <a:schemeClr val="accent1"/>
+          </a:fillRef>
+          <a:effectRef idx="2">
+            <a:schemeClr val="accent1"/>
+          </a:effectRef>
+          <a:fontRef idx="minor">
+            <a:schemeClr val="lt1"/>
+          </a:fontRef>
+        </p:style>
+        <p:txBody>
+          <a:bodyPr rtlCol="0" anchor="ctr"/>
+          <a:lstStyle/>
+          <a:p>
+            <a:pPr algn="ctr"/>
+          </a:p>
+        </p:txBody>
+      </p:sp>
+      <p:sp>
+        <p:nvSpPr>
+          <p:cNvPr id="4" name="TextBox 3"/>
+          <p:cNvSpPr txBox="1"/>
+          <p:nvPr/>
+        </p:nvSpPr>
+        <p:spPr>
+          <a:xfrm>
+            <a:off x="457200" y="1024128"/>
+            <a:ext cx="11338560" cy="384048"/>
+          </a:xfrm>
+          <a:prstGeom prst="rect">
+            <a:avLst/>
+          </a:prstGeom>
+          <a:noFill/>
+        </p:spPr>
+        <p:txBody>
+          <a:bodyPr wrap="square">
+            <a:spAutoFit/>
+          </a:bodyPr>
+          <a:lstStyle/>
+          <a:p>
+            <a:pPr algn="l"/>
+            <a:r>
+              <a:rPr sz="1350" b="0" i="1">
+                <a:solidFill>
+                  <a:srgbClr val="444444"/>
+                </a:solidFill>
+                <a:latin typeface="Calibri"/>
+              </a:rPr>
+              <a:t>start with one bad table, then split it one rule at a time</a:t>
+            </a:r>
+          </a:p>
+        </p:txBody>
+      </p:sp>
+      <p:sp>
+        <p:nvSpPr>
+          <p:cNvPr id="5" name="TextBox 4"/>
+          <p:cNvSpPr txBox="1"/>
+          <p:nvPr/>
+        </p:nvSpPr>
+        <p:spPr>
+          <a:xfrm>
+            <a:off x="640080" y="1517904"/>
+            <a:ext cx="10972800" cy="5065776"/>
+          </a:xfrm>
+          <a:prstGeom prst="rect">
+            <a:avLst/>
+          </a:prstGeom>
+          <a:noFill/>
+        </p:spPr>
+        <p:txBody>
+          <a:bodyPr wrap="square">
+            <a:spAutoFit/>
+          </a:bodyPr>
+          <a:lstStyle/>
+          <a:p>
+            <a:pPr>
+              <a:spcAft>
+                <a:spcPts val="900"/>
+              </a:spcAft>
+            </a:pPr>
+            <a:r>
+              <a:rPr sz="1700">
+                <a:solidFill>
+                  <a:srgbClr val="000000"/>
+                </a:solidFill>
+                <a:latin typeface="Calibri"/>
+              </a:rPr>
+              <a:t>•  1NF: every cell holds one value, and repeating groups move out.</a:t>
+            </a:r>
+          </a:p>
+          <a:p>
+            <a:pPr>
+              <a:spcAft>
+                <a:spcPts val="900"/>
+              </a:spcAft>
+            </a:pPr>
+            <a:r>
+              <a:rPr sz="1700">
+                <a:solidFill>
+                  <a:srgbClr val="000000"/>
+                </a:solidFill>
+                <a:latin typeface="Calibri"/>
+              </a:rPr>
+              <a:t>•  2NF: no column depends on only part of the key.</a:t>
+            </a:r>
+          </a:p>
+          <a:p>
+            <a:pPr>
+              <a:spcAft>
+                <a:spcPts val="900"/>
+              </a:spcAft>
+            </a:pPr>
+            <a:r>
+              <a:rPr sz="1700">
+                <a:solidFill>
+                  <a:srgbClr val="000000"/>
+                </a:solidFill>
+                <a:latin typeface="Calibri"/>
+              </a:rPr>
+              <a:t>•  3NF: no ordinary column decides another ordinary column.</a:t>
+            </a:r>
+          </a:p>
+          <a:p>
+            <a:pPr>
+              <a:spcAft>
+                <a:spcPts val="900"/>
+              </a:spcAft>
+            </a:pPr>
+            <a:r>
+              <a:rPr sz="1700">
+                <a:solidFill>
+                  <a:srgbClr val="000000"/>
+                </a:solidFill>
+                <a:latin typeface="Calibri"/>
+              </a:rPr>
+              <a:t>•  BCNF: the left side of every dependency must be a key.</a:t>
+            </a:r>
+          </a:p>
+          <a:p>
+            <a:pPr>
+              <a:spcAft>
+                <a:spcPts val="900"/>
+              </a:spcAft>
+            </a:pPr>
+            <a:r>
+              <a:rPr sz="1700">
+                <a:solidFill>
+                  <a:srgbClr val="000000"/>
+                </a:solidFill>
+                <a:latin typeface="Calibri"/>
+              </a:rPr>
+              <a:t>•  Each step below names the dependency from section 7 that forces the split.</a:t>
+            </a:r>
+          </a:p>
+        </p:txBody>
+      </p:sp>
+    </p:spTree>
+  </p:cSld>
+  <p:clrMapOvr>
+    <a:masterClrMapping/>
+  </p:clrMapOvr>
+</p:sld>
+</file>
+
+<file path=ppt/slides/slide19.xml><?xml version="1.0" encoding="utf-8"?>
+<p:sld xmlns:a="http://schemas.openxmlformats.org/drawingml/2006/main" xmlns:p="http://schemas.openxmlformats.org/presentationml/2006/main" xmlns:r="http://schemas.openxmlformats.org/officeDocument/2006/relationships">
+  <p:cSld>
+    <p:spTree>
+      <p:nvGrpSpPr>
+        <p:cNvPr id="1" name=""/>
+        <p:cNvGrpSpPr/>
+        <p:nvPr/>
+      </p:nvGrpSpPr>
+      <p:grpSpPr/>
+      <p:sp>
+        <p:nvSpPr>
+          <p:cNvPr id="2" name="TextBox 1"/>
+          <p:cNvSpPr txBox="1"/>
+          <p:nvPr/>
+        </p:nvSpPr>
+        <p:spPr>
+          <a:xfrm>
+            <a:off x="457200" y="292608"/>
+            <a:ext cx="11338560" cy="566928"/>
+          </a:xfrm>
+          <a:prstGeom prst="rect">
+            <a:avLst/>
+          </a:prstGeom>
+          <a:noFill/>
+        </p:spPr>
+        <p:txBody>
+          <a:bodyPr wrap="square">
+            <a:spAutoFit/>
+          </a:bodyPr>
+          <a:lstStyle/>
+          <a:p>
+            <a:pPr algn="l"/>
+            <a:r>
+              <a:rPr sz="2600" b="1" i="0">
+                <a:solidFill>
+                  <a:srgbClr val="000000"/>
+                </a:solidFill>
+                <a:latin typeface="Calibri"/>
+              </a:rPr>
+              <a:t>8. Where we start, Unnormalized Form (UNF)</a:t>
+            </a:r>
+          </a:p>
+        </p:txBody>
+      </p:sp>
+      <p:sp>
+        <p:nvSpPr>
+          <p:cNvPr id="3" name="Rectangle 2"/>
+          <p:cNvSpPr/>
+          <p:nvPr/>
+        </p:nvSpPr>
+        <p:spPr>
+          <a:xfrm>
+            <a:off x="457200" y="950976"/>
+            <a:ext cx="11338560" cy="18288"/>
+          </a:xfrm>
+          <a:prstGeom prst="rect">
+            <a:avLst/>
+          </a:prstGeom>
+          <a:solidFill>
+            <a:srgbClr val="000000"/>
+          </a:solidFill>
+          <a:ln>
+            <a:noFill/>
+          </a:ln>
+          <a:effectLst/>
+        </p:spPr>
+        <p:style>
+          <a:lnRef idx="1">
+            <a:schemeClr val="accent1"/>
+          </a:lnRef>
+          <a:fillRef idx="3">
+            <a:schemeClr val="accent1"/>
+          </a:fillRef>
+          <a:effectRef idx="2">
+            <a:schemeClr val="accent1"/>
+          </a:effectRef>
+          <a:fontRef idx="minor">
+            <a:schemeClr val="lt1"/>
+          </a:fontRef>
+        </p:style>
+        <p:txBody>
+          <a:bodyPr rtlCol="0" anchor="ctr"/>
+          <a:lstStyle/>
+          <a:p>
+            <a:pPr algn="ctr"/>
+          </a:p>
+        </p:txBody>
+      </p:sp>
+      <p:sp>
+        <p:nvSpPr>
+          <p:cNvPr id="4" name="TextBox 3"/>
+          <p:cNvSpPr txBox="1"/>
+          <p:nvPr/>
+        </p:nvSpPr>
+        <p:spPr>
+          <a:xfrm>
+            <a:off x="640080" y="1133856"/>
+            <a:ext cx="10972800" cy="5449824"/>
+          </a:xfrm>
+          <a:prstGeom prst="rect">
+            <a:avLst/>
+          </a:prstGeom>
+          <a:noFill/>
+        </p:spPr>
+        <p:txBody>
+          <a:bodyPr wrap="square">
+            <a:spAutoFit/>
+          </a:bodyPr>
+          <a:lstStyle/>
+          <a:p>
+            <a:pPr>
+              <a:spcAft>
+                <a:spcPts val="900"/>
+              </a:spcAft>
+            </a:pPr>
+            <a:r>
+              <a:rPr sz="1600">
+                <a:solidFill>
+                  <a:srgbClr val="000000"/>
+                </a:solidFill>
+                <a:latin typeface="Calibri"/>
+              </a:rPr>
+              <a:t>•  One wide table, the way a clerk keeps it in a spreadsheet.</a:t>
+            </a:r>
+          </a:p>
+          <a:p>
+            <a:pPr>
+              <a:spcAft>
+                <a:spcPts val="900"/>
+              </a:spcAft>
+            </a:pPr>
+            <a:r>
+              <a:rPr sz="1600">
+                <a:solidFill>
+                  <a:srgbClr val="000000"/>
+                </a:solidFill>
+                <a:latin typeface="Calibri"/>
+              </a:rPr>
+              <a:t>•  Three cells hold lists: SupplierPhones, Items and Delivery.</a:t>
+            </a:r>
+          </a:p>
+          <a:p>
+            <a:pPr>
+              <a:spcAft>
+                <a:spcPts val="900"/>
+              </a:spcAft>
+            </a:pPr>
+            <a:r>
+              <a:rPr sz="1600">
+                <a:solidFill>
+                  <a:srgbClr val="000000"/>
+                </a:solidFill>
+                <a:latin typeface="Calibri"/>
+              </a:rPr>
+              <a:t>•  Customer details are copied onto every order row.</a:t>
+            </a:r>
+          </a:p>
+          <a:p>
+            <a:pPr>
+              <a:spcAft>
+                <a:spcPts val="900"/>
+              </a:spcAft>
+            </a:pPr>
+            <a:r>
+              <a:rPr sz="1600">
+                <a:solidFill>
+                  <a:srgbClr val="000000"/>
+                </a:solidFill>
+                <a:latin typeface="Calibri"/>
+              </a:rPr>
+              <a:t>•  No atomic key, so no dependency can even be written down yet.</a:t>
+            </a:r>
+          </a:p>
+        </p:txBody>
+      </p:sp>
+    </p:spTree>
+  </p:cSld>
+  <p:clrMapOvr>
+    <a:masterClrMapping/>
+  </p:clrMapOvr>
+</p:sld>
+</file>
+
+<file path=ppt/slides/slide2.xml><?xml version="1.0" encoding="utf-8"?>
+<p:sld xmlns:a="http://schemas.openxmlformats.org/drawingml/2006/main" xmlns:p="http://schemas.openxmlformats.org/presentationml/2006/main" xmlns:r="http://schemas.openxmlformats.org/officeDocument/2006/relationships">
+  <p:cSld>
+    <p:spTree>
+      <p:nvGrpSpPr>
+        <p:cNvPr id="1" name=""/>
+        <p:cNvGrpSpPr/>
+        <p:nvPr/>
+      </p:nvGrpSpPr>
+      <p:grpSpPr/>
+      <p:sp>
+        <p:nvSpPr>
+          <p:cNvPr id="2" name="TextBox 1"/>
+          <p:cNvSpPr txBox="1"/>
+          <p:nvPr/>
+        </p:nvSpPr>
+        <p:spPr>
+          <a:xfrm>
+            <a:off x="457200" y="292608"/>
+            <a:ext cx="11338560" cy="566928"/>
+          </a:xfrm>
+          <a:prstGeom prst="rect">
+            <a:avLst/>
+          </a:prstGeom>
+          <a:noFill/>
+        </p:spPr>
+        <p:txBody>
+          <a:bodyPr wrap="square">
+            <a:spAutoFit/>
+          </a:bodyPr>
+          <a:lstStyle/>
+          <a:p>
+            <a:pPr algn="l"/>
+            <a:r>
+              <a:rPr sz="2600" b="1" i="0">
+                <a:solidFill>
+                  <a:srgbClr val="000000"/>
+                </a:solidFill>
+                <a:latin typeface="Calibri"/>
+              </a:rPr>
+              <a:t>Agenda</a:t>
+            </a:r>
+          </a:p>
+        </p:txBody>
+      </p:sp>
+      <p:sp>
+        <p:nvSpPr>
+          <p:cNvPr id="3" name="Rectangle 2"/>
+          <p:cNvSpPr/>
+          <p:nvPr/>
+        </p:nvSpPr>
+        <p:spPr>
+          <a:xfrm>
+            <a:off x="457200" y="950976"/>
+            <a:ext cx="11338560" cy="18288"/>
+          </a:xfrm>
+          <a:prstGeom prst="rect">
+            <a:avLst/>
+          </a:prstGeom>
+          <a:solidFill>
+            <a:srgbClr val="000000"/>
+          </a:solidFill>
+          <a:ln>
+            <a:noFill/>
+          </a:ln>
+          <a:effectLst/>
+        </p:spPr>
+        <p:style>
+          <a:lnRef idx="1">
+            <a:schemeClr val="accent1"/>
+          </a:lnRef>
+          <a:fillRef idx="3">
+            <a:schemeClr val="accent1"/>
+          </a:fillRef>
+          <a:effectRef idx="2">
+            <a:schemeClr val="accent1"/>
+          </a:effectRef>
+          <a:fontRef idx="minor">
+            <a:schemeClr val="lt1"/>
+          </a:fontRef>
+        </p:style>
+        <p:txBody>
+          <a:bodyPr rtlCol="0" anchor="ctr"/>
+          <a:lstStyle/>
+          <a:p>
+            <a:pPr algn="ctr"/>
+          </a:p>
+        </p:txBody>
+      </p:sp>
+      <p:sp>
+        <p:nvSpPr>
+          <p:cNvPr id="4" name="TextBox 3"/>
+          <p:cNvSpPr txBox="1"/>
+          <p:nvPr/>
+        </p:nvSpPr>
+        <p:spPr>
+          <a:xfrm>
+            <a:off x="640080" y="1133856"/>
+            <a:ext cx="10972800" cy="5449824"/>
+          </a:xfrm>
+          <a:prstGeom prst="rect">
+            <a:avLst/>
+          </a:prstGeom>
+          <a:noFill/>
+        </p:spPr>
+        <p:txBody>
+          <a:bodyPr wrap="square">
+            <a:spAutoFit/>
+          </a:bodyPr>
+          <a:lstStyle/>
+          <a:p>
+            <a:pPr>
+              <a:spcAft>
+                <a:spcPts val="900"/>
+              </a:spcAft>
+            </a:pPr>
+            <a:r>
+              <a:rPr sz="1700">
+                <a:solidFill>
+                  <a:srgbClr val="000000"/>
+                </a:solidFill>
+                <a:latin typeface="Calibri"/>
+              </a:rPr>
+              <a:t>•  The problem, objectives and scope</a:t>
+            </a:r>
+          </a:p>
+          <a:p>
+            <a:pPr>
+              <a:spcAft>
+                <a:spcPts val="900"/>
+              </a:spcAft>
+            </a:pPr>
+            <a:r>
+              <a:rPr sz="1700">
+                <a:solidFill>
+                  <a:srgbClr val="000000"/>
+                </a:solidFill>
+                <a:latin typeface="Calibri"/>
+              </a:rPr>
+              <a:t>•  Entities, attributes and relationships</a:t>
+            </a:r>
+          </a:p>
+          <a:p>
+            <a:pPr>
+              <a:spcAft>
+                <a:spcPts val="900"/>
+              </a:spcAft>
+            </a:pPr>
+            <a:r>
+              <a:rPr sz="1700">
+                <a:solidFill>
+                  <a:srgbClr val="000000"/>
+                </a:solidFill>
+                <a:latin typeface="Calibri"/>
+              </a:rPr>
+              <a:t>•  The ER model</a:t>
+            </a:r>
+          </a:p>
+          <a:p>
+            <a:pPr>
+              <a:spcAft>
+                <a:spcPts val="900"/>
+              </a:spcAft>
+            </a:pPr>
+            <a:r>
+              <a:rPr sz="1700">
+                <a:solidFill>
+                  <a:srgbClr val="000000"/>
+                </a:solidFill>
+                <a:latin typeface="Calibri"/>
+              </a:rPr>
+              <a:t>•  The EER model, the same design extended</a:t>
+            </a:r>
+          </a:p>
+          <a:p>
+            <a:pPr>
+              <a:spcAft>
+                <a:spcPts val="900"/>
+              </a:spcAft>
+            </a:pPr>
+            <a:r>
+              <a:rPr sz="1700">
+                <a:solidFill>
+                  <a:srgbClr val="000000"/>
+                </a:solidFill>
+                <a:latin typeface="Calibri"/>
+              </a:rPr>
+              <a:t>•  Turning the model into tables</a:t>
+            </a:r>
+          </a:p>
+          <a:p>
+            <a:pPr>
+              <a:spcAft>
+                <a:spcPts val="900"/>
+              </a:spcAft>
+            </a:pPr>
+            <a:r>
+              <a:rPr sz="1700">
+                <a:solidFill>
+                  <a:srgbClr val="000000"/>
+                </a:solidFill>
+                <a:latin typeface="Calibri"/>
+              </a:rPr>
+              <a:t>•  Sample data and the functional dependencies it reveals</a:t>
+            </a:r>
+          </a:p>
+          <a:p>
+            <a:pPr>
+              <a:spcAft>
+                <a:spcPts val="900"/>
+              </a:spcAft>
+            </a:pPr>
+            <a:r>
+              <a:rPr sz="1700">
+                <a:solidFill>
+                  <a:srgbClr val="000000"/>
+                </a:solidFill>
+                <a:latin typeface="Calibri"/>
+              </a:rPr>
+              <a:t>•  Normalization: UNF to 1NF to 2NF to 3NF to BCNF</a:t>
+            </a:r>
+          </a:p>
+          <a:p>
+            <a:pPr>
+              <a:spcAft>
+                <a:spcPts val="900"/>
+              </a:spcAft>
+            </a:pPr>
+            <a:r>
+              <a:rPr sz="1700">
+                <a:solidFill>
+                  <a:srgbClr val="000000"/>
+                </a:solidFill>
+                <a:latin typeface="Calibri"/>
+              </a:rPr>
+              <a:t>•  The decomposition end to end, the final schema, and what comes next</a:t>
+            </a:r>
+          </a:p>
+        </p:txBody>
+      </p:sp>
+    </p:spTree>
+  </p:cSld>
+  <p:clrMapOvr>
+    <a:masterClrMapping/>
+  </p:clrMapOvr>
+</p:sld>
+</file>
+
+<file path=ppt/slides/slide20.xml><?xml version="1.0" encoding="utf-8"?>
+<p:sld xmlns:a="http://schemas.openxmlformats.org/drawingml/2006/main" xmlns:p="http://schemas.openxmlformats.org/presentationml/2006/main" xmlns:r="http://schemas.openxmlformats.org/officeDocument/2006/relationships">
+  <p:cSld>
+    <p:spTree>
+      <p:nvGrpSpPr>
+        <p:cNvPr id="1" name=""/>
+        <p:cNvGrpSpPr/>
+        <p:nvPr/>
+      </p:nvGrpSpPr>
+      <p:grpSpPr/>
+      <p:sp>
+        <p:nvSpPr>
+          <p:cNvPr id="2" name="TextBox 1"/>
+          <p:cNvSpPr txBox="1"/>
+          <p:nvPr/>
+        </p:nvSpPr>
+        <p:spPr>
+          <a:xfrm>
+            <a:off x="457200" y="237744"/>
+            <a:ext cx="11338560" cy="566928"/>
+          </a:xfrm>
+          <a:prstGeom prst="rect">
+            <a:avLst/>
+          </a:prstGeom>
+          <a:noFill/>
+        </p:spPr>
+        <p:txBody>
+          <a:bodyPr wrap="square">
+            <a:spAutoFit/>
+          </a:bodyPr>
+          <a:lstStyle/>
+          <a:p>
+            <a:pPr algn="l"/>
+            <a:r>
+              <a:rPr sz="2600" b="1" i="0">
+                <a:solidFill>
+                  <a:srgbClr val="000000"/>
+                </a:solidFill>
+                <a:latin typeface="Calibri"/>
+              </a:rPr>
+              <a:t>8. The Tables after UNF</a:t>
+            </a:r>
+          </a:p>
+        </p:txBody>
+      </p:sp>
+      <p:sp>
+        <p:nvSpPr>
+          <p:cNvPr id="3" name="Rectangle 2"/>
+          <p:cNvSpPr/>
+          <p:nvPr/>
+        </p:nvSpPr>
+        <p:spPr>
+          <a:xfrm>
+            <a:off x="457200" y="896112"/>
+            <a:ext cx="11338560" cy="18288"/>
+          </a:xfrm>
+          <a:prstGeom prst="rect">
+            <a:avLst/>
+          </a:prstGeom>
+          <a:solidFill>
+            <a:srgbClr val="000000"/>
+          </a:solidFill>
+          <a:ln>
+            <a:noFill/>
+          </a:ln>
+          <a:effectLst/>
+        </p:spPr>
+        <p:style>
+          <a:lnRef idx="1">
+            <a:schemeClr val="accent1"/>
+          </a:lnRef>
+          <a:fillRef idx="3">
+            <a:schemeClr val="accent1"/>
+          </a:fillRef>
+          <a:effectRef idx="2">
+            <a:schemeClr val="accent1"/>
+          </a:effectRef>
+          <a:fontRef idx="minor">
+            <a:schemeClr val="lt1"/>
+          </a:fontRef>
+        </p:style>
+        <p:txBody>
+          <a:bodyPr rtlCol="0" anchor="ctr"/>
+          <a:lstStyle/>
+          <a:p>
+            <a:pPr algn="ctr"/>
           </a:p>
         </p:txBody>
       </p:sp>
@@ -4705,8 +7207,8 @@
         </p:blipFill>
         <p:spPr>
           <a:xfrm>
-            <a:off x="335127" y="1337574"/>
-            <a:ext cx="11521440" cy="5078962"/>
+            <a:off x="335127" y="2295347"/>
+            <a:ext cx="11521440" cy="3163417"/>
           </a:xfrm>
           <a:prstGeom prst="rect">
             <a:avLst/>
@@ -4721,17 +7223,9 @@
 </p:sld>
 </file>
 
-<file path=ppt/slides/slide15.xml><?xml version="1.0" encoding="utf-8"?>
+<file path=ppt/slides/slide21.xml><?xml version="1.0" encoding="utf-8"?>
 <p:sld xmlns:a="http://schemas.openxmlformats.org/drawingml/2006/main" xmlns:p="http://schemas.openxmlformats.org/presentationml/2006/main" xmlns:r="http://schemas.openxmlformats.org/officeDocument/2006/relationships">
   <p:cSld>
-    <p:bg>
-      <p:bgPr>
-        <a:solidFill>
-          <a:srgbClr val="FFFFFF"/>
-        </a:solidFill>
-        <a:effectLst/>
-      </p:bgPr>
-    </p:bg>
     <p:spTree>
       <p:nvGrpSpPr>
         <p:cNvPr id="1" name=""/>
@@ -4741,20 +7235,55 @@
       <p:grpSpPr/>
       <p:sp>
         <p:nvSpPr>
-          <p:cNvPr id="2" name="Rectangle 1"/>
+          <p:cNvPr id="2" name="TextBox 1"/>
+          <p:cNvSpPr txBox="1"/>
+          <p:nvPr/>
+        </p:nvSpPr>
+        <p:spPr>
+          <a:xfrm>
+            <a:off x="457200" y="292608"/>
+            <a:ext cx="11338560" cy="566928"/>
+          </a:xfrm>
+          <a:prstGeom prst="rect">
+            <a:avLst/>
+          </a:prstGeom>
+          <a:noFill/>
+        </p:spPr>
+        <p:txBody>
+          <a:bodyPr wrap="square">
+            <a:spAutoFit/>
+          </a:bodyPr>
+          <a:lstStyle/>
+          <a:p>
+            <a:pPr algn="l"/>
+            <a:r>
+              <a:rPr sz="2600" b="1" i="0">
+                <a:solidFill>
+                  <a:srgbClr val="000000"/>
+                </a:solidFill>
+                <a:latin typeface="Calibri"/>
+              </a:rPr>
+              <a:t>8. First Normal Form (1NF)</a:t>
+            </a:r>
+          </a:p>
+        </p:txBody>
+      </p:sp>
+      <p:sp>
+        <p:nvSpPr>
+          <p:cNvPr id="3" name="Rectangle 2"/>
           <p:cNvSpPr/>
           <p:nvPr/>
         </p:nvSpPr>
         <p:spPr>
           <a:xfrm>
-            <a:off x="0" y="0"/>
-            <a:ext cx="12191695" cy="914400"/>
+            <a:off x="457200" y="950976"/>
+            <a:ext cx="11338560" cy="18288"/>
           </a:xfrm>
           <a:prstGeom prst="rect">
             <a:avLst/>
           </a:prstGeom>
           <a:solidFill>
-            <a:srgbClr val="1F3A5F"/>
+            <a:srgbClr val="000000"/>
           </a:solidFill>
           <a:ln>
             <a:noFill/>
@@ -4785,14 +7314,14 @@
       </p:sp>
       <p:sp>
         <p:nvSpPr>
-          <p:cNvPr id="3" name="TextBox 2"/>
+          <p:cNvPr id="4" name="TextBox 3"/>
           <p:cNvSpPr txBox="1"/>
           <p:nvPr/>
         </p:nvSpPr>
         <p:spPr>
           <a:xfrm>
-            <a:off x="457200" y="182880"/>
-            <a:ext cx="11338560" cy="731520"/>
+            <a:off x="640080" y="1133856"/>
+            <a:ext cx="10972800" cy="5449824"/>
           </a:xfrm>
           <a:prstGeom prst="rect">
             <a:avLst/>
@@ -4805,16 +7334,181 @@
           </a:bodyPr>
           <a:lstStyle/>
           <a:p>
+            <a:pPr>
+              <a:spcAft>
+                <a:spcPts val="900"/>
+              </a:spcAft>
+            </a:pPr>
+            <a:r>
+              <a:rPr sz="1600">
+                <a:solidFill>
+                  <a:srgbClr val="000000"/>
+                </a:solidFill>
+                <a:latin typeface="Calibri"/>
+              </a:rPr>
+              <a:t>•  Rule: one value per cell, and repeating groups move out.</a:t>
+            </a:r>
+          </a:p>
+          <a:p>
+            <a:pPr>
+              <a:spcAft>
+                <a:spcPts val="900"/>
+              </a:spcAft>
+            </a:pPr>
+            <a:r>
+              <a:rPr sz="1600">
+                <a:solidFill>
+                  <a:srgbClr val="000000"/>
+                </a:solidFill>
+                <a:latin typeface="Calibri"/>
+              </a:rPr>
+              <a:t>•  Items become ORDER_ITEM, phones become SUPPLIER_PHONE, deliveries become DELIVERY_DUTY.</a:t>
+            </a:r>
+          </a:p>
+          <a:p>
+            <a:pPr>
+              <a:spcAft>
+                <a:spcPts val="900"/>
+              </a:spcAft>
+            </a:pPr>
+            <a:r>
+              <a:rPr sz="1600">
+                <a:solidFill>
+                  <a:srgbClr val="000000"/>
+                </a:solidFill>
+                <a:latin typeface="Calibri"/>
+              </a:rPr>
+              <a:t>•  ORDER_ITEM is keyed by OrderID + ProductID, because N1 and N2 rule out either column alone.</a:t>
+            </a:r>
+          </a:p>
+          <a:p>
+            <a:pPr>
+              <a:spcAft>
+                <a:spcPts val="900"/>
+              </a:spcAft>
+            </a:pPr>
+            <a:r>
+              <a:rPr sz="1600">
+                <a:solidFill>
+                  <a:srgbClr val="000000"/>
+                </a:solidFill>
+                <a:latin typeface="Calibri"/>
+              </a:rPr>
+              <a:t>•  DELIVERY_DUTY is keyed by OrderID + City, from F7.</a:t>
+            </a:r>
+          </a:p>
+          <a:p>
+            <a:pPr>
+              <a:spcAft>
+                <a:spcPts val="900"/>
+              </a:spcAft>
+            </a:pPr>
+            <a:r>
+              <a:rPr sz="1600">
+                <a:solidFill>
+                  <a:srgbClr val="000000"/>
+                </a:solidFill>
+                <a:latin typeface="Calibri"/>
+              </a:rPr>
+              <a:t>•  Still wrong: F4 means PName and Category repeat on every line for the same product.</a:t>
+            </a:r>
+          </a:p>
+        </p:txBody>
+      </p:sp>
+    </p:spTree>
+  </p:cSld>
+  <p:clrMapOvr>
+    <a:masterClrMapping/>
+  </p:clrMapOvr>
+</p:sld>
+</file>
+
+<file path=ppt/slides/slide22.xml><?xml version="1.0" encoding="utf-8"?>
+<p:sld xmlns:a="http://schemas.openxmlformats.org/drawingml/2006/main" xmlns:p="http://schemas.openxmlformats.org/presentationml/2006/main" xmlns:r="http://schemas.openxmlformats.org/officeDocument/2006/relationships">
+  <p:cSld>
+    <p:spTree>
+      <p:nvGrpSpPr>
+        <p:cNvPr id="1" name=""/>
+        <p:cNvGrpSpPr/>
+        <p:nvPr/>
+      </p:nvGrpSpPr>
+      <p:grpSpPr/>
+      <p:sp>
+        <p:nvSpPr>
+          <p:cNvPr id="2" name="TextBox 1"/>
+          <p:cNvSpPr txBox="1"/>
+          <p:nvPr/>
+        </p:nvSpPr>
+        <p:spPr>
+          <a:xfrm>
+            <a:off x="457200" y="237744"/>
+            <a:ext cx="11338560" cy="566928"/>
+          </a:xfrm>
+          <a:prstGeom prst="rect">
+            <a:avLst/>
+          </a:prstGeom>
+          <a:noFill/>
+        </p:spPr>
+        <p:txBody>
+          <a:bodyPr wrap="square">
+            <a:spAutoFit/>
+          </a:bodyPr>
+          <a:lstStyle/>
+          <a:p>
             <a:pPr algn="l"/>
             <a:r>
-              <a:rPr sz="2700" b="1" i="0">
-                <a:solidFill>
-                  <a:srgbClr val="FFFFFF"/>
-                </a:solidFill>
-                <a:latin typeface="Calibri"/>
-              </a:rPr>
-              <a:t>7. First Normal Form (1NF)</a:t>
-            </a:r>
+              <a:rPr sz="2600" b="1" i="0">
+                <a:solidFill>
+                  <a:srgbClr val="000000"/>
+                </a:solidFill>
+                <a:latin typeface="Calibri"/>
+              </a:rPr>
+              <a:t>8. The Tables after 1NF</a:t>
+            </a:r>
+          </a:p>
+        </p:txBody>
+      </p:sp>
+      <p:sp>
+        <p:nvSpPr>
+          <p:cNvPr id="3" name="Rectangle 2"/>
+          <p:cNvSpPr/>
+          <p:nvPr/>
+        </p:nvSpPr>
+        <p:spPr>
+          <a:xfrm>
+            <a:off x="457200" y="896112"/>
+            <a:ext cx="11338560" cy="18288"/>
+          </a:xfrm>
+          <a:prstGeom prst="rect">
+            <a:avLst/>
+          </a:prstGeom>
+          <a:solidFill>
+            <a:srgbClr val="000000"/>
+          </a:solidFill>
+          <a:ln>
+            <a:noFill/>
+          </a:ln>
+          <a:effectLst/>
+        </p:spPr>
+        <p:style>
+          <a:lnRef idx="1">
+            <a:schemeClr val="accent1"/>
+          </a:lnRef>
+          <a:fillRef idx="3">
+            <a:schemeClr val="accent1"/>
+          </a:fillRef>
+          <a:effectRef idx="2">
+            <a:schemeClr val="accent1"/>
+          </a:effectRef>
+          <a:fontRef idx="minor">
+            <a:schemeClr val="lt1"/>
+          </a:fontRef>
+        </p:style>
+        <p:txBody>
+          <a:bodyPr rtlCol="0" anchor="ctr"/>
+          <a:lstStyle/>
+          <a:p>
+            <a:pPr algn="ctr"/>
           </a:p>
         </p:txBody>
       </p:sp>
@@ -4834,8 +7528,8 @@
         </p:blipFill>
         <p:spPr>
           <a:xfrm>
-            <a:off x="335127" y="1469363"/>
-            <a:ext cx="11521440" cy="4815384"/>
+            <a:off x="335127" y="1264569"/>
+            <a:ext cx="11521440" cy="5224973"/>
           </a:xfrm>
           <a:prstGeom prst="rect">
             <a:avLst/>
@@ -4850,17 +7544,9 @@
 </p:sld>
 </file>
 
-<file path=ppt/slides/slide16.xml><?xml version="1.0" encoding="utf-8"?>
+<file path=ppt/slides/slide23.xml><?xml version="1.0" encoding="utf-8"?>
 <p:sld xmlns:a="http://schemas.openxmlformats.org/drawingml/2006/main" xmlns:p="http://schemas.openxmlformats.org/presentationml/2006/main" xmlns:r="http://schemas.openxmlformats.org/officeDocument/2006/relationships">
   <p:cSld>
-    <p:bg>
-      <p:bgPr>
-        <a:solidFill>
-          <a:srgbClr val="FFFFFF"/>
-        </a:solidFill>
-        <a:effectLst/>
-      </p:bgPr>
-    </p:bg>
     <p:spTree>
       <p:nvGrpSpPr>
         <p:cNvPr id="1" name=""/>
@@ -4870,20 +7556,55 @@
       <p:grpSpPr/>
       <p:sp>
         <p:nvSpPr>
-          <p:cNvPr id="2" name="Rectangle 1"/>
+          <p:cNvPr id="2" name="TextBox 1"/>
+          <p:cNvSpPr txBox="1"/>
+          <p:nvPr/>
+        </p:nvSpPr>
+        <p:spPr>
+          <a:xfrm>
+            <a:off x="457200" y="292608"/>
+            <a:ext cx="11338560" cy="566928"/>
+          </a:xfrm>
+          <a:prstGeom prst="rect">
+            <a:avLst/>
+          </a:prstGeom>
+          <a:noFill/>
+        </p:spPr>
+        <p:txBody>
+          <a:bodyPr wrap="square">
+            <a:spAutoFit/>
+          </a:bodyPr>
+          <a:lstStyle/>
+          <a:p>
+            <a:pPr algn="l"/>
+            <a:r>
+              <a:rPr sz="2600" b="1" i="0">
+                <a:solidFill>
+                  <a:srgbClr val="000000"/>
+                </a:solidFill>
+                <a:latin typeface="Calibri"/>
+              </a:rPr>
+              <a:t>8. Second Normal Form (2NF)</a:t>
+            </a:r>
+          </a:p>
+        </p:txBody>
+      </p:sp>
+      <p:sp>
+        <p:nvSpPr>
+          <p:cNvPr id="3" name="Rectangle 2"/>
           <p:cNvSpPr/>
           <p:nvPr/>
         </p:nvSpPr>
         <p:spPr>
           <a:xfrm>
-            <a:off x="0" y="0"/>
-            <a:ext cx="12191695" cy="914400"/>
+            <a:off x="457200" y="950976"/>
+            <a:ext cx="11338560" cy="18288"/>
           </a:xfrm>
           <a:prstGeom prst="rect">
             <a:avLst/>
           </a:prstGeom>
           <a:solidFill>
-            <a:srgbClr val="1F3A5F"/>
+            <a:srgbClr val="000000"/>
           </a:solidFill>
           <a:ln>
             <a:noFill/>
@@ -4914,14 +7635,14 @@
       </p:sp>
       <p:sp>
         <p:nvSpPr>
-          <p:cNvPr id="3" name="TextBox 2"/>
+          <p:cNvPr id="4" name="TextBox 3"/>
           <p:cNvSpPr txBox="1"/>
           <p:nvPr/>
         </p:nvSpPr>
         <p:spPr>
           <a:xfrm>
-            <a:off x="457200" y="182880"/>
-            <a:ext cx="11338560" cy="731520"/>
+            <a:off x="640080" y="1133856"/>
+            <a:ext cx="10972800" cy="5449824"/>
           </a:xfrm>
           <a:prstGeom prst="rect">
             <a:avLst/>
@@ -4934,16 +7655,181 @@
           </a:bodyPr>
           <a:lstStyle/>
           <a:p>
+            <a:pPr>
+              <a:spcAft>
+                <a:spcPts val="900"/>
+              </a:spcAft>
+            </a:pPr>
+            <a:r>
+              <a:rPr sz="1600">
+                <a:solidFill>
+                  <a:srgbClr val="000000"/>
+                </a:solidFill>
+                <a:latin typeface="Calibri"/>
+              </a:rPr>
+              <a:t>•  Rule: no column may depend on only part of the key.</a:t>
+            </a:r>
+          </a:p>
+          <a:p>
+            <a:pPr>
+              <a:spcAft>
+                <a:spcPts val="900"/>
+              </a:spcAft>
+            </a:pPr>
+            <a:r>
+              <a:rPr sz="1600">
+                <a:solidFill>
+                  <a:srgbClr val="000000"/>
+                </a:solidFill>
+                <a:latin typeface="Calibri"/>
+              </a:rPr>
+              <a:t>•  ORDER_ITEM is keyed by {OrderID, ProductID}, but F4 fixes PName, Category and Price from ProductID alone.</a:t>
+            </a:r>
+          </a:p>
+          <a:p>
+            <a:pPr>
+              <a:spcAft>
+                <a:spcPts val="900"/>
+              </a:spcAft>
+            </a:pPr>
+            <a:r>
+              <a:rPr sz="1600">
+                <a:solidFill>
+                  <a:srgbClr val="000000"/>
+                </a:solidFill>
+                <a:latin typeface="Calibri"/>
+              </a:rPr>
+              <a:t>•  Those three move to PRODUCT, where Price becomes UnitPrice.</a:t>
+            </a:r>
+          </a:p>
+          <a:p>
+            <a:pPr>
+              <a:spcAft>
+                <a:spcPts val="900"/>
+              </a:spcAft>
+            </a:pPr>
+            <a:r>
+              <a:rPr sz="1600">
+                <a:solidFill>
+                  <a:srgbClr val="000000"/>
+                </a:solidFill>
+                <a:latin typeface="Calibri"/>
+              </a:rPr>
+              <a:t>•  Only Qty depends on the whole key (F5), so only Qty stays behind.</a:t>
+            </a:r>
+          </a:p>
+          <a:p>
+            <a:pPr>
+              <a:spcAft>
+                <a:spcPts val="900"/>
+              </a:spcAft>
+            </a:pPr>
+            <a:r>
+              <a:rPr sz="1600">
+                <a:solidFill>
+                  <a:srgbClr val="000000"/>
+                </a:solidFill>
+                <a:latin typeface="Calibri"/>
+              </a:rPr>
+              <a:t>•  Still wrong: F2 and F3 in ORDER_MASTER both start from a non-key column.</a:t>
+            </a:r>
+          </a:p>
+        </p:txBody>
+      </p:sp>
+    </p:spTree>
+  </p:cSld>
+  <p:clrMapOvr>
+    <a:masterClrMapping/>
+  </p:clrMapOvr>
+</p:sld>
+</file>
+
+<file path=ppt/slides/slide24.xml><?xml version="1.0" encoding="utf-8"?>
+<p:sld xmlns:a="http://schemas.openxmlformats.org/drawingml/2006/main" xmlns:p="http://schemas.openxmlformats.org/presentationml/2006/main" xmlns:r="http://schemas.openxmlformats.org/officeDocument/2006/relationships">
+  <p:cSld>
+    <p:spTree>
+      <p:nvGrpSpPr>
+        <p:cNvPr id="1" name=""/>
+        <p:cNvGrpSpPr/>
+        <p:nvPr/>
+      </p:nvGrpSpPr>
+      <p:grpSpPr/>
+      <p:sp>
+        <p:nvSpPr>
+          <p:cNvPr id="2" name="TextBox 1"/>
+          <p:cNvSpPr txBox="1"/>
+          <p:nvPr/>
+        </p:nvSpPr>
+        <p:spPr>
+          <a:xfrm>
+            <a:off x="457200" y="237744"/>
+            <a:ext cx="11338560" cy="566928"/>
+          </a:xfrm>
+          <a:prstGeom prst="rect">
+            <a:avLst/>
+          </a:prstGeom>
+          <a:noFill/>
+        </p:spPr>
+        <p:txBody>
+          <a:bodyPr wrap="square">
+            <a:spAutoFit/>
+          </a:bodyPr>
+          <a:lstStyle/>
+          <a:p>
             <a:pPr algn="l"/>
             <a:r>
-              <a:rPr sz="2700" b="1" i="0">
-                <a:solidFill>
-                  <a:srgbClr val="FFFFFF"/>
-                </a:solidFill>
-                <a:latin typeface="Calibri"/>
-              </a:rPr>
-              <a:t>7. Second Normal Form (2NF)</a:t>
-            </a:r>
+              <a:rPr sz="2600" b="1" i="0">
+                <a:solidFill>
+                  <a:srgbClr val="000000"/>
+                </a:solidFill>
+                <a:latin typeface="Calibri"/>
+              </a:rPr>
+              <a:t>8. The Tables after 2NF</a:t>
+            </a:r>
+          </a:p>
+        </p:txBody>
+      </p:sp>
+      <p:sp>
+        <p:nvSpPr>
+          <p:cNvPr id="3" name="Rectangle 2"/>
+          <p:cNvSpPr/>
+          <p:nvPr/>
+        </p:nvSpPr>
+        <p:spPr>
+          <a:xfrm>
+            <a:off x="457200" y="896112"/>
+            <a:ext cx="11338560" cy="18288"/>
+          </a:xfrm>
+          <a:prstGeom prst="rect">
+            <a:avLst/>
+          </a:prstGeom>
+          <a:solidFill>
+            <a:srgbClr val="000000"/>
+          </a:solidFill>
+          <a:ln>
+            <a:noFill/>
+          </a:ln>
+          <a:effectLst/>
+        </p:spPr>
+        <p:style>
+          <a:lnRef idx="1">
+            <a:schemeClr val="accent1"/>
+          </a:lnRef>
+          <a:fillRef idx="3">
+            <a:schemeClr val="accent1"/>
+          </a:fillRef>
+          <a:effectRef idx="2">
+            <a:schemeClr val="accent1"/>
+          </a:effectRef>
+          <a:fontRef idx="minor">
+            <a:schemeClr val="lt1"/>
+          </a:fontRef>
+        </p:style>
+        <p:txBody>
+          <a:bodyPr rtlCol="0" anchor="ctr"/>
+          <a:lstStyle/>
+          <a:p>
+            <a:pPr algn="ctr"/>
           </a:p>
         </p:txBody>
       </p:sp>
@@ -4963,8 +7849,8 @@
         </p:blipFill>
         <p:spPr>
           <a:xfrm>
-            <a:off x="335127" y="1170303"/>
-            <a:ext cx="11521440" cy="5413505"/>
+            <a:off x="335127" y="1264569"/>
+            <a:ext cx="11521440" cy="5224973"/>
           </a:xfrm>
           <a:prstGeom prst="rect">
             <a:avLst/>
@@ -4979,17 +7865,9 @@
 </p:sld>
 </file>
 
-<file path=ppt/slides/slide17.xml><?xml version="1.0" encoding="utf-8"?>
+<file path=ppt/slides/slide25.xml><?xml version="1.0" encoding="utf-8"?>
 <p:sld xmlns:a="http://schemas.openxmlformats.org/drawingml/2006/main" xmlns:p="http://schemas.openxmlformats.org/presentationml/2006/main" xmlns:r="http://schemas.openxmlformats.org/officeDocument/2006/relationships">
   <p:cSld>
-    <p:bg>
-      <p:bgPr>
-        <a:solidFill>
-          <a:srgbClr val="FFFFFF"/>
-        </a:solidFill>
-        <a:effectLst/>
-      </p:bgPr>
-    </p:bg>
     <p:spTree>
       <p:nvGrpSpPr>
         <p:cNvPr id="1" name=""/>
@@ -4999,20 +7877,55 @@
       <p:grpSpPr/>
       <p:sp>
         <p:nvSpPr>
-          <p:cNvPr id="2" name="Rectangle 1"/>
+          <p:cNvPr id="2" name="TextBox 1"/>
+          <p:cNvSpPr txBox="1"/>
+          <p:nvPr/>
+        </p:nvSpPr>
+        <p:spPr>
+          <a:xfrm>
+            <a:off x="457200" y="292608"/>
+            <a:ext cx="11338560" cy="566928"/>
+          </a:xfrm>
+          <a:prstGeom prst="rect">
+            <a:avLst/>
+          </a:prstGeom>
+          <a:noFill/>
+        </p:spPr>
+        <p:txBody>
+          <a:bodyPr wrap="square">
+            <a:spAutoFit/>
+          </a:bodyPr>
+          <a:lstStyle/>
+          <a:p>
+            <a:pPr algn="l"/>
+            <a:r>
+              <a:rPr sz="2600" b="1" i="0">
+                <a:solidFill>
+                  <a:srgbClr val="000000"/>
+                </a:solidFill>
+                <a:latin typeface="Calibri"/>
+              </a:rPr>
+              <a:t>8. Third Normal Form (3NF)</a:t>
+            </a:r>
+          </a:p>
+        </p:txBody>
+      </p:sp>
+      <p:sp>
+        <p:nvSpPr>
+          <p:cNvPr id="3" name="Rectangle 2"/>
           <p:cNvSpPr/>
           <p:nvPr/>
         </p:nvSpPr>
         <p:spPr>
           <a:xfrm>
-            <a:off x="0" y="0"/>
-            <a:ext cx="12191695" cy="914400"/>
+            <a:off x="457200" y="950976"/>
+            <a:ext cx="11338560" cy="18288"/>
           </a:xfrm>
           <a:prstGeom prst="rect">
             <a:avLst/>
           </a:prstGeom>
           <a:solidFill>
-            <a:srgbClr val="1F3A5F"/>
+            <a:srgbClr val="000000"/>
           </a:solidFill>
           <a:ln>
             <a:noFill/>
@@ -5043,14 +7956,14 @@
       </p:sp>
       <p:sp>
         <p:nvSpPr>
-          <p:cNvPr id="3" name="TextBox 2"/>
+          <p:cNvPr id="4" name="TextBox 3"/>
           <p:cNvSpPr txBox="1"/>
           <p:nvPr/>
         </p:nvSpPr>
         <p:spPr>
           <a:xfrm>
-            <a:off x="457200" y="182880"/>
-            <a:ext cx="11338560" cy="731520"/>
+            <a:off x="640080" y="1133856"/>
+            <a:ext cx="10972800" cy="5449824"/>
           </a:xfrm>
           <a:prstGeom prst="rect">
             <a:avLst/>
@@ -5063,16 +7976,181 @@
           </a:bodyPr>
           <a:lstStyle/>
           <a:p>
+            <a:pPr>
+              <a:spcAft>
+                <a:spcPts val="900"/>
+              </a:spcAft>
+            </a:pPr>
+            <a:r>
+              <a:rPr sz="1600">
+                <a:solidFill>
+                  <a:srgbClr val="000000"/>
+                </a:solidFill>
+                <a:latin typeface="Calibri"/>
+              </a:rPr>
+              <a:t>•  Rule: no ordinary column may decide another ordinary column.</a:t>
+            </a:r>
+          </a:p>
+          <a:p>
+            <a:pPr>
+              <a:spcAft>
+                <a:spcPts val="900"/>
+              </a:spcAft>
+            </a:pPr>
+            <a:r>
+              <a:rPr sz="1600">
+                <a:solidFill>
+                  <a:srgbClr val="000000"/>
+                </a:solidFill>
+                <a:latin typeface="Calibri"/>
+              </a:rPr>
+              <a:t>•  F2 (CustID -&gt; CName, Street, City) becomes CUSTOMER.</a:t>
+            </a:r>
+          </a:p>
+          <a:p>
+            <a:pPr>
+              <a:spcAft>
+                <a:spcPts val="900"/>
+              </a:spcAft>
+            </a:pPr>
+            <a:r>
+              <a:rPr sz="1600">
+                <a:solidFill>
+                  <a:srgbClr val="000000"/>
+                </a:solidFill>
+                <a:latin typeface="Calibri"/>
+              </a:rPr>
+              <a:t>•  F3 (City -&gt; State) becomes CITY.</a:t>
+            </a:r>
+          </a:p>
+          <a:p>
+            <a:pPr>
+              <a:spcAft>
+                <a:spcPts val="900"/>
+              </a:spcAft>
+            </a:pPr>
+            <a:r>
+              <a:rPr sz="1600">
+                <a:solidFill>
+                  <a:srgbClr val="000000"/>
+                </a:solidFill>
+                <a:latin typeface="Calibri"/>
+              </a:rPr>
+              <a:t>•  What is left of ORDER_MASTER becomes ORDERS, keeping CustID as a foreign key.</a:t>
+            </a:r>
+          </a:p>
+          <a:p>
+            <a:pPr>
+              <a:spcAft>
+                <a:spcPts val="900"/>
+              </a:spcAft>
+            </a:pPr>
+            <a:r>
+              <a:rPr sz="1600">
+                <a:solidFill>
+                  <a:srgbClr val="000000"/>
+                </a:solidFill>
+                <a:latin typeface="Calibri"/>
+              </a:rPr>
+              <a:t>•  Still wrong: DELIVERY_DUTY passes 3NF only because every column of it belongs to some key.</a:t>
+            </a:r>
+          </a:p>
+        </p:txBody>
+      </p:sp>
+    </p:spTree>
+  </p:cSld>
+  <p:clrMapOvr>
+    <a:masterClrMapping/>
+  </p:clrMapOvr>
+</p:sld>
+</file>
+
+<file path=ppt/slides/slide26.xml><?xml version="1.0" encoding="utf-8"?>
+<p:sld xmlns:a="http://schemas.openxmlformats.org/drawingml/2006/main" xmlns:p="http://schemas.openxmlformats.org/presentationml/2006/main" xmlns:r="http://schemas.openxmlformats.org/officeDocument/2006/relationships">
+  <p:cSld>
+    <p:spTree>
+      <p:nvGrpSpPr>
+        <p:cNvPr id="1" name=""/>
+        <p:cNvGrpSpPr/>
+        <p:nvPr/>
+      </p:nvGrpSpPr>
+      <p:grpSpPr/>
+      <p:sp>
+        <p:nvSpPr>
+          <p:cNvPr id="2" name="TextBox 1"/>
+          <p:cNvSpPr txBox="1"/>
+          <p:nvPr/>
+        </p:nvSpPr>
+        <p:spPr>
+          <a:xfrm>
+            <a:off x="457200" y="237744"/>
+            <a:ext cx="11338560" cy="566928"/>
+          </a:xfrm>
+          <a:prstGeom prst="rect">
+            <a:avLst/>
+          </a:prstGeom>
+          <a:noFill/>
+        </p:spPr>
+        <p:txBody>
+          <a:bodyPr wrap="square">
+            <a:spAutoFit/>
+          </a:bodyPr>
+          <a:lstStyle/>
+          <a:p>
             <a:pPr algn="l"/>
             <a:r>
-              <a:rPr sz="2700" b="1" i="0">
-                <a:solidFill>
-                  <a:srgbClr val="FFFFFF"/>
-                </a:solidFill>
-                <a:latin typeface="Calibri"/>
-              </a:rPr>
-              <a:t>7. Third Normal Form (3NF)</a:t>
-            </a:r>
+              <a:rPr sz="2600" b="1" i="0">
+                <a:solidFill>
+                  <a:srgbClr val="000000"/>
+                </a:solidFill>
+                <a:latin typeface="Calibri"/>
+              </a:rPr>
+              <a:t>8. The Tables after 3NF</a:t>
+            </a:r>
+          </a:p>
+        </p:txBody>
+      </p:sp>
+      <p:sp>
+        <p:nvSpPr>
+          <p:cNvPr id="3" name="Rectangle 2"/>
+          <p:cNvSpPr/>
+          <p:nvPr/>
+        </p:nvSpPr>
+        <p:spPr>
+          <a:xfrm>
+            <a:off x="457200" y="896112"/>
+            <a:ext cx="11338560" cy="18288"/>
+          </a:xfrm>
+          <a:prstGeom prst="rect">
+            <a:avLst/>
+          </a:prstGeom>
+          <a:solidFill>
+            <a:srgbClr val="000000"/>
+          </a:solidFill>
+          <a:ln>
+            <a:noFill/>
+          </a:ln>
+          <a:effectLst/>
+        </p:spPr>
+        <p:style>
+          <a:lnRef idx="1">
+            <a:schemeClr val="accent1"/>
+          </a:lnRef>
+          <a:fillRef idx="3">
+            <a:schemeClr val="accent1"/>
+          </a:fillRef>
+          <a:effectRef idx="2">
+            <a:schemeClr val="accent1"/>
+          </a:effectRef>
+          <a:fontRef idx="minor">
+            <a:schemeClr val="lt1"/>
+          </a:fontRef>
+        </p:style>
+        <p:txBody>
+          <a:bodyPr rtlCol="0" anchor="ctr"/>
+          <a:lstStyle/>
+          <a:p>
+            <a:pPr algn="ctr"/>
           </a:p>
         </p:txBody>
       </p:sp>
@@ -5092,8 +8170,8 @@
         </p:blipFill>
         <p:spPr>
           <a:xfrm>
-            <a:off x="335127" y="1170303"/>
-            <a:ext cx="11521440" cy="5413505"/>
+            <a:off x="335127" y="1339429"/>
+            <a:ext cx="11521440" cy="5075253"/>
           </a:xfrm>
           <a:prstGeom prst="rect">
             <a:avLst/>
@@ -5108,17 +8186,9 @@
 </p:sld>
 </file>
 
-<file path=ppt/slides/slide18.xml><?xml version="1.0" encoding="utf-8"?>
+<file path=ppt/slides/slide27.xml><?xml version="1.0" encoding="utf-8"?>
 <p:sld xmlns:a="http://schemas.openxmlformats.org/drawingml/2006/main" xmlns:p="http://schemas.openxmlformats.org/presentationml/2006/main" xmlns:r="http://schemas.openxmlformats.org/officeDocument/2006/relationships">
   <p:cSld>
-    <p:bg>
-      <p:bgPr>
-        <a:solidFill>
-          <a:srgbClr val="FFFFFF"/>
-        </a:solidFill>
-        <a:effectLst/>
-      </p:bgPr>
-    </p:bg>
     <p:spTree>
       <p:nvGrpSpPr>
         <p:cNvPr id="1" name=""/>
@@ -5128,20 +8198,55 @@
       <p:grpSpPr/>
       <p:sp>
         <p:nvSpPr>
-          <p:cNvPr id="2" name="Rectangle 1"/>
+          <p:cNvPr id="2" name="TextBox 1"/>
+          <p:cNvSpPr txBox="1"/>
+          <p:nvPr/>
+        </p:nvSpPr>
+        <p:spPr>
+          <a:xfrm>
+            <a:off x="457200" y="292608"/>
+            <a:ext cx="11338560" cy="566928"/>
+          </a:xfrm>
+          <a:prstGeom prst="rect">
+            <a:avLst/>
+          </a:prstGeom>
+          <a:noFill/>
+        </p:spPr>
+        <p:txBody>
+          <a:bodyPr wrap="square">
+            <a:spAutoFit/>
+          </a:bodyPr>
+          <a:lstStyle/>
+          <a:p>
+            <a:pPr algn="l"/>
+            <a:r>
+              <a:rPr sz="2600" b="1" i="0">
+                <a:solidFill>
+                  <a:srgbClr val="000000"/>
+                </a:solidFill>
+                <a:latin typeface="Calibri"/>
+              </a:rPr>
+              <a:t>8. Boyce-Codd Normal Form (BCNF)</a:t>
+            </a:r>
+          </a:p>
+        </p:txBody>
+      </p:sp>
+      <p:sp>
+        <p:nvSpPr>
+          <p:cNvPr id="3" name="Rectangle 2"/>
           <p:cNvSpPr/>
           <p:nvPr/>
         </p:nvSpPr>
         <p:spPr>
           <a:xfrm>
-            <a:off x="0" y="0"/>
-            <a:ext cx="12191695" cy="914400"/>
+            <a:off x="457200" y="950976"/>
+            <a:ext cx="11338560" cy="18288"/>
           </a:xfrm>
           <a:prstGeom prst="rect">
             <a:avLst/>
           </a:prstGeom>
           <a:solidFill>
-            <a:srgbClr val="1F3A5F"/>
+            <a:srgbClr val="000000"/>
           </a:solidFill>
           <a:ln>
             <a:noFill/>
@@ -5172,14 +8277,14 @@
       </p:sp>
       <p:sp>
         <p:nvSpPr>
-          <p:cNvPr id="3" name="TextBox 2"/>
+          <p:cNvPr id="4" name="TextBox 3"/>
           <p:cNvSpPr txBox="1"/>
           <p:nvPr/>
         </p:nvSpPr>
         <p:spPr>
           <a:xfrm>
-            <a:off x="457200" y="182880"/>
-            <a:ext cx="11338560" cy="731520"/>
+            <a:off x="640080" y="1133856"/>
+            <a:ext cx="10972800" cy="5449824"/>
           </a:xfrm>
           <a:prstGeom prst="rect">
             <a:avLst/>
@@ -5192,16 +8297,197 @@
           </a:bodyPr>
           <a:lstStyle/>
           <a:p>
+            <a:pPr>
+              <a:spcAft>
+                <a:spcPts val="900"/>
+              </a:spcAft>
+            </a:pPr>
+            <a:r>
+              <a:rPr sz="1600">
+                <a:solidFill>
+                  <a:srgbClr val="000000"/>
+                </a:solidFill>
+                <a:latin typeface="Calibri"/>
+              </a:rPr>
+              <a:t>•  Rule: the left side of every dependency must be a key.</a:t>
+            </a:r>
+          </a:p>
+          <a:p>
+            <a:pPr>
+              <a:spcAft>
+                <a:spcPts val="900"/>
+              </a:spcAft>
+            </a:pPr>
+            <a:r>
+              <a:rPr sz="1600">
+                <a:solidFill>
+                  <a:srgbClr val="000000"/>
+                </a:solidFill>
+                <a:latin typeface="Calibri"/>
+              </a:rPr>
+              <a:t>•  DELIVERY_DUTY has two candidate keys, {OrderID, City} and {OrderID, DriverID}, so F7 is fine.</a:t>
+            </a:r>
+          </a:p>
+          <a:p>
+            <a:pPr>
+              <a:spcAft>
+                <a:spcPts val="900"/>
+              </a:spcAft>
+            </a:pPr>
+            <a:r>
+              <a:rPr sz="1600">
+                <a:solidFill>
+                  <a:srgbClr val="000000"/>
+                </a:solidFill>
+                <a:latin typeface="Calibri"/>
+              </a:rPr>
+              <a:t>•  F6 (DriverID -&gt; City) is not, because DriverID is not a key on its own.</a:t>
+            </a:r>
+          </a:p>
+          <a:p>
+            <a:pPr>
+              <a:spcAft>
+                <a:spcPts val="900"/>
+              </a:spcAft>
+            </a:pPr>
+            <a:r>
+              <a:rPr sz="1600">
+                <a:solidFill>
+                  <a:srgbClr val="000000"/>
+                </a:solidFill>
+                <a:latin typeface="Calibri"/>
+              </a:rPr>
+              <a:t>•  'D-09 covers Mumbai' therefore sits on three rows, and two of them can be made to disagree.</a:t>
+            </a:r>
+          </a:p>
+          <a:p>
+            <a:pPr>
+              <a:spcAft>
+                <a:spcPts val="900"/>
+              </a:spcAft>
+            </a:pPr>
+            <a:r>
+              <a:rPr sz="1600">
+                <a:solidFill>
+                  <a:srgbClr val="000000"/>
+                </a:solidFill>
+                <a:latin typeface="Calibri"/>
+              </a:rPr>
+              <a:t>•  Splitting on F6 gives DRIVER_CITY and ORDER_DRIVER, and the join on DriverID returns the original rows.</a:t>
+            </a:r>
+          </a:p>
+          <a:p>
+            <a:pPr>
+              <a:spcAft>
+                <a:spcPts val="900"/>
+              </a:spcAft>
+            </a:pPr>
+            <a:r>
+              <a:rPr sz="1600">
+                <a:solidFill>
+                  <a:srgbClr val="000000"/>
+                </a:solidFill>
+                <a:latin typeface="Calibri"/>
+              </a:rPr>
+              <a:t>•  Every table is now in BCNF.</a:t>
+            </a:r>
+          </a:p>
+        </p:txBody>
+      </p:sp>
+    </p:spTree>
+  </p:cSld>
+  <p:clrMapOvr>
+    <a:masterClrMapping/>
+  </p:clrMapOvr>
+</p:sld>
+</file>
+
+<file path=ppt/slides/slide28.xml><?xml version="1.0" encoding="utf-8"?>
+<p:sld xmlns:a="http://schemas.openxmlformats.org/drawingml/2006/main" xmlns:p="http://schemas.openxmlformats.org/presentationml/2006/main" xmlns:r="http://schemas.openxmlformats.org/officeDocument/2006/relationships">
+  <p:cSld>
+    <p:spTree>
+      <p:nvGrpSpPr>
+        <p:cNvPr id="1" name=""/>
+        <p:cNvGrpSpPr/>
+        <p:nvPr/>
+      </p:nvGrpSpPr>
+      <p:grpSpPr/>
+      <p:sp>
+        <p:nvSpPr>
+          <p:cNvPr id="2" name="TextBox 1"/>
+          <p:cNvSpPr txBox="1"/>
+          <p:nvPr/>
+        </p:nvSpPr>
+        <p:spPr>
+          <a:xfrm>
+            <a:off x="457200" y="237744"/>
+            <a:ext cx="11338560" cy="566928"/>
+          </a:xfrm>
+          <a:prstGeom prst="rect">
+            <a:avLst/>
+          </a:prstGeom>
+          <a:noFill/>
+        </p:spPr>
+        <p:txBody>
+          <a:bodyPr wrap="square">
+            <a:spAutoFit/>
+          </a:bodyPr>
+          <a:lstStyle/>
+          <a:p>
             <a:pPr algn="l"/>
             <a:r>
-              <a:rPr sz="2700" b="1" i="0">
-                <a:solidFill>
-                  <a:srgbClr val="FFFFFF"/>
-                </a:solidFill>
-                <a:latin typeface="Calibri"/>
-              </a:rPr>
-              <a:t>7. Boyce-Codd Normal Form (BCNF)</a:t>
-            </a:r>
+              <a:rPr sz="2600" b="1" i="0">
+                <a:solidFill>
+                  <a:srgbClr val="000000"/>
+                </a:solidFill>
+                <a:latin typeface="Calibri"/>
+              </a:rPr>
+              <a:t>8. The Tables after BCNF</a:t>
+            </a:r>
+          </a:p>
+        </p:txBody>
+      </p:sp>
+      <p:sp>
+        <p:nvSpPr>
+          <p:cNvPr id="3" name="Rectangle 2"/>
+          <p:cNvSpPr/>
+          <p:nvPr/>
+        </p:nvSpPr>
+        <p:spPr>
+          <a:xfrm>
+            <a:off x="457200" y="896112"/>
+            <a:ext cx="11338560" cy="18288"/>
+          </a:xfrm>
+          <a:prstGeom prst="rect">
+            <a:avLst/>
+          </a:prstGeom>
+          <a:solidFill>
+            <a:srgbClr val="000000"/>
+          </a:solidFill>
+          <a:ln>
+            <a:noFill/>
+          </a:ln>
+          <a:effectLst/>
+        </p:spPr>
+        <p:style>
+          <a:lnRef idx="1">
+            <a:schemeClr val="accent1"/>
+          </a:lnRef>
+          <a:fillRef idx="3">
+            <a:schemeClr val="accent1"/>
+          </a:fillRef>
+          <a:effectRef idx="2">
+            <a:schemeClr val="accent1"/>
+          </a:effectRef>
+          <a:fontRef idx="minor">
+            <a:schemeClr val="lt1"/>
+          </a:fontRef>
+        </p:style>
+        <p:txBody>
+          <a:bodyPr rtlCol="0" anchor="ctr"/>
+          <a:lstStyle/>
+          <a:p>
+            <a:pPr algn="ctr"/>
           </a:p>
         </p:txBody>
       </p:sp>
@@ -5221,8 +8507,8 @@
         </p:blipFill>
         <p:spPr>
           <a:xfrm>
-            <a:off x="598290" y="1042416"/>
-            <a:ext cx="10995113" cy="5669279"/>
+            <a:off x="335127" y="1320001"/>
+            <a:ext cx="11521440" cy="5114108"/>
           </a:xfrm>
           <a:prstGeom prst="rect">
             <a:avLst/>
@@ -5237,17 +8523,9 @@
 </p:sld>
 </file>
 
-<file path=ppt/slides/slide19.xml><?xml version="1.0" encoding="utf-8"?>
+<file path=ppt/slides/slide29.xml><?xml version="1.0" encoding="utf-8"?>
 <p:sld xmlns:a="http://schemas.openxmlformats.org/drawingml/2006/main" xmlns:p="http://schemas.openxmlformats.org/presentationml/2006/main" xmlns:r="http://schemas.openxmlformats.org/officeDocument/2006/relationships">
   <p:cSld>
-    <p:bg>
-      <p:bgPr>
-        <a:solidFill>
-          <a:srgbClr val="FFFFFF"/>
-        </a:solidFill>
-        <a:effectLst/>
-      </p:bgPr>
-    </p:bg>
     <p:spTree>
       <p:nvGrpSpPr>
         <p:cNvPr id="1" name=""/>
@@ -5257,20 +8535,55 @@
       <p:grpSpPr/>
       <p:sp>
         <p:nvSpPr>
-          <p:cNvPr id="2" name="Rectangle 1"/>
+          <p:cNvPr id="2" name="TextBox 1"/>
+          <p:cNvSpPr txBox="1"/>
+          <p:nvPr/>
+        </p:nvSpPr>
+        <p:spPr>
+          <a:xfrm>
+            <a:off x="457200" y="237744"/>
+            <a:ext cx="11338560" cy="566928"/>
+          </a:xfrm>
+          <a:prstGeom prst="rect">
+            <a:avLst/>
+          </a:prstGeom>
+          <a:noFill/>
+        </p:spPr>
+        <p:txBody>
+          <a:bodyPr wrap="square">
+            <a:spAutoFit/>
+          </a:bodyPr>
+          <a:lstStyle/>
+          <a:p>
+            <a:pPr algn="l"/>
+            <a:r>
+              <a:rPr sz="2600" b="1" i="0">
+                <a:solidFill>
+                  <a:srgbClr val="000000"/>
+                </a:solidFill>
+                <a:latin typeface="Calibri"/>
+              </a:rPr>
+              <a:t>9. The Decomposition, End to End</a:t>
+            </a:r>
+          </a:p>
+        </p:txBody>
+      </p:sp>
+      <p:sp>
+        <p:nvSpPr>
+          <p:cNvPr id="3" name="Rectangle 2"/>
           <p:cNvSpPr/>
           <p:nvPr/>
         </p:nvSpPr>
         <p:spPr>
           <a:xfrm>
-            <a:off x="0" y="0"/>
-            <a:ext cx="12191695" cy="914400"/>
+            <a:off x="457200" y="896112"/>
+            <a:ext cx="11338560" cy="18288"/>
           </a:xfrm>
           <a:prstGeom prst="rect">
             <a:avLst/>
           </a:prstGeom>
           <a:solidFill>
-            <a:srgbClr val="1F3A5F"/>
+            <a:srgbClr val="000000"/>
           </a:solidFill>
           <a:ln>
             <a:noFill/>
@@ -5301,14 +8614,14 @@
       </p:sp>
       <p:sp>
         <p:nvSpPr>
-          <p:cNvPr id="3" name="TextBox 2"/>
+          <p:cNvPr id="4" name="TextBox 3"/>
           <p:cNvSpPr txBox="1"/>
           <p:nvPr/>
         </p:nvSpPr>
         <p:spPr>
           <a:xfrm>
-            <a:off x="457200" y="182880"/>
-            <a:ext cx="11338560" cy="731520"/>
+            <a:off x="457200" y="969264"/>
+            <a:ext cx="11338560" cy="384048"/>
           </a:xfrm>
           <a:prstGeom prst="rect">
             <a:avLst/>
@@ -5323,14 +8636,354 @@
           <a:p>
             <a:pPr algn="l"/>
             <a:r>
-              <a:rPr sz="2700" b="1" i="0">
-                <a:solidFill>
-                  <a:srgbClr val="FFFFFF"/>
-                </a:solidFill>
-                <a:latin typeface="Calibri"/>
-              </a:rPr>
-              <a:t>8. Final Schema — 16 Tables, All in BCNF</a:t>
-            </a:r>
+              <a:rPr sz="1350" b="0" i="1">
+                <a:solidFill>
+                  <a:srgbClr val="444444"/>
+                </a:solidFill>
+                <a:latin typeface="Calibri"/>
+              </a:rPr>
+              <a:t>every relation, every column, at every stage</a:t>
+            </a:r>
+          </a:p>
+        </p:txBody>
+      </p:sp>
+      <p:pic>
+        <p:nvPicPr>
+          <p:cNvPr id="5" name="Picture 4" descr="decomp_tree.png"/>
+          <p:cNvPicPr>
+            <a:picLocks noChangeAspect="1"/>
+          </p:cNvPicPr>
+          <p:nvPr/>
+        </p:nvPicPr>
+        <p:blipFill>
+          <a:blip r:embed="rId2"/>
+          <a:stretch>
+            <a:fillRect/>
+          </a:stretch>
+        </p:blipFill>
+        <p:spPr>
+          <a:xfrm>
+            <a:off x="1925792" y="1463040"/>
+            <a:ext cx="8340110" cy="5212079"/>
+          </a:xfrm>
+          <a:prstGeom prst="rect">
+            <a:avLst/>
+          </a:prstGeom>
+        </p:spPr>
+      </p:pic>
+    </p:spTree>
+  </p:cSld>
+  <p:clrMapOvr>
+    <a:masterClrMapping/>
+  </p:clrMapOvr>
+</p:sld>
+</file>
+
+<file path=ppt/slides/slide3.xml><?xml version="1.0" encoding="utf-8"?>
+<p:sld xmlns:a="http://schemas.openxmlformats.org/drawingml/2006/main" xmlns:p="http://schemas.openxmlformats.org/presentationml/2006/main" xmlns:r="http://schemas.openxmlformats.org/officeDocument/2006/relationships">
+  <p:cSld>
+    <p:spTree>
+      <p:nvGrpSpPr>
+        <p:cNvPr id="1" name=""/>
+        <p:cNvGrpSpPr/>
+        <p:nvPr/>
+      </p:nvGrpSpPr>
+      <p:grpSpPr/>
+      <p:sp>
+        <p:nvSpPr>
+          <p:cNvPr id="2" name="TextBox 1"/>
+          <p:cNvSpPr txBox="1"/>
+          <p:nvPr/>
+        </p:nvSpPr>
+        <p:spPr>
+          <a:xfrm>
+            <a:off x="457200" y="292608"/>
+            <a:ext cx="11338560" cy="566928"/>
+          </a:xfrm>
+          <a:prstGeom prst="rect">
+            <a:avLst/>
+          </a:prstGeom>
+          <a:noFill/>
+        </p:spPr>
+        <p:txBody>
+          <a:bodyPr wrap="square">
+            <a:spAutoFit/>
+          </a:bodyPr>
+          <a:lstStyle/>
+          <a:p>
+            <a:pPr algn="l"/>
+            <a:r>
+              <a:rPr sz="2600" b="1" i="0">
+                <a:solidFill>
+                  <a:srgbClr val="000000"/>
+                </a:solidFill>
+                <a:latin typeface="Calibri"/>
+              </a:rPr>
+              <a:t>1. The Problem</a:t>
+            </a:r>
+          </a:p>
+        </p:txBody>
+      </p:sp>
+      <p:sp>
+        <p:nvSpPr>
+          <p:cNvPr id="3" name="Rectangle 2"/>
+          <p:cNvSpPr/>
+          <p:nvPr/>
+        </p:nvSpPr>
+        <p:spPr>
+          <a:xfrm>
+            <a:off x="457200" y="950976"/>
+            <a:ext cx="11338560" cy="18288"/>
+          </a:xfrm>
+          <a:prstGeom prst="rect">
+            <a:avLst/>
+          </a:prstGeom>
+          <a:solidFill>
+            <a:srgbClr val="000000"/>
+          </a:solidFill>
+          <a:ln>
+            <a:noFill/>
+          </a:ln>
+          <a:effectLst/>
+        </p:spPr>
+        <p:style>
+          <a:lnRef idx="1">
+            <a:schemeClr val="accent1"/>
+          </a:lnRef>
+          <a:fillRef idx="3">
+            <a:schemeClr val="accent1"/>
+          </a:fillRef>
+          <a:effectRef idx="2">
+            <a:schemeClr val="accent1"/>
+          </a:effectRef>
+          <a:fontRef idx="minor">
+            <a:schemeClr val="lt1"/>
+          </a:fontRef>
+        </p:style>
+        <p:txBody>
+          <a:bodyPr rtlCol="0" anchor="ctr"/>
+          <a:lstStyle/>
+          <a:p>
+            <a:pPr algn="ctr"/>
+          </a:p>
+        </p:txBody>
+      </p:sp>
+      <p:sp>
+        <p:nvSpPr>
+          <p:cNvPr id="4" name="TextBox 3"/>
+          <p:cNvSpPr txBox="1"/>
+          <p:nvPr/>
+        </p:nvSpPr>
+        <p:spPr>
+          <a:xfrm>
+            <a:off x="457200" y="1024128"/>
+            <a:ext cx="11338560" cy="384048"/>
+          </a:xfrm>
+          <a:prstGeom prst="rect">
+            <a:avLst/>
+          </a:prstGeom>
+          <a:noFill/>
+        </p:spPr>
+        <p:txBody>
+          <a:bodyPr wrap="square">
+            <a:spAutoFit/>
+          </a:bodyPr>
+          <a:lstStyle/>
+          <a:p>
+            <a:pPr algn="l"/>
+            <a:r>
+              <a:rPr sz="1350" b="0" i="1">
+                <a:solidFill>
+                  <a:srgbClr val="444444"/>
+                </a:solidFill>
+                <a:latin typeface="Calibri"/>
+              </a:rPr>
+              <a:t>the trouble is not missing data, it is the same data stored more than once</a:t>
+            </a:r>
+          </a:p>
+        </p:txBody>
+      </p:sp>
+      <p:sp>
+        <p:nvSpPr>
+          <p:cNvPr id="5" name="TextBox 4"/>
+          <p:cNvSpPr txBox="1"/>
+          <p:nvPr/>
+        </p:nvSpPr>
+        <p:spPr>
+          <a:xfrm>
+            <a:off x="640080" y="1517904"/>
+            <a:ext cx="10972800" cy="5065776"/>
+          </a:xfrm>
+          <a:prstGeom prst="rect">
+            <a:avLst/>
+          </a:prstGeom>
+          <a:noFill/>
+        </p:spPr>
+        <p:txBody>
+          <a:bodyPr wrap="square">
+            <a:spAutoFit/>
+          </a:bodyPr>
+          <a:lstStyle/>
+          <a:p>
+            <a:pPr>
+              <a:spcAft>
+                <a:spcPts val="900"/>
+              </a:spcAft>
+            </a:pPr>
+            <a:r>
+              <a:rPr sz="1700">
+                <a:solidFill>
+                  <a:srgbClr val="000000"/>
+                </a:solidFill>
+                <a:latin typeface="Calibri"/>
+              </a:rPr>
+              <a:t>•  A warehouse must always know: what stock is where, who supplies it, and where each order has reached.</a:t>
+            </a:r>
+          </a:p>
+          <a:p>
+            <a:pPr>
+              <a:spcAft>
+                <a:spcPts val="900"/>
+              </a:spcAft>
+            </a:pPr>
+            <a:r>
+              <a:rPr sz="1700">
+                <a:solidFill>
+                  <a:srgbClr val="000000"/>
+                </a:solidFill>
+                <a:latin typeface="Calibri"/>
+              </a:rPr>
+              <a:t>•  In practice those three answers live in three separate places, and nothing keeps them in agreement.</a:t>
+            </a:r>
+          </a:p>
+          <a:p>
+            <a:pPr>
+              <a:spcAft>
+                <a:spcPts val="900"/>
+              </a:spcAft>
+            </a:pPr>
+            <a:r>
+              <a:rPr sz="1700">
+                <a:solidFill>
+                  <a:srgbClr val="000000"/>
+                </a:solidFill>
+                <a:latin typeface="Calibri"/>
+              </a:rPr>
+              <a:t>•  So the same fact gets stored twice: a customer's address on every order, a product's name on every order line.</a:t>
+            </a:r>
+          </a:p>
+          <a:p>
+            <a:pPr>
+              <a:spcAft>
+                <a:spcPts val="900"/>
+              </a:spcAft>
+            </a:pPr>
+            <a:r>
+              <a:rPr sz="1700">
+                <a:solidFill>
+                  <a:srgbClr val="000000"/>
+                </a:solidFill>
+                <a:latin typeface="Calibri"/>
+              </a:rPr>
+              <a:t>•  Correct one copy, miss another, and the data contradicts itself.</a:t>
+            </a:r>
+          </a:p>
+        </p:txBody>
+      </p:sp>
+    </p:spTree>
+  </p:cSld>
+  <p:clrMapOvr>
+    <a:masterClrMapping/>
+  </p:clrMapOvr>
+</p:sld>
+</file>
+
+<file path=ppt/slides/slide30.xml><?xml version="1.0" encoding="utf-8"?>
+<p:sld xmlns:a="http://schemas.openxmlformats.org/drawingml/2006/main" xmlns:p="http://schemas.openxmlformats.org/presentationml/2006/main" xmlns:r="http://schemas.openxmlformats.org/officeDocument/2006/relationships">
+  <p:cSld>
+    <p:spTree>
+      <p:nvGrpSpPr>
+        <p:cNvPr id="1" name=""/>
+        <p:cNvGrpSpPr/>
+        <p:nvPr/>
+      </p:nvGrpSpPr>
+      <p:grpSpPr/>
+      <p:sp>
+        <p:nvSpPr>
+          <p:cNvPr id="2" name="TextBox 1"/>
+          <p:cNvSpPr txBox="1"/>
+          <p:nvPr/>
+        </p:nvSpPr>
+        <p:spPr>
+          <a:xfrm>
+            <a:off x="457200" y="237744"/>
+            <a:ext cx="11338560" cy="566928"/>
+          </a:xfrm>
+          <a:prstGeom prst="rect">
+            <a:avLst/>
+          </a:prstGeom>
+          <a:noFill/>
+        </p:spPr>
+        <p:txBody>
+          <a:bodyPr wrap="square">
+            <a:spAutoFit/>
+          </a:bodyPr>
+          <a:lstStyle/>
+          <a:p>
+            <a:pPr algn="l"/>
+            <a:r>
+              <a:rPr sz="2600" b="1" i="0">
+                <a:solidFill>
+                  <a:srgbClr val="000000"/>
+                </a:solidFill>
+                <a:latin typeface="Calibri"/>
+              </a:rPr>
+              <a:t>10. Final Schema, 17 Tables, All in BCNF</a:t>
+            </a:r>
+          </a:p>
+        </p:txBody>
+      </p:sp>
+      <p:sp>
+        <p:nvSpPr>
+          <p:cNvPr id="3" name="Rectangle 2"/>
+          <p:cNvSpPr/>
+          <p:nvPr/>
+        </p:nvSpPr>
+        <p:spPr>
+          <a:xfrm>
+            <a:off x="457200" y="896112"/>
+            <a:ext cx="11338560" cy="18288"/>
+          </a:xfrm>
+          <a:prstGeom prst="rect">
+            <a:avLst/>
+          </a:prstGeom>
+          <a:solidFill>
+            <a:srgbClr val="000000"/>
+          </a:solidFill>
+          <a:ln>
+            <a:noFill/>
+          </a:ln>
+          <a:effectLst/>
+        </p:spPr>
+        <p:style>
+          <a:lnRef idx="1">
+            <a:schemeClr val="accent1"/>
+          </a:lnRef>
+          <a:fillRef idx="3">
+            <a:schemeClr val="accent1"/>
+          </a:fillRef>
+          <a:effectRef idx="2">
+            <a:schemeClr val="accent1"/>
+          </a:effectRef>
+          <a:fontRef idx="minor">
+            <a:schemeClr val="lt1"/>
+          </a:fontRef>
+        </p:style>
+        <p:txBody>
+          <a:bodyPr rtlCol="0" anchor="ctr"/>
+          <a:lstStyle/>
+          <a:p>
+            <a:pPr algn="ctr"/>
           </a:p>
         </p:txBody>
       </p:sp>
@@ -5350,8 +9003,8 @@
         </p:blipFill>
         <p:spPr>
           <a:xfrm>
-            <a:off x="536626" y="1042416"/>
-            <a:ext cx="11118441" cy="5669279"/>
+            <a:off x="1107783" y="1078992"/>
+            <a:ext cx="9976127" cy="5596127"/>
           </a:xfrm>
           <a:prstGeom prst="rect">
             <a:avLst/>
@@ -5366,17 +9019,9 @@
 </p:sld>
 </file>
 
-<file path=ppt/slides/slide2.xml><?xml version="1.0" encoding="utf-8"?>
+<file path=ppt/slides/slide31.xml><?xml version="1.0" encoding="utf-8"?>
 <p:sld xmlns:a="http://schemas.openxmlformats.org/drawingml/2006/main" xmlns:p="http://schemas.openxmlformats.org/presentationml/2006/main" xmlns:r="http://schemas.openxmlformats.org/officeDocument/2006/relationships">
   <p:cSld>
-    <p:bg>
-      <p:bgPr>
-        <a:solidFill>
-          <a:srgbClr val="FFFFFF"/>
-        </a:solidFill>
-        <a:effectLst/>
-      </p:bgPr>
-    </p:bg>
     <p:spTree>
       <p:nvGrpSpPr>
         <p:cNvPr id="1" name=""/>
@@ -5386,20 +9031,55 @@
       <p:grpSpPr/>
       <p:sp>
         <p:nvSpPr>
-          <p:cNvPr id="2" name="Rectangle 1"/>
+          <p:cNvPr id="2" name="TextBox 1"/>
+          <p:cNvSpPr txBox="1"/>
+          <p:nvPr/>
+        </p:nvSpPr>
+        <p:spPr>
+          <a:xfrm>
+            <a:off x="457200" y="292608"/>
+            <a:ext cx="11338560" cy="566928"/>
+          </a:xfrm>
+          <a:prstGeom prst="rect">
+            <a:avLst/>
+          </a:prstGeom>
+          <a:noFill/>
+        </p:spPr>
+        <p:txBody>
+          <a:bodyPr wrap="square">
+            <a:spAutoFit/>
+          </a:bodyPr>
+          <a:lstStyle/>
+          <a:p>
+            <a:pPr algn="l"/>
+            <a:r>
+              <a:rPr sz="2600" b="1" i="0">
+                <a:solidFill>
+                  <a:srgbClr val="000000"/>
+                </a:solidFill>
+                <a:latin typeface="Calibri"/>
+              </a:rPr>
+              <a:t>10. Why the Design Is Now Safe</a:t>
+            </a:r>
+          </a:p>
+        </p:txBody>
+      </p:sp>
+      <p:sp>
+        <p:nvSpPr>
+          <p:cNvPr id="3" name="Rectangle 2"/>
           <p:cNvSpPr/>
           <p:nvPr/>
         </p:nvSpPr>
         <p:spPr>
           <a:xfrm>
-            <a:off x="0" y="0"/>
-            <a:ext cx="12191695" cy="1051560"/>
+            <a:off x="457200" y="950976"/>
+            <a:ext cx="11338560" cy="18288"/>
           </a:xfrm>
           <a:prstGeom prst="rect">
             <a:avLst/>
           </a:prstGeom>
           <a:solidFill>
-            <a:srgbClr val="1F3A5F"/>
+            <a:srgbClr val="000000"/>
           </a:solidFill>
           <a:ln>
             <a:noFill/>
@@ -5430,49 +9110,14 @@
       </p:sp>
       <p:sp>
         <p:nvSpPr>
-          <p:cNvPr id="3" name="TextBox 2"/>
-          <p:cNvSpPr txBox="1"/>
-          <p:nvPr/>
-        </p:nvSpPr>
-        <p:spPr>
-          <a:xfrm>
-            <a:off x="457200" y="182880"/>
-            <a:ext cx="11338560" cy="731520"/>
-          </a:xfrm>
-          <a:prstGeom prst="rect">
-            <a:avLst/>
-          </a:prstGeom>
-          <a:noFill/>
-        </p:spPr>
-        <p:txBody>
-          <a:bodyPr wrap="square">
-            <a:spAutoFit/>
-          </a:bodyPr>
-          <a:lstStyle/>
-          <a:p>
-            <a:pPr algn="l"/>
-            <a:r>
-              <a:rPr sz="2700" b="1" i="0">
-                <a:solidFill>
-                  <a:srgbClr val="FFFFFF"/>
-                </a:solidFill>
-                <a:latin typeface="Calibri"/>
-              </a:rPr>
-              <a:t>Agenda</a:t>
-            </a:r>
-          </a:p>
-        </p:txBody>
-      </p:sp>
-      <p:sp>
-        <p:nvSpPr>
           <p:cNvPr id="4" name="TextBox 3"/>
           <p:cNvSpPr txBox="1"/>
           <p:nvPr/>
         </p:nvSpPr>
         <p:spPr>
           <a:xfrm>
-            <a:off x="640080" y="1325880"/>
-            <a:ext cx="10972800" cy="5257800"/>
+            <a:off x="640080" y="1133856"/>
+            <a:ext cx="10972800" cy="5449824"/>
           </a:xfrm>
           <a:prstGeom prst="rect">
             <a:avLst/>
@@ -5493,11 +9138,11 @@
             <a:r>
               <a:rPr sz="1700">
                 <a:solidFill>
-                  <a:srgbClr val="222222"/>
-                </a:solidFill>
-                <a:latin typeface="Calibri"/>
-              </a:rPr>
-              <a:t>•  The problem, objectives and scope</a:t>
+                  <a:srgbClr val="000000"/>
+                </a:solidFill>
+                <a:latin typeface="Calibri"/>
+              </a:rPr>
+              <a:t>•  Every fact is stored in exactly one place, so two rows can never disagree.</a:t>
             </a:r>
           </a:p>
           <a:p>
@@ -5509,11 +9154,11 @@
             <a:r>
               <a:rPr sz="1700">
                 <a:solidFill>
-                  <a:srgbClr val="222222"/>
-                </a:solidFill>
-                <a:latin typeface="Calibri"/>
-              </a:rPr>
-              <a:t>•  Entities, attributes and relationships</a:t>
+                  <a:srgbClr val="000000"/>
+                </a:solidFill>
+                <a:latin typeface="Calibri"/>
+              </a:rPr>
+              <a:t>•  Correcting a product name, an address or a city's state is a single-row edit.</a:t>
             </a:r>
           </a:p>
           <a:p>
@@ -5525,11 +9170,11 @@
             <a:r>
               <a:rPr sz="1700">
                 <a:solidFill>
-                  <a:srgbClr val="222222"/>
-                </a:solidFill>
-                <a:latin typeface="Calibri"/>
-              </a:rPr>
-              <a:t>•  The ER model</a:t>
+                  <a:srgbClr val="000000"/>
+                </a:solidFill>
+                <a:latin typeface="Calibri"/>
+              </a:rPr>
+              <a:t>•  A supplier, product or customer can exist before appearing on any order.</a:t>
             </a:r>
           </a:p>
           <a:p>
@@ -5541,11 +9186,11 @@
             <a:r>
               <a:rPr sz="1700">
                 <a:solidFill>
-                  <a:srgbClr val="222222"/>
-                </a:solidFill>
-                <a:latin typeface="Calibri"/>
-              </a:rPr>
-              <a:t>•  The EER model — the same design, extended</a:t>
+                  <a:srgbClr val="000000"/>
+                </a:solidFill>
+                <a:latin typeface="Calibri"/>
+              </a:rPr>
+              <a:t>•  Deleting an order cannot wipe out the customer who placed it.</a:t>
             </a:r>
           </a:p>
           <a:p>
@@ -5557,11 +9202,11 @@
             <a:r>
               <a:rPr sz="1700">
                 <a:solidFill>
-                  <a:srgbClr val="222222"/>
-                </a:solidFill>
-                <a:latin typeface="Calibri"/>
-              </a:rPr>
-              <a:t>•  Turning the model into tables</a:t>
+                  <a:srgbClr val="000000"/>
+                </a:solidFill>
+                <a:latin typeface="Calibri"/>
+              </a:rPr>
+              <a:t>•  TotalAmt is calculated, not stored, so it can never fall out of step.</a:t>
             </a:r>
           </a:p>
           <a:p>
@@ -5573,27 +9218,11 @@
             <a:r>
               <a:rPr sz="1700">
                 <a:solidFill>
-                  <a:srgbClr val="222222"/>
-                </a:solidFill>
-                <a:latin typeface="Calibri"/>
-              </a:rPr>
-              <a:t>•  Normalization: UNF → 1NF → 2NF → 3NF → BCNF</a:t>
-            </a:r>
-          </a:p>
-          <a:p>
-            <a:pPr>
-              <a:spcAft>
-                <a:spcPts val="900"/>
-              </a:spcAft>
-            </a:pPr>
-            <a:r>
-              <a:rPr sz="1700">
-                <a:solidFill>
-                  <a:srgbClr val="222222"/>
-                </a:solidFill>
-                <a:latin typeface="Calibri"/>
-              </a:rPr>
-              <a:t>•  The final schema, and what comes next</a:t>
+                  <a:srgbClr val="000000"/>
+                </a:solidFill>
+                <a:latin typeface="Calibri"/>
+              </a:rPr>
+              <a:t>•  One trade-off: F7, {OrderID, City} -&gt; DriverID, now needs a trigger, which DA2 will add.</a:t>
             </a:r>
           </a:p>
         </p:txBody>
@@ -5606,17 +9235,9 @@
 </p:sld>
 </file>
 
-<file path=ppt/slides/slide20.xml><?xml version="1.0" encoding="utf-8"?>
+<file path=ppt/slides/slide32.xml><?xml version="1.0" encoding="utf-8"?>
 <p:sld xmlns:a="http://schemas.openxmlformats.org/drawingml/2006/main" xmlns:p="http://schemas.openxmlformats.org/presentationml/2006/main" xmlns:r="http://schemas.openxmlformats.org/officeDocument/2006/relationships">
   <p:cSld>
-    <p:bg>
-      <p:bgPr>
-        <a:solidFill>
-          <a:srgbClr val="FFFFFF"/>
-        </a:solidFill>
-        <a:effectLst/>
-      </p:bgPr>
-    </p:bg>
     <p:spTree>
       <p:nvGrpSpPr>
         <p:cNvPr id="1" name=""/>
@@ -5626,20 +9247,55 @@
       <p:grpSpPr/>
       <p:sp>
         <p:nvSpPr>
-          <p:cNvPr id="2" name="Rectangle 1"/>
+          <p:cNvPr id="2" name="TextBox 1"/>
+          <p:cNvSpPr txBox="1"/>
+          <p:nvPr/>
+        </p:nvSpPr>
+        <p:spPr>
+          <a:xfrm>
+            <a:off x="457200" y="292608"/>
+            <a:ext cx="11338560" cy="566928"/>
+          </a:xfrm>
+          <a:prstGeom prst="rect">
+            <a:avLst/>
+          </a:prstGeom>
+          <a:noFill/>
+        </p:spPr>
+        <p:txBody>
+          <a:bodyPr wrap="square">
+            <a:spAutoFit/>
+          </a:bodyPr>
+          <a:lstStyle/>
+          <a:p>
+            <a:pPr algn="l"/>
+            <a:r>
+              <a:rPr sz="2600" b="1" i="0">
+                <a:solidFill>
+                  <a:srgbClr val="000000"/>
+                </a:solidFill>
+                <a:latin typeface="Calibri"/>
+              </a:rPr>
+              <a:t>11. What Comes Next</a:t>
+            </a:r>
+          </a:p>
+        </p:txBody>
+      </p:sp>
+      <p:sp>
+        <p:nvSpPr>
+          <p:cNvPr id="3" name="Rectangle 2"/>
           <p:cNvSpPr/>
           <p:nvPr/>
         </p:nvSpPr>
         <p:spPr>
           <a:xfrm>
-            <a:off x="0" y="0"/>
-            <a:ext cx="12191695" cy="1051560"/>
+            <a:off x="457200" y="950976"/>
+            <a:ext cx="11338560" cy="18288"/>
           </a:xfrm>
           <a:prstGeom prst="rect">
             <a:avLst/>
           </a:prstGeom>
           <a:solidFill>
-            <a:srgbClr val="1F3A5F"/>
+            <a:srgbClr val="000000"/>
           </a:solidFill>
           <a:ln>
             <a:noFill/>
@@ -5670,49 +9326,14 @@
       </p:sp>
       <p:sp>
         <p:nvSpPr>
-          <p:cNvPr id="3" name="TextBox 2"/>
-          <p:cNvSpPr txBox="1"/>
-          <p:nvPr/>
-        </p:nvSpPr>
-        <p:spPr>
-          <a:xfrm>
-            <a:off x="457200" y="182880"/>
-            <a:ext cx="11338560" cy="731520"/>
-          </a:xfrm>
-          <a:prstGeom prst="rect">
-            <a:avLst/>
-          </a:prstGeom>
-          <a:noFill/>
-        </p:spPr>
-        <p:txBody>
-          <a:bodyPr wrap="square">
-            <a:spAutoFit/>
-          </a:bodyPr>
-          <a:lstStyle/>
-          <a:p>
-            <a:pPr algn="l"/>
-            <a:r>
-              <a:rPr sz="2700" b="1" i="0">
-                <a:solidFill>
-                  <a:srgbClr val="FFFFFF"/>
-                </a:solidFill>
-                <a:latin typeface="Calibri"/>
-              </a:rPr>
-              <a:t>8. Why the Design Is Now Safe</a:t>
-            </a:r>
-          </a:p>
-        </p:txBody>
-      </p:sp>
-      <p:sp>
-        <p:nvSpPr>
           <p:cNvPr id="4" name="TextBox 3"/>
           <p:cNvSpPr txBox="1"/>
           <p:nvPr/>
         </p:nvSpPr>
         <p:spPr>
           <a:xfrm>
-            <a:off x="640080" y="1325880"/>
-            <a:ext cx="10972800" cy="5257800"/>
+            <a:off x="640080" y="1133856"/>
+            <a:ext cx="10972800" cy="5449824"/>
           </a:xfrm>
           <a:prstGeom prst="rect">
             <a:avLst/>
@@ -5733,11 +9354,27 @@
             <a:r>
               <a:rPr sz="1700">
                 <a:solidFill>
-                  <a:srgbClr val="222222"/>
-                </a:solidFill>
-                <a:latin typeface="Calibri"/>
-              </a:rPr>
-              <a:t>•  Every fact is stored in exactly one place, so two rows can never disagree.</a:t>
+                  <a:srgbClr val="000000"/>
+                </a:solidFill>
+                <a:latin typeface="Calibri"/>
+              </a:rPr>
+              <a:t>•  DA2, due 18 September 2026</a:t>
+            </a:r>
+          </a:p>
+          <a:p>
+            <a:pPr lvl="1">
+              <a:spcAft>
+                <a:spcPts val="900"/>
+              </a:spcAft>
+            </a:pPr>
+            <a:r>
+              <a:rPr sz="1500">
+                <a:solidFill>
+                  <a:srgbClr val="444444"/>
+                </a:solidFill>
+                <a:latin typeface="Calibri"/>
+              </a:rPr>
+              <a:t>-  Create the 17 tables in SQL with keys and constraints, load sample data, add the BCNF trigger, and write PL/SQL for receiving stock and dispatching orders.</a:t>
             </a:r>
           </a:p>
           <a:p>
@@ -5749,75 +9386,27 @@
             <a:r>
               <a:rPr sz="1700">
                 <a:solidFill>
-                  <a:srgbClr val="222222"/>
-                </a:solidFill>
-                <a:latin typeface="Calibri"/>
-              </a:rPr>
-              <a:t>•  Correcting a product name, an address or a city's state is a single-row edit.</a:t>
-            </a:r>
-          </a:p>
-          <a:p>
-            <a:pPr>
+                  <a:srgbClr val="000000"/>
+                </a:solidFill>
+                <a:latin typeface="Calibri"/>
+              </a:rPr>
+              <a:t>•  DA3, due 23 October 2026</a:t>
+            </a:r>
+          </a:p>
+          <a:p>
+            <a:pPr lvl="1">
               <a:spcAft>
                 <a:spcPts val="900"/>
               </a:spcAft>
             </a:pPr>
             <a:r>
-              <a:rPr sz="1700">
-                <a:solidFill>
-                  <a:srgbClr val="222222"/>
-                </a:solidFill>
-                <a:latin typeface="Calibri"/>
-              </a:rPr>
-              <a:t>•  A supplier, product or customer can exist before appearing on any order.</a:t>
-            </a:r>
-          </a:p>
-          <a:p>
-            <a:pPr>
-              <a:spcAft>
-                <a:spcPts val="900"/>
-              </a:spcAft>
-            </a:pPr>
-            <a:r>
-              <a:rPr sz="1700">
-                <a:solidFill>
-                  <a:srgbClr val="222222"/>
-                </a:solidFill>
-                <a:latin typeface="Calibri"/>
-              </a:rPr>
-              <a:t>•  Deleting an order cannot wipe out the customer who placed it.</a:t>
-            </a:r>
-          </a:p>
-          <a:p>
-            <a:pPr>
-              <a:spcAft>
-                <a:spcPts val="900"/>
-              </a:spcAft>
-            </a:pPr>
-            <a:r>
-              <a:rPr sz="1700">
-                <a:solidFill>
-                  <a:srgbClr val="222222"/>
-                </a:solidFill>
-                <a:latin typeface="Calibri"/>
-              </a:rPr>
-              <a:t>•  TotalAmt is calculated, not stored, so it can never fall out of step.</a:t>
-            </a:r>
-          </a:p>
-          <a:p>
-            <a:pPr>
-              <a:spcAft>
-                <a:spcPts val="900"/>
-              </a:spcAft>
-            </a:pPr>
-            <a:r>
-              <a:rPr sz="1700">
-                <a:solidFill>
-                  <a:srgbClr val="222222"/>
-                </a:solidFill>
-                <a:latin typeface="Calibri"/>
-              </a:rPr>
-              <a:t>•  One trade-off: the rule {OrderID, City} → DriverID now needs a trigger, which DA2 will add.</a:t>
+              <a:rPr sz="1500">
+                <a:solidFill>
+                  <a:srgbClr val="444444"/>
+                </a:solidFill>
+                <a:latin typeface="Calibri"/>
+              </a:rPr>
+              <a:t>-  Rebuild on a graph database (Neo4j). Tracing a delivery back through shipment, order, warehouse and supplier is a chain of hops, one line in a graph query but a fresh join for every step in SQL.</a:t>
             </a:r>
           </a:p>
         </p:txBody>
@@ -5830,17 +9419,9 @@
 </p:sld>
 </file>
 
-<file path=ppt/slides/slide21.xml><?xml version="1.0" encoding="utf-8"?>
+<file path=ppt/slides/slide33.xml><?xml version="1.0" encoding="utf-8"?>
 <p:sld xmlns:a="http://schemas.openxmlformats.org/drawingml/2006/main" xmlns:p="http://schemas.openxmlformats.org/presentationml/2006/main" xmlns:r="http://schemas.openxmlformats.org/officeDocument/2006/relationships">
   <p:cSld>
-    <p:bg>
-      <p:bgPr>
-        <a:solidFill>
-          <a:srgbClr val="FFFFFF"/>
-        </a:solidFill>
-        <a:effectLst/>
-      </p:bgPr>
-    </p:bg>
     <p:spTree>
       <p:nvGrpSpPr>
         <p:cNvPr id="1" name=""/>
@@ -5850,20 +9431,55 @@
       <p:grpSpPr/>
       <p:sp>
         <p:nvSpPr>
-          <p:cNvPr id="2" name="Rectangle 1"/>
+          <p:cNvPr id="2" name="TextBox 1"/>
+          <p:cNvSpPr txBox="1"/>
+          <p:nvPr/>
+        </p:nvSpPr>
+        <p:spPr>
+          <a:xfrm>
+            <a:off x="731520" y="2651760"/>
+            <a:ext cx="10698480" cy="1097280"/>
+          </a:xfrm>
+          <a:prstGeom prst="rect">
+            <a:avLst/>
+          </a:prstGeom>
+          <a:noFill/>
+        </p:spPr>
+        <p:txBody>
+          <a:bodyPr wrap="square">
+            <a:spAutoFit/>
+          </a:bodyPr>
+          <a:lstStyle/>
+          <a:p>
+            <a:pPr algn="ctr"/>
+            <a:r>
+              <a:rPr sz="4400" b="1" i="0">
+                <a:solidFill>
+                  <a:srgbClr val="000000"/>
+                </a:solidFill>
+                <a:latin typeface="Calibri"/>
+              </a:rPr>
+              <a:t>Thank You</a:t>
+            </a:r>
+          </a:p>
+        </p:txBody>
+      </p:sp>
+      <p:sp>
+        <p:nvSpPr>
+          <p:cNvPr id="3" name="Rectangle 2"/>
           <p:cNvSpPr/>
           <p:nvPr/>
         </p:nvSpPr>
         <p:spPr>
           <a:xfrm>
-            <a:off x="0" y="0"/>
-            <a:ext cx="12191695" cy="1051560"/>
+            <a:off x="4023360" y="3794760"/>
+            <a:ext cx="4114800" cy="18288"/>
           </a:xfrm>
           <a:prstGeom prst="rect">
             <a:avLst/>
           </a:prstGeom>
           <a:solidFill>
-            <a:srgbClr val="1F3A5F"/>
+            <a:srgbClr val="000000"/>
           </a:solidFill>
           <a:ln>
             <a:noFill/>
@@ -5894,14 +9510,14 @@
       </p:sp>
       <p:sp>
         <p:nvSpPr>
-          <p:cNvPr id="3" name="TextBox 2"/>
+          <p:cNvPr id="4" name="TextBox 3"/>
           <p:cNvSpPr txBox="1"/>
           <p:nvPr/>
         </p:nvSpPr>
         <p:spPr>
           <a:xfrm>
-            <a:off x="457200" y="182880"/>
-            <a:ext cx="11338560" cy="731520"/>
+            <a:off x="731520" y="3977639"/>
+            <a:ext cx="10698480" cy="640080"/>
           </a:xfrm>
           <a:prstGeom prst="rect">
             <a:avLst/>
@@ -5914,29 +9530,29 @@
           </a:bodyPr>
           <a:lstStyle/>
           <a:p>
-            <a:pPr algn="l"/>
-            <a:r>
-              <a:rPr sz="2700" b="1" i="0">
-                <a:solidFill>
-                  <a:srgbClr val="FFFFFF"/>
-                </a:solidFill>
-                <a:latin typeface="Calibri"/>
-              </a:rPr>
-              <a:t>9. What Comes Next</a:t>
-            </a:r>
-          </a:p>
-        </p:txBody>
-      </p:sp>
-      <p:sp>
-        <p:nvSpPr>
-          <p:cNvPr id="4" name="TextBox 3"/>
+            <a:pPr algn="ctr"/>
+            <a:r>
+              <a:rPr sz="1900" b="0" i="1">
+                <a:solidFill>
+                  <a:srgbClr val="444444"/>
+                </a:solidFill>
+                <a:latin typeface="Calibri"/>
+              </a:rPr>
+              <a:t>7 entities, 7 relationships, 17 tables, all in BCNF</a:t>
+            </a:r>
+          </a:p>
+        </p:txBody>
+      </p:sp>
+      <p:sp>
+        <p:nvSpPr>
+          <p:cNvPr id="5" name="TextBox 4"/>
           <p:cNvSpPr txBox="1"/>
           <p:nvPr/>
         </p:nvSpPr>
         <p:spPr>
           <a:xfrm>
-            <a:off x="640080" y="1325880"/>
-            <a:ext cx="10972800" cy="5257800"/>
+            <a:off x="731520" y="5212080"/>
+            <a:ext cx="10698480" cy="640080"/>
           </a:xfrm>
           <a:prstGeom prst="rect">
             <a:avLst/>
@@ -5949,67 +9565,15 @@
           </a:bodyPr>
           <a:lstStyle/>
           <a:p>
-            <a:pPr>
-              <a:spcAft>
-                <a:spcPts val="900"/>
-              </a:spcAft>
-            </a:pPr>
-            <a:r>
-              <a:rPr sz="1700">
-                <a:solidFill>
-                  <a:srgbClr val="222222"/>
-                </a:solidFill>
-                <a:latin typeface="Calibri"/>
-              </a:rPr>
-              <a:t>•  DA2 — 18 September 2026</a:t>
-            </a:r>
-          </a:p>
-          <a:p>
-            <a:pPr lvl="1">
-              <a:spcAft>
-                <a:spcPts val="900"/>
-              </a:spcAft>
-            </a:pPr>
-            <a:r>
-              <a:rPr sz="1500">
-                <a:solidFill>
-                  <a:srgbClr val="555555"/>
-                </a:solidFill>
-                <a:latin typeface="Calibri"/>
-              </a:rPr>
-              <a:t>–  Create the 16 tables in SQL with keys and constraints, load sample data, add the BCNF trigger, and write PL/SQL for receiving stock and dispatching orders.</a:t>
-            </a:r>
-          </a:p>
-          <a:p>
-            <a:pPr>
-              <a:spcAft>
-                <a:spcPts val="900"/>
-              </a:spcAft>
-            </a:pPr>
-            <a:r>
-              <a:rPr sz="1700">
-                <a:solidFill>
-                  <a:srgbClr val="222222"/>
-                </a:solidFill>
-                <a:latin typeface="Calibri"/>
-              </a:rPr>
-              <a:t>•  DA3 — 23 October 2026</a:t>
-            </a:r>
-          </a:p>
-          <a:p>
-            <a:pPr lvl="1">
-              <a:spcAft>
-                <a:spcPts val="900"/>
-              </a:spcAft>
-            </a:pPr>
-            <a:r>
-              <a:rPr sz="1500">
-                <a:solidFill>
-                  <a:srgbClr val="555555"/>
-                </a:solidFill>
-                <a:latin typeface="Calibri"/>
-              </a:rPr>
-              <a:t>–  Rebuild on a graph database (Neo4j). Tracing a delivery back through shipment, order, warehouse and supplier is a chain of hops — one line in a graph query, but a fresh join for every step in SQL.</a:t>
+            <a:pPr algn="ctr"/>
+            <a:r>
+              <a:rPr sz="1400" b="0" i="0">
+                <a:solidFill>
+                  <a:srgbClr val="000000"/>
+                </a:solidFill>
+                <a:latin typeface="Calibri"/>
+              </a:rPr>
+              <a:t>Safwaan Mohamed S (25BCE1188)   |   Avi Dhandhania (25BCE1207)   |   Priyal Bhalla (25BCE1261)</a:t>
             </a:r>
           </a:p>
         </p:txBody>
@@ -6022,17 +9586,9 @@
 </p:sld>
 </file>
 
-<file path=ppt/slides/slide22.xml><?xml version="1.0" encoding="utf-8"?>
+<file path=ppt/slides/slide4.xml><?xml version="1.0" encoding="utf-8"?>
 <p:sld xmlns:a="http://schemas.openxmlformats.org/drawingml/2006/main" xmlns:p="http://schemas.openxmlformats.org/presentationml/2006/main" xmlns:r="http://schemas.openxmlformats.org/officeDocument/2006/relationships">
   <p:cSld>
-    <p:bg>
-      <p:bgPr>
-        <a:solidFill>
-          <a:srgbClr val="1F3A5F"/>
-        </a:solidFill>
-        <a:effectLst/>
-      </p:bgPr>
-    </p:bg>
     <p:spTree>
       <p:nvGrpSpPr>
         <p:cNvPr id="1" name=""/>
@@ -6048,8 +9604,8 @@
         </p:nvSpPr>
         <p:spPr>
           <a:xfrm>
-            <a:off x="731520" y="2468880"/>
-            <a:ext cx="10698480" cy="1097280"/>
+            <a:off x="457200" y="292608"/>
+            <a:ext cx="11338560" cy="566928"/>
           </a:xfrm>
           <a:prstGeom prst="rect">
             <a:avLst/>
@@ -6062,131 +9618,35 @@
           </a:bodyPr>
           <a:lstStyle/>
           <a:p>
-            <a:pPr algn="ctr"/>
-            <a:r>
-              <a:rPr sz="4400" b="1" i="0">
-                <a:solidFill>
-                  <a:srgbClr val="FFFFFF"/>
-                </a:solidFill>
-                <a:latin typeface="Calibri"/>
-              </a:rPr>
-              <a:t>Thank You</a:t>
-            </a:r>
-          </a:p>
-        </p:txBody>
-      </p:sp>
-      <p:sp>
-        <p:nvSpPr>
-          <p:cNvPr id="3" name="TextBox 2"/>
-          <p:cNvSpPr txBox="1"/>
-          <p:nvPr/>
-        </p:nvSpPr>
-        <p:spPr>
-          <a:xfrm>
-            <a:off x="731520" y="3657600"/>
-            <a:ext cx="10698480" cy="640080"/>
-          </a:xfrm>
-          <a:prstGeom prst="rect">
-            <a:avLst/>
-          </a:prstGeom>
-          <a:noFill/>
-        </p:spPr>
-        <p:txBody>
-          <a:bodyPr wrap="square">
-            <a:spAutoFit/>
-          </a:bodyPr>
-          <a:lstStyle/>
-          <a:p>
-            <a:pPr algn="ctr"/>
-            <a:r>
-              <a:rPr sz="1900" b="0" i="1">
-                <a:solidFill>
-                  <a:srgbClr val="2A9D8F"/>
-                </a:solidFill>
-                <a:latin typeface="Calibri"/>
-              </a:rPr>
-              <a:t>7 entities  ·  7 relationships  ·  16 tables  ·  all in BCNF</a:t>
-            </a:r>
-          </a:p>
-        </p:txBody>
-      </p:sp>
-      <p:sp>
-        <p:nvSpPr>
-          <p:cNvPr id="4" name="TextBox 3"/>
-          <p:cNvSpPr txBox="1"/>
-          <p:nvPr/>
-        </p:nvSpPr>
-        <p:spPr>
-          <a:xfrm>
-            <a:off x="731520" y="5120640"/>
-            <a:ext cx="10698480" cy="640080"/>
-          </a:xfrm>
-          <a:prstGeom prst="rect">
-            <a:avLst/>
-          </a:prstGeom>
-          <a:noFill/>
-        </p:spPr>
-        <p:txBody>
-          <a:bodyPr wrap="square">
-            <a:spAutoFit/>
-          </a:bodyPr>
-          <a:lstStyle/>
-          <a:p>
-            <a:pPr algn="ctr"/>
-            <a:r>
-              <a:rPr sz="1400" b="0" i="0">
-                <a:solidFill>
-                  <a:srgbClr val="CFE3DF"/>
-                </a:solidFill>
-                <a:latin typeface="Calibri"/>
-              </a:rPr>
-              <a:t>Safwaan Mohamed S (25BCE1188)   •   Avi Dhandhania (25BCE1207)   •   Priyal Bhalla (25BCE1261)</a:t>
-            </a:r>
-          </a:p>
-        </p:txBody>
-      </p:sp>
-    </p:spTree>
-  </p:cSld>
-  <p:clrMapOvr>
-    <a:masterClrMapping/>
-  </p:clrMapOvr>
-</p:sld>
-</file>
-
-<file path=ppt/slides/slide3.xml><?xml version="1.0" encoding="utf-8"?>
-<p:sld xmlns:a="http://schemas.openxmlformats.org/drawingml/2006/main" xmlns:p="http://schemas.openxmlformats.org/presentationml/2006/main" xmlns:r="http://schemas.openxmlformats.org/officeDocument/2006/relationships">
-  <p:cSld>
-    <p:bg>
-      <p:bgPr>
-        <a:solidFill>
-          <a:srgbClr val="FFFFFF"/>
-        </a:solidFill>
-        <a:effectLst/>
-      </p:bgPr>
-    </p:bg>
-    <p:spTree>
-      <p:nvGrpSpPr>
-        <p:cNvPr id="1" name=""/>
-        <p:cNvGrpSpPr/>
-        <p:nvPr/>
-      </p:nvGrpSpPr>
-      <p:grpSpPr/>
-      <p:sp>
-        <p:nvSpPr>
-          <p:cNvPr id="2" name="Rectangle 1"/>
+            <a:pPr algn="l"/>
+            <a:r>
+              <a:rPr sz="2600" b="1" i="0">
+                <a:solidFill>
+                  <a:srgbClr val="000000"/>
+                </a:solidFill>
+                <a:latin typeface="Calibri"/>
+              </a:rPr>
+              <a:t>1. What That Duplication Costs</a:t>
+            </a:r>
+          </a:p>
+        </p:txBody>
+      </p:sp>
+      <p:sp>
+        <p:nvSpPr>
+          <p:cNvPr id="3" name="Rectangle 2"/>
           <p:cNvSpPr/>
           <p:nvPr/>
         </p:nvSpPr>
         <p:spPr>
           <a:xfrm>
-            <a:off x="0" y="0"/>
-            <a:ext cx="12191695" cy="1051560"/>
+            <a:off x="457200" y="950976"/>
+            <a:ext cx="11338560" cy="18288"/>
           </a:xfrm>
           <a:prstGeom prst="rect">
             <a:avLst/>
           </a:prstGeom>
           <a:solidFill>
-            <a:srgbClr val="1F3A5F"/>
+            <a:srgbClr val="000000"/>
           </a:solidFill>
           <a:ln>
             <a:noFill/>
@@ -6217,84 +9677,14 @@
       </p:sp>
       <p:sp>
         <p:nvSpPr>
-          <p:cNvPr id="3" name="TextBox 2"/>
-          <p:cNvSpPr txBox="1"/>
-          <p:nvPr/>
-        </p:nvSpPr>
-        <p:spPr>
-          <a:xfrm>
-            <a:off x="457200" y="182880"/>
-            <a:ext cx="11338560" cy="731520"/>
-          </a:xfrm>
-          <a:prstGeom prst="rect">
-            <a:avLst/>
-          </a:prstGeom>
-          <a:noFill/>
-        </p:spPr>
-        <p:txBody>
-          <a:bodyPr wrap="square">
-            <a:spAutoFit/>
-          </a:bodyPr>
-          <a:lstStyle/>
-          <a:p>
-            <a:pPr algn="l"/>
-            <a:r>
-              <a:rPr sz="2700" b="1" i="0">
-                <a:solidFill>
-                  <a:srgbClr val="FFFFFF"/>
-                </a:solidFill>
-                <a:latin typeface="Calibri"/>
-              </a:rPr>
-              <a:t>1. The Problem</a:t>
-            </a:r>
-          </a:p>
-        </p:txBody>
-      </p:sp>
-      <p:sp>
-        <p:nvSpPr>
           <p:cNvPr id="4" name="TextBox 3"/>
           <p:cNvSpPr txBox="1"/>
           <p:nvPr/>
         </p:nvSpPr>
         <p:spPr>
           <a:xfrm>
-            <a:off x="457200" y="1106424"/>
-            <a:ext cx="11338560" cy="411480"/>
-          </a:xfrm>
-          <a:prstGeom prst="rect">
-            <a:avLst/>
-          </a:prstGeom>
-          <a:noFill/>
-        </p:spPr>
-        <p:txBody>
-          <a:bodyPr wrap="square">
-            <a:spAutoFit/>
-          </a:bodyPr>
-          <a:lstStyle/>
-          <a:p>
-            <a:pPr algn="l"/>
-            <a:r>
-              <a:rPr sz="1400" b="0" i="1">
-                <a:solidFill>
-                  <a:srgbClr val="2A9D8F"/>
-                </a:solidFill>
-                <a:latin typeface="Calibri"/>
-              </a:rPr>
-              <a:t>The trouble is not missing data — it is the same data stored more than once</a:t>
-            </a:r>
-          </a:p>
-        </p:txBody>
-      </p:sp>
-      <p:sp>
-        <p:nvSpPr>
-          <p:cNvPr id="5" name="TextBox 4"/>
-          <p:cNvSpPr txBox="1"/>
-          <p:nvPr/>
-        </p:nvSpPr>
-        <p:spPr>
-          <a:xfrm>
-            <a:off x="640080" y="1783080"/>
-            <a:ext cx="10972800" cy="4800600"/>
+            <a:off x="640080" y="1133856"/>
+            <a:ext cx="10972800" cy="5449824"/>
           </a:xfrm>
           <a:prstGeom prst="rect">
             <a:avLst/>
@@ -6315,11 +9705,11 @@
             <a:r>
               <a:rPr sz="1700">
                 <a:solidFill>
-                  <a:srgbClr val="222222"/>
-                </a:solidFill>
-                <a:latin typeface="Calibri"/>
-              </a:rPr>
-              <a:t>•  A warehouse must always know: what stock is where, who supplies it, and where each order has reached.</a:t>
+                  <a:srgbClr val="000000"/>
+                </a:solidFill>
+                <a:latin typeface="Calibri"/>
+              </a:rPr>
+              <a:t>•  Insert problem: a new customer cannot be recorded until they place an order.</a:t>
             </a:r>
           </a:p>
           <a:p>
@@ -6331,11 +9721,11 @@
             <a:r>
               <a:rPr sz="1700">
                 <a:solidFill>
-                  <a:srgbClr val="222222"/>
-                </a:solidFill>
-                <a:latin typeface="Calibri"/>
-              </a:rPr>
-              <a:t>•  In practice those three answers live in three separate places, and nothing keeps them in agreement.</a:t>
+                  <a:srgbClr val="000000"/>
+                </a:solidFill>
+                <a:latin typeface="Calibri"/>
+              </a:rPr>
+              <a:t>•  Delete problem: deleting a customer's last order erases the customer.</a:t>
             </a:r>
           </a:p>
           <a:p>
@@ -6347,11 +9737,11 @@
             <a:r>
               <a:rPr sz="1700">
                 <a:solidFill>
-                  <a:srgbClr val="222222"/>
-                </a:solidFill>
-                <a:latin typeface="Calibri"/>
-              </a:rPr>
-              <a:t>•  So the same fact gets stored twice — a customer's address on every order, a product's name on every order line.</a:t>
+                  <a:srgbClr val="000000"/>
+                </a:solidFill>
+                <a:latin typeface="Calibri"/>
+              </a:rPr>
+              <a:t>•  Update problem: renaming a product means editing many rows, and missing one leaves two answers.</a:t>
             </a:r>
           </a:p>
           <a:p>
@@ -6363,11 +9753,27 @@
             <a:r>
               <a:rPr sz="1700">
                 <a:solidFill>
-                  <a:srgbClr val="222222"/>
-                </a:solidFill>
-                <a:latin typeface="Calibri"/>
-              </a:rPr>
-              <a:t>•  Correct one copy, miss another, and the data contradicts itself.</a:t>
+                  <a:srgbClr val="000000"/>
+                </a:solidFill>
+                <a:latin typeface="Calibri"/>
+              </a:rPr>
+              <a:t>•  Unreliable stock: the quantity on hand is kept in more than one place.</a:t>
+            </a:r>
+          </a:p>
+          <a:p>
+            <a:pPr>
+              <a:spcAft>
+                <a:spcPts val="900"/>
+              </a:spcAft>
+            </a:pPr>
+            <a:r>
+              <a:rPr sz="1700">
+                <a:solidFill>
+                  <a:srgbClr val="000000"/>
+                </a:solidFill>
+                <a:latin typeface="Calibri"/>
+              </a:rPr>
+              <a:t>•  These are the insert, delete and update anomalies. Normalization removes them.</a:t>
             </a:r>
           </a:p>
         </p:txBody>
@@ -6380,17 +9786,9 @@
 </p:sld>
 </file>
 
-<file path=ppt/slides/slide4.xml><?xml version="1.0" encoding="utf-8"?>
+<file path=ppt/slides/slide5.xml><?xml version="1.0" encoding="utf-8"?>
 <p:sld xmlns:a="http://schemas.openxmlformats.org/drawingml/2006/main" xmlns:p="http://schemas.openxmlformats.org/presentationml/2006/main" xmlns:r="http://schemas.openxmlformats.org/officeDocument/2006/relationships">
   <p:cSld>
-    <p:bg>
-      <p:bgPr>
-        <a:solidFill>
-          <a:srgbClr val="FFFFFF"/>
-        </a:solidFill>
-        <a:effectLst/>
-      </p:bgPr>
-    </p:bg>
     <p:spTree>
       <p:nvGrpSpPr>
         <p:cNvPr id="1" name=""/>
@@ -6400,20 +9798,55 @@
       <p:grpSpPr/>
       <p:sp>
         <p:nvSpPr>
-          <p:cNvPr id="2" name="Rectangle 1"/>
+          <p:cNvPr id="2" name="TextBox 1"/>
+          <p:cNvSpPr txBox="1"/>
+          <p:nvPr/>
+        </p:nvSpPr>
+        <p:spPr>
+          <a:xfrm>
+            <a:off x="457200" y="292608"/>
+            <a:ext cx="11338560" cy="566928"/>
+          </a:xfrm>
+          <a:prstGeom prst="rect">
+            <a:avLst/>
+          </a:prstGeom>
+          <a:noFill/>
+        </p:spPr>
+        <p:txBody>
+          <a:bodyPr wrap="square">
+            <a:spAutoFit/>
+          </a:bodyPr>
+          <a:lstStyle/>
+          <a:p>
+            <a:pPr algn="l"/>
+            <a:r>
+              <a:rPr sz="2600" b="1" i="0">
+                <a:solidFill>
+                  <a:srgbClr val="000000"/>
+                </a:solidFill>
+                <a:latin typeface="Calibri"/>
+              </a:rPr>
+              <a:t>1. Objectives and Scope</a:t>
+            </a:r>
+          </a:p>
+        </p:txBody>
+      </p:sp>
+      <p:sp>
+        <p:nvSpPr>
+          <p:cNvPr id="3" name="Rectangle 2"/>
           <p:cNvSpPr/>
           <p:nvPr/>
         </p:nvSpPr>
         <p:spPr>
           <a:xfrm>
-            <a:off x="0" y="0"/>
-            <a:ext cx="12191695" cy="1051560"/>
+            <a:off x="457200" y="950976"/>
+            <a:ext cx="11338560" cy="18288"/>
           </a:xfrm>
           <a:prstGeom prst="rect">
             <a:avLst/>
           </a:prstGeom>
           <a:solidFill>
-            <a:srgbClr val="1F3A5F"/>
+            <a:srgbClr val="000000"/>
           </a:solidFill>
           <a:ln>
             <a:noFill/>
@@ -6444,49 +9877,14 @@
       </p:sp>
       <p:sp>
         <p:nvSpPr>
-          <p:cNvPr id="3" name="TextBox 2"/>
-          <p:cNvSpPr txBox="1"/>
-          <p:nvPr/>
-        </p:nvSpPr>
-        <p:spPr>
-          <a:xfrm>
-            <a:off x="457200" y="182880"/>
-            <a:ext cx="11338560" cy="731520"/>
-          </a:xfrm>
-          <a:prstGeom prst="rect">
-            <a:avLst/>
-          </a:prstGeom>
-          <a:noFill/>
-        </p:spPr>
-        <p:txBody>
-          <a:bodyPr wrap="square">
-            <a:spAutoFit/>
-          </a:bodyPr>
-          <a:lstStyle/>
-          <a:p>
-            <a:pPr algn="l"/>
-            <a:r>
-              <a:rPr sz="2700" b="1" i="0">
-                <a:solidFill>
-                  <a:srgbClr val="FFFFFF"/>
-                </a:solidFill>
-                <a:latin typeface="Calibri"/>
-              </a:rPr>
-              <a:t>1. What That Duplication Costs</a:t>
-            </a:r>
-          </a:p>
-        </p:txBody>
-      </p:sp>
-      <p:sp>
-        <p:nvSpPr>
           <p:cNvPr id="4" name="TextBox 3"/>
           <p:cNvSpPr txBox="1"/>
           <p:nvPr/>
         </p:nvSpPr>
         <p:spPr>
           <a:xfrm>
-            <a:off x="640080" y="1325880"/>
-            <a:ext cx="10972800" cy="5257800"/>
+            <a:off x="640080" y="1133856"/>
+            <a:ext cx="10972800" cy="5449824"/>
           </a:xfrm>
           <a:prstGeom prst="rect">
             <a:avLst/>
@@ -6507,11 +9905,11 @@
             <a:r>
               <a:rPr sz="1700">
                 <a:solidFill>
-                  <a:srgbClr val="222222"/>
-                </a:solidFill>
-                <a:latin typeface="Calibri"/>
-              </a:rPr>
-              <a:t>•  Insert problem — a new customer cannot be recorded until they place an order.</a:t>
+                  <a:srgbClr val="000000"/>
+                </a:solidFill>
+                <a:latin typeface="Calibri"/>
+              </a:rPr>
+              <a:t>•  Identify the entities, attributes and relationships.</a:t>
             </a:r>
           </a:p>
           <a:p>
@@ -6523,11 +9921,11 @@
             <a:r>
               <a:rPr sz="1700">
                 <a:solidFill>
-                  <a:srgbClr val="222222"/>
-                </a:solidFill>
-                <a:latin typeface="Calibri"/>
-              </a:rPr>
-              <a:t>•  Delete problem — deleting a customer's last order erases the customer.</a:t>
+                  <a:srgbClr val="000000"/>
+                </a:solidFill>
+                <a:latin typeface="Calibri"/>
+              </a:rPr>
+              <a:t>•  Draw the ER model, then extend the same model into an EER model.</a:t>
             </a:r>
           </a:p>
           <a:p>
@@ -6539,11 +9937,11 @@
             <a:r>
               <a:rPr sz="1700">
                 <a:solidFill>
-                  <a:srgbClr val="222222"/>
-                </a:solidFill>
-                <a:latin typeface="Calibri"/>
-              </a:rPr>
-              <a:t>•  Update problem — renaming a product means editing many rows; miss one and the two disagree.</a:t>
+                  <a:srgbClr val="000000"/>
+                </a:solidFill>
+                <a:latin typeface="Calibri"/>
+              </a:rPr>
+              <a:t>•  Convert the model into relational tables.</a:t>
             </a:r>
           </a:p>
           <a:p>
@@ -6555,11 +9953,11 @@
             <a:r>
               <a:rPr sz="1700">
                 <a:solidFill>
-                  <a:srgbClr val="222222"/>
-                </a:solidFill>
-                <a:latin typeface="Calibri"/>
-              </a:rPr>
-              <a:t>•  Unreliable stock — the quantity on hand is kept in more than one place.</a:t>
+                  <a:srgbClr val="000000"/>
+                </a:solidFill>
+                <a:latin typeface="Calibri"/>
+              </a:rPr>
+              <a:t>•  Work out the functional dependencies from sample rows.</a:t>
             </a:r>
           </a:p>
           <a:p>
@@ -6571,11 +9969,43 @@
             <a:r>
               <a:rPr sz="1700">
                 <a:solidFill>
-                  <a:srgbClr val="222222"/>
-                </a:solidFill>
-                <a:latin typeface="Calibri"/>
-              </a:rPr>
-              <a:t>•  These are the insert, delete and update anomalies. Normalization removes them.</a:t>
+                  <a:srgbClr val="000000"/>
+                </a:solidFill>
+                <a:latin typeface="Calibri"/>
+              </a:rPr>
+              <a:t>•  Normalize every table from UNF up to BCNF, showing each step.</a:t>
+            </a:r>
+          </a:p>
+          <a:p>
+            <a:pPr>
+              <a:spcAft>
+                <a:spcPts val="900"/>
+              </a:spcAft>
+            </a:pPr>
+            <a:r>
+              <a:rPr sz="1700">
+                <a:solidFill>
+                  <a:srgbClr val="000000"/>
+                </a:solidFill>
+                <a:latin typeface="Calibri"/>
+              </a:rPr>
+              <a:t>•  In scope: 7 entities, namely warehouse, product, supplier, customer, orders, shipment and employee.</a:t>
+            </a:r>
+          </a:p>
+          <a:p>
+            <a:pPr>
+              <a:spcAft>
+                <a:spcPts val="900"/>
+              </a:spcAft>
+            </a:pPr>
+            <a:r>
+              <a:rPr sz="1700">
+                <a:solidFill>
+                  <a:srgbClr val="000000"/>
+                </a:solidFill>
+                <a:latin typeface="Calibri"/>
+              </a:rPr>
+              <a:t>•  Out of scope: SQL and PL/SQL (DA2), and a modern database (DA3).</a:t>
             </a:r>
           </a:p>
         </p:txBody>
@@ -6588,17 +10018,9 @@
 </p:sld>
 </file>
 
-<file path=ppt/slides/slide5.xml><?xml version="1.0" encoding="utf-8"?>
+<file path=ppt/slides/slide6.xml><?xml version="1.0" encoding="utf-8"?>
 <p:sld xmlns:a="http://schemas.openxmlformats.org/drawingml/2006/main" xmlns:p="http://schemas.openxmlformats.org/presentationml/2006/main" xmlns:r="http://schemas.openxmlformats.org/officeDocument/2006/relationships">
   <p:cSld>
-    <p:bg>
-      <p:bgPr>
-        <a:solidFill>
-          <a:srgbClr val="FFFFFF"/>
-        </a:solidFill>
-        <a:effectLst/>
-      </p:bgPr>
-    </p:bg>
     <p:spTree>
       <p:nvGrpSpPr>
         <p:cNvPr id="1" name=""/>
@@ -6608,20 +10030,55 @@
       <p:grpSpPr/>
       <p:sp>
         <p:nvSpPr>
-          <p:cNvPr id="2" name="Rectangle 1"/>
+          <p:cNvPr id="2" name="TextBox 1"/>
+          <p:cNvSpPr txBox="1"/>
+          <p:nvPr/>
+        </p:nvSpPr>
+        <p:spPr>
+          <a:xfrm>
+            <a:off x="457200" y="292608"/>
+            <a:ext cx="11338560" cy="566928"/>
+          </a:xfrm>
+          <a:prstGeom prst="rect">
+            <a:avLst/>
+          </a:prstGeom>
+          <a:noFill/>
+        </p:spPr>
+        <p:txBody>
+          <a:bodyPr wrap="square">
+            <a:spAutoFit/>
+          </a:bodyPr>
+          <a:lstStyle/>
+          <a:p>
+            <a:pPr algn="l"/>
+            <a:r>
+              <a:rPr sz="2600" b="1" i="0">
+                <a:solidFill>
+                  <a:srgbClr val="000000"/>
+                </a:solidFill>
+                <a:latin typeface="Calibri"/>
+              </a:rPr>
+              <a:t>2. The Seven Entities</a:t>
+            </a:r>
+          </a:p>
+        </p:txBody>
+      </p:sp>
+      <p:sp>
+        <p:nvSpPr>
+          <p:cNvPr id="3" name="Rectangle 2"/>
           <p:cNvSpPr/>
           <p:nvPr/>
         </p:nvSpPr>
         <p:spPr>
           <a:xfrm>
-            <a:off x="0" y="0"/>
-            <a:ext cx="12191695" cy="1051560"/>
+            <a:off x="457200" y="950976"/>
+            <a:ext cx="11338560" cy="18288"/>
           </a:xfrm>
           <a:prstGeom prst="rect">
             <a:avLst/>
           </a:prstGeom>
           <a:solidFill>
-            <a:srgbClr val="1F3A5F"/>
+            <a:srgbClr val="000000"/>
           </a:solidFill>
           <a:ln>
             <a:noFill/>
@@ -6652,14 +10109,14 @@
       </p:sp>
       <p:sp>
         <p:nvSpPr>
-          <p:cNvPr id="3" name="TextBox 2"/>
+          <p:cNvPr id="4" name="TextBox 3"/>
           <p:cNvSpPr txBox="1"/>
           <p:nvPr/>
         </p:nvSpPr>
         <p:spPr>
           <a:xfrm>
-            <a:off x="457200" y="182880"/>
-            <a:ext cx="11338560" cy="731520"/>
+            <a:off x="457200" y="1024128"/>
+            <a:ext cx="11338560" cy="384048"/>
           </a:xfrm>
           <a:prstGeom prst="rect">
             <a:avLst/>
@@ -6674,268 +10131,9 @@
           <a:p>
             <a:pPr algn="l"/>
             <a:r>
-              <a:rPr sz="2700" b="1" i="0">
-                <a:solidFill>
-                  <a:srgbClr val="FFFFFF"/>
-                </a:solidFill>
-                <a:latin typeface="Calibri"/>
-              </a:rPr>
-              <a:t>1. Objectives and Scope</a:t>
-            </a:r>
-          </a:p>
-        </p:txBody>
-      </p:sp>
-      <p:sp>
-        <p:nvSpPr>
-          <p:cNvPr id="4" name="TextBox 3"/>
-          <p:cNvSpPr txBox="1"/>
-          <p:nvPr/>
-        </p:nvSpPr>
-        <p:spPr>
-          <a:xfrm>
-            <a:off x="640080" y="1325880"/>
-            <a:ext cx="10972800" cy="5257800"/>
-          </a:xfrm>
-          <a:prstGeom prst="rect">
-            <a:avLst/>
-          </a:prstGeom>
-          <a:noFill/>
-        </p:spPr>
-        <p:txBody>
-          <a:bodyPr wrap="square">
-            <a:spAutoFit/>
-          </a:bodyPr>
-          <a:lstStyle/>
-          <a:p>
-            <a:pPr>
-              <a:spcAft>
-                <a:spcPts val="900"/>
-              </a:spcAft>
-            </a:pPr>
-            <a:r>
-              <a:rPr sz="1700">
-                <a:solidFill>
-                  <a:srgbClr val="222222"/>
-                </a:solidFill>
-                <a:latin typeface="Calibri"/>
-              </a:rPr>
-              <a:t>•  Identify the entities, attributes and relationships.</a:t>
-            </a:r>
-          </a:p>
-          <a:p>
-            <a:pPr>
-              <a:spcAft>
-                <a:spcPts val="900"/>
-              </a:spcAft>
-            </a:pPr>
-            <a:r>
-              <a:rPr sz="1700">
-                <a:solidFill>
-                  <a:srgbClr val="222222"/>
-                </a:solidFill>
-                <a:latin typeface="Calibri"/>
-              </a:rPr>
-              <a:t>•  Draw the ER model, then extend the same model into an EER model.</a:t>
-            </a:r>
-          </a:p>
-          <a:p>
-            <a:pPr>
-              <a:spcAft>
-                <a:spcPts val="900"/>
-              </a:spcAft>
-            </a:pPr>
-            <a:r>
-              <a:rPr sz="1700">
-                <a:solidFill>
-                  <a:srgbClr val="222222"/>
-                </a:solidFill>
-                <a:latin typeface="Calibri"/>
-              </a:rPr>
-              <a:t>•  Convert the model into relational tables.</a:t>
-            </a:r>
-          </a:p>
-          <a:p>
-            <a:pPr>
-              <a:spcAft>
-                <a:spcPts val="900"/>
-              </a:spcAft>
-            </a:pPr>
-            <a:r>
-              <a:rPr sz="1700">
-                <a:solidFill>
-                  <a:srgbClr val="222222"/>
-                </a:solidFill>
-                <a:latin typeface="Calibri"/>
-              </a:rPr>
-              <a:t>•  Normalize every table from UNF up to BCNF, showing each step.</a:t>
-            </a:r>
-          </a:p>
-          <a:p>
-            <a:pPr>
-              <a:spcAft>
-                <a:spcPts val="900"/>
-              </a:spcAft>
-            </a:pPr>
-            <a:r>
-              <a:rPr sz="1700">
-                <a:solidFill>
-                  <a:srgbClr val="222222"/>
-                </a:solidFill>
-                <a:latin typeface="Calibri"/>
-              </a:rPr>
-              <a:t>•  In scope: 7 entities — warehouse, product, supplier, customer, orders, shipment, employee.</a:t>
-            </a:r>
-          </a:p>
-          <a:p>
-            <a:pPr>
-              <a:spcAft>
-                <a:spcPts val="900"/>
-              </a:spcAft>
-            </a:pPr>
-            <a:r>
-              <a:rPr sz="1700">
-                <a:solidFill>
-                  <a:srgbClr val="222222"/>
-                </a:solidFill>
-                <a:latin typeface="Calibri"/>
-              </a:rPr>
-              <a:t>•  Out of scope: SQL and PL/SQL (DA2), and a modern database (DA3).</a:t>
-            </a:r>
-          </a:p>
-        </p:txBody>
-      </p:sp>
-    </p:spTree>
-  </p:cSld>
-  <p:clrMapOvr>
-    <a:masterClrMapping/>
-  </p:clrMapOvr>
-</p:sld>
-</file>
-
-<file path=ppt/slides/slide6.xml><?xml version="1.0" encoding="utf-8"?>
-<p:sld xmlns:a="http://schemas.openxmlformats.org/drawingml/2006/main" xmlns:p="http://schemas.openxmlformats.org/presentationml/2006/main" xmlns:r="http://schemas.openxmlformats.org/officeDocument/2006/relationships">
-  <p:cSld>
-    <p:bg>
-      <p:bgPr>
-        <a:solidFill>
-          <a:srgbClr val="FFFFFF"/>
-        </a:solidFill>
-        <a:effectLst/>
-      </p:bgPr>
-    </p:bg>
-    <p:spTree>
-      <p:nvGrpSpPr>
-        <p:cNvPr id="1" name=""/>
-        <p:cNvGrpSpPr/>
-        <p:nvPr/>
-      </p:nvGrpSpPr>
-      <p:grpSpPr/>
-      <p:sp>
-        <p:nvSpPr>
-          <p:cNvPr id="2" name="Rectangle 1"/>
-          <p:cNvSpPr/>
-          <p:nvPr/>
-        </p:nvSpPr>
-        <p:spPr>
-          <a:xfrm>
-            <a:off x="0" y="0"/>
-            <a:ext cx="12191695" cy="1051560"/>
-          </a:xfrm>
-          <a:prstGeom prst="rect">
-            <a:avLst/>
-          </a:prstGeom>
-          <a:solidFill>
-            <a:srgbClr val="1F3A5F"/>
-          </a:solidFill>
-          <a:ln>
-            <a:noFill/>
-          </a:ln>
-          <a:effectLst/>
-        </p:spPr>
-        <p:style>
-          <a:lnRef idx="1">
-            <a:schemeClr val="accent1"/>
-          </a:lnRef>
-          <a:fillRef idx="3">
-            <a:schemeClr val="accent1"/>
-          </a:fillRef>
-          <a:effectRef idx="2">
-            <a:schemeClr val="accent1"/>
-          </a:effectRef>
-          <a:fontRef idx="minor">
-            <a:schemeClr val="lt1"/>
-          </a:fontRef>
-        </p:style>
-        <p:txBody>
-          <a:bodyPr rtlCol="0" anchor="ctr"/>
-          <a:lstStyle/>
-          <a:p>
-            <a:pPr algn="ctr"/>
-          </a:p>
-        </p:txBody>
-      </p:sp>
-      <p:sp>
-        <p:nvSpPr>
-          <p:cNvPr id="3" name="TextBox 2"/>
-          <p:cNvSpPr txBox="1"/>
-          <p:nvPr/>
-        </p:nvSpPr>
-        <p:spPr>
-          <a:xfrm>
-            <a:off x="457200" y="182880"/>
-            <a:ext cx="11338560" cy="731520"/>
-          </a:xfrm>
-          <a:prstGeom prst="rect">
-            <a:avLst/>
-          </a:prstGeom>
-          <a:noFill/>
-        </p:spPr>
-        <p:txBody>
-          <a:bodyPr wrap="square">
-            <a:spAutoFit/>
-          </a:bodyPr>
-          <a:lstStyle/>
-          <a:p>
-            <a:pPr algn="l"/>
-            <a:r>
-              <a:rPr sz="2700" b="1" i="0">
-                <a:solidFill>
-                  <a:srgbClr val="FFFFFF"/>
-                </a:solidFill>
-                <a:latin typeface="Calibri"/>
-              </a:rPr>
-              <a:t>2. The Seven Entities</a:t>
-            </a:r>
-          </a:p>
-        </p:txBody>
-      </p:sp>
-      <p:sp>
-        <p:nvSpPr>
-          <p:cNvPr id="4" name="TextBox 3"/>
-          <p:cNvSpPr txBox="1"/>
-          <p:nvPr/>
-        </p:nvSpPr>
-        <p:spPr>
-          <a:xfrm>
-            <a:off x="457200" y="1106424"/>
-            <a:ext cx="11338560" cy="411480"/>
-          </a:xfrm>
-          <a:prstGeom prst="rect">
-            <a:avLst/>
-          </a:prstGeom>
-          <a:noFill/>
-        </p:spPr>
-        <p:txBody>
-          <a:bodyPr wrap="square">
-            <a:spAutoFit/>
-          </a:bodyPr>
-          <a:lstStyle/>
-          <a:p>
-            <a:pPr algn="l"/>
-            <a:r>
-              <a:rPr sz="1400" b="0" i="1">
-                <a:solidFill>
-                  <a:srgbClr val="2A9D8F"/>
+              <a:rPr sz="1350" b="0" i="1">
+                <a:solidFill>
+                  <a:srgbClr val="444444"/>
                 </a:solidFill>
                 <a:latin typeface="Calibri"/>
               </a:rPr>
@@ -6953,8 +10151,8 @@
           <p:nvPr/>
         </p:nvGraphicFramePr>
         <p:xfrm>
-          <a:off x="838047" y="2546603"/>
-          <a:ext cx="10515600" cy="3364992"/>
+          <a:off x="838047" y="2464308"/>
+          <a:ext cx="10515600" cy="3218688"/>
         </p:xfrm>
         <a:graphic>
           <a:graphicData uri="http://schemas.openxmlformats.org/drawingml/2006/table">
@@ -6967,7 +10165,7 @@
                 <a:gridCol w="2286000"/>
                 <a:gridCol w="6035040"/>
               </a:tblGrid>
-              <a:tr h="420624">
+              <a:tr h="402336">
                 <a:tc>
                   <a:txBody>
                     <a:bodyPr/>
@@ -6976,7 +10174,7 @@
                       <a:r>
                         <a:rPr sz="1300" b="1">
                           <a:solidFill>
-                            <a:srgbClr val="FFFFFF"/>
+                            <a:srgbClr val="000000"/>
                           </a:solidFill>
                         </a:rPr>
                         <a:t>Entity</a:t>
@@ -6985,7 +10183,7 @@
                   </a:txBody>
                   <a:tcPr anchor="ctr">
                     <a:solidFill>
-                      <a:srgbClr val="1F3A5F"/>
+                      <a:srgbClr val="D9D9D9"/>
                     </a:solidFill>
                   </a:tcPr>
                 </a:tc>
@@ -6997,7 +10195,7 @@
                       <a:r>
                         <a:rPr sz="1300" b="1">
                           <a:solidFill>
-                            <a:srgbClr val="FFFFFF"/>
+                            <a:srgbClr val="000000"/>
                           </a:solidFill>
                         </a:rPr>
                         <a:t>Key attribute</a:t>
@@ -7006,7 +10204,7 @@
                   </a:txBody>
                   <a:tcPr anchor="ctr">
                     <a:solidFill>
-                      <a:srgbClr val="1F3A5F"/>
+                      <a:srgbClr val="D9D9D9"/>
                     </a:solidFill>
                   </a:tcPr>
                 </a:tc>
@@ -7018,7 +10216,7 @@
                       <a:r>
                         <a:rPr sz="1300" b="1">
                           <a:solidFill>
-                            <a:srgbClr val="FFFFFF"/>
+                            <a:srgbClr val="000000"/>
                           </a:solidFill>
                         </a:rPr>
                         <a:t>Other attributes</a:t>
@@ -7027,12 +10225,12 @@
                   </a:txBody>
                   <a:tcPr anchor="ctr">
                     <a:solidFill>
-                      <a:srgbClr val="1F3A5F"/>
+                      <a:srgbClr val="D9D9D9"/>
                     </a:solidFill>
                   </a:tcPr>
                 </a:tc>
               </a:tr>
-              <a:tr h="420624">
+              <a:tr h="402336">
                 <a:tc>
                   <a:txBody>
                     <a:bodyPr/>
@@ -7041,7 +10239,7 @@
                       <a:r>
                         <a:rPr sz="1200">
                           <a:solidFill>
-                            <a:srgbClr val="222222"/>
+                            <a:srgbClr val="000000"/>
                           </a:solidFill>
                         </a:rPr>
                         <a:t>WAREHOUSE</a:t>
@@ -7050,7 +10248,7 @@
                   </a:txBody>
                   <a:tcPr anchor="ctr">
                     <a:solidFill>
-                      <a:srgbClr val="F2F6FB"/>
+                      <a:srgbClr val="F4F4F4"/>
                     </a:solidFill>
                   </a:tcPr>
                 </a:tc>
@@ -7062,7 +10260,7 @@
                       <a:r>
                         <a:rPr sz="1200">
                           <a:solidFill>
-                            <a:srgbClr val="222222"/>
+                            <a:srgbClr val="000000"/>
                           </a:solidFill>
                         </a:rPr>
                         <a:t>WarehouseID</a:t>
@@ -7071,7 +10269,7 @@
                   </a:txBody>
                   <a:tcPr anchor="ctr">
                     <a:solidFill>
-                      <a:srgbClr val="F2F6FB"/>
+                      <a:srgbClr val="F4F4F4"/>
                     </a:solidFill>
                   </a:tcPr>
                 </a:tc>
@@ -7083,7 +10281,7 @@
                       <a:r>
                         <a:rPr sz="1200">
                           <a:solidFill>
-                            <a:srgbClr val="222222"/>
+                            <a:srgbClr val="000000"/>
                           </a:solidFill>
                         </a:rPr>
                         <a:t>WName, City, Capacity</a:t>
@@ -7092,12 +10290,12 @@
                   </a:txBody>
                   <a:tcPr anchor="ctr">
                     <a:solidFill>
-                      <a:srgbClr val="F2F6FB"/>
+                      <a:srgbClr val="F4F4F4"/>
                     </a:solidFill>
                   </a:tcPr>
                 </a:tc>
               </a:tr>
-              <a:tr h="420624">
+              <a:tr h="402336">
                 <a:tc>
                   <a:txBody>
                     <a:bodyPr/>
@@ -7106,7 +10304,7 @@
                       <a:r>
                         <a:rPr sz="1200">
                           <a:solidFill>
-                            <a:srgbClr val="222222"/>
+                            <a:srgbClr val="000000"/>
                           </a:solidFill>
                         </a:rPr>
                         <a:t>PRODUCT</a:t>
@@ -7127,7 +10325,7 @@
                       <a:r>
                         <a:rPr sz="1200">
                           <a:solidFill>
-                            <a:srgbClr val="222222"/>
+                            <a:srgbClr val="000000"/>
                           </a:solidFill>
                         </a:rPr>
                         <a:t>ProductID</a:t>
@@ -7148,7 +10346,7 @@
                       <a:r>
                         <a:rPr sz="1200">
                           <a:solidFill>
-                            <a:srgbClr val="222222"/>
+                            <a:srgbClr val="000000"/>
                           </a:solidFill>
                         </a:rPr>
                         <a:t>PName, Category, UnitPrice</a:t>
@@ -7162,7 +10360,7 @@
                   </a:tcPr>
                 </a:tc>
               </a:tr>
-              <a:tr h="420624">
+              <a:tr h="402336">
                 <a:tc>
                   <a:txBody>
                     <a:bodyPr/>
@@ -7171,7 +10369,7 @@
                       <a:r>
                         <a:rPr sz="1200">
                           <a:solidFill>
-                            <a:srgbClr val="222222"/>
+                            <a:srgbClr val="000000"/>
                           </a:solidFill>
                         </a:rPr>
                         <a:t>SUPPLIER</a:t>
@@ -7180,7 +10378,7 @@
                   </a:txBody>
                   <a:tcPr anchor="ctr">
                     <a:solidFill>
-                      <a:srgbClr val="F2F6FB"/>
+                      <a:srgbClr val="F4F4F4"/>
                     </a:solidFill>
                   </a:tcPr>
                 </a:tc>
@@ -7192,7 +10390,7 @@
                       <a:r>
                         <a:rPr sz="1200">
                           <a:solidFill>
-                            <a:srgbClr val="222222"/>
+                            <a:srgbClr val="000000"/>
                           </a:solidFill>
                         </a:rPr>
                         <a:t>SupplierID</a:t>
@@ -7201,7 +10399,7 @@
                   </a:txBody>
                   <a:tcPr anchor="ctr">
                     <a:solidFill>
-                      <a:srgbClr val="F2F6FB"/>
+                      <a:srgbClr val="F4F4F4"/>
                     </a:solidFill>
                   </a:tcPr>
                 </a:tc>
@@ -7213,7 +10411,7 @@
                       <a:r>
                         <a:rPr sz="1200">
                           <a:solidFill>
-                            <a:srgbClr val="222222"/>
+                            <a:srgbClr val="000000"/>
                           </a:solidFill>
                         </a:rPr>
                         <a:t>SName, City, Phone (many per supplier)</a:t>
@@ -7222,12 +10420,12 @@
                   </a:txBody>
                   <a:tcPr anchor="ctr">
                     <a:solidFill>
-                      <a:srgbClr val="F2F6FB"/>
+                      <a:srgbClr val="F4F4F4"/>
                     </a:solidFill>
                   </a:tcPr>
                 </a:tc>
               </a:tr>
-              <a:tr h="420624">
+              <a:tr h="402336">
                 <a:tc>
                   <a:txBody>
                     <a:bodyPr/>
@@ -7236,7 +10434,7 @@
                       <a:r>
                         <a:rPr sz="1200">
                           <a:solidFill>
-                            <a:srgbClr val="222222"/>
+                            <a:srgbClr val="000000"/>
                           </a:solidFill>
                         </a:rPr>
                         <a:t>CUSTOMER</a:t>
@@ -7257,7 +10455,7 @@
                       <a:r>
                         <a:rPr sz="1200">
                           <a:solidFill>
-                            <a:srgbClr val="222222"/>
+                            <a:srgbClr val="000000"/>
                           </a:solidFill>
                         </a:rPr>
                         <a:t>CustomerID</a:t>
@@ -7278,7 +10476,7 @@
                       <a:r>
                         <a:rPr sz="1200">
                           <a:solidFill>
-                            <a:srgbClr val="222222"/>
+                            <a:srgbClr val="000000"/>
                           </a:solidFill>
                         </a:rPr>
                         <a:t>CName, Address (Street + City + Pincode), Phone</a:t>
@@ -7292,7 +10490,7 @@
                   </a:tcPr>
                 </a:tc>
               </a:tr>
-              <a:tr h="420624">
+              <a:tr h="402336">
                 <a:tc>
                   <a:txBody>
                     <a:bodyPr/>
@@ -7301,7 +10499,7 @@
                       <a:r>
                         <a:rPr sz="1200">
                           <a:solidFill>
-                            <a:srgbClr val="222222"/>
+                            <a:srgbClr val="000000"/>
                           </a:solidFill>
                         </a:rPr>
                         <a:t>ORDERS</a:t>
@@ -7310,7 +10508,7 @@
                   </a:txBody>
                   <a:tcPr anchor="ctr">
                     <a:solidFill>
-                      <a:srgbClr val="F2F6FB"/>
+                      <a:srgbClr val="F4F4F4"/>
                     </a:solidFill>
                   </a:tcPr>
                 </a:tc>
@@ -7322,7 +10520,7 @@
                       <a:r>
                         <a:rPr sz="1200">
                           <a:solidFill>
-                            <a:srgbClr val="222222"/>
+                            <a:srgbClr val="000000"/>
                           </a:solidFill>
                         </a:rPr>
                         <a:t>OrderID</a:t>
@@ -7331,7 +10529,7 @@
                   </a:txBody>
                   <a:tcPr anchor="ctr">
                     <a:solidFill>
-                      <a:srgbClr val="F2F6FB"/>
+                      <a:srgbClr val="F4F4F4"/>
                     </a:solidFill>
                   </a:tcPr>
                 </a:tc>
@@ -7343,7 +10541,7 @@
                       <a:r>
                         <a:rPr sz="1200">
                           <a:solidFill>
-                            <a:srgbClr val="222222"/>
+                            <a:srgbClr val="000000"/>
                           </a:solidFill>
                         </a:rPr>
                         <a:t>OrderDate, Status, TotalAmt (calculated)</a:t>
@@ -7352,12 +10550,12 @@
                   </a:txBody>
                   <a:tcPr anchor="ctr">
                     <a:solidFill>
-                      <a:srgbClr val="F2F6FB"/>
+                      <a:srgbClr val="F4F4F4"/>
                     </a:solidFill>
                   </a:tcPr>
                 </a:tc>
               </a:tr>
-              <a:tr h="420624">
+              <a:tr h="402336">
                 <a:tc>
                   <a:txBody>
                     <a:bodyPr/>
@@ -7366,7 +10564,7 @@
                       <a:r>
                         <a:rPr sz="1200">
                           <a:solidFill>
-                            <a:srgbClr val="222222"/>
+                            <a:srgbClr val="000000"/>
                           </a:solidFill>
                         </a:rPr>
                         <a:t>SHIPMENT</a:t>
@@ -7387,7 +10585,7 @@
                       <a:r>
                         <a:rPr sz="1200">
                           <a:solidFill>
-                            <a:srgbClr val="222222"/>
+                            <a:srgbClr val="000000"/>
                           </a:solidFill>
                         </a:rPr>
                         <a:t>ShipmentID</a:t>
@@ -7408,7 +10606,7 @@
                       <a:r>
                         <a:rPr sz="1200">
                           <a:solidFill>
-                            <a:srgbClr val="222222"/>
+                            <a:srgbClr val="000000"/>
                           </a:solidFill>
                         </a:rPr>
                         <a:t>DispatchDate, DeliveryDate, Status</a:t>
@@ -7422,7 +10620,7 @@
                   </a:tcPr>
                 </a:tc>
               </a:tr>
-              <a:tr h="420624">
+              <a:tr h="402336">
                 <a:tc>
                   <a:txBody>
                     <a:bodyPr/>
@@ -7431,7 +10629,7 @@
                       <a:r>
                         <a:rPr sz="1200">
                           <a:solidFill>
-                            <a:srgbClr val="222222"/>
+                            <a:srgbClr val="000000"/>
                           </a:solidFill>
                         </a:rPr>
                         <a:t>EMPLOYEE</a:t>
@@ -7440,7 +10638,7 @@
                   </a:txBody>
                   <a:tcPr anchor="ctr">
                     <a:solidFill>
-                      <a:srgbClr val="F2F6FB"/>
+                      <a:srgbClr val="F4F4F4"/>
                     </a:solidFill>
                   </a:tcPr>
                 </a:tc>
@@ -7452,7 +10650,7 @@
                       <a:r>
                         <a:rPr sz="1200">
                           <a:solidFill>
-                            <a:srgbClr val="222222"/>
+                            <a:srgbClr val="000000"/>
                           </a:solidFill>
                         </a:rPr>
                         <a:t>EmpID</a:t>
@@ -7461,7 +10659,7 @@
                   </a:txBody>
                   <a:tcPr anchor="ctr">
                     <a:solidFill>
-                      <a:srgbClr val="F2F6FB"/>
+                      <a:srgbClr val="F4F4F4"/>
                     </a:solidFill>
                   </a:tcPr>
                 </a:tc>
@@ -7473,7 +10671,7 @@
                       <a:r>
                         <a:rPr sz="1200">
                           <a:solidFill>
-                            <a:srgbClr val="222222"/>
+                            <a:srgbClr val="000000"/>
                           </a:solidFill>
                         </a:rPr>
                         <a:t>EName, Role, Salary</a:t>
@@ -7482,7 +10680,7 @@
                   </a:txBody>
                   <a:tcPr anchor="ctr">
                     <a:solidFill>
-                      <a:srgbClr val="F2F6FB"/>
+                      <a:srgbClr val="F4F4F4"/>
                     </a:solidFill>
                   </a:tcPr>
                 </a:tc>
@@ -7502,14 +10700,6 @@
 <file path=ppt/slides/slide7.xml><?xml version="1.0" encoding="utf-8"?>
 <p:sld xmlns:a="http://schemas.openxmlformats.org/drawingml/2006/main" xmlns:p="http://schemas.openxmlformats.org/presentationml/2006/main" xmlns:r="http://schemas.openxmlformats.org/officeDocument/2006/relationships">
   <p:cSld>
-    <p:bg>
-      <p:bgPr>
-        <a:solidFill>
-          <a:srgbClr val="FFFFFF"/>
-        </a:solidFill>
-        <a:effectLst/>
-      </p:bgPr>
-    </p:bg>
     <p:spTree>
       <p:nvGrpSpPr>
         <p:cNvPr id="1" name=""/>
@@ -7519,20 +10709,55 @@
       <p:grpSpPr/>
       <p:sp>
         <p:nvSpPr>
-          <p:cNvPr id="2" name="Rectangle 1"/>
+          <p:cNvPr id="2" name="TextBox 1"/>
+          <p:cNvSpPr txBox="1"/>
+          <p:nvPr/>
+        </p:nvSpPr>
+        <p:spPr>
+          <a:xfrm>
+            <a:off x="457200" y="292608"/>
+            <a:ext cx="11338560" cy="566928"/>
+          </a:xfrm>
+          <a:prstGeom prst="rect">
+            <a:avLst/>
+          </a:prstGeom>
+          <a:noFill/>
+        </p:spPr>
+        <p:txBody>
+          <a:bodyPr wrap="square">
+            <a:spAutoFit/>
+          </a:bodyPr>
+          <a:lstStyle/>
+          <a:p>
+            <a:pPr algn="l"/>
+            <a:r>
+              <a:rPr sz="2600" b="1" i="0">
+                <a:solidFill>
+                  <a:srgbClr val="000000"/>
+                </a:solidFill>
+                <a:latin typeface="Calibri"/>
+              </a:rPr>
+              <a:t>3. The Seven Relationships</a:t>
+            </a:r>
+          </a:p>
+        </p:txBody>
+      </p:sp>
+      <p:sp>
+        <p:nvSpPr>
+          <p:cNvPr id="3" name="Rectangle 2"/>
           <p:cNvSpPr/>
           <p:nvPr/>
         </p:nvSpPr>
         <p:spPr>
           <a:xfrm>
-            <a:off x="0" y="0"/>
-            <a:ext cx="12191695" cy="1051560"/>
+            <a:off x="457200" y="950976"/>
+            <a:ext cx="11338560" cy="18288"/>
           </a:xfrm>
           <a:prstGeom prst="rect">
             <a:avLst/>
           </a:prstGeom>
           <a:solidFill>
-            <a:srgbClr val="1F3A5F"/>
+            <a:srgbClr val="000000"/>
           </a:solidFill>
           <a:ln>
             <a:noFill/>
@@ -7563,14 +10788,14 @@
       </p:sp>
       <p:sp>
         <p:nvSpPr>
-          <p:cNvPr id="3" name="TextBox 2"/>
+          <p:cNvPr id="4" name="TextBox 3"/>
           <p:cNvSpPr txBox="1"/>
           <p:nvPr/>
         </p:nvSpPr>
         <p:spPr>
           <a:xfrm>
-            <a:off x="457200" y="182880"/>
-            <a:ext cx="11338560" cy="731520"/>
+            <a:off x="457200" y="1024128"/>
+            <a:ext cx="11338560" cy="384048"/>
           </a:xfrm>
           <a:prstGeom prst="rect">
             <a:avLst/>
@@ -7585,48 +10810,13 @@
           <a:p>
             <a:pPr algn="l"/>
             <a:r>
-              <a:rPr sz="2700" b="1" i="0">
-                <a:solidFill>
-                  <a:srgbClr val="FFFFFF"/>
-                </a:solidFill>
-                <a:latin typeface="Calibri"/>
-              </a:rPr>
-              <a:t>3. The Seven Relationships</a:t>
-            </a:r>
-          </a:p>
-        </p:txBody>
-      </p:sp>
-      <p:sp>
-        <p:nvSpPr>
-          <p:cNvPr id="4" name="TextBox 3"/>
-          <p:cNvSpPr txBox="1"/>
-          <p:nvPr/>
-        </p:nvSpPr>
-        <p:spPr>
-          <a:xfrm>
-            <a:off x="457200" y="1106424"/>
-            <a:ext cx="11338560" cy="411480"/>
-          </a:xfrm>
-          <a:prstGeom prst="rect">
-            <a:avLst/>
-          </a:prstGeom>
-          <a:noFill/>
-        </p:spPr>
-        <p:txBody>
-          <a:bodyPr wrap="square">
-            <a:spAutoFit/>
-          </a:bodyPr>
-          <a:lstStyle/>
-          <a:p>
-            <a:pPr algn="l"/>
-            <a:r>
-              <a:rPr sz="1400" b="0" i="1">
-                <a:solidFill>
-                  <a:srgbClr val="2A9D8F"/>
-                </a:solidFill>
-                <a:latin typeface="Calibri"/>
-              </a:rPr>
-              <a:t>1:N means one row links to many; M:N means many on both sides</a:t>
+              <a:rPr sz="1350" b="0" i="1">
+                <a:solidFill>
+                  <a:srgbClr val="444444"/>
+                </a:solidFill>
+                <a:latin typeface="Calibri"/>
+              </a:rPr>
+              <a:t>1:N means one row links to many, M:N means many on both sides</a:t>
             </a:r>
           </a:p>
         </p:txBody>
@@ -7640,8 +10830,8 @@
           <p:nvPr/>
         </p:nvGraphicFramePr>
         <p:xfrm>
-          <a:off x="1798167" y="2546603"/>
-          <a:ext cx="8595360" cy="3364992"/>
+          <a:off x="1798167" y="2464308"/>
+          <a:ext cx="8595360" cy="3218688"/>
         </p:xfrm>
         <a:graphic>
           <a:graphicData uri="http://schemas.openxmlformats.org/drawingml/2006/table">
@@ -7654,7 +10844,7 @@
                 <a:gridCol w="4023360"/>
                 <a:gridCol w="1463040"/>
               </a:tblGrid>
-              <a:tr h="420624">
+              <a:tr h="402336">
                 <a:tc>
                   <a:txBody>
                     <a:bodyPr/>
@@ -7663,7 +10853,7 @@
                       <a:r>
                         <a:rPr sz="1400" b="1">
                           <a:solidFill>
-                            <a:srgbClr val="FFFFFF"/>
+                            <a:srgbClr val="000000"/>
                           </a:solidFill>
                         </a:rPr>
                         <a:t>Relationship</a:t>
@@ -7672,7 +10862,7 @@
                   </a:txBody>
                   <a:tcPr anchor="ctr">
                     <a:solidFill>
-                      <a:srgbClr val="1F3A5F"/>
+                      <a:srgbClr val="D9D9D9"/>
                     </a:solidFill>
                   </a:tcPr>
                 </a:tc>
@@ -7684,7 +10874,7 @@
                       <a:r>
                         <a:rPr sz="1400" b="1">
                           <a:solidFill>
-                            <a:srgbClr val="FFFFFF"/>
+                            <a:srgbClr val="000000"/>
                           </a:solidFill>
                         </a:rPr>
                         <a:t>Between</a:t>
@@ -7693,7 +10883,7 @@
                   </a:txBody>
                   <a:tcPr anchor="ctr">
                     <a:solidFill>
-                      <a:srgbClr val="1F3A5F"/>
+                      <a:srgbClr val="D9D9D9"/>
                     </a:solidFill>
                   </a:tcPr>
                 </a:tc>
@@ -7705,7 +10895,7 @@
                       <a:r>
                         <a:rPr sz="1400" b="1">
                           <a:solidFill>
-                            <a:srgbClr val="FFFFFF"/>
+                            <a:srgbClr val="000000"/>
                           </a:solidFill>
                         </a:rPr>
                         <a:t>Type</a:t>
@@ -7714,12 +10904,12 @@
                   </a:txBody>
                   <a:tcPr anchor="ctr">
                     <a:solidFill>
-                      <a:srgbClr val="1F3A5F"/>
+                      <a:srgbClr val="D9D9D9"/>
                     </a:solidFill>
                   </a:tcPr>
                 </a:tc>
               </a:tr>
-              <a:tr h="420624">
+              <a:tr h="402336">
                 <a:tc>
                   <a:txBody>
                     <a:bodyPr/>
@@ -7728,7 +10918,7 @@
                       <a:r>
                         <a:rPr sz="1300">
                           <a:solidFill>
-                            <a:srgbClr val="222222"/>
+                            <a:srgbClr val="000000"/>
                           </a:solidFill>
                         </a:rPr>
                         <a:t>SUPPLIES</a:t>
@@ -7737,7 +10927,7 @@
                   </a:txBody>
                   <a:tcPr anchor="ctr">
                     <a:solidFill>
-                      <a:srgbClr val="F2F6FB"/>
+                      <a:srgbClr val="F4F4F4"/>
                     </a:solidFill>
                   </a:tcPr>
                 </a:tc>
@@ -7749,16 +10939,16 @@
                       <a:r>
                         <a:rPr sz="1300">
                           <a:solidFill>
-                            <a:srgbClr val="222222"/>
+                            <a:srgbClr val="000000"/>
                           </a:solidFill>
                         </a:rPr>
-                        <a:t>SUPPLIER – PRODUCT</a:t>
+                        <a:t>SUPPLIER - PRODUCT</a:t>
                       </a:r>
                     </a:p>
                   </a:txBody>
                   <a:tcPr anchor="ctr">
                     <a:solidFill>
-                      <a:srgbClr val="F2F6FB"/>
+                      <a:srgbClr val="F4F4F4"/>
                     </a:solidFill>
                   </a:tcPr>
                 </a:tc>
@@ -7770,7 +10960,7 @@
                       <a:r>
                         <a:rPr sz="1300">
                           <a:solidFill>
-                            <a:srgbClr val="222222"/>
+                            <a:srgbClr val="000000"/>
                           </a:solidFill>
                         </a:rPr>
                         <a:t>M:N</a:t>
@@ -7779,12 +10969,12 @@
                   </a:txBody>
                   <a:tcPr anchor="ctr">
                     <a:solidFill>
-                      <a:srgbClr val="F2F6FB"/>
+                      <a:srgbClr val="F4F4F4"/>
                     </a:solidFill>
                   </a:tcPr>
                 </a:tc>
               </a:tr>
-              <a:tr h="420624">
+              <a:tr h="402336">
                 <a:tc>
                   <a:txBody>
                     <a:bodyPr/>
@@ -7793,7 +10983,7 @@
                       <a:r>
                         <a:rPr sz="1300">
                           <a:solidFill>
-                            <a:srgbClr val="222222"/>
+                            <a:srgbClr val="000000"/>
                           </a:solidFill>
                         </a:rPr>
                         <a:t>STORED_IN</a:t>
@@ -7814,10 +11004,10 @@
                       <a:r>
                         <a:rPr sz="1300">
                           <a:solidFill>
-                            <a:srgbClr val="222222"/>
+                            <a:srgbClr val="000000"/>
                           </a:solidFill>
                         </a:rPr>
-                        <a:t>PRODUCT – WAREHOUSE</a:t>
+                        <a:t>PRODUCT - WAREHOUSE</a:t>
                       </a:r>
                     </a:p>
                   </a:txBody>
@@ -7835,7 +11025,7 @@
                       <a:r>
                         <a:rPr sz="1300">
                           <a:solidFill>
-                            <a:srgbClr val="222222"/>
+                            <a:srgbClr val="000000"/>
                           </a:solidFill>
                         </a:rPr>
                         <a:t>M:N</a:t>
@@ -7849,7 +11039,7 @@
                   </a:tcPr>
                 </a:tc>
               </a:tr>
-              <a:tr h="420624">
+              <a:tr h="402336">
                 <a:tc>
                   <a:txBody>
                     <a:bodyPr/>
@@ -7858,7 +11048,7 @@
                       <a:r>
                         <a:rPr sz="1300">
                           <a:solidFill>
-                            <a:srgbClr val="222222"/>
+                            <a:srgbClr val="000000"/>
                           </a:solidFill>
                         </a:rPr>
                         <a:t>CONTAINS</a:t>
@@ -7867,7 +11057,7 @@
                   </a:txBody>
                   <a:tcPr anchor="ctr">
                     <a:solidFill>
-                      <a:srgbClr val="F2F6FB"/>
+                      <a:srgbClr val="F4F4F4"/>
                     </a:solidFill>
                   </a:tcPr>
                 </a:tc>
@@ -7879,16 +11069,16 @@
                       <a:r>
                         <a:rPr sz="1300">
                           <a:solidFill>
-                            <a:srgbClr val="222222"/>
+                            <a:srgbClr val="000000"/>
                           </a:solidFill>
                         </a:rPr>
-                        <a:t>PRODUCT – ORDERS</a:t>
+                        <a:t>PRODUCT - ORDERS</a:t>
                       </a:r>
                     </a:p>
                   </a:txBody>
                   <a:tcPr anchor="ctr">
                     <a:solidFill>
-                      <a:srgbClr val="F2F6FB"/>
+                      <a:srgbClr val="F4F4F4"/>
                     </a:solidFill>
                   </a:tcPr>
                 </a:tc>
@@ -7900,7 +11090,7 @@
                       <a:r>
                         <a:rPr sz="1300">
                           <a:solidFill>
-                            <a:srgbClr val="222222"/>
+                            <a:srgbClr val="000000"/>
                           </a:solidFill>
                         </a:rPr>
                         <a:t>M:N</a:t>
@@ -7909,12 +11099,12 @@
                   </a:txBody>
                   <a:tcPr anchor="ctr">
                     <a:solidFill>
-                      <a:srgbClr val="F2F6FB"/>
+                      <a:srgbClr val="F4F4F4"/>
                     </a:solidFill>
                   </a:tcPr>
                 </a:tc>
               </a:tr>
-              <a:tr h="420624">
+              <a:tr h="402336">
                 <a:tc>
                   <a:txBody>
                     <a:bodyPr/>
@@ -7923,7 +11113,7 @@
                       <a:r>
                         <a:rPr sz="1300">
                           <a:solidFill>
-                            <a:srgbClr val="222222"/>
+                            <a:srgbClr val="000000"/>
                           </a:solidFill>
                         </a:rPr>
                         <a:t>WORKS_AT</a:t>
@@ -7944,10 +11134,10 @@
                       <a:r>
                         <a:rPr sz="1300">
                           <a:solidFill>
-                            <a:srgbClr val="222222"/>
+                            <a:srgbClr val="000000"/>
                           </a:solidFill>
                         </a:rPr>
-                        <a:t>WAREHOUSE – EMPLOYEE</a:t>
+                        <a:t>WAREHOUSE - EMPLOYEE</a:t>
                       </a:r>
                     </a:p>
                   </a:txBody>
@@ -7965,7 +11155,7 @@
                       <a:r>
                         <a:rPr sz="1300">
                           <a:solidFill>
-                            <a:srgbClr val="222222"/>
+                            <a:srgbClr val="000000"/>
                           </a:solidFill>
                         </a:rPr>
                         <a:t>1:N</a:t>
@@ -7979,7 +11169,7 @@
                   </a:tcPr>
                 </a:tc>
               </a:tr>
-              <a:tr h="420624">
+              <a:tr h="402336">
                 <a:tc>
                   <a:txBody>
                     <a:bodyPr/>
@@ -7988,7 +11178,7 @@
                       <a:r>
                         <a:rPr sz="1300">
                           <a:solidFill>
-                            <a:srgbClr val="222222"/>
+                            <a:srgbClr val="000000"/>
                           </a:solidFill>
                         </a:rPr>
                         <a:t>PLACES</a:t>
@@ -7997,7 +11187,7 @@
                   </a:txBody>
                   <a:tcPr anchor="ctr">
                     <a:solidFill>
-                      <a:srgbClr val="F2F6FB"/>
+                      <a:srgbClr val="F4F4F4"/>
                     </a:solidFill>
                   </a:tcPr>
                 </a:tc>
@@ -8009,16 +11199,16 @@
                       <a:r>
                         <a:rPr sz="1300">
                           <a:solidFill>
-                            <a:srgbClr val="222222"/>
+                            <a:srgbClr val="000000"/>
                           </a:solidFill>
                         </a:rPr>
-                        <a:t>CUSTOMER – ORDERS</a:t>
+                        <a:t>CUSTOMER - ORDERS</a:t>
                       </a:r>
                     </a:p>
                   </a:txBody>
                   <a:tcPr anchor="ctr">
                     <a:solidFill>
-                      <a:srgbClr val="F2F6FB"/>
+                      <a:srgbClr val="F4F4F4"/>
                     </a:solidFill>
                   </a:tcPr>
                 </a:tc>
@@ -8030,7 +11220,7 @@
                       <a:r>
                         <a:rPr sz="1300">
                           <a:solidFill>
-                            <a:srgbClr val="222222"/>
+                            <a:srgbClr val="000000"/>
                           </a:solidFill>
                         </a:rPr>
                         <a:t>1:N</a:t>
@@ -8039,12 +11229,12 @@
                   </a:txBody>
                   <a:tcPr anchor="ctr">
                     <a:solidFill>
-                      <a:srgbClr val="F2F6FB"/>
+                      <a:srgbClr val="F4F4F4"/>
                     </a:solidFill>
                   </a:tcPr>
                 </a:tc>
               </a:tr>
-              <a:tr h="420624">
+              <a:tr h="402336">
                 <a:tc>
                   <a:txBody>
                     <a:bodyPr/>
@@ -8053,7 +11243,7 @@
                       <a:r>
                         <a:rPr sz="1300">
                           <a:solidFill>
-                            <a:srgbClr val="222222"/>
+                            <a:srgbClr val="000000"/>
                           </a:solidFill>
                         </a:rPr>
                         <a:t>SHIPPED_BY</a:t>
@@ -8074,10 +11264,10 @@
                       <a:r>
                         <a:rPr sz="1300">
                           <a:solidFill>
-                            <a:srgbClr val="222222"/>
+                            <a:srgbClr val="000000"/>
                           </a:solidFill>
                         </a:rPr>
-                        <a:t>ORDERS – SHIPMENT</a:t>
+                        <a:t>ORDERS - SHIPMENT</a:t>
                       </a:r>
                     </a:p>
                   </a:txBody>
@@ -8095,7 +11285,7 @@
                       <a:r>
                         <a:rPr sz="1300">
                           <a:solidFill>
-                            <a:srgbClr val="222222"/>
+                            <a:srgbClr val="000000"/>
                           </a:solidFill>
                         </a:rPr>
                         <a:t>1:N</a:t>
@@ -8109,7 +11299,7 @@
                   </a:tcPr>
                 </a:tc>
               </a:tr>
-              <a:tr h="420624">
+              <a:tr h="402336">
                 <a:tc>
                   <a:txBody>
                     <a:bodyPr/>
@@ -8118,7 +11308,7 @@
                       <a:r>
                         <a:rPr sz="1300">
                           <a:solidFill>
-                            <a:srgbClr val="222222"/>
+                            <a:srgbClr val="000000"/>
                           </a:solidFill>
                         </a:rPr>
                         <a:t>DISPATCHED_FROM</a:t>
@@ -8127,7 +11317,7 @@
                   </a:txBody>
                   <a:tcPr anchor="ctr">
                     <a:solidFill>
-                      <a:srgbClr val="F2F6FB"/>
+                      <a:srgbClr val="F4F4F4"/>
                     </a:solidFill>
                   </a:tcPr>
                 </a:tc>
@@ -8139,16 +11329,16 @@
                       <a:r>
                         <a:rPr sz="1300">
                           <a:solidFill>
-                            <a:srgbClr val="222222"/>
+                            <a:srgbClr val="000000"/>
                           </a:solidFill>
                         </a:rPr>
-                        <a:t>WAREHOUSE – SHIPMENT</a:t>
+                        <a:t>WAREHOUSE - SHIPMENT</a:t>
                       </a:r>
                     </a:p>
                   </a:txBody>
                   <a:tcPr anchor="ctr">
                     <a:solidFill>
-                      <a:srgbClr val="F2F6FB"/>
+                      <a:srgbClr val="F4F4F4"/>
                     </a:solidFill>
                   </a:tcPr>
                 </a:tc>
@@ -8160,7 +11350,7 @@
                       <a:r>
                         <a:rPr sz="1300">
                           <a:solidFill>
-                            <a:srgbClr val="222222"/>
+                            <a:srgbClr val="000000"/>
                           </a:solidFill>
                         </a:rPr>
                         <a:t>1:N</a:t>
@@ -8169,7 +11359,7 @@
                   </a:txBody>
                   <a:tcPr anchor="ctr">
                     <a:solidFill>
-                      <a:srgbClr val="F2F6FB"/>
+                      <a:srgbClr val="F4F4F4"/>
                     </a:solidFill>
                   </a:tcPr>
                 </a:tc>
@@ -8189,14 +11379,6 @@
 <file path=ppt/slides/slide8.xml><?xml version="1.0" encoding="utf-8"?>
 <p:sld xmlns:a="http://schemas.openxmlformats.org/drawingml/2006/main" xmlns:p="http://schemas.openxmlformats.org/presentationml/2006/main" xmlns:r="http://schemas.openxmlformats.org/officeDocument/2006/relationships">
   <p:cSld>
-    <p:bg>
-      <p:bgPr>
-        <a:solidFill>
-          <a:srgbClr val="FFFFFF"/>
-        </a:solidFill>
-        <a:effectLst/>
-      </p:bgPr>
-    </p:bg>
     <p:spTree>
       <p:nvGrpSpPr>
         <p:cNvPr id="1" name=""/>
@@ -8206,20 +11388,55 @@
       <p:grpSpPr/>
       <p:sp>
         <p:nvSpPr>
-          <p:cNvPr id="2" name="Rectangle 1"/>
+          <p:cNvPr id="2" name="TextBox 1"/>
+          <p:cNvSpPr txBox="1"/>
+          <p:nvPr/>
+        </p:nvSpPr>
+        <p:spPr>
+          <a:xfrm>
+            <a:off x="457200" y="237744"/>
+            <a:ext cx="11338560" cy="566928"/>
+          </a:xfrm>
+          <a:prstGeom prst="rect">
+            <a:avLst/>
+          </a:prstGeom>
+          <a:noFill/>
+        </p:spPr>
+        <p:txBody>
+          <a:bodyPr wrap="square">
+            <a:spAutoFit/>
+          </a:bodyPr>
+          <a:lstStyle/>
+          <a:p>
+            <a:pPr algn="l"/>
+            <a:r>
+              <a:rPr sz="2600" b="1" i="0">
+                <a:solidFill>
+                  <a:srgbClr val="000000"/>
+                </a:solidFill>
+                <a:latin typeface="Calibri"/>
+              </a:rPr>
+              <a:t>4. The ER Model</a:t>
+            </a:r>
+          </a:p>
+        </p:txBody>
+      </p:sp>
+      <p:sp>
+        <p:nvSpPr>
+          <p:cNvPr id="3" name="Rectangle 2"/>
           <p:cNvSpPr/>
           <p:nvPr/>
         </p:nvSpPr>
         <p:spPr>
           <a:xfrm>
-            <a:off x="0" y="0"/>
-            <a:ext cx="12191695" cy="914400"/>
+            <a:off x="457200" y="896112"/>
+            <a:ext cx="11338560" cy="18288"/>
           </a:xfrm>
           <a:prstGeom prst="rect">
             <a:avLst/>
           </a:prstGeom>
           <a:solidFill>
-            <a:srgbClr val="1F3A5F"/>
+            <a:srgbClr val="000000"/>
           </a:solidFill>
           <a:ln>
             <a:noFill/>
@@ -8248,41 +11465,6 @@
           </a:p>
         </p:txBody>
       </p:sp>
-      <p:sp>
-        <p:nvSpPr>
-          <p:cNvPr id="3" name="TextBox 2"/>
-          <p:cNvSpPr txBox="1"/>
-          <p:nvPr/>
-        </p:nvSpPr>
-        <p:spPr>
-          <a:xfrm>
-            <a:off x="457200" y="182880"/>
-            <a:ext cx="11338560" cy="731520"/>
-          </a:xfrm>
-          <a:prstGeom prst="rect">
-            <a:avLst/>
-          </a:prstGeom>
-          <a:noFill/>
-        </p:spPr>
-        <p:txBody>
-          <a:bodyPr wrap="square">
-            <a:spAutoFit/>
-          </a:bodyPr>
-          <a:lstStyle/>
-          <a:p>
-            <a:pPr algn="l"/>
-            <a:r>
-              <a:rPr sz="2700" b="1" i="0">
-                <a:solidFill>
-                  <a:srgbClr val="FFFFFF"/>
-                </a:solidFill>
-                <a:latin typeface="Calibri"/>
-              </a:rPr>
-              <a:t>4. The ER Model</a:t>
-            </a:r>
-          </a:p>
-        </p:txBody>
-      </p:sp>
       <p:pic>
         <p:nvPicPr>
           <p:cNvPr id="4" name="Picture 3" descr="er_model.png"/>
@@ -8299,8 +11481,8 @@
         </p:blipFill>
         <p:spPr>
           <a:xfrm>
-            <a:off x="1208887" y="1042416"/>
-            <a:ext cx="9773919" cy="5669279"/>
+            <a:off x="1331743" y="1078992"/>
+            <a:ext cx="9528209" cy="5596127"/>
           </a:xfrm>
           <a:prstGeom prst="rect">
             <a:avLst/>
@@ -8318,14 +11500,6 @@
 <file path=ppt/slides/slide9.xml><?xml version="1.0" encoding="utf-8"?>
 <p:sld xmlns:a="http://schemas.openxmlformats.org/drawingml/2006/main" xmlns:p="http://schemas.openxmlformats.org/presentationml/2006/main" xmlns:r="http://schemas.openxmlformats.org/officeDocument/2006/relationships">
   <p:cSld>
-    <p:bg>
-      <p:bgPr>
-        <a:solidFill>
-          <a:srgbClr val="FFFFFF"/>
-        </a:solidFill>
-        <a:effectLst/>
-      </p:bgPr>
-    </p:bg>
     <p:spTree>
       <p:nvGrpSpPr>
         <p:cNvPr id="1" name=""/>
@@ -8335,20 +11509,55 @@
       <p:grpSpPr/>
       <p:sp>
         <p:nvSpPr>
-          <p:cNvPr id="2" name="Rectangle 1"/>
+          <p:cNvPr id="2" name="TextBox 1"/>
+          <p:cNvSpPr txBox="1"/>
+          <p:nvPr/>
+        </p:nvSpPr>
+        <p:spPr>
+          <a:xfrm>
+            <a:off x="457200" y="237744"/>
+            <a:ext cx="11338560" cy="566928"/>
+          </a:xfrm>
+          <a:prstGeom prst="rect">
+            <a:avLst/>
+          </a:prstGeom>
+          <a:noFill/>
+        </p:spPr>
+        <p:txBody>
+          <a:bodyPr wrap="square">
+            <a:spAutoFit/>
+          </a:bodyPr>
+          <a:lstStyle/>
+          <a:p>
+            <a:pPr algn="l"/>
+            <a:r>
+              <a:rPr sz="2600" b="1" i="0">
+                <a:solidFill>
+                  <a:srgbClr val="000000"/>
+                </a:solidFill>
+                <a:latin typeface="Calibri"/>
+              </a:rPr>
+              <a:t>5. The EER Model, the Same Design Extended</a:t>
+            </a:r>
+          </a:p>
+        </p:txBody>
+      </p:sp>
+      <p:sp>
+        <p:nvSpPr>
+          <p:cNvPr id="3" name="Rectangle 2"/>
           <p:cNvSpPr/>
           <p:nvPr/>
         </p:nvSpPr>
         <p:spPr>
           <a:xfrm>
-            <a:off x="0" y="0"/>
-            <a:ext cx="12191695" cy="914400"/>
+            <a:off x="457200" y="896112"/>
+            <a:ext cx="11338560" cy="18288"/>
           </a:xfrm>
           <a:prstGeom prst="rect">
             <a:avLst/>
           </a:prstGeom>
           <a:solidFill>
-            <a:srgbClr val="1F3A5F"/>
+            <a:srgbClr val="000000"/>
           </a:solidFill>
           <a:ln>
             <a:noFill/>
@@ -8377,41 +11586,6 @@
           </a:p>
         </p:txBody>
       </p:sp>
-      <p:sp>
-        <p:nvSpPr>
-          <p:cNvPr id="3" name="TextBox 2"/>
-          <p:cNvSpPr txBox="1"/>
-          <p:nvPr/>
-        </p:nvSpPr>
-        <p:spPr>
-          <a:xfrm>
-            <a:off x="457200" y="182880"/>
-            <a:ext cx="11338560" cy="731520"/>
-          </a:xfrm>
-          <a:prstGeom prst="rect">
-            <a:avLst/>
-          </a:prstGeom>
-          <a:noFill/>
-        </p:spPr>
-        <p:txBody>
-          <a:bodyPr wrap="square">
-            <a:spAutoFit/>
-          </a:bodyPr>
-          <a:lstStyle/>
-          <a:p>
-            <a:pPr algn="l"/>
-            <a:r>
-              <a:rPr sz="2700" b="1" i="0">
-                <a:solidFill>
-                  <a:srgbClr val="FFFFFF"/>
-                </a:solidFill>
-                <a:latin typeface="Calibri"/>
-              </a:rPr>
-              <a:t>5. The EER Model — the Same Design, Extended</a:t>
-            </a:r>
-          </a:p>
-        </p:txBody>
-      </p:sp>
       <p:pic>
         <p:nvPicPr>
           <p:cNvPr id="4" name="Picture 3" descr="eer_model.png"/>
@@ -8428,8 +11602,8 @@
         </p:blipFill>
         <p:spPr>
           <a:xfrm>
-            <a:off x="1208887" y="1042416"/>
-            <a:ext cx="9773919" cy="5669279"/>
+            <a:off x="1077420" y="1078992"/>
+            <a:ext cx="10036854" cy="5596127"/>
           </a:xfrm>
           <a:prstGeom prst="rect">
             <a:avLst/>

--- a/presentation/DA1_Presentation.pptx
+++ b/presentation/DA1_Presentation.pptx
@@ -8663,8 +8663,8 @@
         </p:blipFill>
         <p:spPr>
           <a:xfrm>
-            <a:off x="1925792" y="1463040"/>
-            <a:ext cx="8340110" cy="5212079"/>
+            <a:off x="1849336" y="1463040"/>
+            <a:ext cx="8493022" cy="5212079"/>
           </a:xfrm>
           <a:prstGeom prst="rect">
             <a:avLst/>
@@ -9003,8 +9003,8 @@
         </p:blipFill>
         <p:spPr>
           <a:xfrm>
-            <a:off x="1107783" y="1078992"/>
-            <a:ext cx="9976127" cy="5596127"/>
+            <a:off x="335127" y="1294664"/>
+            <a:ext cx="11521440" cy="5164783"/>
           </a:xfrm>
           <a:prstGeom prst="rect">
             <a:avLst/>
@@ -11481,8 +11481,8 @@
         </p:blipFill>
         <p:spPr>
           <a:xfrm>
-            <a:off x="1331743" y="1078992"/>
-            <a:ext cx="9528209" cy="5596127"/>
+            <a:off x="790278" y="1078992"/>
+            <a:ext cx="10611137" cy="5596127"/>
           </a:xfrm>
           <a:prstGeom prst="rect">
             <a:avLst/>
@@ -11602,8 +11602,8 @@
         </p:blipFill>
         <p:spPr>
           <a:xfrm>
-            <a:off x="1077420" y="1078992"/>
-            <a:ext cx="10036854" cy="5596127"/>
+            <a:off x="585312" y="1078992"/>
+            <a:ext cx="11021070" cy="5596127"/>
           </a:xfrm>
           <a:prstGeom prst="rect">
             <a:avLst/>

--- a/presentation/DA1_Presentation.pptx
+++ b/presentation/DA1_Presentation.pptx
@@ -38,6 +38,9 @@
     <p:sldId id="286" r:id="rId37"/>
     <p:sldId id="287" r:id="rId38"/>
     <p:sldId id="288" r:id="rId39"/>
+    <p:sldId id="289" r:id="rId40"/>
+    <p:sldId id="290" r:id="rId41"/>
+    <p:sldId id="291" r:id="rId42"/>
   </p:sldIdLst>
   <p:sldSz cx="12191695" cy="6858000" type="screen4x3"/>
   <p:notesSz cx="6858000" cy="9144000"/>
@@ -3352,7 +3355,7 @@
                 </a:solidFill>
                 <a:latin typeface="Calibri"/>
               </a:rPr>
-              <a:t>5. What EER Added, and Why</a:t>
+              <a:t>5. Specialization and Generalization</a:t>
             </a:r>
           </a:p>
         </p:txBody>
@@ -3431,389 +3434,146 @@
                 </a:solidFill>
                 <a:latin typeface="Calibri"/>
               </a:rPr>
-              <a:t>each addition describes something plain ER cannot</a:t>
-            </a:r>
-          </a:p>
-        </p:txBody>
-      </p:sp>
-      <p:graphicFrame>
-        <p:nvGraphicFramePr>
-          <p:cNvPr id="5" name="Table 4"/>
-          <p:cNvGraphicFramePr>
-            <a:graphicFrameLocks noGrp="1"/>
-          </p:cNvGraphicFramePr>
+              <a:t>the difference is the direction, not the drawing</a:t>
+            </a:r>
+          </a:p>
+        </p:txBody>
+      </p:sp>
+      <p:sp>
+        <p:nvSpPr>
+          <p:cNvPr id="5" name="TextBox 4"/>
+          <p:cNvSpPr txBox="1"/>
           <p:nvPr/>
-        </p:nvGraphicFramePr>
-        <p:xfrm>
-          <a:off x="1432407" y="2464308"/>
-          <a:ext cx="9326880" cy="3218688"/>
-        </p:xfrm>
-        <a:graphic>
-          <a:graphicData uri="http://schemas.openxmlformats.org/drawingml/2006/table">
-            <a:tbl>
-              <a:tblPr firstRow="1" bandRow="1">
-                <a:tableStyleId>{5C22544A-7EE6-4342-B048-85BDC9FD1C3A}</a:tableStyleId>
-              </a:tblPr>
-              <a:tblGrid>
-                <a:gridCol w="4206240"/>
-                <a:gridCol w="5120640"/>
-              </a:tblGrid>
-              <a:tr h="402336">
-                <a:tc>
-                  <a:txBody>
-                    <a:bodyPr/>
-                    <a:lstStyle/>
-                    <a:p>
-                      <a:r>
-                        <a:rPr sz="1300" b="1">
-                          <a:solidFill>
-                            <a:srgbClr val="000000"/>
-                          </a:solidFill>
-                        </a:rPr>
-                        <a:t>EER feature</a:t>
-                      </a:r>
-                    </a:p>
-                  </a:txBody>
-                  <a:tcPr anchor="ctr">
-                    <a:solidFill>
-                      <a:srgbClr val="D9D9D9"/>
-                    </a:solidFill>
-                  </a:tcPr>
-                </a:tc>
-                <a:tc>
-                  <a:txBody>
-                    <a:bodyPr/>
-                    <a:lstStyle/>
-                    <a:p>
-                      <a:r>
-                        <a:rPr sz="1300" b="1">
-                          <a:solidFill>
-                            <a:srgbClr val="000000"/>
-                          </a:solidFill>
-                        </a:rPr>
-                        <a:t>Where</a:t>
-                      </a:r>
-                    </a:p>
-                  </a:txBody>
-                  <a:tcPr anchor="ctr">
-                    <a:solidFill>
-                      <a:srgbClr val="D9D9D9"/>
-                    </a:solidFill>
-                  </a:tcPr>
-                </a:tc>
-              </a:tr>
-              <a:tr h="402336">
-                <a:tc>
-                  <a:txBody>
-                    <a:bodyPr/>
-                    <a:lstStyle/>
-                    <a:p>
-                      <a:r>
-                        <a:rPr sz="1200">
-                          <a:solidFill>
-                            <a:srgbClr val="000000"/>
-                          </a:solidFill>
-                        </a:rPr>
-                        <a:t>Weak entity</a:t>
-                      </a:r>
-                    </a:p>
-                  </a:txBody>
-                  <a:tcPr anchor="ctr">
-                    <a:solidFill>
-                      <a:srgbClr val="F4F4F4"/>
-                    </a:solidFill>
-                  </a:tcPr>
-                </a:tc>
-                <a:tc>
-                  <a:txBody>
-                    <a:bodyPr/>
-                    <a:lstStyle/>
-                    <a:p>
-                      <a:r>
-                        <a:rPr sz="1200">
-                          <a:solidFill>
-                            <a:srgbClr val="000000"/>
-                          </a:solidFill>
-                        </a:rPr>
-                        <a:t>ORDER_ITEM</a:t>
-                      </a:r>
-                    </a:p>
-                  </a:txBody>
-                  <a:tcPr anchor="ctr">
-                    <a:solidFill>
-                      <a:srgbClr val="F4F4F4"/>
-                    </a:solidFill>
-                  </a:tcPr>
-                </a:tc>
-              </a:tr>
-              <a:tr h="402336">
-                <a:tc>
-                  <a:txBody>
-                    <a:bodyPr/>
-                    <a:lstStyle/>
-                    <a:p>
-                      <a:r>
-                        <a:rPr sz="1200">
-                          <a:solidFill>
-                            <a:srgbClr val="000000"/>
-                          </a:solidFill>
-                        </a:rPr>
-                        <a:t>Specialization (total, disjoint)</a:t>
-                      </a:r>
-                    </a:p>
-                  </a:txBody>
-                  <a:tcPr anchor="ctr">
-                    <a:solidFill>
-                      <a:srgbClr val="FFFFFF"/>
-                    </a:solidFill>
-                  </a:tcPr>
-                </a:tc>
-                <a:tc>
-                  <a:txBody>
-                    <a:bodyPr/>
-                    <a:lstStyle/>
-                    <a:p>
-                      <a:r>
-                        <a:rPr sz="1200">
-                          <a:solidFill>
-                            <a:srgbClr val="000000"/>
-                          </a:solidFill>
-                        </a:rPr>
-                        <a:t>EMPLOYEE to MANAGER, DRIVER</a:t>
-                      </a:r>
-                    </a:p>
-                  </a:txBody>
-                  <a:tcPr anchor="ctr">
-                    <a:solidFill>
-                      <a:srgbClr val="FFFFFF"/>
-                    </a:solidFill>
-                  </a:tcPr>
-                </a:tc>
-              </a:tr>
-              <a:tr h="402336">
-                <a:tc>
-                  <a:txBody>
-                    <a:bodyPr/>
-                    <a:lstStyle/>
-                    <a:p>
-                      <a:r>
-                        <a:rPr sz="1200">
-                          <a:solidFill>
-                            <a:srgbClr val="000000"/>
-                          </a:solidFill>
-                        </a:rPr>
-                        <a:t>Specialization (partial)</a:t>
-                      </a:r>
-                    </a:p>
-                  </a:txBody>
-                  <a:tcPr anchor="ctr">
-                    <a:solidFill>
-                      <a:srgbClr val="F4F4F4"/>
-                    </a:solidFill>
-                  </a:tcPr>
-                </a:tc>
-                <a:tc>
-                  <a:txBody>
-                    <a:bodyPr/>
-                    <a:lstStyle/>
-                    <a:p>
-                      <a:r>
-                        <a:rPr sz="1200">
-                          <a:solidFill>
-                            <a:srgbClr val="000000"/>
-                          </a:solidFill>
-                        </a:rPr>
-                        <a:t>PRODUCT to PERISHABLE_PRODUCT</a:t>
-                      </a:r>
-                    </a:p>
-                  </a:txBody>
-                  <a:tcPr anchor="ctr">
-                    <a:solidFill>
-                      <a:srgbClr val="F4F4F4"/>
-                    </a:solidFill>
-                  </a:tcPr>
-                </a:tc>
-              </a:tr>
-              <a:tr h="402336">
-                <a:tc>
-                  <a:txBody>
-                    <a:bodyPr/>
-                    <a:lstStyle/>
-                    <a:p>
-                      <a:r>
-                        <a:rPr sz="1200">
-                          <a:solidFill>
-                            <a:srgbClr val="000000"/>
-                          </a:solidFill>
-                        </a:rPr>
-                        <a:t>Multivalued attribute</a:t>
-                      </a:r>
-                    </a:p>
-                  </a:txBody>
-                  <a:tcPr anchor="ctr">
-                    <a:solidFill>
-                      <a:srgbClr val="FFFFFF"/>
-                    </a:solidFill>
-                  </a:tcPr>
-                </a:tc>
-                <a:tc>
-                  <a:txBody>
-                    <a:bodyPr/>
-                    <a:lstStyle/>
-                    <a:p>
-                      <a:r>
-                        <a:rPr sz="1200">
-                          <a:solidFill>
-                            <a:srgbClr val="000000"/>
-                          </a:solidFill>
-                        </a:rPr>
-                        <a:t>SUPPLIER.Phone</a:t>
-                      </a:r>
-                    </a:p>
-                  </a:txBody>
-                  <a:tcPr anchor="ctr">
-                    <a:solidFill>
-                      <a:srgbClr val="FFFFFF"/>
-                    </a:solidFill>
-                  </a:tcPr>
-                </a:tc>
-              </a:tr>
-              <a:tr h="402336">
-                <a:tc>
-                  <a:txBody>
-                    <a:bodyPr/>
-                    <a:lstStyle/>
-                    <a:p>
-                      <a:r>
-                        <a:rPr sz="1200">
-                          <a:solidFill>
-                            <a:srgbClr val="000000"/>
-                          </a:solidFill>
-                        </a:rPr>
-                        <a:t>Composite attribute</a:t>
-                      </a:r>
-                    </a:p>
-                  </a:txBody>
-                  <a:tcPr anchor="ctr">
-                    <a:solidFill>
-                      <a:srgbClr val="F4F4F4"/>
-                    </a:solidFill>
-                  </a:tcPr>
-                </a:tc>
-                <a:tc>
-                  <a:txBody>
-                    <a:bodyPr/>
-                    <a:lstStyle/>
-                    <a:p>
-                      <a:r>
-                        <a:rPr sz="1200">
-                          <a:solidFill>
-                            <a:srgbClr val="000000"/>
-                          </a:solidFill>
-                        </a:rPr>
-                        <a:t>CUSTOMER.Address</a:t>
-                      </a:r>
-                    </a:p>
-                  </a:txBody>
-                  <a:tcPr anchor="ctr">
-                    <a:solidFill>
-                      <a:srgbClr val="F4F4F4"/>
-                    </a:solidFill>
-                  </a:tcPr>
-                </a:tc>
-              </a:tr>
-              <a:tr h="402336">
-                <a:tc>
-                  <a:txBody>
-                    <a:bodyPr/>
-                    <a:lstStyle/>
-                    <a:p>
-                      <a:r>
-                        <a:rPr sz="1200">
-                          <a:solidFill>
-                            <a:srgbClr val="000000"/>
-                          </a:solidFill>
-                        </a:rPr>
-                        <a:t>Derived attribute</a:t>
-                      </a:r>
-                    </a:p>
-                  </a:txBody>
-                  <a:tcPr anchor="ctr">
-                    <a:solidFill>
-                      <a:srgbClr val="FFFFFF"/>
-                    </a:solidFill>
-                  </a:tcPr>
-                </a:tc>
-                <a:tc>
-                  <a:txBody>
-                    <a:bodyPr/>
-                    <a:lstStyle/>
-                    <a:p>
-                      <a:r>
-                        <a:rPr sz="1200">
-                          <a:solidFill>
-                            <a:srgbClr val="000000"/>
-                          </a:solidFill>
-                        </a:rPr>
-                        <a:t>ORDERS.TotalAmt</a:t>
-                      </a:r>
-                    </a:p>
-                  </a:txBody>
-                  <a:tcPr anchor="ctr">
-                    <a:solidFill>
-                      <a:srgbClr val="FFFFFF"/>
-                    </a:solidFill>
-                  </a:tcPr>
-                </a:tc>
-              </a:tr>
-              <a:tr h="402336">
-                <a:tc>
-                  <a:txBody>
-                    <a:bodyPr/>
-                    <a:lstStyle/>
-                    <a:p>
-                      <a:r>
-                        <a:rPr sz="1200">
-                          <a:solidFill>
-                            <a:srgbClr val="000000"/>
-                          </a:solidFill>
-                        </a:rPr>
-                        <a:t>Recursive relationship</a:t>
-                      </a:r>
-                    </a:p>
-                  </a:txBody>
-                  <a:tcPr anchor="ctr">
-                    <a:solidFill>
-                      <a:srgbClr val="F4F4F4"/>
-                    </a:solidFill>
-                  </a:tcPr>
-                </a:tc>
-                <a:tc>
-                  <a:txBody>
-                    <a:bodyPr/>
-                    <a:lstStyle/>
-                    <a:p>
-                      <a:r>
-                        <a:rPr sz="1200">
-                          <a:solidFill>
-                            <a:srgbClr val="000000"/>
-                          </a:solidFill>
-                        </a:rPr>
-                        <a:t>EMPLOYEE SUPERVISES EMPLOYEE</a:t>
-                      </a:r>
-                    </a:p>
-                  </a:txBody>
-                  <a:tcPr anchor="ctr">
-                    <a:solidFill>
-                      <a:srgbClr val="F4F4F4"/>
-                    </a:solidFill>
-                  </a:tcPr>
-                </a:tc>
-              </a:tr>
-            </a:tbl>
-          </a:graphicData>
-        </a:graphic>
-      </p:graphicFrame>
+        </p:nvSpPr>
+        <p:spPr>
+          <a:xfrm>
+            <a:off x="640080" y="1517904"/>
+            <a:ext cx="10972800" cy="5065776"/>
+          </a:xfrm>
+          <a:prstGeom prst="rect">
+            <a:avLst/>
+          </a:prstGeom>
+          <a:noFill/>
+        </p:spPr>
+        <p:txBody>
+          <a:bodyPr wrap="square">
+            <a:spAutoFit/>
+          </a:bodyPr>
+          <a:lstStyle/>
+          <a:p>
+            <a:pPr>
+              <a:spcAft>
+                <a:spcPts val="900"/>
+              </a:spcAft>
+            </a:pPr>
+            <a:r>
+              <a:rPr sz="1500">
+                <a:solidFill>
+                  <a:srgbClr val="000000"/>
+                </a:solidFill>
+                <a:latin typeface="Calibri"/>
+              </a:rPr>
+              <a:t>•  Specialization works downwards, from a type we already had to its kinds.</a:t>
+            </a:r>
+          </a:p>
+          <a:p>
+            <a:pPr lvl="1">
+              <a:spcAft>
+                <a:spcPts val="900"/>
+              </a:spcAft>
+            </a:pPr>
+            <a:r>
+              <a:rPr sz="1300">
+                <a:solidFill>
+                  <a:srgbClr val="444444"/>
+                </a:solidFill>
+                <a:latin typeface="Calibri"/>
+              </a:rPr>
+              <a:t>-  EMPLOYEE existed; splitting it gives MANAGER (Level, Bonus) and DRIVER (LicenseNo, Expiry). Total and disjoint.</a:t>
+            </a:r>
+          </a:p>
+          <a:p>
+            <a:pPr lvl="1">
+              <a:spcAft>
+                <a:spcPts val="900"/>
+              </a:spcAft>
+            </a:pPr>
+            <a:r>
+              <a:rPr sz="1300">
+                <a:solidFill>
+                  <a:srgbClr val="444444"/>
+                </a:solidFill>
+                <a:latin typeface="Calibri"/>
+              </a:rPr>
+              <a:t>-  PRODUCT existed; only some products need ShelfLifeDays and StorageTempC, so PERISHABLE_PRODUCT is a partial specialization.</a:t>
+            </a:r>
+          </a:p>
+          <a:p>
+            <a:pPr>
+              <a:spcAft>
+                <a:spcPts val="900"/>
+              </a:spcAft>
+            </a:pPr>
+            <a:r>
+              <a:rPr sz="1500">
+                <a:solidFill>
+                  <a:srgbClr val="000000"/>
+                </a:solidFill>
+                <a:latin typeface="Calibri"/>
+              </a:rPr>
+              <a:t>•  Generalization works upwards, from types we already had to what they share.</a:t>
+            </a:r>
+          </a:p>
+          <a:p>
+            <a:pPr lvl="1">
+              <a:spcAft>
+                <a:spcPts val="900"/>
+              </a:spcAft>
+            </a:pPr>
+            <a:r>
+              <a:rPr sz="1300">
+                <a:solidFill>
+                  <a:srgbClr val="444444"/>
+                </a:solidFill>
+                <a:latin typeface="Calibri"/>
+              </a:rPr>
+              <a:t>-  SHIPMENT and GOODS_RETURN were both in the ER model. Both are one order's goods moving on a date with a status, so GOODS_MOVEMENT is created above them.</a:t>
+            </a:r>
+          </a:p>
+          <a:p>
+            <a:pPr lvl="1">
+              <a:spcAft>
+                <a:spcPts val="900"/>
+              </a:spcAft>
+            </a:pPr>
+            <a:r>
+              <a:rPr sz="1300">
+                <a:solidFill>
+                  <a:srgbClr val="444444"/>
+                </a:solidFill>
+                <a:latin typeface="Calibri"/>
+              </a:rPr>
+              <a:t>-  Their two links to ORDERS and WAREHOUSE become one each, and ShipmentID and ReturnID collapse into MovementID.</a:t>
+            </a:r>
+          </a:p>
+          <a:p>
+            <a:pPr>
+              <a:spcAft>
+                <a:spcPts val="900"/>
+              </a:spcAft>
+            </a:pPr>
+            <a:r>
+              <a:rPr sz="1500">
+                <a:solidFill>
+                  <a:srgbClr val="000000"/>
+                </a:solidFill>
+                <a:latin typeface="Calibri"/>
+              </a:rPr>
+              <a:t>•  Same shape on paper, same mapping to tables, opposite directions of reasoning.</a:t>
+            </a:r>
+          </a:p>
+        </p:txBody>
+      </p:sp>
     </p:spTree>
   </p:cSld>
   <p:clrMapOvr>
@@ -3862,7 +3622,7 @@
                 </a:solidFill>
                 <a:latin typeface="Calibri"/>
               </a:rPr>
-              <a:t>5. The Weak Entity, in One Slide</a:t>
+              <a:t>5. Aggregation</a:t>
             </a:r>
           </a:p>
         </p:txBody>
@@ -3941,7 +3701,7 @@
                 </a:solidFill>
                 <a:latin typeface="Calibri"/>
               </a:rPr>
-              <a:t>why ORDER_ITEM is drawn differently from every other box</a:t>
+              <a:t>a relationship treated as one higher-level object</a:t>
             </a:r>
           </a:p>
         </p:txBody>
@@ -3980,7 +3740,7 @@
                 </a:solidFill>
                 <a:latin typeface="Calibri"/>
               </a:rPr>
-              <a:t>•  ORDER_ITEM cannot exist on its own, an order line means nothing without its order.</a:t>
+              <a:t>•  An inspection is of one supplier's supply of one product.</a:t>
             </a:r>
           </a:p>
           <a:p>
@@ -3996,7 +3756,7 @@
                 </a:solidFill>
                 <a:latin typeface="Calibri"/>
               </a:rPr>
-              <a:t>•  ItemNo (1, 2, 3 and so on) is only unique inside one order, so it is a partial key, shown with a dashed underline.</a:t>
+              <a:t>•  Not of the supplier, and not of the product, which is why the ER model needed two separate links and still could not say it.</a:t>
             </a:r>
           </a:p>
           <a:p>
@@ -4012,7 +3772,7 @@
                 </a:solidFill>
                 <a:latin typeface="Calibri"/>
               </a:rPr>
-              <a:t>•  Its real key is therefore OrderID + ItemNo.</a:t>
+              <a:t>•  So the whole SUPPLIER, SUPPLIES, PRODUCT arrangement is boxed and treated as one object, and INSPECTION joins the box.</a:t>
             </a:r>
           </a:p>
           <a:p>
@@ -4028,7 +3788,7 @@
                 </a:solidFill>
                 <a:latin typeface="Calibri"/>
               </a:rPr>
-              <a:t>•  Drawn with a double border, and the diamond joining it to ORDERS is a double diamond, meaning that relationship gives it its identity.</a:t>
+              <a:t>•  In tables: the aggregate is the SUPPLIES table, and INSPECTION carries SupplierID with ProductID as a single foreign key into it.</a:t>
             </a:r>
           </a:p>
           <a:p>
@@ -4044,7 +3804,7 @@
                 </a:solidFill>
                 <a:latin typeface="Calibri"/>
               </a:rPr>
-              <a:t>•  It replaces the M:N CONTAINS relationship from the ER model.</a:t>
+              <a:t>•  An inspection therefore cannot name a pair that is not actually supplied.</a:t>
             </a:r>
           </a:p>
         </p:txBody>
@@ -4075,7 +3835,7 @@
         </p:nvSpPr>
         <p:spPr>
           <a:xfrm>
-            <a:off x="457200" y="292608"/>
+            <a:off x="457200" y="237744"/>
             <a:ext cx="11338560" cy="566928"/>
           </a:xfrm>
           <a:prstGeom prst="rect">
@@ -4097,7 +3857,7 @@
                 </a:solidFill>
                 <a:latin typeface="Calibri"/>
               </a:rPr>
-              <a:t>6. Turning the Model into Tables</a:t>
+              <a:t>5. The Aggregation on Its Own</a:t>
             </a:r>
           </a:p>
         </p:txBody>
@@ -4110,7 +3870,7 @@
         </p:nvSpPr>
         <p:spPr>
           <a:xfrm>
-            <a:off x="457200" y="950976"/>
+            <a:off x="457200" y="896112"/>
             <a:ext cx="11338560" cy="18288"/>
           </a:xfrm>
           <a:prstGeom prst="rect">
@@ -4146,192 +3906,30 @@
           </a:p>
         </p:txBody>
       </p:sp>
-      <p:sp>
-        <p:nvSpPr>
-          <p:cNvPr id="4" name="TextBox 3"/>
-          <p:cNvSpPr txBox="1"/>
+      <p:pic>
+        <p:nvPicPr>
+          <p:cNvPr id="4" name="Picture 3" descr="eer_aggregation.png"/>
+          <p:cNvPicPr>
+            <a:picLocks noChangeAspect="1"/>
+          </p:cNvPicPr>
           <p:nvPr/>
-        </p:nvSpPr>
-        <p:spPr>
-          <a:xfrm>
-            <a:off x="457200" y="1024128"/>
-            <a:ext cx="11338560" cy="384048"/>
+        </p:nvPicPr>
+        <p:blipFill>
+          <a:blip r:embed="rId2"/>
+          <a:stretch>
+            <a:fillRect/>
+          </a:stretch>
+        </p:blipFill>
+        <p:spPr>
+          <a:xfrm>
+            <a:off x="2450524" y="1078992"/>
+            <a:ext cx="7290645" cy="5596127"/>
           </a:xfrm>
           <a:prstGeom prst="rect">
             <a:avLst/>
           </a:prstGeom>
-          <a:noFill/>
-        </p:spPr>
-        <p:txBody>
-          <a:bodyPr wrap="square">
-            <a:spAutoFit/>
-          </a:bodyPr>
-          <a:lstStyle/>
-          <a:p>
-            <a:pPr algn="l"/>
-            <a:r>
-              <a:rPr sz="1350" b="0" i="1">
-                <a:solidFill>
-                  <a:srgbClr val="444444"/>
-                </a:solidFill>
-                <a:latin typeface="Calibri"/>
-              </a:rPr>
-              <a:t>the standard mapping rules</a:t>
-            </a:r>
-          </a:p>
-        </p:txBody>
-      </p:sp>
-      <p:sp>
-        <p:nvSpPr>
-          <p:cNvPr id="5" name="TextBox 4"/>
-          <p:cNvSpPr txBox="1"/>
-          <p:nvPr/>
-        </p:nvSpPr>
-        <p:spPr>
-          <a:xfrm>
-            <a:off x="640080" y="1517904"/>
-            <a:ext cx="10972800" cy="5065776"/>
-          </a:xfrm>
-          <a:prstGeom prst="rect">
-            <a:avLst/>
-          </a:prstGeom>
-          <a:noFill/>
-        </p:spPr>
-        <p:txBody>
-          <a:bodyPr wrap="square">
-            <a:spAutoFit/>
-          </a:bodyPr>
-          <a:lstStyle/>
-          <a:p>
-            <a:pPr>
-              <a:spcAft>
-                <a:spcPts val="900"/>
-              </a:spcAft>
-            </a:pPr>
-            <a:r>
-              <a:rPr sz="1600">
-                <a:solidFill>
-                  <a:srgbClr val="000000"/>
-                </a:solidFill>
-                <a:latin typeface="Calibri"/>
-              </a:rPr>
-              <a:t>•  Each entity becomes one table, and its key attribute becomes the primary key.</a:t>
-            </a:r>
-          </a:p>
-          <a:p>
-            <a:pPr>
-              <a:spcAft>
-                <a:spcPts val="900"/>
-              </a:spcAft>
-            </a:pPr>
-            <a:r>
-              <a:rPr sz="1600">
-                <a:solidFill>
-                  <a:srgbClr val="000000"/>
-                </a:solidFill>
-                <a:latin typeface="Calibri"/>
-              </a:rPr>
-              <a:t>•  Each 1:N relationship becomes a foreign key stored on the 'many' side.</a:t>
-            </a:r>
-          </a:p>
-          <a:p>
-            <a:pPr>
-              <a:spcAft>
-                <a:spcPts val="900"/>
-              </a:spcAft>
-            </a:pPr>
-            <a:r>
-              <a:rPr sz="1600">
-                <a:solidFill>
-                  <a:srgbClr val="000000"/>
-                </a:solidFill>
-                <a:latin typeface="Calibri"/>
-              </a:rPr>
-              <a:t>•  Each M:N relationship becomes a new table whose primary key is the two keys put together.</a:t>
-            </a:r>
-          </a:p>
-          <a:p>
-            <a:pPr>
-              <a:spcAft>
-                <a:spcPts val="900"/>
-              </a:spcAft>
-            </a:pPr>
-            <a:r>
-              <a:rPr sz="1600">
-                <a:solidFill>
-                  <a:srgbClr val="000000"/>
-                </a:solidFill>
-                <a:latin typeface="Calibri"/>
-              </a:rPr>
-              <a:t>•  Each multivalued attribute becomes its own small table.</a:t>
-            </a:r>
-          </a:p>
-          <a:p>
-            <a:pPr>
-              <a:spcAft>
-                <a:spcPts val="900"/>
-              </a:spcAft>
-            </a:pPr>
-            <a:r>
-              <a:rPr sz="1600">
-                <a:solidFill>
-                  <a:srgbClr val="000000"/>
-                </a:solidFill>
-                <a:latin typeface="Calibri"/>
-              </a:rPr>
-              <a:t>•  Each composite attribute becomes one column per part.</a:t>
-            </a:r>
-          </a:p>
-          <a:p>
-            <a:pPr>
-              <a:spcAft>
-                <a:spcPts val="900"/>
-              </a:spcAft>
-            </a:pPr>
-            <a:r>
-              <a:rPr sz="1600">
-                <a:solidFill>
-                  <a:srgbClr val="000000"/>
-                </a:solidFill>
-                <a:latin typeface="Calibri"/>
-              </a:rPr>
-              <a:t>•  A derived attribute is not stored at all, it is calculated when needed.</a:t>
-            </a:r>
-          </a:p>
-          <a:p>
-            <a:pPr>
-              <a:spcAft>
-                <a:spcPts val="900"/>
-              </a:spcAft>
-            </a:pPr>
-            <a:r>
-              <a:rPr sz="1600">
-                <a:solidFill>
-                  <a:srgbClr val="000000"/>
-                </a:solidFill>
-                <a:latin typeface="Calibri"/>
-              </a:rPr>
-              <a:t>•  A weak entity becomes a table keyed by its owner's key plus its own partial key.</a:t>
-            </a:r>
-          </a:p>
-          <a:p>
-            <a:pPr>
-              <a:spcAft>
-                <a:spcPts val="900"/>
-              </a:spcAft>
-            </a:pPr>
-            <a:r>
-              <a:rPr sz="1600">
-                <a:solidFill>
-                  <a:srgbClr val="000000"/>
-                </a:solidFill>
-                <a:latin typeface="Calibri"/>
-              </a:rPr>
-              <a:t>•  A specialization becomes one table per subclass, each sharing the superclass's key.</a:t>
-            </a:r>
-          </a:p>
-        </p:txBody>
-      </p:sp>
+        </p:spPr>
+      </p:pic>
     </p:spTree>
   </p:cSld>
   <p:clrMapOvr>
@@ -4380,7 +3978,7 @@
                 </a:solidFill>
                 <a:latin typeface="Calibri"/>
               </a:rPr>
-              <a:t>7. Why Sample Data Comes First</a:t>
+              <a:t>5. What EER Added, and Why</a:t>
             </a:r>
           </a:p>
         </p:txBody>
@@ -4459,114 +4057,521 @@
                 </a:solidFill>
                 <a:latin typeface="Calibri"/>
               </a:rPr>
-              <a:t>the dependencies drive every split that follows</a:t>
-            </a:r>
-          </a:p>
-        </p:txBody>
-      </p:sp>
-      <p:sp>
-        <p:nvSpPr>
-          <p:cNvPr id="5" name="TextBox 4"/>
-          <p:cNvSpPr txBox="1"/>
+              <a:t>each addition describes something plain ER cannot</a:t>
+            </a:r>
+          </a:p>
+        </p:txBody>
+      </p:sp>
+      <p:graphicFrame>
+        <p:nvGraphicFramePr>
+          <p:cNvPr id="5" name="Table 4"/>
+          <p:cNvGraphicFramePr>
+            <a:graphicFrameLocks noGrp="1"/>
+          </p:cNvGraphicFramePr>
           <p:nvPr/>
-        </p:nvSpPr>
-        <p:spPr>
-          <a:xfrm>
-            <a:off x="640080" y="1517904"/>
-            <a:ext cx="10972800" cy="5065776"/>
-          </a:xfrm>
-          <a:prstGeom prst="rect">
-            <a:avLst/>
-          </a:prstGeom>
-          <a:noFill/>
-        </p:spPr>
-        <p:txBody>
-          <a:bodyPr wrap="square">
-            <a:spAutoFit/>
-          </a:bodyPr>
-          <a:lstStyle/>
-          <a:p>
-            <a:pPr>
-              <a:spcAft>
-                <a:spcPts val="900"/>
-              </a:spcAft>
-            </a:pPr>
-            <a:r>
-              <a:rPr sz="1700">
-                <a:solidFill>
-                  <a:srgbClr val="000000"/>
-                </a:solidFill>
-                <a:latin typeface="Calibri"/>
-              </a:rPr>
-              <a:t>•  A functional dependency X -&gt; Y means: if you know X, then Y is fixed.</a:t>
-            </a:r>
-          </a:p>
-          <a:p>
-            <a:pPr lvl="1">
-              <a:spcAft>
-                <a:spcPts val="900"/>
-              </a:spcAft>
-            </a:pPr>
-            <a:r>
-              <a:rPr sz="1500">
-                <a:solidFill>
-                  <a:srgbClr val="444444"/>
-                </a:solidFill>
-                <a:latin typeface="Calibri"/>
-              </a:rPr>
-              <a:t>-  Example, CustID -&gt; CName: once the customer ID is known, the name is decided.</a:t>
-            </a:r>
-          </a:p>
-          <a:p>
-            <a:pPr>
-              <a:spcAft>
-                <a:spcPts val="900"/>
-              </a:spcAft>
-            </a:pPr>
-            <a:r>
-              <a:rPr sz="1700">
-                <a:solidFill>
-                  <a:srgbClr val="000000"/>
-                </a:solidFill>
-                <a:latin typeface="Calibri"/>
-              </a:rPr>
-              <a:t>•  Each normal form is a rule about which dependencies a table may contain, so the dependencies have to be settled before any splitting starts.</a:t>
-            </a:r>
-          </a:p>
-          <a:p>
-            <a:pPr>
-              <a:spcAft>
-                <a:spcPts val="900"/>
-              </a:spcAft>
-            </a:pPr>
-            <a:r>
-              <a:rPr sz="1700">
-                <a:solidFill>
-                  <a:srgbClr val="000000"/>
-                </a:solidFill>
-                <a:latin typeface="Calibri"/>
-              </a:rPr>
-              <a:t>•  Data cannot prove a dependency, but two rows can kill one: agree on X, disagree on Y, and X -&gt; Y is gone.</a:t>
-            </a:r>
-          </a:p>
-          <a:p>
-            <a:pPr>
-              <a:spcAft>
-                <a:spcPts val="900"/>
-              </a:spcAft>
-            </a:pPr>
-            <a:r>
-              <a:rPr sz="1700">
-                <a:solidFill>
-                  <a:srgbClr val="000000"/>
-                </a:solidFill>
-                <a:latin typeface="Calibri"/>
-              </a:rPr>
-              <a:t>•  So every relation gets at least five rows, and every candidate dependency is checked against them.</a:t>
-            </a:r>
-          </a:p>
-        </p:txBody>
-      </p:sp>
+        </p:nvGraphicFramePr>
+        <p:xfrm>
+          <a:off x="1432407" y="1860804"/>
+          <a:ext cx="9326880" cy="4425696"/>
+        </p:xfrm>
+        <a:graphic>
+          <a:graphicData uri="http://schemas.openxmlformats.org/drawingml/2006/table">
+            <a:tbl>
+              <a:tblPr firstRow="1" bandRow="1">
+                <a:tableStyleId>{5C22544A-7EE6-4342-B048-85BDC9FD1C3A}</a:tableStyleId>
+              </a:tblPr>
+              <a:tblGrid>
+                <a:gridCol w="4206240"/>
+                <a:gridCol w="5120640"/>
+              </a:tblGrid>
+              <a:tr h="402336">
+                <a:tc>
+                  <a:txBody>
+                    <a:bodyPr/>
+                    <a:lstStyle/>
+                    <a:p>
+                      <a:r>
+                        <a:rPr sz="1300" b="1">
+                          <a:solidFill>
+                            <a:srgbClr val="000000"/>
+                          </a:solidFill>
+                        </a:rPr>
+                        <a:t>EER feature</a:t>
+                      </a:r>
+                    </a:p>
+                  </a:txBody>
+                  <a:tcPr anchor="ctr">
+                    <a:solidFill>
+                      <a:srgbClr val="D9D9D9"/>
+                    </a:solidFill>
+                  </a:tcPr>
+                </a:tc>
+                <a:tc>
+                  <a:txBody>
+                    <a:bodyPr/>
+                    <a:lstStyle/>
+                    <a:p>
+                      <a:r>
+                        <a:rPr sz="1300" b="1">
+                          <a:solidFill>
+                            <a:srgbClr val="000000"/>
+                          </a:solidFill>
+                        </a:rPr>
+                        <a:t>Where</a:t>
+                      </a:r>
+                    </a:p>
+                  </a:txBody>
+                  <a:tcPr anchor="ctr">
+                    <a:solidFill>
+                      <a:srgbClr val="D9D9D9"/>
+                    </a:solidFill>
+                  </a:tcPr>
+                </a:tc>
+              </a:tr>
+              <a:tr h="402336">
+                <a:tc>
+                  <a:txBody>
+                    <a:bodyPr/>
+                    <a:lstStyle/>
+                    <a:p>
+                      <a:r>
+                        <a:rPr sz="1200">
+                          <a:solidFill>
+                            <a:srgbClr val="000000"/>
+                          </a:solidFill>
+                        </a:rPr>
+                        <a:t>Weak entity</a:t>
+                      </a:r>
+                    </a:p>
+                  </a:txBody>
+                  <a:tcPr anchor="ctr">
+                    <a:solidFill>
+                      <a:srgbClr val="F4F4F4"/>
+                    </a:solidFill>
+                  </a:tcPr>
+                </a:tc>
+                <a:tc>
+                  <a:txBody>
+                    <a:bodyPr/>
+                    <a:lstStyle/>
+                    <a:p>
+                      <a:r>
+                        <a:rPr sz="1200">
+                          <a:solidFill>
+                            <a:srgbClr val="000000"/>
+                          </a:solidFill>
+                        </a:rPr>
+                        <a:t>ORDER_ITEM</a:t>
+                      </a:r>
+                    </a:p>
+                  </a:txBody>
+                  <a:tcPr anchor="ctr">
+                    <a:solidFill>
+                      <a:srgbClr val="F4F4F4"/>
+                    </a:solidFill>
+                  </a:tcPr>
+                </a:tc>
+              </a:tr>
+              <a:tr h="402336">
+                <a:tc>
+                  <a:txBody>
+                    <a:bodyPr/>
+                    <a:lstStyle/>
+                    <a:p>
+                      <a:r>
+                        <a:rPr sz="1200">
+                          <a:solidFill>
+                            <a:srgbClr val="000000"/>
+                          </a:solidFill>
+                        </a:rPr>
+                        <a:t>Specialization (total, disjoint)</a:t>
+                      </a:r>
+                    </a:p>
+                  </a:txBody>
+                  <a:tcPr anchor="ctr">
+                    <a:solidFill>
+                      <a:srgbClr val="FFFFFF"/>
+                    </a:solidFill>
+                  </a:tcPr>
+                </a:tc>
+                <a:tc>
+                  <a:txBody>
+                    <a:bodyPr/>
+                    <a:lstStyle/>
+                    <a:p>
+                      <a:r>
+                        <a:rPr sz="1200">
+                          <a:solidFill>
+                            <a:srgbClr val="000000"/>
+                          </a:solidFill>
+                        </a:rPr>
+                        <a:t>EMPLOYEE to MANAGER, DRIVER</a:t>
+                      </a:r>
+                    </a:p>
+                  </a:txBody>
+                  <a:tcPr anchor="ctr">
+                    <a:solidFill>
+                      <a:srgbClr val="FFFFFF"/>
+                    </a:solidFill>
+                  </a:tcPr>
+                </a:tc>
+              </a:tr>
+              <a:tr h="402336">
+                <a:tc>
+                  <a:txBody>
+                    <a:bodyPr/>
+                    <a:lstStyle/>
+                    <a:p>
+                      <a:r>
+                        <a:rPr sz="1200">
+                          <a:solidFill>
+                            <a:srgbClr val="000000"/>
+                          </a:solidFill>
+                        </a:rPr>
+                        <a:t>Specialization (partial)</a:t>
+                      </a:r>
+                    </a:p>
+                  </a:txBody>
+                  <a:tcPr anchor="ctr">
+                    <a:solidFill>
+                      <a:srgbClr val="F4F4F4"/>
+                    </a:solidFill>
+                  </a:tcPr>
+                </a:tc>
+                <a:tc>
+                  <a:txBody>
+                    <a:bodyPr/>
+                    <a:lstStyle/>
+                    <a:p>
+                      <a:r>
+                        <a:rPr sz="1200">
+                          <a:solidFill>
+                            <a:srgbClr val="000000"/>
+                          </a:solidFill>
+                        </a:rPr>
+                        <a:t>PRODUCT to PERISHABLE_PRODUCT</a:t>
+                      </a:r>
+                    </a:p>
+                  </a:txBody>
+                  <a:tcPr anchor="ctr">
+                    <a:solidFill>
+                      <a:srgbClr val="F4F4F4"/>
+                    </a:solidFill>
+                  </a:tcPr>
+                </a:tc>
+              </a:tr>
+              <a:tr h="402336">
+                <a:tc>
+                  <a:txBody>
+                    <a:bodyPr/>
+                    <a:lstStyle/>
+                    <a:p>
+                      <a:r>
+                        <a:rPr sz="1200">
+                          <a:solidFill>
+                            <a:srgbClr val="000000"/>
+                          </a:solidFill>
+                        </a:rPr>
+                        <a:t>Multivalued attribute</a:t>
+                      </a:r>
+                    </a:p>
+                  </a:txBody>
+                  <a:tcPr anchor="ctr">
+                    <a:solidFill>
+                      <a:srgbClr val="FFFFFF"/>
+                    </a:solidFill>
+                  </a:tcPr>
+                </a:tc>
+                <a:tc>
+                  <a:txBody>
+                    <a:bodyPr/>
+                    <a:lstStyle/>
+                    <a:p>
+                      <a:r>
+                        <a:rPr sz="1200">
+                          <a:solidFill>
+                            <a:srgbClr val="000000"/>
+                          </a:solidFill>
+                        </a:rPr>
+                        <a:t>SUPPLIER.Phone</a:t>
+                      </a:r>
+                    </a:p>
+                  </a:txBody>
+                  <a:tcPr anchor="ctr">
+                    <a:solidFill>
+                      <a:srgbClr val="FFFFFF"/>
+                    </a:solidFill>
+                  </a:tcPr>
+                </a:tc>
+              </a:tr>
+              <a:tr h="402336">
+                <a:tc>
+                  <a:txBody>
+                    <a:bodyPr/>
+                    <a:lstStyle/>
+                    <a:p>
+                      <a:r>
+                        <a:rPr sz="1200">
+                          <a:solidFill>
+                            <a:srgbClr val="000000"/>
+                          </a:solidFill>
+                        </a:rPr>
+                        <a:t>Composite attribute</a:t>
+                      </a:r>
+                    </a:p>
+                  </a:txBody>
+                  <a:tcPr anchor="ctr">
+                    <a:solidFill>
+                      <a:srgbClr val="F4F4F4"/>
+                    </a:solidFill>
+                  </a:tcPr>
+                </a:tc>
+                <a:tc>
+                  <a:txBody>
+                    <a:bodyPr/>
+                    <a:lstStyle/>
+                    <a:p>
+                      <a:r>
+                        <a:rPr sz="1200">
+                          <a:solidFill>
+                            <a:srgbClr val="000000"/>
+                          </a:solidFill>
+                        </a:rPr>
+                        <a:t>CUSTOMER.Address</a:t>
+                      </a:r>
+                    </a:p>
+                  </a:txBody>
+                  <a:tcPr anchor="ctr">
+                    <a:solidFill>
+                      <a:srgbClr val="F4F4F4"/>
+                    </a:solidFill>
+                  </a:tcPr>
+                </a:tc>
+              </a:tr>
+              <a:tr h="402336">
+                <a:tc>
+                  <a:txBody>
+                    <a:bodyPr/>
+                    <a:lstStyle/>
+                    <a:p>
+                      <a:r>
+                        <a:rPr sz="1200">
+                          <a:solidFill>
+                            <a:srgbClr val="000000"/>
+                          </a:solidFill>
+                        </a:rPr>
+                        <a:t>Derived attribute</a:t>
+                      </a:r>
+                    </a:p>
+                  </a:txBody>
+                  <a:tcPr anchor="ctr">
+                    <a:solidFill>
+                      <a:srgbClr val="FFFFFF"/>
+                    </a:solidFill>
+                  </a:tcPr>
+                </a:tc>
+                <a:tc>
+                  <a:txBody>
+                    <a:bodyPr/>
+                    <a:lstStyle/>
+                    <a:p>
+                      <a:r>
+                        <a:rPr sz="1200">
+                          <a:solidFill>
+                            <a:srgbClr val="000000"/>
+                          </a:solidFill>
+                        </a:rPr>
+                        <a:t>ORDERS.TotalAmt</a:t>
+                      </a:r>
+                    </a:p>
+                  </a:txBody>
+                  <a:tcPr anchor="ctr">
+                    <a:solidFill>
+                      <a:srgbClr val="FFFFFF"/>
+                    </a:solidFill>
+                  </a:tcPr>
+                </a:tc>
+              </a:tr>
+              <a:tr h="402336">
+                <a:tc>
+                  <a:txBody>
+                    <a:bodyPr/>
+                    <a:lstStyle/>
+                    <a:p>
+                      <a:r>
+                        <a:rPr sz="1200">
+                          <a:solidFill>
+                            <a:srgbClr val="000000"/>
+                          </a:solidFill>
+                        </a:rPr>
+                        <a:t>Recursive relationship</a:t>
+                      </a:r>
+                    </a:p>
+                  </a:txBody>
+                  <a:tcPr anchor="ctr">
+                    <a:solidFill>
+                      <a:srgbClr val="F4F4F4"/>
+                    </a:solidFill>
+                  </a:tcPr>
+                </a:tc>
+                <a:tc>
+                  <a:txBody>
+                    <a:bodyPr/>
+                    <a:lstStyle/>
+                    <a:p>
+                      <a:r>
+                        <a:rPr sz="1200">
+                          <a:solidFill>
+                            <a:srgbClr val="000000"/>
+                          </a:solidFill>
+                        </a:rPr>
+                        <a:t>EMPLOYEE SUPERVISES EMPLOYEE</a:t>
+                      </a:r>
+                    </a:p>
+                  </a:txBody>
+                  <a:tcPr anchor="ctr">
+                    <a:solidFill>
+                      <a:srgbClr val="F4F4F4"/>
+                    </a:solidFill>
+                  </a:tcPr>
+                </a:tc>
+              </a:tr>
+              <a:tr h="402336">
+                <a:tc>
+                  <a:txBody>
+                    <a:bodyPr/>
+                    <a:lstStyle/>
+                    <a:p>
+                      <a:r>
+                        <a:rPr sz="1200">
+                          <a:solidFill>
+                            <a:srgbClr val="000000"/>
+                          </a:solidFill>
+                        </a:rPr>
+                        <a:t>Generalization (total, disjoint)</a:t>
+                      </a:r>
+                    </a:p>
+                  </a:txBody>
+                  <a:tcPr anchor="ctr">
+                    <a:solidFill>
+                      <a:srgbClr val="FFFFFF"/>
+                    </a:solidFill>
+                  </a:tcPr>
+                </a:tc>
+                <a:tc>
+                  <a:txBody>
+                    <a:bodyPr/>
+                    <a:lstStyle/>
+                    <a:p>
+                      <a:r>
+                        <a:rPr sz="1200">
+                          <a:solidFill>
+                            <a:srgbClr val="000000"/>
+                          </a:solidFill>
+                        </a:rPr>
+                        <a:t>SHIPMENT + GOODS_RETURN to GOODS_MOVEMENT</a:t>
+                      </a:r>
+                    </a:p>
+                  </a:txBody>
+                  <a:tcPr anchor="ctr">
+                    <a:solidFill>
+                      <a:srgbClr val="FFFFFF"/>
+                    </a:solidFill>
+                  </a:tcPr>
+                </a:tc>
+              </a:tr>
+              <a:tr h="402336">
+                <a:tc>
+                  <a:txBody>
+                    <a:bodyPr/>
+                    <a:lstStyle/>
+                    <a:p>
+                      <a:r>
+                        <a:rPr sz="1200">
+                          <a:solidFill>
+                            <a:srgbClr val="000000"/>
+                          </a:solidFill>
+                        </a:rPr>
+                        <a:t>Aggregation</a:t>
+                      </a:r>
+                    </a:p>
+                  </a:txBody>
+                  <a:tcPr anchor="ctr">
+                    <a:solidFill>
+                      <a:srgbClr val="F4F4F4"/>
+                    </a:solidFill>
+                  </a:tcPr>
+                </a:tc>
+                <a:tc>
+                  <a:txBody>
+                    <a:bodyPr/>
+                    <a:lstStyle/>
+                    <a:p>
+                      <a:r>
+                        <a:rPr sz="1200">
+                          <a:solidFill>
+                            <a:srgbClr val="000000"/>
+                          </a:solidFill>
+                        </a:rPr>
+                        <a:t>SUPPLIER SUPPLIES PRODUCT, then INSPECTED_IN</a:t>
+                      </a:r>
+                    </a:p>
+                  </a:txBody>
+                  <a:tcPr anchor="ctr">
+                    <a:solidFill>
+                      <a:srgbClr val="F4F4F4"/>
+                    </a:solidFill>
+                  </a:tcPr>
+                </a:tc>
+              </a:tr>
+              <a:tr h="402336">
+                <a:tc>
+                  <a:txBody>
+                    <a:bodyPr/>
+                    <a:lstStyle/>
+                    <a:p>
+                      <a:r>
+                        <a:rPr sz="1200">
+                          <a:solidFill>
+                            <a:srgbClr val="000000"/>
+                          </a:solidFill>
+                        </a:rPr>
+                        <a:t>1:1 relationship made precise</a:t>
+                      </a:r>
+                    </a:p>
+                  </a:txBody>
+                  <a:tcPr anchor="ctr">
+                    <a:solidFill>
+                      <a:srgbClr val="FFFFFF"/>
+                    </a:solidFill>
+                  </a:tcPr>
+                </a:tc>
+                <a:tc>
+                  <a:txBody>
+                    <a:bodyPr/>
+                    <a:lstStyle/>
+                    <a:p>
+                      <a:r>
+                        <a:rPr sz="1200">
+                          <a:solidFill>
+                            <a:srgbClr val="000000"/>
+                          </a:solidFill>
+                        </a:rPr>
+                        <a:t>WAREHOUSE MANAGES to MANAGER</a:t>
+                      </a:r>
+                    </a:p>
+                  </a:txBody>
+                  <a:tcPr anchor="ctr">
+                    <a:solidFill>
+                      <a:srgbClr val="FFFFFF"/>
+                    </a:solidFill>
+                  </a:tcPr>
+                </a:tc>
+              </a:tr>
+            </a:tbl>
+          </a:graphicData>
+        </a:graphic>
+      </p:graphicFrame>
     </p:spTree>
   </p:cSld>
   <p:clrMapOvr>
@@ -4593,7 +4598,7 @@
         </p:nvSpPr>
         <p:spPr>
           <a:xfrm>
-            <a:off x="457200" y="237744"/>
+            <a:off x="457200" y="292608"/>
             <a:ext cx="11338560" cy="566928"/>
           </a:xfrm>
           <a:prstGeom prst="rect">
@@ -4615,7 +4620,7 @@
                 </a:solidFill>
                 <a:latin typeface="Calibri"/>
               </a:rPr>
-              <a:t>7. The Sample Rows</a:t>
+              <a:t>5. The Weak Entity</a:t>
             </a:r>
           </a:p>
         </p:txBody>
@@ -4628,7 +4633,7 @@
         </p:nvSpPr>
         <p:spPr>
           <a:xfrm>
-            <a:off x="457200" y="896112"/>
+            <a:off x="457200" y="950976"/>
             <a:ext cx="11338560" cy="18288"/>
           </a:xfrm>
           <a:prstGeom prst="rect">
@@ -4672,6 +4677,807 @@
         </p:nvSpPr>
         <p:spPr>
           <a:xfrm>
+            <a:off x="457200" y="1024128"/>
+            <a:ext cx="11338560" cy="384048"/>
+          </a:xfrm>
+          <a:prstGeom prst="rect">
+            <a:avLst/>
+          </a:prstGeom>
+          <a:noFill/>
+        </p:spPr>
+        <p:txBody>
+          <a:bodyPr wrap="square">
+            <a:spAutoFit/>
+          </a:bodyPr>
+          <a:lstStyle/>
+          <a:p>
+            <a:pPr algn="l"/>
+            <a:r>
+              <a:rPr sz="1350" b="0" i="1">
+                <a:solidFill>
+                  <a:srgbClr val="444444"/>
+                </a:solidFill>
+                <a:latin typeface="Calibri"/>
+              </a:rPr>
+              <a:t>why ORDER_ITEM is drawn differently from every other box</a:t>
+            </a:r>
+          </a:p>
+        </p:txBody>
+      </p:sp>
+      <p:sp>
+        <p:nvSpPr>
+          <p:cNvPr id="5" name="TextBox 4"/>
+          <p:cNvSpPr txBox="1"/>
+          <p:nvPr/>
+        </p:nvSpPr>
+        <p:spPr>
+          <a:xfrm>
+            <a:off x="640080" y="1517904"/>
+            <a:ext cx="10972800" cy="5065776"/>
+          </a:xfrm>
+          <a:prstGeom prst="rect">
+            <a:avLst/>
+          </a:prstGeom>
+          <a:noFill/>
+        </p:spPr>
+        <p:txBody>
+          <a:bodyPr wrap="square">
+            <a:spAutoFit/>
+          </a:bodyPr>
+          <a:lstStyle/>
+          <a:p>
+            <a:pPr>
+              <a:spcAft>
+                <a:spcPts val="900"/>
+              </a:spcAft>
+            </a:pPr>
+            <a:r>
+              <a:rPr sz="1700">
+                <a:solidFill>
+                  <a:srgbClr val="000000"/>
+                </a:solidFill>
+                <a:latin typeface="Calibri"/>
+              </a:rPr>
+              <a:t>•  ORDER_ITEM cannot exist on its own, an order line means nothing without its order.</a:t>
+            </a:r>
+          </a:p>
+          <a:p>
+            <a:pPr>
+              <a:spcAft>
+                <a:spcPts val="900"/>
+              </a:spcAft>
+            </a:pPr>
+            <a:r>
+              <a:rPr sz="1700">
+                <a:solidFill>
+                  <a:srgbClr val="000000"/>
+                </a:solidFill>
+                <a:latin typeface="Calibri"/>
+              </a:rPr>
+              <a:t>•  ItemNo (1, 2, 3 and so on) is only unique inside one order, so it is a partial key, shown with a dashed underline.</a:t>
+            </a:r>
+          </a:p>
+          <a:p>
+            <a:pPr>
+              <a:spcAft>
+                <a:spcPts val="900"/>
+              </a:spcAft>
+            </a:pPr>
+            <a:r>
+              <a:rPr sz="1700">
+                <a:solidFill>
+                  <a:srgbClr val="000000"/>
+                </a:solidFill>
+                <a:latin typeface="Calibri"/>
+              </a:rPr>
+              <a:t>•  Its real key is therefore OrderID + ItemNo.</a:t>
+            </a:r>
+          </a:p>
+          <a:p>
+            <a:pPr>
+              <a:spcAft>
+                <a:spcPts val="900"/>
+              </a:spcAft>
+            </a:pPr>
+            <a:r>
+              <a:rPr sz="1700">
+                <a:solidFill>
+                  <a:srgbClr val="000000"/>
+                </a:solidFill>
+                <a:latin typeface="Calibri"/>
+              </a:rPr>
+              <a:t>•  Drawn with a double border, and the diamond joining it to ORDERS is a double diamond, meaning that relationship gives it its identity.</a:t>
+            </a:r>
+          </a:p>
+          <a:p>
+            <a:pPr>
+              <a:spcAft>
+                <a:spcPts val="900"/>
+              </a:spcAft>
+            </a:pPr>
+            <a:r>
+              <a:rPr sz="1700">
+                <a:solidFill>
+                  <a:srgbClr val="000000"/>
+                </a:solidFill>
+                <a:latin typeface="Calibri"/>
+              </a:rPr>
+              <a:t>•  It replaces the M:N CONTAINS relationship from the ER model.</a:t>
+            </a:r>
+          </a:p>
+        </p:txBody>
+      </p:sp>
+    </p:spTree>
+  </p:cSld>
+  <p:clrMapOvr>
+    <a:masterClrMapping/>
+  </p:clrMapOvr>
+</p:sld>
+</file>
+
+<file path=ppt/slides/slide15.xml><?xml version="1.0" encoding="utf-8"?>
+<p:sld xmlns:a="http://schemas.openxmlformats.org/drawingml/2006/main" xmlns:p="http://schemas.openxmlformats.org/presentationml/2006/main" xmlns:r="http://schemas.openxmlformats.org/officeDocument/2006/relationships">
+  <p:cSld>
+    <p:spTree>
+      <p:nvGrpSpPr>
+        <p:cNvPr id="1" name=""/>
+        <p:cNvGrpSpPr/>
+        <p:nvPr/>
+      </p:nvGrpSpPr>
+      <p:grpSpPr/>
+      <p:sp>
+        <p:nvSpPr>
+          <p:cNvPr id="2" name="TextBox 1"/>
+          <p:cNvSpPr txBox="1"/>
+          <p:nvPr/>
+        </p:nvSpPr>
+        <p:spPr>
+          <a:xfrm>
+            <a:off x="457200" y="292608"/>
+            <a:ext cx="11338560" cy="566928"/>
+          </a:xfrm>
+          <a:prstGeom prst="rect">
+            <a:avLst/>
+          </a:prstGeom>
+          <a:noFill/>
+        </p:spPr>
+        <p:txBody>
+          <a:bodyPr wrap="square">
+            <a:spAutoFit/>
+          </a:bodyPr>
+          <a:lstStyle/>
+          <a:p>
+            <a:pPr algn="l"/>
+            <a:r>
+              <a:rPr sz="2600" b="1" i="0">
+                <a:solidFill>
+                  <a:srgbClr val="000000"/>
+                </a:solidFill>
+                <a:latin typeface="Calibri"/>
+              </a:rPr>
+              <a:t>6. Turning the Model into Tables</a:t>
+            </a:r>
+          </a:p>
+        </p:txBody>
+      </p:sp>
+      <p:sp>
+        <p:nvSpPr>
+          <p:cNvPr id="3" name="Rectangle 2"/>
+          <p:cNvSpPr/>
+          <p:nvPr/>
+        </p:nvSpPr>
+        <p:spPr>
+          <a:xfrm>
+            <a:off x="457200" y="950976"/>
+            <a:ext cx="11338560" cy="18288"/>
+          </a:xfrm>
+          <a:prstGeom prst="rect">
+            <a:avLst/>
+          </a:prstGeom>
+          <a:solidFill>
+            <a:srgbClr val="000000"/>
+          </a:solidFill>
+          <a:ln>
+            <a:noFill/>
+          </a:ln>
+          <a:effectLst/>
+        </p:spPr>
+        <p:style>
+          <a:lnRef idx="1">
+            <a:schemeClr val="accent1"/>
+          </a:lnRef>
+          <a:fillRef idx="3">
+            <a:schemeClr val="accent1"/>
+          </a:fillRef>
+          <a:effectRef idx="2">
+            <a:schemeClr val="accent1"/>
+          </a:effectRef>
+          <a:fontRef idx="minor">
+            <a:schemeClr val="lt1"/>
+          </a:fontRef>
+        </p:style>
+        <p:txBody>
+          <a:bodyPr rtlCol="0" anchor="ctr"/>
+          <a:lstStyle/>
+          <a:p>
+            <a:pPr algn="ctr"/>
+          </a:p>
+        </p:txBody>
+      </p:sp>
+      <p:sp>
+        <p:nvSpPr>
+          <p:cNvPr id="4" name="TextBox 3"/>
+          <p:cNvSpPr txBox="1"/>
+          <p:nvPr/>
+        </p:nvSpPr>
+        <p:spPr>
+          <a:xfrm>
+            <a:off x="457200" y="1024128"/>
+            <a:ext cx="11338560" cy="384048"/>
+          </a:xfrm>
+          <a:prstGeom prst="rect">
+            <a:avLst/>
+          </a:prstGeom>
+          <a:noFill/>
+        </p:spPr>
+        <p:txBody>
+          <a:bodyPr wrap="square">
+            <a:spAutoFit/>
+          </a:bodyPr>
+          <a:lstStyle/>
+          <a:p>
+            <a:pPr algn="l"/>
+            <a:r>
+              <a:rPr sz="1350" b="0" i="1">
+                <a:solidFill>
+                  <a:srgbClr val="444444"/>
+                </a:solidFill>
+                <a:latin typeface="Calibri"/>
+              </a:rPr>
+              <a:t>the standard mapping rules</a:t>
+            </a:r>
+          </a:p>
+        </p:txBody>
+      </p:sp>
+      <p:sp>
+        <p:nvSpPr>
+          <p:cNvPr id="5" name="TextBox 4"/>
+          <p:cNvSpPr txBox="1"/>
+          <p:nvPr/>
+        </p:nvSpPr>
+        <p:spPr>
+          <a:xfrm>
+            <a:off x="640080" y="1517904"/>
+            <a:ext cx="10972800" cy="5065776"/>
+          </a:xfrm>
+          <a:prstGeom prst="rect">
+            <a:avLst/>
+          </a:prstGeom>
+          <a:noFill/>
+        </p:spPr>
+        <p:txBody>
+          <a:bodyPr wrap="square">
+            <a:spAutoFit/>
+          </a:bodyPr>
+          <a:lstStyle/>
+          <a:p>
+            <a:pPr>
+              <a:spcAft>
+                <a:spcPts val="900"/>
+              </a:spcAft>
+            </a:pPr>
+            <a:r>
+              <a:rPr sz="1600">
+                <a:solidFill>
+                  <a:srgbClr val="000000"/>
+                </a:solidFill>
+                <a:latin typeface="Calibri"/>
+              </a:rPr>
+              <a:t>•  Each entity becomes one table, and its key attribute becomes the primary key.</a:t>
+            </a:r>
+          </a:p>
+          <a:p>
+            <a:pPr>
+              <a:spcAft>
+                <a:spcPts val="900"/>
+              </a:spcAft>
+            </a:pPr>
+            <a:r>
+              <a:rPr sz="1600">
+                <a:solidFill>
+                  <a:srgbClr val="000000"/>
+                </a:solidFill>
+                <a:latin typeface="Calibri"/>
+              </a:rPr>
+              <a:t>•  Each 1:N relationship becomes a foreign key stored on the 'many' side.</a:t>
+            </a:r>
+          </a:p>
+          <a:p>
+            <a:pPr>
+              <a:spcAft>
+                <a:spcPts val="900"/>
+              </a:spcAft>
+            </a:pPr>
+            <a:r>
+              <a:rPr sz="1600">
+                <a:solidFill>
+                  <a:srgbClr val="000000"/>
+                </a:solidFill>
+                <a:latin typeface="Calibri"/>
+              </a:rPr>
+              <a:t>•  Each M:N relationship becomes a new table whose primary key is the two keys put together.</a:t>
+            </a:r>
+          </a:p>
+          <a:p>
+            <a:pPr>
+              <a:spcAft>
+                <a:spcPts val="900"/>
+              </a:spcAft>
+            </a:pPr>
+            <a:r>
+              <a:rPr sz="1600">
+                <a:solidFill>
+                  <a:srgbClr val="000000"/>
+                </a:solidFill>
+                <a:latin typeface="Calibri"/>
+              </a:rPr>
+              <a:t>•  Each multivalued attribute becomes its own small table.</a:t>
+            </a:r>
+          </a:p>
+          <a:p>
+            <a:pPr>
+              <a:spcAft>
+                <a:spcPts val="900"/>
+              </a:spcAft>
+            </a:pPr>
+            <a:r>
+              <a:rPr sz="1600">
+                <a:solidFill>
+                  <a:srgbClr val="000000"/>
+                </a:solidFill>
+                <a:latin typeface="Calibri"/>
+              </a:rPr>
+              <a:t>•  Each composite attribute becomes one column per part.</a:t>
+            </a:r>
+          </a:p>
+          <a:p>
+            <a:pPr>
+              <a:spcAft>
+                <a:spcPts val="900"/>
+              </a:spcAft>
+            </a:pPr>
+            <a:r>
+              <a:rPr sz="1600">
+                <a:solidFill>
+                  <a:srgbClr val="000000"/>
+                </a:solidFill>
+                <a:latin typeface="Calibri"/>
+              </a:rPr>
+              <a:t>•  A derived attribute is not stored at all, it is calculated when needed.</a:t>
+            </a:r>
+          </a:p>
+          <a:p>
+            <a:pPr>
+              <a:spcAft>
+                <a:spcPts val="900"/>
+              </a:spcAft>
+            </a:pPr>
+            <a:r>
+              <a:rPr sz="1600">
+                <a:solidFill>
+                  <a:srgbClr val="000000"/>
+                </a:solidFill>
+                <a:latin typeface="Calibri"/>
+              </a:rPr>
+              <a:t>•  A weak entity becomes a table keyed by its owner's key plus its own partial key.</a:t>
+            </a:r>
+          </a:p>
+          <a:p>
+            <a:pPr>
+              <a:spcAft>
+                <a:spcPts val="900"/>
+              </a:spcAft>
+            </a:pPr>
+            <a:r>
+              <a:rPr sz="1600">
+                <a:solidFill>
+                  <a:srgbClr val="000000"/>
+                </a:solidFill>
+                <a:latin typeface="Calibri"/>
+              </a:rPr>
+              <a:t>•  A specialization becomes one table per subclass, each sharing the superclass's key.</a:t>
+            </a:r>
+          </a:p>
+          <a:p>
+            <a:pPr>
+              <a:spcAft>
+                <a:spcPts val="900"/>
+              </a:spcAft>
+            </a:pPr>
+            <a:r>
+              <a:rPr sz="1600">
+                <a:solidFill>
+                  <a:srgbClr val="000000"/>
+                </a:solidFill>
+                <a:latin typeface="Calibri"/>
+              </a:rPr>
+              <a:t>•  A generalization is mapped the same way: one table for the superclass and one for each subclass, each subclass keyed by the superclass's key.</a:t>
+            </a:r>
+          </a:p>
+          <a:p>
+            <a:pPr>
+              <a:spcAft>
+                <a:spcPts val="900"/>
+              </a:spcAft>
+            </a:pPr>
+            <a:r>
+              <a:rPr sz="1600">
+                <a:solidFill>
+                  <a:srgbClr val="000000"/>
+                </a:solidFill>
+                <a:latin typeface="Calibri"/>
+              </a:rPr>
+              <a:t>•  Each 1:1 relationship becomes a foreign key on the side where taking part is compulsory, with a UNIQUE constraint so that one row cannot be claimed twice.</a:t>
+            </a:r>
+          </a:p>
+          <a:p>
+            <a:pPr>
+              <a:spcAft>
+                <a:spcPts val="900"/>
+              </a:spcAft>
+            </a:pPr>
+            <a:r>
+              <a:rPr sz="1600">
+                <a:solidFill>
+                  <a:srgbClr val="000000"/>
+                </a:solidFill>
+                <a:latin typeface="Calibri"/>
+              </a:rPr>
+              <a:t>•  An aggregation becomes a foreign key pointing at the primary key of the table the aggregated relationship produced.</a:t>
+            </a:r>
+          </a:p>
+        </p:txBody>
+      </p:sp>
+    </p:spTree>
+  </p:cSld>
+  <p:clrMapOvr>
+    <a:masterClrMapping/>
+  </p:clrMapOvr>
+</p:sld>
+</file>
+
+<file path=ppt/slides/slide16.xml><?xml version="1.0" encoding="utf-8"?>
+<p:sld xmlns:a="http://schemas.openxmlformats.org/drawingml/2006/main" xmlns:p="http://schemas.openxmlformats.org/presentationml/2006/main" xmlns:r="http://schemas.openxmlformats.org/officeDocument/2006/relationships">
+  <p:cSld>
+    <p:spTree>
+      <p:nvGrpSpPr>
+        <p:cNvPr id="1" name=""/>
+        <p:cNvGrpSpPr/>
+        <p:nvPr/>
+      </p:nvGrpSpPr>
+      <p:grpSpPr/>
+      <p:sp>
+        <p:nvSpPr>
+          <p:cNvPr id="2" name="TextBox 1"/>
+          <p:cNvSpPr txBox="1"/>
+          <p:nvPr/>
+        </p:nvSpPr>
+        <p:spPr>
+          <a:xfrm>
+            <a:off x="457200" y="292608"/>
+            <a:ext cx="11338560" cy="566928"/>
+          </a:xfrm>
+          <a:prstGeom prst="rect">
+            <a:avLst/>
+          </a:prstGeom>
+          <a:noFill/>
+        </p:spPr>
+        <p:txBody>
+          <a:bodyPr wrap="square">
+            <a:spAutoFit/>
+          </a:bodyPr>
+          <a:lstStyle/>
+          <a:p>
+            <a:pPr algn="l"/>
+            <a:r>
+              <a:rPr sz="2600" b="1" i="0">
+                <a:solidFill>
+                  <a:srgbClr val="000000"/>
+                </a:solidFill>
+                <a:latin typeface="Calibri"/>
+              </a:rPr>
+              <a:t>7. Why Sample Data Comes First</a:t>
+            </a:r>
+          </a:p>
+        </p:txBody>
+      </p:sp>
+      <p:sp>
+        <p:nvSpPr>
+          <p:cNvPr id="3" name="Rectangle 2"/>
+          <p:cNvSpPr/>
+          <p:nvPr/>
+        </p:nvSpPr>
+        <p:spPr>
+          <a:xfrm>
+            <a:off x="457200" y="950976"/>
+            <a:ext cx="11338560" cy="18288"/>
+          </a:xfrm>
+          <a:prstGeom prst="rect">
+            <a:avLst/>
+          </a:prstGeom>
+          <a:solidFill>
+            <a:srgbClr val="000000"/>
+          </a:solidFill>
+          <a:ln>
+            <a:noFill/>
+          </a:ln>
+          <a:effectLst/>
+        </p:spPr>
+        <p:style>
+          <a:lnRef idx="1">
+            <a:schemeClr val="accent1"/>
+          </a:lnRef>
+          <a:fillRef idx="3">
+            <a:schemeClr val="accent1"/>
+          </a:fillRef>
+          <a:effectRef idx="2">
+            <a:schemeClr val="accent1"/>
+          </a:effectRef>
+          <a:fontRef idx="minor">
+            <a:schemeClr val="lt1"/>
+          </a:fontRef>
+        </p:style>
+        <p:txBody>
+          <a:bodyPr rtlCol="0" anchor="ctr"/>
+          <a:lstStyle/>
+          <a:p>
+            <a:pPr algn="ctr"/>
+          </a:p>
+        </p:txBody>
+      </p:sp>
+      <p:sp>
+        <p:nvSpPr>
+          <p:cNvPr id="4" name="TextBox 3"/>
+          <p:cNvSpPr txBox="1"/>
+          <p:nvPr/>
+        </p:nvSpPr>
+        <p:spPr>
+          <a:xfrm>
+            <a:off x="457200" y="1024128"/>
+            <a:ext cx="11338560" cy="384048"/>
+          </a:xfrm>
+          <a:prstGeom prst="rect">
+            <a:avLst/>
+          </a:prstGeom>
+          <a:noFill/>
+        </p:spPr>
+        <p:txBody>
+          <a:bodyPr wrap="square">
+            <a:spAutoFit/>
+          </a:bodyPr>
+          <a:lstStyle/>
+          <a:p>
+            <a:pPr algn="l"/>
+            <a:r>
+              <a:rPr sz="1350" b="0" i="1">
+                <a:solidFill>
+                  <a:srgbClr val="444444"/>
+                </a:solidFill>
+                <a:latin typeface="Calibri"/>
+              </a:rPr>
+              <a:t>the dependencies drive every split that follows</a:t>
+            </a:r>
+          </a:p>
+        </p:txBody>
+      </p:sp>
+      <p:sp>
+        <p:nvSpPr>
+          <p:cNvPr id="5" name="TextBox 4"/>
+          <p:cNvSpPr txBox="1"/>
+          <p:nvPr/>
+        </p:nvSpPr>
+        <p:spPr>
+          <a:xfrm>
+            <a:off x="640080" y="1517904"/>
+            <a:ext cx="10972800" cy="5065776"/>
+          </a:xfrm>
+          <a:prstGeom prst="rect">
+            <a:avLst/>
+          </a:prstGeom>
+          <a:noFill/>
+        </p:spPr>
+        <p:txBody>
+          <a:bodyPr wrap="square">
+            <a:spAutoFit/>
+          </a:bodyPr>
+          <a:lstStyle/>
+          <a:p>
+            <a:pPr>
+              <a:spcAft>
+                <a:spcPts val="900"/>
+              </a:spcAft>
+            </a:pPr>
+            <a:r>
+              <a:rPr sz="1700">
+                <a:solidFill>
+                  <a:srgbClr val="000000"/>
+                </a:solidFill>
+                <a:latin typeface="Calibri"/>
+              </a:rPr>
+              <a:t>•  A functional dependency X -&gt; Y means: if you know X, then Y is fixed.</a:t>
+            </a:r>
+          </a:p>
+          <a:p>
+            <a:pPr lvl="1">
+              <a:spcAft>
+                <a:spcPts val="900"/>
+              </a:spcAft>
+            </a:pPr>
+            <a:r>
+              <a:rPr sz="1500">
+                <a:solidFill>
+                  <a:srgbClr val="444444"/>
+                </a:solidFill>
+                <a:latin typeface="Calibri"/>
+              </a:rPr>
+              <a:t>-  Example, CustID -&gt; CName: once the customer ID is known, the name is decided.</a:t>
+            </a:r>
+          </a:p>
+          <a:p>
+            <a:pPr>
+              <a:spcAft>
+                <a:spcPts val="900"/>
+              </a:spcAft>
+            </a:pPr>
+            <a:r>
+              <a:rPr sz="1700">
+                <a:solidFill>
+                  <a:srgbClr val="000000"/>
+                </a:solidFill>
+                <a:latin typeface="Calibri"/>
+              </a:rPr>
+              <a:t>•  Each normal form is a rule about which dependencies a table may contain, so the dependencies have to be settled before any splitting starts.</a:t>
+            </a:r>
+          </a:p>
+          <a:p>
+            <a:pPr>
+              <a:spcAft>
+                <a:spcPts val="900"/>
+              </a:spcAft>
+            </a:pPr>
+            <a:r>
+              <a:rPr sz="1700">
+                <a:solidFill>
+                  <a:srgbClr val="000000"/>
+                </a:solidFill>
+                <a:latin typeface="Calibri"/>
+              </a:rPr>
+              <a:t>•  Data cannot prove a dependency, but two rows can kill one: agree on X, disagree on Y, and X -&gt; Y is gone.</a:t>
+            </a:r>
+          </a:p>
+          <a:p>
+            <a:pPr>
+              <a:spcAft>
+                <a:spcPts val="900"/>
+              </a:spcAft>
+            </a:pPr>
+            <a:r>
+              <a:rPr sz="1700">
+                <a:solidFill>
+                  <a:srgbClr val="000000"/>
+                </a:solidFill>
+                <a:latin typeface="Calibri"/>
+              </a:rPr>
+              <a:t>•  So every relation gets at least five rows, and every candidate dependency is checked against them.</a:t>
+            </a:r>
+          </a:p>
+        </p:txBody>
+      </p:sp>
+    </p:spTree>
+  </p:cSld>
+  <p:clrMapOvr>
+    <a:masterClrMapping/>
+  </p:clrMapOvr>
+</p:sld>
+</file>
+
+<file path=ppt/slides/slide17.xml><?xml version="1.0" encoding="utf-8"?>
+<p:sld xmlns:a="http://schemas.openxmlformats.org/drawingml/2006/main" xmlns:p="http://schemas.openxmlformats.org/presentationml/2006/main" xmlns:r="http://schemas.openxmlformats.org/officeDocument/2006/relationships">
+  <p:cSld>
+    <p:spTree>
+      <p:nvGrpSpPr>
+        <p:cNvPr id="1" name=""/>
+        <p:cNvGrpSpPr/>
+        <p:nvPr/>
+      </p:nvGrpSpPr>
+      <p:grpSpPr/>
+      <p:sp>
+        <p:nvSpPr>
+          <p:cNvPr id="2" name="TextBox 1"/>
+          <p:cNvSpPr txBox="1"/>
+          <p:nvPr/>
+        </p:nvSpPr>
+        <p:spPr>
+          <a:xfrm>
+            <a:off x="457200" y="237744"/>
+            <a:ext cx="11338560" cy="566928"/>
+          </a:xfrm>
+          <a:prstGeom prst="rect">
+            <a:avLst/>
+          </a:prstGeom>
+          <a:noFill/>
+        </p:spPr>
+        <p:txBody>
+          <a:bodyPr wrap="square">
+            <a:spAutoFit/>
+          </a:bodyPr>
+          <a:lstStyle/>
+          <a:p>
+            <a:pPr algn="l"/>
+            <a:r>
+              <a:rPr sz="2600" b="1" i="0">
+                <a:solidFill>
+                  <a:srgbClr val="000000"/>
+                </a:solidFill>
+                <a:latin typeface="Calibri"/>
+              </a:rPr>
+              <a:t>7. The Sample Rows</a:t>
+            </a:r>
+          </a:p>
+        </p:txBody>
+      </p:sp>
+      <p:sp>
+        <p:nvSpPr>
+          <p:cNvPr id="3" name="Rectangle 2"/>
+          <p:cNvSpPr/>
+          <p:nvPr/>
+        </p:nvSpPr>
+        <p:spPr>
+          <a:xfrm>
+            <a:off x="457200" y="896112"/>
+            <a:ext cx="11338560" cy="18288"/>
+          </a:xfrm>
+          <a:prstGeom prst="rect">
+            <a:avLst/>
+          </a:prstGeom>
+          <a:solidFill>
+            <a:srgbClr val="000000"/>
+          </a:solidFill>
+          <a:ln>
+            <a:noFill/>
+          </a:ln>
+          <a:effectLst/>
+        </p:spPr>
+        <p:style>
+          <a:lnRef idx="1">
+            <a:schemeClr val="accent1"/>
+          </a:lnRef>
+          <a:fillRef idx="3">
+            <a:schemeClr val="accent1"/>
+          </a:fillRef>
+          <a:effectRef idx="2">
+            <a:schemeClr val="accent1"/>
+          </a:effectRef>
+          <a:fontRef idx="minor">
+            <a:schemeClr val="lt1"/>
+          </a:fontRef>
+        </p:style>
+        <p:txBody>
+          <a:bodyPr rtlCol="0" anchor="ctr"/>
+          <a:lstStyle/>
+          <a:p>
+            <a:pPr algn="ctr"/>
+          </a:p>
+        </p:txBody>
+      </p:sp>
+      <p:sp>
+        <p:nvSpPr>
+          <p:cNvPr id="4" name="TextBox 3"/>
+          <p:cNvSpPr txBox="1"/>
+          <p:nvPr/>
+        </p:nvSpPr>
+        <p:spPr>
+          <a:xfrm>
             <a:off x="457200" y="969264"/>
             <a:ext cx="11338560" cy="384048"/>
           </a:xfrm>
@@ -4731,7 +5537,7 @@
 </p:sld>
 </file>
 
-<file path=ppt/slides/slide15.xml><?xml version="1.0" encoding="utf-8"?>
+<file path=ppt/slides/slide18.xml><?xml version="1.0" encoding="utf-8"?>
 <p:sld xmlns:a="http://schemas.openxmlformats.org/drawingml/2006/main" xmlns:p="http://schemas.openxmlformats.org/presentationml/2006/main" xmlns:r="http://schemas.openxmlformats.org/officeDocument/2006/relationships">
   <p:cSld>
     <p:spTree>
@@ -5475,7 +6281,7 @@
 </p:sld>
 </file>
 
-<file path=ppt/slides/slide16.xml><?xml version="1.0" encoding="utf-8"?>
+<file path=ppt/slides/slide19.xml><?xml version="1.0" encoding="utf-8"?>
 <p:sld xmlns:a="http://schemas.openxmlformats.org/drawingml/2006/main" xmlns:p="http://schemas.openxmlformats.org/presentationml/2006/main" xmlns:r="http://schemas.openxmlformats.org/officeDocument/2006/relationships">
   <p:cSld>
     <p:spTree>
@@ -6219,7 +7025,7 @@
 </p:sld>
 </file>
 
-<file path=ppt/slides/slide17.xml><?xml version="1.0" encoding="utf-8"?>
+<file path=ppt/slides/slide2.xml><?xml version="1.0" encoding="utf-8"?>
 <p:sld xmlns:a="http://schemas.openxmlformats.org/drawingml/2006/main" xmlns:p="http://schemas.openxmlformats.org/presentationml/2006/main" xmlns:r="http://schemas.openxmlformats.org/officeDocument/2006/relationships">
   <p:cSld>
     <p:spTree>
@@ -6259,7 +7065,7 @@
                 </a:solidFill>
                 <a:latin typeface="Calibri"/>
               </a:rPr>
-              <a:t>7. Candidate Keys</a:t>
+              <a:t>Agenda</a:t>
             </a:r>
           </a:p>
         </p:txBody>
@@ -6336,45 +7142,13 @@
               </a:spcAft>
             </a:pPr>
             <a:r>
-              <a:rPr sz="1600">
-                <a:solidFill>
-                  <a:srgbClr val="000000"/>
-                </a:solidFill>
-                <a:latin typeface="Calibri"/>
-              </a:rPr>
-              <a:t>•  ORDER_LINE: start from {OrderID, ProductID} and close it.</a:t>
-            </a:r>
-          </a:p>
-          <a:p>
-            <a:pPr lvl="1">
-              <a:spcAft>
-                <a:spcPts val="900"/>
-              </a:spcAft>
-            </a:pPr>
-            <a:r>
-              <a:rPr sz="1400">
-                <a:solidFill>
-                  <a:srgbClr val="444444"/>
-                </a:solidFill>
-                <a:latin typeface="Calibri"/>
-              </a:rPr>
-              <a:t>-  F1 adds OrderDate, Status, CustID. F2 adds CName, Street, City. F3 adds State. F4 adds PName, Category, Price. F5 adds Qty.</a:t>
-            </a:r>
-          </a:p>
-          <a:p>
-            <a:pPr lvl="1">
-              <a:spcAft>
-                <a:spcPts val="900"/>
-              </a:spcAft>
-            </a:pPr>
-            <a:r>
-              <a:rPr sz="1400">
-                <a:solidFill>
-                  <a:srgbClr val="444444"/>
-                </a:solidFill>
-                <a:latin typeface="Calibri"/>
-              </a:rPr>
-              <a:t>-  All thirteen columns are reached, and neither half works alone (N1, N2), so it is the only candidate key.</a:t>
+              <a:rPr sz="1700">
+                <a:solidFill>
+                  <a:srgbClr val="000000"/>
+                </a:solidFill>
+                <a:latin typeface="Calibri"/>
+              </a:rPr>
+              <a:t>•  The problem, objectives and scope</a:t>
             </a:r>
           </a:p>
           <a:p>
@@ -6384,29 +7158,13 @@
               </a:spcAft>
             </a:pPr>
             <a:r>
-              <a:rPr sz="1600">
-                <a:solidFill>
-                  <a:srgbClr val="000000"/>
-                </a:solidFill>
-                <a:latin typeface="Calibri"/>
-              </a:rPr>
-              <a:t>•  DELIVERY_DUTY: two candidate keys, {OrderID, City} by F7 and {OrderID, DriverID} by F6.</a:t>
-            </a:r>
-          </a:p>
-          <a:p>
-            <a:pPr lvl="1">
-              <a:spcAft>
-                <a:spcPts val="900"/>
-              </a:spcAft>
-            </a:pPr>
-            <a:r>
-              <a:rPr sz="1400">
-                <a:solidFill>
-                  <a:srgbClr val="444444"/>
-                </a:solidFill>
-                <a:latin typeface="Calibri"/>
-              </a:rPr>
-              <a:t>-  That second key is exactly why it passes 3NF and still fails BCNF.</a:t>
+              <a:rPr sz="1700">
+                <a:solidFill>
+                  <a:srgbClr val="000000"/>
+                </a:solidFill>
+                <a:latin typeface="Calibri"/>
+              </a:rPr>
+              <a:t>•  Entities, attributes and relationships</a:t>
             </a:r>
           </a:p>
           <a:p>
@@ -6416,170 +7174,15 @@
               </a:spcAft>
             </a:pPr>
             <a:r>
-              <a:rPr sz="1600">
-                <a:solidFill>
-                  <a:srgbClr val="000000"/>
-                </a:solidFill>
-                <a:latin typeface="Calibri"/>
-              </a:rPr>
-              <a:t>•  SUPPLIER_PHONE: {SupplierID, Phone}, and Phone alone by F8.</a:t>
-            </a:r>
-          </a:p>
-        </p:txBody>
-      </p:sp>
-    </p:spTree>
-  </p:cSld>
-  <p:clrMapOvr>
-    <a:masterClrMapping/>
-  </p:clrMapOvr>
-</p:sld>
-</file>
-
-<file path=ppt/slides/slide18.xml><?xml version="1.0" encoding="utf-8"?>
-<p:sld xmlns:a="http://schemas.openxmlformats.org/drawingml/2006/main" xmlns:p="http://schemas.openxmlformats.org/presentationml/2006/main" xmlns:r="http://schemas.openxmlformats.org/officeDocument/2006/relationships">
-  <p:cSld>
-    <p:spTree>
-      <p:nvGrpSpPr>
-        <p:cNvPr id="1" name=""/>
-        <p:cNvGrpSpPr/>
-        <p:nvPr/>
-      </p:nvGrpSpPr>
-      <p:grpSpPr/>
-      <p:sp>
-        <p:nvSpPr>
-          <p:cNvPr id="2" name="TextBox 1"/>
-          <p:cNvSpPr txBox="1"/>
-          <p:nvPr/>
-        </p:nvSpPr>
-        <p:spPr>
-          <a:xfrm>
-            <a:off x="457200" y="292608"/>
-            <a:ext cx="11338560" cy="566928"/>
-          </a:xfrm>
-          <a:prstGeom prst="rect">
-            <a:avLst/>
-          </a:prstGeom>
-          <a:noFill/>
-        </p:spPr>
-        <p:txBody>
-          <a:bodyPr wrap="square">
-            <a:spAutoFit/>
-          </a:bodyPr>
-          <a:lstStyle/>
-          <a:p>
-            <a:pPr algn="l"/>
-            <a:r>
-              <a:rPr sz="2600" b="1" i="0">
-                <a:solidFill>
-                  <a:srgbClr val="000000"/>
-                </a:solidFill>
-                <a:latin typeface="Calibri"/>
-              </a:rPr>
-              <a:t>8. The Four Rules</a:t>
-            </a:r>
-          </a:p>
-        </p:txBody>
-      </p:sp>
-      <p:sp>
-        <p:nvSpPr>
-          <p:cNvPr id="3" name="Rectangle 2"/>
-          <p:cNvSpPr/>
-          <p:nvPr/>
-        </p:nvSpPr>
-        <p:spPr>
-          <a:xfrm>
-            <a:off x="457200" y="950976"/>
-            <a:ext cx="11338560" cy="18288"/>
-          </a:xfrm>
-          <a:prstGeom prst="rect">
-            <a:avLst/>
-          </a:prstGeom>
-          <a:solidFill>
-            <a:srgbClr val="000000"/>
-          </a:solidFill>
-          <a:ln>
-            <a:noFill/>
-          </a:ln>
-          <a:effectLst/>
-        </p:spPr>
-        <p:style>
-          <a:lnRef idx="1">
-            <a:schemeClr val="accent1"/>
-          </a:lnRef>
-          <a:fillRef idx="3">
-            <a:schemeClr val="accent1"/>
-          </a:fillRef>
-          <a:effectRef idx="2">
-            <a:schemeClr val="accent1"/>
-          </a:effectRef>
-          <a:fontRef idx="minor">
-            <a:schemeClr val="lt1"/>
-          </a:fontRef>
-        </p:style>
-        <p:txBody>
-          <a:bodyPr rtlCol="0" anchor="ctr"/>
-          <a:lstStyle/>
-          <a:p>
-            <a:pPr algn="ctr"/>
-          </a:p>
-        </p:txBody>
-      </p:sp>
-      <p:sp>
-        <p:nvSpPr>
-          <p:cNvPr id="4" name="TextBox 3"/>
-          <p:cNvSpPr txBox="1"/>
-          <p:nvPr/>
-        </p:nvSpPr>
-        <p:spPr>
-          <a:xfrm>
-            <a:off x="457200" y="1024128"/>
-            <a:ext cx="11338560" cy="384048"/>
-          </a:xfrm>
-          <a:prstGeom prst="rect">
-            <a:avLst/>
-          </a:prstGeom>
-          <a:noFill/>
-        </p:spPr>
-        <p:txBody>
-          <a:bodyPr wrap="square">
-            <a:spAutoFit/>
-          </a:bodyPr>
-          <a:lstStyle/>
-          <a:p>
-            <a:pPr algn="l"/>
-            <a:r>
-              <a:rPr sz="1350" b="0" i="1">
-                <a:solidFill>
-                  <a:srgbClr val="444444"/>
-                </a:solidFill>
-                <a:latin typeface="Calibri"/>
-              </a:rPr>
-              <a:t>start with one bad table, then split it one rule at a time</a:t>
-            </a:r>
-          </a:p>
-        </p:txBody>
-      </p:sp>
-      <p:sp>
-        <p:nvSpPr>
-          <p:cNvPr id="5" name="TextBox 4"/>
-          <p:cNvSpPr txBox="1"/>
-          <p:nvPr/>
-        </p:nvSpPr>
-        <p:spPr>
-          <a:xfrm>
-            <a:off x="640080" y="1517904"/>
-            <a:ext cx="10972800" cy="5065776"/>
-          </a:xfrm>
-          <a:prstGeom prst="rect">
-            <a:avLst/>
-          </a:prstGeom>
-          <a:noFill/>
-        </p:spPr>
-        <p:txBody>
-          <a:bodyPr wrap="square">
-            <a:spAutoFit/>
-          </a:bodyPr>
-          <a:lstStyle/>
+              <a:rPr sz="1700">
+                <a:solidFill>
+                  <a:srgbClr val="000000"/>
+                </a:solidFill>
+                <a:latin typeface="Calibri"/>
+              </a:rPr>
+              <a:t>•  The ER model</a:t>
+            </a:r>
+          </a:p>
           <a:p>
             <a:pPr>
               <a:spcAft>
@@ -6593,439 +7196,7 @@
                 </a:solidFill>
                 <a:latin typeface="Calibri"/>
               </a:rPr>
-              <a:t>•  1NF: every cell holds one value, and repeating groups move out.</a:t>
-            </a:r>
-          </a:p>
-          <a:p>
-            <a:pPr>
-              <a:spcAft>
-                <a:spcPts val="900"/>
-              </a:spcAft>
-            </a:pPr>
-            <a:r>
-              <a:rPr sz="1700">
-                <a:solidFill>
-                  <a:srgbClr val="000000"/>
-                </a:solidFill>
-                <a:latin typeface="Calibri"/>
-              </a:rPr>
-              <a:t>•  2NF: no column depends on only part of the key.</a:t>
-            </a:r>
-          </a:p>
-          <a:p>
-            <a:pPr>
-              <a:spcAft>
-                <a:spcPts val="900"/>
-              </a:spcAft>
-            </a:pPr>
-            <a:r>
-              <a:rPr sz="1700">
-                <a:solidFill>
-                  <a:srgbClr val="000000"/>
-                </a:solidFill>
-                <a:latin typeface="Calibri"/>
-              </a:rPr>
-              <a:t>•  3NF: no ordinary column decides another ordinary column.</a:t>
-            </a:r>
-          </a:p>
-          <a:p>
-            <a:pPr>
-              <a:spcAft>
-                <a:spcPts val="900"/>
-              </a:spcAft>
-            </a:pPr>
-            <a:r>
-              <a:rPr sz="1700">
-                <a:solidFill>
-                  <a:srgbClr val="000000"/>
-                </a:solidFill>
-                <a:latin typeface="Calibri"/>
-              </a:rPr>
-              <a:t>•  BCNF: the left side of every dependency must be a key.</a:t>
-            </a:r>
-          </a:p>
-          <a:p>
-            <a:pPr>
-              <a:spcAft>
-                <a:spcPts val="900"/>
-              </a:spcAft>
-            </a:pPr>
-            <a:r>
-              <a:rPr sz="1700">
-                <a:solidFill>
-                  <a:srgbClr val="000000"/>
-                </a:solidFill>
-                <a:latin typeface="Calibri"/>
-              </a:rPr>
-              <a:t>•  Each step below names the dependency from section 7 that forces the split.</a:t>
-            </a:r>
-          </a:p>
-        </p:txBody>
-      </p:sp>
-    </p:spTree>
-  </p:cSld>
-  <p:clrMapOvr>
-    <a:masterClrMapping/>
-  </p:clrMapOvr>
-</p:sld>
-</file>
-
-<file path=ppt/slides/slide19.xml><?xml version="1.0" encoding="utf-8"?>
-<p:sld xmlns:a="http://schemas.openxmlformats.org/drawingml/2006/main" xmlns:p="http://schemas.openxmlformats.org/presentationml/2006/main" xmlns:r="http://schemas.openxmlformats.org/officeDocument/2006/relationships">
-  <p:cSld>
-    <p:spTree>
-      <p:nvGrpSpPr>
-        <p:cNvPr id="1" name=""/>
-        <p:cNvGrpSpPr/>
-        <p:nvPr/>
-      </p:nvGrpSpPr>
-      <p:grpSpPr/>
-      <p:sp>
-        <p:nvSpPr>
-          <p:cNvPr id="2" name="TextBox 1"/>
-          <p:cNvSpPr txBox="1"/>
-          <p:nvPr/>
-        </p:nvSpPr>
-        <p:spPr>
-          <a:xfrm>
-            <a:off x="457200" y="292608"/>
-            <a:ext cx="11338560" cy="566928"/>
-          </a:xfrm>
-          <a:prstGeom prst="rect">
-            <a:avLst/>
-          </a:prstGeom>
-          <a:noFill/>
-        </p:spPr>
-        <p:txBody>
-          <a:bodyPr wrap="square">
-            <a:spAutoFit/>
-          </a:bodyPr>
-          <a:lstStyle/>
-          <a:p>
-            <a:pPr algn="l"/>
-            <a:r>
-              <a:rPr sz="2600" b="1" i="0">
-                <a:solidFill>
-                  <a:srgbClr val="000000"/>
-                </a:solidFill>
-                <a:latin typeface="Calibri"/>
-              </a:rPr>
-              <a:t>8. Where we start, Unnormalized Form (UNF)</a:t>
-            </a:r>
-          </a:p>
-        </p:txBody>
-      </p:sp>
-      <p:sp>
-        <p:nvSpPr>
-          <p:cNvPr id="3" name="Rectangle 2"/>
-          <p:cNvSpPr/>
-          <p:nvPr/>
-        </p:nvSpPr>
-        <p:spPr>
-          <a:xfrm>
-            <a:off x="457200" y="950976"/>
-            <a:ext cx="11338560" cy="18288"/>
-          </a:xfrm>
-          <a:prstGeom prst="rect">
-            <a:avLst/>
-          </a:prstGeom>
-          <a:solidFill>
-            <a:srgbClr val="000000"/>
-          </a:solidFill>
-          <a:ln>
-            <a:noFill/>
-          </a:ln>
-          <a:effectLst/>
-        </p:spPr>
-        <p:style>
-          <a:lnRef idx="1">
-            <a:schemeClr val="accent1"/>
-          </a:lnRef>
-          <a:fillRef idx="3">
-            <a:schemeClr val="accent1"/>
-          </a:fillRef>
-          <a:effectRef idx="2">
-            <a:schemeClr val="accent1"/>
-          </a:effectRef>
-          <a:fontRef idx="minor">
-            <a:schemeClr val="lt1"/>
-          </a:fontRef>
-        </p:style>
-        <p:txBody>
-          <a:bodyPr rtlCol="0" anchor="ctr"/>
-          <a:lstStyle/>
-          <a:p>
-            <a:pPr algn="ctr"/>
-          </a:p>
-        </p:txBody>
-      </p:sp>
-      <p:sp>
-        <p:nvSpPr>
-          <p:cNvPr id="4" name="TextBox 3"/>
-          <p:cNvSpPr txBox="1"/>
-          <p:nvPr/>
-        </p:nvSpPr>
-        <p:spPr>
-          <a:xfrm>
-            <a:off x="640080" y="1133856"/>
-            <a:ext cx="10972800" cy="5449824"/>
-          </a:xfrm>
-          <a:prstGeom prst="rect">
-            <a:avLst/>
-          </a:prstGeom>
-          <a:noFill/>
-        </p:spPr>
-        <p:txBody>
-          <a:bodyPr wrap="square">
-            <a:spAutoFit/>
-          </a:bodyPr>
-          <a:lstStyle/>
-          <a:p>
-            <a:pPr>
-              <a:spcAft>
-                <a:spcPts val="900"/>
-              </a:spcAft>
-            </a:pPr>
-            <a:r>
-              <a:rPr sz="1600">
-                <a:solidFill>
-                  <a:srgbClr val="000000"/>
-                </a:solidFill>
-                <a:latin typeface="Calibri"/>
-              </a:rPr>
-              <a:t>•  One wide table, the way a clerk keeps it in a spreadsheet.</a:t>
-            </a:r>
-          </a:p>
-          <a:p>
-            <a:pPr>
-              <a:spcAft>
-                <a:spcPts val="900"/>
-              </a:spcAft>
-            </a:pPr>
-            <a:r>
-              <a:rPr sz="1600">
-                <a:solidFill>
-                  <a:srgbClr val="000000"/>
-                </a:solidFill>
-                <a:latin typeface="Calibri"/>
-              </a:rPr>
-              <a:t>•  Three cells hold lists: SupplierPhones, Items and Delivery.</a:t>
-            </a:r>
-          </a:p>
-          <a:p>
-            <a:pPr>
-              <a:spcAft>
-                <a:spcPts val="900"/>
-              </a:spcAft>
-            </a:pPr>
-            <a:r>
-              <a:rPr sz="1600">
-                <a:solidFill>
-                  <a:srgbClr val="000000"/>
-                </a:solidFill>
-                <a:latin typeface="Calibri"/>
-              </a:rPr>
-              <a:t>•  Customer details are copied onto every order row.</a:t>
-            </a:r>
-          </a:p>
-          <a:p>
-            <a:pPr>
-              <a:spcAft>
-                <a:spcPts val="900"/>
-              </a:spcAft>
-            </a:pPr>
-            <a:r>
-              <a:rPr sz="1600">
-                <a:solidFill>
-                  <a:srgbClr val="000000"/>
-                </a:solidFill>
-                <a:latin typeface="Calibri"/>
-              </a:rPr>
-              <a:t>•  No atomic key, so no dependency can even be written down yet.</a:t>
-            </a:r>
-          </a:p>
-        </p:txBody>
-      </p:sp>
-    </p:spTree>
-  </p:cSld>
-  <p:clrMapOvr>
-    <a:masterClrMapping/>
-  </p:clrMapOvr>
-</p:sld>
-</file>
-
-<file path=ppt/slides/slide2.xml><?xml version="1.0" encoding="utf-8"?>
-<p:sld xmlns:a="http://schemas.openxmlformats.org/drawingml/2006/main" xmlns:p="http://schemas.openxmlformats.org/presentationml/2006/main" xmlns:r="http://schemas.openxmlformats.org/officeDocument/2006/relationships">
-  <p:cSld>
-    <p:spTree>
-      <p:nvGrpSpPr>
-        <p:cNvPr id="1" name=""/>
-        <p:cNvGrpSpPr/>
-        <p:nvPr/>
-      </p:nvGrpSpPr>
-      <p:grpSpPr/>
-      <p:sp>
-        <p:nvSpPr>
-          <p:cNvPr id="2" name="TextBox 1"/>
-          <p:cNvSpPr txBox="1"/>
-          <p:nvPr/>
-        </p:nvSpPr>
-        <p:spPr>
-          <a:xfrm>
-            <a:off x="457200" y="292608"/>
-            <a:ext cx="11338560" cy="566928"/>
-          </a:xfrm>
-          <a:prstGeom prst="rect">
-            <a:avLst/>
-          </a:prstGeom>
-          <a:noFill/>
-        </p:spPr>
-        <p:txBody>
-          <a:bodyPr wrap="square">
-            <a:spAutoFit/>
-          </a:bodyPr>
-          <a:lstStyle/>
-          <a:p>
-            <a:pPr algn="l"/>
-            <a:r>
-              <a:rPr sz="2600" b="1" i="0">
-                <a:solidFill>
-                  <a:srgbClr val="000000"/>
-                </a:solidFill>
-                <a:latin typeface="Calibri"/>
-              </a:rPr>
-              <a:t>Agenda</a:t>
-            </a:r>
-          </a:p>
-        </p:txBody>
-      </p:sp>
-      <p:sp>
-        <p:nvSpPr>
-          <p:cNvPr id="3" name="Rectangle 2"/>
-          <p:cNvSpPr/>
-          <p:nvPr/>
-        </p:nvSpPr>
-        <p:spPr>
-          <a:xfrm>
-            <a:off x="457200" y="950976"/>
-            <a:ext cx="11338560" cy="18288"/>
-          </a:xfrm>
-          <a:prstGeom prst="rect">
-            <a:avLst/>
-          </a:prstGeom>
-          <a:solidFill>
-            <a:srgbClr val="000000"/>
-          </a:solidFill>
-          <a:ln>
-            <a:noFill/>
-          </a:ln>
-          <a:effectLst/>
-        </p:spPr>
-        <p:style>
-          <a:lnRef idx="1">
-            <a:schemeClr val="accent1"/>
-          </a:lnRef>
-          <a:fillRef idx="3">
-            <a:schemeClr val="accent1"/>
-          </a:fillRef>
-          <a:effectRef idx="2">
-            <a:schemeClr val="accent1"/>
-          </a:effectRef>
-          <a:fontRef idx="minor">
-            <a:schemeClr val="lt1"/>
-          </a:fontRef>
-        </p:style>
-        <p:txBody>
-          <a:bodyPr rtlCol="0" anchor="ctr"/>
-          <a:lstStyle/>
-          <a:p>
-            <a:pPr algn="ctr"/>
-          </a:p>
-        </p:txBody>
-      </p:sp>
-      <p:sp>
-        <p:nvSpPr>
-          <p:cNvPr id="4" name="TextBox 3"/>
-          <p:cNvSpPr txBox="1"/>
-          <p:nvPr/>
-        </p:nvSpPr>
-        <p:spPr>
-          <a:xfrm>
-            <a:off x="640080" y="1133856"/>
-            <a:ext cx="10972800" cy="5449824"/>
-          </a:xfrm>
-          <a:prstGeom prst="rect">
-            <a:avLst/>
-          </a:prstGeom>
-          <a:noFill/>
-        </p:spPr>
-        <p:txBody>
-          <a:bodyPr wrap="square">
-            <a:spAutoFit/>
-          </a:bodyPr>
-          <a:lstStyle/>
-          <a:p>
-            <a:pPr>
-              <a:spcAft>
-                <a:spcPts val="900"/>
-              </a:spcAft>
-            </a:pPr>
-            <a:r>
-              <a:rPr sz="1700">
-                <a:solidFill>
-                  <a:srgbClr val="000000"/>
-                </a:solidFill>
-                <a:latin typeface="Calibri"/>
-              </a:rPr>
-              <a:t>•  The problem, objectives and scope</a:t>
-            </a:r>
-          </a:p>
-          <a:p>
-            <a:pPr>
-              <a:spcAft>
-                <a:spcPts val="900"/>
-              </a:spcAft>
-            </a:pPr>
-            <a:r>
-              <a:rPr sz="1700">
-                <a:solidFill>
-                  <a:srgbClr val="000000"/>
-                </a:solidFill>
-                <a:latin typeface="Calibri"/>
-              </a:rPr>
-              <a:t>•  Entities, attributes and relationships</a:t>
-            </a:r>
-          </a:p>
-          <a:p>
-            <a:pPr>
-              <a:spcAft>
-                <a:spcPts val="900"/>
-              </a:spcAft>
-            </a:pPr>
-            <a:r>
-              <a:rPr sz="1700">
-                <a:solidFill>
-                  <a:srgbClr val="000000"/>
-                </a:solidFill>
-                <a:latin typeface="Calibri"/>
-              </a:rPr>
-              <a:t>•  The ER model</a:t>
-            </a:r>
-          </a:p>
-          <a:p>
-            <a:pPr>
-              <a:spcAft>
-                <a:spcPts val="900"/>
-              </a:spcAft>
-            </a:pPr>
-            <a:r>
-              <a:rPr sz="1700">
-                <a:solidFill>
-                  <a:srgbClr val="000000"/>
-                </a:solidFill>
-                <a:latin typeface="Calibri"/>
-              </a:rPr>
-              <a:t>•  The EER model, the same design extended</a:t>
+              <a:t>•  The EER model: specialization, generalization and aggregation</a:t>
             </a:r>
           </a:p>
           <a:p>
@@ -7120,7 +7291,7 @@
         </p:nvSpPr>
         <p:spPr>
           <a:xfrm>
-            <a:off x="457200" y="237744"/>
+            <a:off x="457200" y="292608"/>
             <a:ext cx="11338560" cy="566928"/>
           </a:xfrm>
           <a:prstGeom prst="rect">
@@ -7142,7 +7313,7 @@
                 </a:solidFill>
                 <a:latin typeface="Calibri"/>
               </a:rPr>
-              <a:t>8. The Tables after UNF</a:t>
+              <a:t>7. Candidate Keys</a:t>
             </a:r>
           </a:p>
         </p:txBody>
@@ -7155,7 +7326,7 @@
         </p:nvSpPr>
         <p:spPr>
           <a:xfrm>
-            <a:off x="457200" y="896112"/>
+            <a:off x="457200" y="950976"/>
             <a:ext cx="11338560" cy="18288"/>
           </a:xfrm>
           <a:prstGeom prst="rect">
@@ -7191,30 +7362,125 @@
           </a:p>
         </p:txBody>
       </p:sp>
-      <p:pic>
-        <p:nvPicPr>
-          <p:cNvPr id="4" name="Picture 3" descr="norm_unf.png"/>
-          <p:cNvPicPr>
-            <a:picLocks noChangeAspect="1"/>
-          </p:cNvPicPr>
+      <p:sp>
+        <p:nvSpPr>
+          <p:cNvPr id="4" name="TextBox 3"/>
+          <p:cNvSpPr txBox="1"/>
           <p:nvPr/>
-        </p:nvPicPr>
-        <p:blipFill>
-          <a:blip r:embed="rId2"/>
-          <a:stretch>
-            <a:fillRect/>
-          </a:stretch>
-        </p:blipFill>
-        <p:spPr>
-          <a:xfrm>
-            <a:off x="335127" y="2295347"/>
-            <a:ext cx="11521440" cy="3163417"/>
+        </p:nvSpPr>
+        <p:spPr>
+          <a:xfrm>
+            <a:off x="640080" y="1133856"/>
+            <a:ext cx="10972800" cy="5449824"/>
           </a:xfrm>
           <a:prstGeom prst="rect">
             <a:avLst/>
           </a:prstGeom>
-        </p:spPr>
-      </p:pic>
+          <a:noFill/>
+        </p:spPr>
+        <p:txBody>
+          <a:bodyPr wrap="square">
+            <a:spAutoFit/>
+          </a:bodyPr>
+          <a:lstStyle/>
+          <a:p>
+            <a:pPr>
+              <a:spcAft>
+                <a:spcPts val="900"/>
+              </a:spcAft>
+            </a:pPr>
+            <a:r>
+              <a:rPr sz="1600">
+                <a:solidFill>
+                  <a:srgbClr val="000000"/>
+                </a:solidFill>
+                <a:latin typeface="Calibri"/>
+              </a:rPr>
+              <a:t>•  ORDER_LINE: start from {OrderID, ProductID} and close it.</a:t>
+            </a:r>
+          </a:p>
+          <a:p>
+            <a:pPr lvl="1">
+              <a:spcAft>
+                <a:spcPts val="900"/>
+              </a:spcAft>
+            </a:pPr>
+            <a:r>
+              <a:rPr sz="1400">
+                <a:solidFill>
+                  <a:srgbClr val="444444"/>
+                </a:solidFill>
+                <a:latin typeface="Calibri"/>
+              </a:rPr>
+              <a:t>-  F1 adds OrderDate, Status, CustID. F2 adds CName, Street, City. F3 adds State. F4 adds PName, Category, Price. F5 adds Qty.</a:t>
+            </a:r>
+          </a:p>
+          <a:p>
+            <a:pPr lvl="1">
+              <a:spcAft>
+                <a:spcPts val="900"/>
+              </a:spcAft>
+            </a:pPr>
+            <a:r>
+              <a:rPr sz="1400">
+                <a:solidFill>
+                  <a:srgbClr val="444444"/>
+                </a:solidFill>
+                <a:latin typeface="Calibri"/>
+              </a:rPr>
+              <a:t>-  All thirteen columns are reached, and neither half works alone (N1, N2), so it is the only candidate key.</a:t>
+            </a:r>
+          </a:p>
+          <a:p>
+            <a:pPr>
+              <a:spcAft>
+                <a:spcPts val="900"/>
+              </a:spcAft>
+            </a:pPr>
+            <a:r>
+              <a:rPr sz="1600">
+                <a:solidFill>
+                  <a:srgbClr val="000000"/>
+                </a:solidFill>
+                <a:latin typeface="Calibri"/>
+              </a:rPr>
+              <a:t>•  DELIVERY_DUTY: two candidate keys, {OrderID, City} by F7 and {OrderID, DriverID} by F6.</a:t>
+            </a:r>
+          </a:p>
+          <a:p>
+            <a:pPr lvl="1">
+              <a:spcAft>
+                <a:spcPts val="900"/>
+              </a:spcAft>
+            </a:pPr>
+            <a:r>
+              <a:rPr sz="1400">
+                <a:solidFill>
+                  <a:srgbClr val="444444"/>
+                </a:solidFill>
+                <a:latin typeface="Calibri"/>
+              </a:rPr>
+              <a:t>-  That second key is exactly why it passes 3NF and still fails BCNF.</a:t>
+            </a:r>
+          </a:p>
+          <a:p>
+            <a:pPr>
+              <a:spcAft>
+                <a:spcPts val="900"/>
+              </a:spcAft>
+            </a:pPr>
+            <a:r>
+              <a:rPr sz="1600">
+                <a:solidFill>
+                  <a:srgbClr val="000000"/>
+                </a:solidFill>
+                <a:latin typeface="Calibri"/>
+              </a:rPr>
+              <a:t>•  SUPPLIER_PHONE: {SupplierID, Phone}, and Phone alone by F8.</a:t>
+            </a:r>
+          </a:p>
+        </p:txBody>
+      </p:sp>
     </p:spTree>
   </p:cSld>
   <p:clrMapOvr>
@@ -7263,7 +7529,7 @@
                 </a:solidFill>
                 <a:latin typeface="Calibri"/>
               </a:rPr>
-              <a:t>8. First Normal Form (1NF)</a:t>
+              <a:t>8. The Four Rules</a:t>
             </a:r>
           </a:p>
         </p:txBody>
@@ -7320,8 +7586,43 @@
         </p:nvSpPr>
         <p:spPr>
           <a:xfrm>
-            <a:off x="640080" y="1133856"/>
-            <a:ext cx="10972800" cy="5449824"/>
+            <a:off x="457200" y="1024128"/>
+            <a:ext cx="11338560" cy="384048"/>
+          </a:xfrm>
+          <a:prstGeom prst="rect">
+            <a:avLst/>
+          </a:prstGeom>
+          <a:noFill/>
+        </p:spPr>
+        <p:txBody>
+          <a:bodyPr wrap="square">
+            <a:spAutoFit/>
+          </a:bodyPr>
+          <a:lstStyle/>
+          <a:p>
+            <a:pPr algn="l"/>
+            <a:r>
+              <a:rPr sz="1350" b="0" i="1">
+                <a:solidFill>
+                  <a:srgbClr val="444444"/>
+                </a:solidFill>
+                <a:latin typeface="Calibri"/>
+              </a:rPr>
+              <a:t>start with one bad table, then split it one rule at a time</a:t>
+            </a:r>
+          </a:p>
+        </p:txBody>
+      </p:sp>
+      <p:sp>
+        <p:nvSpPr>
+          <p:cNvPr id="5" name="TextBox 4"/>
+          <p:cNvSpPr txBox="1"/>
+          <p:nvPr/>
+        </p:nvSpPr>
+        <p:spPr>
+          <a:xfrm>
+            <a:off x="640080" y="1517904"/>
+            <a:ext cx="10972800" cy="5065776"/>
           </a:xfrm>
           <a:prstGeom prst="rect">
             <a:avLst/>
@@ -7340,13 +7641,13 @@
               </a:spcAft>
             </a:pPr>
             <a:r>
-              <a:rPr sz="1600">
-                <a:solidFill>
-                  <a:srgbClr val="000000"/>
-                </a:solidFill>
-                <a:latin typeface="Calibri"/>
-              </a:rPr>
-              <a:t>•  Rule: one value per cell, and repeating groups move out.</a:t>
+              <a:rPr sz="1700">
+                <a:solidFill>
+                  <a:srgbClr val="000000"/>
+                </a:solidFill>
+                <a:latin typeface="Calibri"/>
+              </a:rPr>
+              <a:t>•  1NF: every cell holds one value, and repeating groups move out.</a:t>
             </a:r>
           </a:p>
           <a:p>
@@ -7356,13 +7657,13 @@
               </a:spcAft>
             </a:pPr>
             <a:r>
-              <a:rPr sz="1600">
-                <a:solidFill>
-                  <a:srgbClr val="000000"/>
-                </a:solidFill>
-                <a:latin typeface="Calibri"/>
-              </a:rPr>
-              <a:t>•  Items become ORDER_ITEM, phones become SUPPLIER_PHONE, deliveries become DELIVERY_DUTY.</a:t>
+              <a:rPr sz="1700">
+                <a:solidFill>
+                  <a:srgbClr val="000000"/>
+                </a:solidFill>
+                <a:latin typeface="Calibri"/>
+              </a:rPr>
+              <a:t>•  2NF: no column depends on only part of the key.</a:t>
             </a:r>
           </a:p>
           <a:p>
@@ -7372,13 +7673,13 @@
               </a:spcAft>
             </a:pPr>
             <a:r>
-              <a:rPr sz="1600">
-                <a:solidFill>
-                  <a:srgbClr val="000000"/>
-                </a:solidFill>
-                <a:latin typeface="Calibri"/>
-              </a:rPr>
-              <a:t>•  ORDER_ITEM is keyed by OrderID + ProductID, because N1 and N2 rule out either column alone.</a:t>
+              <a:rPr sz="1700">
+                <a:solidFill>
+                  <a:srgbClr val="000000"/>
+                </a:solidFill>
+                <a:latin typeface="Calibri"/>
+              </a:rPr>
+              <a:t>•  3NF: no ordinary column decides another ordinary column.</a:t>
             </a:r>
           </a:p>
           <a:p>
@@ -7388,13 +7689,13 @@
               </a:spcAft>
             </a:pPr>
             <a:r>
-              <a:rPr sz="1600">
-                <a:solidFill>
-                  <a:srgbClr val="000000"/>
-                </a:solidFill>
-                <a:latin typeface="Calibri"/>
-              </a:rPr>
-              <a:t>•  DELIVERY_DUTY is keyed by OrderID + City, from F7.</a:t>
+              <a:rPr sz="1700">
+                <a:solidFill>
+                  <a:srgbClr val="000000"/>
+                </a:solidFill>
+                <a:latin typeface="Calibri"/>
+              </a:rPr>
+              <a:t>•  BCNF: the left side of every dependency must be a key.</a:t>
             </a:r>
           </a:p>
           <a:p>
@@ -7404,13 +7705,13 @@
               </a:spcAft>
             </a:pPr>
             <a:r>
-              <a:rPr sz="1600">
-                <a:solidFill>
-                  <a:srgbClr val="000000"/>
-                </a:solidFill>
-                <a:latin typeface="Calibri"/>
-              </a:rPr>
-              <a:t>•  Still wrong: F4 means PName and Category repeat on every line for the same product.</a:t>
+              <a:rPr sz="1700">
+                <a:solidFill>
+                  <a:srgbClr val="000000"/>
+                </a:solidFill>
+                <a:latin typeface="Calibri"/>
+              </a:rPr>
+              <a:t>•  Each step below names the dependency from section 7 that forces the split.</a:t>
             </a:r>
           </a:p>
         </p:txBody>
@@ -7441,7 +7742,7 @@
         </p:nvSpPr>
         <p:spPr>
           <a:xfrm>
-            <a:off x="457200" y="237744"/>
+            <a:off x="457200" y="292608"/>
             <a:ext cx="11338560" cy="566928"/>
           </a:xfrm>
           <a:prstGeom prst="rect">
@@ -7463,7 +7764,7 @@
                 </a:solidFill>
                 <a:latin typeface="Calibri"/>
               </a:rPr>
-              <a:t>8. The Tables after 1NF</a:t>
+              <a:t>8. Where we start, Unnormalized Form (UNF)</a:t>
             </a:r>
           </a:p>
         </p:txBody>
@@ -7476,7 +7777,7 @@
         </p:nvSpPr>
         <p:spPr>
           <a:xfrm>
-            <a:off x="457200" y="896112"/>
+            <a:off x="457200" y="950976"/>
             <a:ext cx="11338560" cy="18288"/>
           </a:xfrm>
           <a:prstGeom prst="rect">
@@ -7512,30 +7813,93 @@
           </a:p>
         </p:txBody>
       </p:sp>
-      <p:pic>
-        <p:nvPicPr>
-          <p:cNvPr id="4" name="Picture 3" descr="norm_1nf.png"/>
-          <p:cNvPicPr>
-            <a:picLocks noChangeAspect="1"/>
-          </p:cNvPicPr>
+      <p:sp>
+        <p:nvSpPr>
+          <p:cNvPr id="4" name="TextBox 3"/>
+          <p:cNvSpPr txBox="1"/>
           <p:nvPr/>
-        </p:nvPicPr>
-        <p:blipFill>
-          <a:blip r:embed="rId2"/>
-          <a:stretch>
-            <a:fillRect/>
-          </a:stretch>
-        </p:blipFill>
-        <p:spPr>
-          <a:xfrm>
-            <a:off x="335127" y="1264569"/>
-            <a:ext cx="11521440" cy="5224973"/>
+        </p:nvSpPr>
+        <p:spPr>
+          <a:xfrm>
+            <a:off x="640080" y="1133856"/>
+            <a:ext cx="10972800" cy="5449824"/>
           </a:xfrm>
           <a:prstGeom prst="rect">
             <a:avLst/>
           </a:prstGeom>
-        </p:spPr>
-      </p:pic>
+          <a:noFill/>
+        </p:spPr>
+        <p:txBody>
+          <a:bodyPr wrap="square">
+            <a:spAutoFit/>
+          </a:bodyPr>
+          <a:lstStyle/>
+          <a:p>
+            <a:pPr>
+              <a:spcAft>
+                <a:spcPts val="900"/>
+              </a:spcAft>
+            </a:pPr>
+            <a:r>
+              <a:rPr sz="1600">
+                <a:solidFill>
+                  <a:srgbClr val="000000"/>
+                </a:solidFill>
+                <a:latin typeface="Calibri"/>
+              </a:rPr>
+              <a:t>•  One wide table, the way a clerk keeps it in a spreadsheet.</a:t>
+            </a:r>
+          </a:p>
+          <a:p>
+            <a:pPr>
+              <a:spcAft>
+                <a:spcPts val="900"/>
+              </a:spcAft>
+            </a:pPr>
+            <a:r>
+              <a:rPr sz="1600">
+                <a:solidFill>
+                  <a:srgbClr val="000000"/>
+                </a:solidFill>
+                <a:latin typeface="Calibri"/>
+              </a:rPr>
+              <a:t>•  Three cells hold lists: SupplierPhones, Items and Delivery.</a:t>
+            </a:r>
+          </a:p>
+          <a:p>
+            <a:pPr>
+              <a:spcAft>
+                <a:spcPts val="900"/>
+              </a:spcAft>
+            </a:pPr>
+            <a:r>
+              <a:rPr sz="1600">
+                <a:solidFill>
+                  <a:srgbClr val="000000"/>
+                </a:solidFill>
+                <a:latin typeface="Calibri"/>
+              </a:rPr>
+              <a:t>•  Customer details are copied onto every order row.</a:t>
+            </a:r>
+          </a:p>
+          <a:p>
+            <a:pPr>
+              <a:spcAft>
+                <a:spcPts val="900"/>
+              </a:spcAft>
+            </a:pPr>
+            <a:r>
+              <a:rPr sz="1600">
+                <a:solidFill>
+                  <a:srgbClr val="000000"/>
+                </a:solidFill>
+                <a:latin typeface="Calibri"/>
+              </a:rPr>
+              <a:t>•  No atomic key, so no dependency can even be written down yet.</a:t>
+            </a:r>
+          </a:p>
+        </p:txBody>
+      </p:sp>
     </p:spTree>
   </p:cSld>
   <p:clrMapOvr>
@@ -7562,7 +7926,7 @@
         </p:nvSpPr>
         <p:spPr>
           <a:xfrm>
-            <a:off x="457200" y="292608"/>
+            <a:off x="457200" y="237744"/>
             <a:ext cx="11338560" cy="566928"/>
           </a:xfrm>
           <a:prstGeom prst="rect">
@@ -7584,7 +7948,7 @@
                 </a:solidFill>
                 <a:latin typeface="Calibri"/>
               </a:rPr>
-              <a:t>8. Second Normal Form (2NF)</a:t>
+              <a:t>8. The Tables after UNF</a:t>
             </a:r>
           </a:p>
         </p:txBody>
@@ -7597,7 +7961,7 @@
         </p:nvSpPr>
         <p:spPr>
           <a:xfrm>
-            <a:off x="457200" y="950976"/>
+            <a:off x="457200" y="896112"/>
             <a:ext cx="11338560" cy="18288"/>
           </a:xfrm>
           <a:prstGeom prst="rect">
@@ -7633,109 +7997,30 @@
           </a:p>
         </p:txBody>
       </p:sp>
-      <p:sp>
-        <p:nvSpPr>
-          <p:cNvPr id="4" name="TextBox 3"/>
-          <p:cNvSpPr txBox="1"/>
+      <p:pic>
+        <p:nvPicPr>
+          <p:cNvPr id="4" name="Picture 3" descr="norm_unf.png"/>
+          <p:cNvPicPr>
+            <a:picLocks noChangeAspect="1"/>
+          </p:cNvPicPr>
           <p:nvPr/>
-        </p:nvSpPr>
-        <p:spPr>
-          <a:xfrm>
-            <a:off x="640080" y="1133856"/>
-            <a:ext cx="10972800" cy="5449824"/>
+        </p:nvPicPr>
+        <p:blipFill>
+          <a:blip r:embed="rId2"/>
+          <a:stretch>
+            <a:fillRect/>
+          </a:stretch>
+        </p:blipFill>
+        <p:spPr>
+          <a:xfrm>
+            <a:off x="335127" y="2295347"/>
+            <a:ext cx="11521440" cy="3163417"/>
           </a:xfrm>
           <a:prstGeom prst="rect">
             <a:avLst/>
           </a:prstGeom>
-          <a:noFill/>
-        </p:spPr>
-        <p:txBody>
-          <a:bodyPr wrap="square">
-            <a:spAutoFit/>
-          </a:bodyPr>
-          <a:lstStyle/>
-          <a:p>
-            <a:pPr>
-              <a:spcAft>
-                <a:spcPts val="900"/>
-              </a:spcAft>
-            </a:pPr>
-            <a:r>
-              <a:rPr sz="1600">
-                <a:solidFill>
-                  <a:srgbClr val="000000"/>
-                </a:solidFill>
-                <a:latin typeface="Calibri"/>
-              </a:rPr>
-              <a:t>•  Rule: no column may depend on only part of the key.</a:t>
-            </a:r>
-          </a:p>
-          <a:p>
-            <a:pPr>
-              <a:spcAft>
-                <a:spcPts val="900"/>
-              </a:spcAft>
-            </a:pPr>
-            <a:r>
-              <a:rPr sz="1600">
-                <a:solidFill>
-                  <a:srgbClr val="000000"/>
-                </a:solidFill>
-                <a:latin typeface="Calibri"/>
-              </a:rPr>
-              <a:t>•  ORDER_ITEM is keyed by {OrderID, ProductID}, but F4 fixes PName, Category and Price from ProductID alone.</a:t>
-            </a:r>
-          </a:p>
-          <a:p>
-            <a:pPr>
-              <a:spcAft>
-                <a:spcPts val="900"/>
-              </a:spcAft>
-            </a:pPr>
-            <a:r>
-              <a:rPr sz="1600">
-                <a:solidFill>
-                  <a:srgbClr val="000000"/>
-                </a:solidFill>
-                <a:latin typeface="Calibri"/>
-              </a:rPr>
-              <a:t>•  Those three move to PRODUCT, where Price becomes UnitPrice.</a:t>
-            </a:r>
-          </a:p>
-          <a:p>
-            <a:pPr>
-              <a:spcAft>
-                <a:spcPts val="900"/>
-              </a:spcAft>
-            </a:pPr>
-            <a:r>
-              <a:rPr sz="1600">
-                <a:solidFill>
-                  <a:srgbClr val="000000"/>
-                </a:solidFill>
-                <a:latin typeface="Calibri"/>
-              </a:rPr>
-              <a:t>•  Only Qty depends on the whole key (F5), so only Qty stays behind.</a:t>
-            </a:r>
-          </a:p>
-          <a:p>
-            <a:pPr>
-              <a:spcAft>
-                <a:spcPts val="900"/>
-              </a:spcAft>
-            </a:pPr>
-            <a:r>
-              <a:rPr sz="1600">
-                <a:solidFill>
-                  <a:srgbClr val="000000"/>
-                </a:solidFill>
-                <a:latin typeface="Calibri"/>
-              </a:rPr>
-              <a:t>•  Still wrong: F2 and F3 in ORDER_MASTER both start from a non-key column.</a:t>
-            </a:r>
-          </a:p>
-        </p:txBody>
-      </p:sp>
+        </p:spPr>
+      </p:pic>
     </p:spTree>
   </p:cSld>
   <p:clrMapOvr>
@@ -7762,7 +8047,7 @@
         </p:nvSpPr>
         <p:spPr>
           <a:xfrm>
-            <a:off x="457200" y="237744"/>
+            <a:off x="457200" y="292608"/>
             <a:ext cx="11338560" cy="566928"/>
           </a:xfrm>
           <a:prstGeom prst="rect">
@@ -7784,7 +8069,7 @@
                 </a:solidFill>
                 <a:latin typeface="Calibri"/>
               </a:rPr>
-              <a:t>8. The Tables after 2NF</a:t>
+              <a:t>8. First Normal Form (1NF)</a:t>
             </a:r>
           </a:p>
         </p:txBody>
@@ -7797,7 +8082,7 @@
         </p:nvSpPr>
         <p:spPr>
           <a:xfrm>
-            <a:off x="457200" y="896112"/>
+            <a:off x="457200" y="950976"/>
             <a:ext cx="11338560" cy="18288"/>
           </a:xfrm>
           <a:prstGeom prst="rect">
@@ -7833,30 +8118,109 @@
           </a:p>
         </p:txBody>
       </p:sp>
-      <p:pic>
-        <p:nvPicPr>
-          <p:cNvPr id="4" name="Picture 3" descr="norm_2nf.png"/>
-          <p:cNvPicPr>
-            <a:picLocks noChangeAspect="1"/>
-          </p:cNvPicPr>
+      <p:sp>
+        <p:nvSpPr>
+          <p:cNvPr id="4" name="TextBox 3"/>
+          <p:cNvSpPr txBox="1"/>
           <p:nvPr/>
-        </p:nvPicPr>
-        <p:blipFill>
-          <a:blip r:embed="rId2"/>
-          <a:stretch>
-            <a:fillRect/>
-          </a:stretch>
-        </p:blipFill>
-        <p:spPr>
-          <a:xfrm>
-            <a:off x="335127" y="1264569"/>
-            <a:ext cx="11521440" cy="5224973"/>
+        </p:nvSpPr>
+        <p:spPr>
+          <a:xfrm>
+            <a:off x="640080" y="1133856"/>
+            <a:ext cx="10972800" cy="5449824"/>
           </a:xfrm>
           <a:prstGeom prst="rect">
             <a:avLst/>
           </a:prstGeom>
-        </p:spPr>
-      </p:pic>
+          <a:noFill/>
+        </p:spPr>
+        <p:txBody>
+          <a:bodyPr wrap="square">
+            <a:spAutoFit/>
+          </a:bodyPr>
+          <a:lstStyle/>
+          <a:p>
+            <a:pPr>
+              <a:spcAft>
+                <a:spcPts val="900"/>
+              </a:spcAft>
+            </a:pPr>
+            <a:r>
+              <a:rPr sz="1600">
+                <a:solidFill>
+                  <a:srgbClr val="000000"/>
+                </a:solidFill>
+                <a:latin typeface="Calibri"/>
+              </a:rPr>
+              <a:t>•  Rule: one value per cell, and repeating groups move out.</a:t>
+            </a:r>
+          </a:p>
+          <a:p>
+            <a:pPr>
+              <a:spcAft>
+                <a:spcPts val="900"/>
+              </a:spcAft>
+            </a:pPr>
+            <a:r>
+              <a:rPr sz="1600">
+                <a:solidFill>
+                  <a:srgbClr val="000000"/>
+                </a:solidFill>
+                <a:latin typeface="Calibri"/>
+              </a:rPr>
+              <a:t>•  Items become ORDER_ITEM, phones become SUPPLIER_PHONE, deliveries become DELIVERY_DUTY.</a:t>
+            </a:r>
+          </a:p>
+          <a:p>
+            <a:pPr>
+              <a:spcAft>
+                <a:spcPts val="900"/>
+              </a:spcAft>
+            </a:pPr>
+            <a:r>
+              <a:rPr sz="1600">
+                <a:solidFill>
+                  <a:srgbClr val="000000"/>
+                </a:solidFill>
+                <a:latin typeface="Calibri"/>
+              </a:rPr>
+              <a:t>•  ORDER_ITEM is keyed by OrderID + ProductID, because N1 and N2 rule out either column alone.</a:t>
+            </a:r>
+          </a:p>
+          <a:p>
+            <a:pPr>
+              <a:spcAft>
+                <a:spcPts val="900"/>
+              </a:spcAft>
+            </a:pPr>
+            <a:r>
+              <a:rPr sz="1600">
+                <a:solidFill>
+                  <a:srgbClr val="000000"/>
+                </a:solidFill>
+                <a:latin typeface="Calibri"/>
+              </a:rPr>
+              <a:t>•  DELIVERY_DUTY is keyed by OrderID + City, from F7.</a:t>
+            </a:r>
+          </a:p>
+          <a:p>
+            <a:pPr>
+              <a:spcAft>
+                <a:spcPts val="900"/>
+              </a:spcAft>
+            </a:pPr>
+            <a:r>
+              <a:rPr sz="1600">
+                <a:solidFill>
+                  <a:srgbClr val="000000"/>
+                </a:solidFill>
+                <a:latin typeface="Calibri"/>
+              </a:rPr>
+              <a:t>•  Still wrong: F4 means PName and Category repeat on every line for the same product.</a:t>
+            </a:r>
+          </a:p>
+        </p:txBody>
+      </p:sp>
     </p:spTree>
   </p:cSld>
   <p:clrMapOvr>
@@ -7883,7 +8247,7 @@
         </p:nvSpPr>
         <p:spPr>
           <a:xfrm>
-            <a:off x="457200" y="292608"/>
+            <a:off x="457200" y="237744"/>
             <a:ext cx="11338560" cy="566928"/>
           </a:xfrm>
           <a:prstGeom prst="rect">
@@ -7905,7 +8269,7 @@
                 </a:solidFill>
                 <a:latin typeface="Calibri"/>
               </a:rPr>
-              <a:t>8. Third Normal Form (3NF)</a:t>
+              <a:t>8. The Tables after 1NF</a:t>
             </a:r>
           </a:p>
         </p:txBody>
@@ -7918,7 +8282,7 @@
         </p:nvSpPr>
         <p:spPr>
           <a:xfrm>
-            <a:off x="457200" y="950976"/>
+            <a:off x="457200" y="896112"/>
             <a:ext cx="11338560" cy="18288"/>
           </a:xfrm>
           <a:prstGeom prst="rect">
@@ -7954,109 +8318,30 @@
           </a:p>
         </p:txBody>
       </p:sp>
-      <p:sp>
-        <p:nvSpPr>
-          <p:cNvPr id="4" name="TextBox 3"/>
-          <p:cNvSpPr txBox="1"/>
+      <p:pic>
+        <p:nvPicPr>
+          <p:cNvPr id="4" name="Picture 3" descr="norm_1nf.png"/>
+          <p:cNvPicPr>
+            <a:picLocks noChangeAspect="1"/>
+          </p:cNvPicPr>
           <p:nvPr/>
-        </p:nvSpPr>
-        <p:spPr>
-          <a:xfrm>
-            <a:off x="640080" y="1133856"/>
-            <a:ext cx="10972800" cy="5449824"/>
+        </p:nvPicPr>
+        <p:blipFill>
+          <a:blip r:embed="rId2"/>
+          <a:stretch>
+            <a:fillRect/>
+          </a:stretch>
+        </p:blipFill>
+        <p:spPr>
+          <a:xfrm>
+            <a:off x="335127" y="1264569"/>
+            <a:ext cx="11521440" cy="5224973"/>
           </a:xfrm>
           <a:prstGeom prst="rect">
             <a:avLst/>
           </a:prstGeom>
-          <a:noFill/>
-        </p:spPr>
-        <p:txBody>
-          <a:bodyPr wrap="square">
-            <a:spAutoFit/>
-          </a:bodyPr>
-          <a:lstStyle/>
-          <a:p>
-            <a:pPr>
-              <a:spcAft>
-                <a:spcPts val="900"/>
-              </a:spcAft>
-            </a:pPr>
-            <a:r>
-              <a:rPr sz="1600">
-                <a:solidFill>
-                  <a:srgbClr val="000000"/>
-                </a:solidFill>
-                <a:latin typeface="Calibri"/>
-              </a:rPr>
-              <a:t>•  Rule: no ordinary column may decide another ordinary column.</a:t>
-            </a:r>
-          </a:p>
-          <a:p>
-            <a:pPr>
-              <a:spcAft>
-                <a:spcPts val="900"/>
-              </a:spcAft>
-            </a:pPr>
-            <a:r>
-              <a:rPr sz="1600">
-                <a:solidFill>
-                  <a:srgbClr val="000000"/>
-                </a:solidFill>
-                <a:latin typeface="Calibri"/>
-              </a:rPr>
-              <a:t>•  F2 (CustID -&gt; CName, Street, City) becomes CUSTOMER.</a:t>
-            </a:r>
-          </a:p>
-          <a:p>
-            <a:pPr>
-              <a:spcAft>
-                <a:spcPts val="900"/>
-              </a:spcAft>
-            </a:pPr>
-            <a:r>
-              <a:rPr sz="1600">
-                <a:solidFill>
-                  <a:srgbClr val="000000"/>
-                </a:solidFill>
-                <a:latin typeface="Calibri"/>
-              </a:rPr>
-              <a:t>•  F3 (City -&gt; State) becomes CITY.</a:t>
-            </a:r>
-          </a:p>
-          <a:p>
-            <a:pPr>
-              <a:spcAft>
-                <a:spcPts val="900"/>
-              </a:spcAft>
-            </a:pPr>
-            <a:r>
-              <a:rPr sz="1600">
-                <a:solidFill>
-                  <a:srgbClr val="000000"/>
-                </a:solidFill>
-                <a:latin typeface="Calibri"/>
-              </a:rPr>
-              <a:t>•  What is left of ORDER_MASTER becomes ORDERS, keeping CustID as a foreign key.</a:t>
-            </a:r>
-          </a:p>
-          <a:p>
-            <a:pPr>
-              <a:spcAft>
-                <a:spcPts val="900"/>
-              </a:spcAft>
-            </a:pPr>
-            <a:r>
-              <a:rPr sz="1600">
-                <a:solidFill>
-                  <a:srgbClr val="000000"/>
-                </a:solidFill>
-                <a:latin typeface="Calibri"/>
-              </a:rPr>
-              <a:t>•  Still wrong: DELIVERY_DUTY passes 3NF only because every column of it belongs to some key.</a:t>
-            </a:r>
-          </a:p>
-        </p:txBody>
-      </p:sp>
+        </p:spPr>
+      </p:pic>
     </p:spTree>
   </p:cSld>
   <p:clrMapOvr>
@@ -8083,7 +8368,7 @@
         </p:nvSpPr>
         <p:spPr>
           <a:xfrm>
-            <a:off x="457200" y="237744"/>
+            <a:off x="457200" y="292608"/>
             <a:ext cx="11338560" cy="566928"/>
           </a:xfrm>
           <a:prstGeom prst="rect">
@@ -8105,7 +8390,7 @@
                 </a:solidFill>
                 <a:latin typeface="Calibri"/>
               </a:rPr>
-              <a:t>8. The Tables after 3NF</a:t>
+              <a:t>8. Second Normal Form (2NF)</a:t>
             </a:r>
           </a:p>
         </p:txBody>
@@ -8118,7 +8403,7 @@
         </p:nvSpPr>
         <p:spPr>
           <a:xfrm>
-            <a:off x="457200" y="896112"/>
+            <a:off x="457200" y="950976"/>
             <a:ext cx="11338560" cy="18288"/>
           </a:xfrm>
           <a:prstGeom prst="rect">
@@ -8154,30 +8439,109 @@
           </a:p>
         </p:txBody>
       </p:sp>
-      <p:pic>
-        <p:nvPicPr>
-          <p:cNvPr id="4" name="Picture 3" descr="norm_3nf.png"/>
-          <p:cNvPicPr>
-            <a:picLocks noChangeAspect="1"/>
-          </p:cNvPicPr>
+      <p:sp>
+        <p:nvSpPr>
+          <p:cNvPr id="4" name="TextBox 3"/>
+          <p:cNvSpPr txBox="1"/>
           <p:nvPr/>
-        </p:nvPicPr>
-        <p:blipFill>
-          <a:blip r:embed="rId2"/>
-          <a:stretch>
-            <a:fillRect/>
-          </a:stretch>
-        </p:blipFill>
-        <p:spPr>
-          <a:xfrm>
-            <a:off x="335127" y="1339429"/>
-            <a:ext cx="11521440" cy="5075253"/>
+        </p:nvSpPr>
+        <p:spPr>
+          <a:xfrm>
+            <a:off x="640080" y="1133856"/>
+            <a:ext cx="10972800" cy="5449824"/>
           </a:xfrm>
           <a:prstGeom prst="rect">
             <a:avLst/>
           </a:prstGeom>
-        </p:spPr>
-      </p:pic>
+          <a:noFill/>
+        </p:spPr>
+        <p:txBody>
+          <a:bodyPr wrap="square">
+            <a:spAutoFit/>
+          </a:bodyPr>
+          <a:lstStyle/>
+          <a:p>
+            <a:pPr>
+              <a:spcAft>
+                <a:spcPts val="900"/>
+              </a:spcAft>
+            </a:pPr>
+            <a:r>
+              <a:rPr sz="1600">
+                <a:solidFill>
+                  <a:srgbClr val="000000"/>
+                </a:solidFill>
+                <a:latin typeface="Calibri"/>
+              </a:rPr>
+              <a:t>•  Rule: no column may depend on only part of the key.</a:t>
+            </a:r>
+          </a:p>
+          <a:p>
+            <a:pPr>
+              <a:spcAft>
+                <a:spcPts val="900"/>
+              </a:spcAft>
+            </a:pPr>
+            <a:r>
+              <a:rPr sz="1600">
+                <a:solidFill>
+                  <a:srgbClr val="000000"/>
+                </a:solidFill>
+                <a:latin typeface="Calibri"/>
+              </a:rPr>
+              <a:t>•  ORDER_ITEM is keyed by {OrderID, ProductID}, but F4 fixes PName, Category and Price from ProductID alone.</a:t>
+            </a:r>
+          </a:p>
+          <a:p>
+            <a:pPr>
+              <a:spcAft>
+                <a:spcPts val="900"/>
+              </a:spcAft>
+            </a:pPr>
+            <a:r>
+              <a:rPr sz="1600">
+                <a:solidFill>
+                  <a:srgbClr val="000000"/>
+                </a:solidFill>
+                <a:latin typeface="Calibri"/>
+              </a:rPr>
+              <a:t>•  Those three move to PRODUCT, where Price becomes UnitPrice.</a:t>
+            </a:r>
+          </a:p>
+          <a:p>
+            <a:pPr>
+              <a:spcAft>
+                <a:spcPts val="900"/>
+              </a:spcAft>
+            </a:pPr>
+            <a:r>
+              <a:rPr sz="1600">
+                <a:solidFill>
+                  <a:srgbClr val="000000"/>
+                </a:solidFill>
+                <a:latin typeface="Calibri"/>
+              </a:rPr>
+              <a:t>•  Only Qty depends on the whole key (F5), so only Qty stays behind.</a:t>
+            </a:r>
+          </a:p>
+          <a:p>
+            <a:pPr>
+              <a:spcAft>
+                <a:spcPts val="900"/>
+              </a:spcAft>
+            </a:pPr>
+            <a:r>
+              <a:rPr sz="1600">
+                <a:solidFill>
+                  <a:srgbClr val="000000"/>
+                </a:solidFill>
+                <a:latin typeface="Calibri"/>
+              </a:rPr>
+              <a:t>•  Still wrong: F2 and F3 in ORDER_MASTER both start from a non-key column.</a:t>
+            </a:r>
+          </a:p>
+        </p:txBody>
+      </p:sp>
     </p:spTree>
   </p:cSld>
   <p:clrMapOvr>
@@ -8204,7 +8568,7 @@
         </p:nvSpPr>
         <p:spPr>
           <a:xfrm>
-            <a:off x="457200" y="292608"/>
+            <a:off x="457200" y="237744"/>
             <a:ext cx="11338560" cy="566928"/>
           </a:xfrm>
           <a:prstGeom prst="rect">
@@ -8226,7 +8590,7 @@
                 </a:solidFill>
                 <a:latin typeface="Calibri"/>
               </a:rPr>
-              <a:t>8. Boyce-Codd Normal Form (BCNF)</a:t>
+              <a:t>8. The Tables after 2NF</a:t>
             </a:r>
           </a:p>
         </p:txBody>
@@ -8239,7 +8603,7 @@
         </p:nvSpPr>
         <p:spPr>
           <a:xfrm>
-            <a:off x="457200" y="950976"/>
+            <a:off x="457200" y="896112"/>
             <a:ext cx="11338560" cy="18288"/>
           </a:xfrm>
           <a:prstGeom prst="rect">
@@ -8275,125 +8639,30 @@
           </a:p>
         </p:txBody>
       </p:sp>
-      <p:sp>
-        <p:nvSpPr>
-          <p:cNvPr id="4" name="TextBox 3"/>
-          <p:cNvSpPr txBox="1"/>
+      <p:pic>
+        <p:nvPicPr>
+          <p:cNvPr id="4" name="Picture 3" descr="norm_2nf.png"/>
+          <p:cNvPicPr>
+            <a:picLocks noChangeAspect="1"/>
+          </p:cNvPicPr>
           <p:nvPr/>
-        </p:nvSpPr>
-        <p:spPr>
-          <a:xfrm>
-            <a:off x="640080" y="1133856"/>
-            <a:ext cx="10972800" cy="5449824"/>
+        </p:nvPicPr>
+        <p:blipFill>
+          <a:blip r:embed="rId2"/>
+          <a:stretch>
+            <a:fillRect/>
+          </a:stretch>
+        </p:blipFill>
+        <p:spPr>
+          <a:xfrm>
+            <a:off x="335127" y="1264569"/>
+            <a:ext cx="11521440" cy="5224973"/>
           </a:xfrm>
           <a:prstGeom prst="rect">
             <a:avLst/>
           </a:prstGeom>
-          <a:noFill/>
-        </p:spPr>
-        <p:txBody>
-          <a:bodyPr wrap="square">
-            <a:spAutoFit/>
-          </a:bodyPr>
-          <a:lstStyle/>
-          <a:p>
-            <a:pPr>
-              <a:spcAft>
-                <a:spcPts val="900"/>
-              </a:spcAft>
-            </a:pPr>
-            <a:r>
-              <a:rPr sz="1600">
-                <a:solidFill>
-                  <a:srgbClr val="000000"/>
-                </a:solidFill>
-                <a:latin typeface="Calibri"/>
-              </a:rPr>
-              <a:t>•  Rule: the left side of every dependency must be a key.</a:t>
-            </a:r>
-          </a:p>
-          <a:p>
-            <a:pPr>
-              <a:spcAft>
-                <a:spcPts val="900"/>
-              </a:spcAft>
-            </a:pPr>
-            <a:r>
-              <a:rPr sz="1600">
-                <a:solidFill>
-                  <a:srgbClr val="000000"/>
-                </a:solidFill>
-                <a:latin typeface="Calibri"/>
-              </a:rPr>
-              <a:t>•  DELIVERY_DUTY has two candidate keys, {OrderID, City} and {OrderID, DriverID}, so F7 is fine.</a:t>
-            </a:r>
-          </a:p>
-          <a:p>
-            <a:pPr>
-              <a:spcAft>
-                <a:spcPts val="900"/>
-              </a:spcAft>
-            </a:pPr>
-            <a:r>
-              <a:rPr sz="1600">
-                <a:solidFill>
-                  <a:srgbClr val="000000"/>
-                </a:solidFill>
-                <a:latin typeface="Calibri"/>
-              </a:rPr>
-              <a:t>•  F6 (DriverID -&gt; City) is not, because DriverID is not a key on its own.</a:t>
-            </a:r>
-          </a:p>
-          <a:p>
-            <a:pPr>
-              <a:spcAft>
-                <a:spcPts val="900"/>
-              </a:spcAft>
-            </a:pPr>
-            <a:r>
-              <a:rPr sz="1600">
-                <a:solidFill>
-                  <a:srgbClr val="000000"/>
-                </a:solidFill>
-                <a:latin typeface="Calibri"/>
-              </a:rPr>
-              <a:t>•  'D-09 covers Mumbai' therefore sits on three rows, and two of them can be made to disagree.</a:t>
-            </a:r>
-          </a:p>
-          <a:p>
-            <a:pPr>
-              <a:spcAft>
-                <a:spcPts val="900"/>
-              </a:spcAft>
-            </a:pPr>
-            <a:r>
-              <a:rPr sz="1600">
-                <a:solidFill>
-                  <a:srgbClr val="000000"/>
-                </a:solidFill>
-                <a:latin typeface="Calibri"/>
-              </a:rPr>
-              <a:t>•  Splitting on F6 gives DRIVER_CITY and ORDER_DRIVER, and the join on DriverID returns the original rows.</a:t>
-            </a:r>
-          </a:p>
-          <a:p>
-            <a:pPr>
-              <a:spcAft>
-                <a:spcPts val="900"/>
-              </a:spcAft>
-            </a:pPr>
-            <a:r>
-              <a:rPr sz="1600">
-                <a:solidFill>
-                  <a:srgbClr val="000000"/>
-                </a:solidFill>
-                <a:latin typeface="Calibri"/>
-              </a:rPr>
-              <a:t>•  Every table is now in BCNF.</a:t>
-            </a:r>
-          </a:p>
-        </p:txBody>
-      </p:sp>
+        </p:spPr>
+      </p:pic>
     </p:spTree>
   </p:cSld>
   <p:clrMapOvr>
@@ -8420,7 +8689,7 @@
         </p:nvSpPr>
         <p:spPr>
           <a:xfrm>
-            <a:off x="457200" y="237744"/>
+            <a:off x="457200" y="292608"/>
             <a:ext cx="11338560" cy="566928"/>
           </a:xfrm>
           <a:prstGeom prst="rect">
@@ -8442,7 +8711,7 @@
                 </a:solidFill>
                 <a:latin typeface="Calibri"/>
               </a:rPr>
-              <a:t>8. The Tables after BCNF</a:t>
+              <a:t>8. Third Normal Form (3NF)</a:t>
             </a:r>
           </a:p>
         </p:txBody>
@@ -8455,7 +8724,7 @@
         </p:nvSpPr>
         <p:spPr>
           <a:xfrm>
-            <a:off x="457200" y="896112"/>
+            <a:off x="457200" y="950976"/>
             <a:ext cx="11338560" cy="18288"/>
           </a:xfrm>
           <a:prstGeom prst="rect">
@@ -8491,30 +8760,109 @@
           </a:p>
         </p:txBody>
       </p:sp>
-      <p:pic>
-        <p:nvPicPr>
-          <p:cNvPr id="4" name="Picture 3" descr="norm_bcnf.png"/>
-          <p:cNvPicPr>
-            <a:picLocks noChangeAspect="1"/>
-          </p:cNvPicPr>
+      <p:sp>
+        <p:nvSpPr>
+          <p:cNvPr id="4" name="TextBox 3"/>
+          <p:cNvSpPr txBox="1"/>
           <p:nvPr/>
-        </p:nvPicPr>
-        <p:blipFill>
-          <a:blip r:embed="rId2"/>
-          <a:stretch>
-            <a:fillRect/>
-          </a:stretch>
-        </p:blipFill>
-        <p:spPr>
-          <a:xfrm>
-            <a:off x="335127" y="1320001"/>
-            <a:ext cx="11521440" cy="5114108"/>
+        </p:nvSpPr>
+        <p:spPr>
+          <a:xfrm>
+            <a:off x="640080" y="1133856"/>
+            <a:ext cx="10972800" cy="5449824"/>
           </a:xfrm>
           <a:prstGeom prst="rect">
             <a:avLst/>
           </a:prstGeom>
-        </p:spPr>
-      </p:pic>
+          <a:noFill/>
+        </p:spPr>
+        <p:txBody>
+          <a:bodyPr wrap="square">
+            <a:spAutoFit/>
+          </a:bodyPr>
+          <a:lstStyle/>
+          <a:p>
+            <a:pPr>
+              <a:spcAft>
+                <a:spcPts val="900"/>
+              </a:spcAft>
+            </a:pPr>
+            <a:r>
+              <a:rPr sz="1600">
+                <a:solidFill>
+                  <a:srgbClr val="000000"/>
+                </a:solidFill>
+                <a:latin typeface="Calibri"/>
+              </a:rPr>
+              <a:t>•  Rule: no ordinary column may decide another ordinary column.</a:t>
+            </a:r>
+          </a:p>
+          <a:p>
+            <a:pPr>
+              <a:spcAft>
+                <a:spcPts val="900"/>
+              </a:spcAft>
+            </a:pPr>
+            <a:r>
+              <a:rPr sz="1600">
+                <a:solidFill>
+                  <a:srgbClr val="000000"/>
+                </a:solidFill>
+                <a:latin typeface="Calibri"/>
+              </a:rPr>
+              <a:t>•  F2 (CustID -&gt; CName, Street, City) becomes CUSTOMER.</a:t>
+            </a:r>
+          </a:p>
+          <a:p>
+            <a:pPr>
+              <a:spcAft>
+                <a:spcPts val="900"/>
+              </a:spcAft>
+            </a:pPr>
+            <a:r>
+              <a:rPr sz="1600">
+                <a:solidFill>
+                  <a:srgbClr val="000000"/>
+                </a:solidFill>
+                <a:latin typeface="Calibri"/>
+              </a:rPr>
+              <a:t>•  F3 (City -&gt; State) becomes CITY.</a:t>
+            </a:r>
+          </a:p>
+          <a:p>
+            <a:pPr>
+              <a:spcAft>
+                <a:spcPts val="900"/>
+              </a:spcAft>
+            </a:pPr>
+            <a:r>
+              <a:rPr sz="1600">
+                <a:solidFill>
+                  <a:srgbClr val="000000"/>
+                </a:solidFill>
+                <a:latin typeface="Calibri"/>
+              </a:rPr>
+              <a:t>•  What is left of ORDER_MASTER becomes ORDERS, keeping CustID as a foreign key.</a:t>
+            </a:r>
+          </a:p>
+          <a:p>
+            <a:pPr>
+              <a:spcAft>
+                <a:spcPts val="900"/>
+              </a:spcAft>
+            </a:pPr>
+            <a:r>
+              <a:rPr sz="1600">
+                <a:solidFill>
+                  <a:srgbClr val="000000"/>
+                </a:solidFill>
+                <a:latin typeface="Calibri"/>
+              </a:rPr>
+              <a:t>•  Still wrong: DELIVERY_DUTY passes 3NF only because every column of it belongs to some key.</a:t>
+            </a:r>
+          </a:p>
+        </p:txBody>
+      </p:sp>
     </p:spTree>
   </p:cSld>
   <p:clrMapOvr>
@@ -8563,7 +8911,7 @@
                 </a:solidFill>
                 <a:latin typeface="Calibri"/>
               </a:rPr>
-              <a:t>9. The Decomposition, End to End</a:t>
+              <a:t>8. The Tables after 3NF</a:t>
             </a:r>
           </a:p>
         </p:txBody>
@@ -8612,44 +8960,9 @@
           </a:p>
         </p:txBody>
       </p:sp>
-      <p:sp>
-        <p:nvSpPr>
-          <p:cNvPr id="4" name="TextBox 3"/>
-          <p:cNvSpPr txBox="1"/>
-          <p:nvPr/>
-        </p:nvSpPr>
-        <p:spPr>
-          <a:xfrm>
-            <a:off x="457200" y="969264"/>
-            <a:ext cx="11338560" cy="384048"/>
-          </a:xfrm>
-          <a:prstGeom prst="rect">
-            <a:avLst/>
-          </a:prstGeom>
-          <a:noFill/>
-        </p:spPr>
-        <p:txBody>
-          <a:bodyPr wrap="square">
-            <a:spAutoFit/>
-          </a:bodyPr>
-          <a:lstStyle/>
-          <a:p>
-            <a:pPr algn="l"/>
-            <a:r>
-              <a:rPr sz="1350" b="0" i="1">
-                <a:solidFill>
-                  <a:srgbClr val="444444"/>
-                </a:solidFill>
-                <a:latin typeface="Calibri"/>
-              </a:rPr>
-              <a:t>every relation, every column, at every stage</a:t>
-            </a:r>
-          </a:p>
-        </p:txBody>
-      </p:sp>
       <p:pic>
         <p:nvPicPr>
-          <p:cNvPr id="5" name="Picture 4" descr="decomp_tree.png"/>
+          <p:cNvPr id="4" name="Picture 3" descr="norm_3nf.png"/>
           <p:cNvPicPr>
             <a:picLocks noChangeAspect="1"/>
           </p:cNvPicPr>
@@ -8663,8 +8976,8 @@
         </p:blipFill>
         <p:spPr>
           <a:xfrm>
-            <a:off x="1849336" y="1463040"/>
-            <a:ext cx="8493022" cy="5212079"/>
+            <a:off x="335127" y="1339429"/>
+            <a:ext cx="11521440" cy="5075253"/>
           </a:xfrm>
           <a:prstGeom prst="rect">
             <a:avLst/>
@@ -8916,7 +9229,7 @@
         </p:nvSpPr>
         <p:spPr>
           <a:xfrm>
-            <a:off x="457200" y="237744"/>
+            <a:off x="457200" y="292608"/>
             <a:ext cx="11338560" cy="566928"/>
           </a:xfrm>
           <a:prstGeom prst="rect">
@@ -8938,7 +9251,7 @@
                 </a:solidFill>
                 <a:latin typeface="Calibri"/>
               </a:rPr>
-              <a:t>10. Final Schema, 17 Tables, All in BCNF</a:t>
+              <a:t>8. Boyce-Codd Normal Form (BCNF)</a:t>
             </a:r>
           </a:p>
         </p:txBody>
@@ -8951,7 +9264,7 @@
         </p:nvSpPr>
         <p:spPr>
           <a:xfrm>
-            <a:off x="457200" y="896112"/>
+            <a:off x="457200" y="950976"/>
             <a:ext cx="11338560" cy="18288"/>
           </a:xfrm>
           <a:prstGeom prst="rect">
@@ -8987,30 +9300,125 @@
           </a:p>
         </p:txBody>
       </p:sp>
-      <p:pic>
-        <p:nvPicPr>
-          <p:cNvPr id="4" name="Picture 3" descr="final_schema.png"/>
-          <p:cNvPicPr>
-            <a:picLocks noChangeAspect="1"/>
-          </p:cNvPicPr>
+      <p:sp>
+        <p:nvSpPr>
+          <p:cNvPr id="4" name="TextBox 3"/>
+          <p:cNvSpPr txBox="1"/>
           <p:nvPr/>
-        </p:nvPicPr>
-        <p:blipFill>
-          <a:blip r:embed="rId2"/>
-          <a:stretch>
-            <a:fillRect/>
-          </a:stretch>
-        </p:blipFill>
-        <p:spPr>
-          <a:xfrm>
-            <a:off x="335127" y="1294664"/>
-            <a:ext cx="11521440" cy="5164783"/>
+        </p:nvSpPr>
+        <p:spPr>
+          <a:xfrm>
+            <a:off x="640080" y="1133856"/>
+            <a:ext cx="10972800" cy="5449824"/>
           </a:xfrm>
           <a:prstGeom prst="rect">
             <a:avLst/>
           </a:prstGeom>
-        </p:spPr>
-      </p:pic>
+          <a:noFill/>
+        </p:spPr>
+        <p:txBody>
+          <a:bodyPr wrap="square">
+            <a:spAutoFit/>
+          </a:bodyPr>
+          <a:lstStyle/>
+          <a:p>
+            <a:pPr>
+              <a:spcAft>
+                <a:spcPts val="900"/>
+              </a:spcAft>
+            </a:pPr>
+            <a:r>
+              <a:rPr sz="1600">
+                <a:solidFill>
+                  <a:srgbClr val="000000"/>
+                </a:solidFill>
+                <a:latin typeface="Calibri"/>
+              </a:rPr>
+              <a:t>•  Rule: the left side of every dependency must be a key.</a:t>
+            </a:r>
+          </a:p>
+          <a:p>
+            <a:pPr>
+              <a:spcAft>
+                <a:spcPts val="900"/>
+              </a:spcAft>
+            </a:pPr>
+            <a:r>
+              <a:rPr sz="1600">
+                <a:solidFill>
+                  <a:srgbClr val="000000"/>
+                </a:solidFill>
+                <a:latin typeface="Calibri"/>
+              </a:rPr>
+              <a:t>•  DELIVERY_DUTY has two candidate keys, {OrderID, City} and {OrderID, DriverID}, so F7 is fine.</a:t>
+            </a:r>
+          </a:p>
+          <a:p>
+            <a:pPr>
+              <a:spcAft>
+                <a:spcPts val="900"/>
+              </a:spcAft>
+            </a:pPr>
+            <a:r>
+              <a:rPr sz="1600">
+                <a:solidFill>
+                  <a:srgbClr val="000000"/>
+                </a:solidFill>
+                <a:latin typeface="Calibri"/>
+              </a:rPr>
+              <a:t>•  F6 (DriverID -&gt; City) is not, because DriverID is not a key on its own.</a:t>
+            </a:r>
+          </a:p>
+          <a:p>
+            <a:pPr>
+              <a:spcAft>
+                <a:spcPts val="900"/>
+              </a:spcAft>
+            </a:pPr>
+            <a:r>
+              <a:rPr sz="1600">
+                <a:solidFill>
+                  <a:srgbClr val="000000"/>
+                </a:solidFill>
+                <a:latin typeface="Calibri"/>
+              </a:rPr>
+              <a:t>•  'D-09 covers Mumbai' therefore sits on three rows, and two of them can be made to disagree.</a:t>
+            </a:r>
+          </a:p>
+          <a:p>
+            <a:pPr>
+              <a:spcAft>
+                <a:spcPts val="900"/>
+              </a:spcAft>
+            </a:pPr>
+            <a:r>
+              <a:rPr sz="1600">
+                <a:solidFill>
+                  <a:srgbClr val="000000"/>
+                </a:solidFill>
+                <a:latin typeface="Calibri"/>
+              </a:rPr>
+              <a:t>•  Splitting on F6 gives DRIVER_CITY and ORDER_DRIVER, and the join on DriverID returns the original rows.</a:t>
+            </a:r>
+          </a:p>
+          <a:p>
+            <a:pPr>
+              <a:spcAft>
+                <a:spcPts val="900"/>
+              </a:spcAft>
+            </a:pPr>
+            <a:r>
+              <a:rPr sz="1600">
+                <a:solidFill>
+                  <a:srgbClr val="000000"/>
+                </a:solidFill>
+                <a:latin typeface="Calibri"/>
+              </a:rPr>
+              <a:t>•  Every table is now in BCNF.</a:t>
+            </a:r>
+          </a:p>
+        </p:txBody>
+      </p:sp>
     </p:spTree>
   </p:cSld>
   <p:clrMapOvr>
@@ -9037,7 +9445,7 @@
         </p:nvSpPr>
         <p:spPr>
           <a:xfrm>
-            <a:off x="457200" y="292608"/>
+            <a:off x="457200" y="237744"/>
             <a:ext cx="11338560" cy="566928"/>
           </a:xfrm>
           <a:prstGeom prst="rect">
@@ -9059,7 +9467,7 @@
                 </a:solidFill>
                 <a:latin typeface="Calibri"/>
               </a:rPr>
-              <a:t>10. Why the Design Is Now Safe</a:t>
+              <a:t>8. The Tables after BCNF</a:t>
             </a:r>
           </a:p>
         </p:txBody>
@@ -9072,7 +9480,7 @@
         </p:nvSpPr>
         <p:spPr>
           <a:xfrm>
-            <a:off x="457200" y="950976"/>
+            <a:off x="457200" y="896112"/>
             <a:ext cx="11338560" cy="18288"/>
           </a:xfrm>
           <a:prstGeom prst="rect">
@@ -9108,125 +9516,30 @@
           </a:p>
         </p:txBody>
       </p:sp>
-      <p:sp>
-        <p:nvSpPr>
-          <p:cNvPr id="4" name="TextBox 3"/>
-          <p:cNvSpPr txBox="1"/>
+      <p:pic>
+        <p:nvPicPr>
+          <p:cNvPr id="4" name="Picture 3" descr="norm_bcnf.png"/>
+          <p:cNvPicPr>
+            <a:picLocks noChangeAspect="1"/>
+          </p:cNvPicPr>
           <p:nvPr/>
-        </p:nvSpPr>
-        <p:spPr>
-          <a:xfrm>
-            <a:off x="640080" y="1133856"/>
-            <a:ext cx="10972800" cy="5449824"/>
+        </p:nvPicPr>
+        <p:blipFill>
+          <a:blip r:embed="rId2"/>
+          <a:stretch>
+            <a:fillRect/>
+          </a:stretch>
+        </p:blipFill>
+        <p:spPr>
+          <a:xfrm>
+            <a:off x="335127" y="1320001"/>
+            <a:ext cx="11521440" cy="5114108"/>
           </a:xfrm>
           <a:prstGeom prst="rect">
             <a:avLst/>
           </a:prstGeom>
-          <a:noFill/>
-        </p:spPr>
-        <p:txBody>
-          <a:bodyPr wrap="square">
-            <a:spAutoFit/>
-          </a:bodyPr>
-          <a:lstStyle/>
-          <a:p>
-            <a:pPr>
-              <a:spcAft>
-                <a:spcPts val="900"/>
-              </a:spcAft>
-            </a:pPr>
-            <a:r>
-              <a:rPr sz="1700">
-                <a:solidFill>
-                  <a:srgbClr val="000000"/>
-                </a:solidFill>
-                <a:latin typeface="Calibri"/>
-              </a:rPr>
-              <a:t>•  Every fact is stored in exactly one place, so two rows can never disagree.</a:t>
-            </a:r>
-          </a:p>
-          <a:p>
-            <a:pPr>
-              <a:spcAft>
-                <a:spcPts val="900"/>
-              </a:spcAft>
-            </a:pPr>
-            <a:r>
-              <a:rPr sz="1700">
-                <a:solidFill>
-                  <a:srgbClr val="000000"/>
-                </a:solidFill>
-                <a:latin typeface="Calibri"/>
-              </a:rPr>
-              <a:t>•  Correcting a product name, an address or a city's state is a single-row edit.</a:t>
-            </a:r>
-          </a:p>
-          <a:p>
-            <a:pPr>
-              <a:spcAft>
-                <a:spcPts val="900"/>
-              </a:spcAft>
-            </a:pPr>
-            <a:r>
-              <a:rPr sz="1700">
-                <a:solidFill>
-                  <a:srgbClr val="000000"/>
-                </a:solidFill>
-                <a:latin typeface="Calibri"/>
-              </a:rPr>
-              <a:t>•  A supplier, product or customer can exist before appearing on any order.</a:t>
-            </a:r>
-          </a:p>
-          <a:p>
-            <a:pPr>
-              <a:spcAft>
-                <a:spcPts val="900"/>
-              </a:spcAft>
-            </a:pPr>
-            <a:r>
-              <a:rPr sz="1700">
-                <a:solidFill>
-                  <a:srgbClr val="000000"/>
-                </a:solidFill>
-                <a:latin typeface="Calibri"/>
-              </a:rPr>
-              <a:t>•  Deleting an order cannot wipe out the customer who placed it.</a:t>
-            </a:r>
-          </a:p>
-          <a:p>
-            <a:pPr>
-              <a:spcAft>
-                <a:spcPts val="900"/>
-              </a:spcAft>
-            </a:pPr>
-            <a:r>
-              <a:rPr sz="1700">
-                <a:solidFill>
-                  <a:srgbClr val="000000"/>
-                </a:solidFill>
-                <a:latin typeface="Calibri"/>
-              </a:rPr>
-              <a:t>•  TotalAmt is calculated, not stored, so it can never fall out of step.</a:t>
-            </a:r>
-          </a:p>
-          <a:p>
-            <a:pPr>
-              <a:spcAft>
-                <a:spcPts val="900"/>
-              </a:spcAft>
-            </a:pPr>
-            <a:r>
-              <a:rPr sz="1700">
-                <a:solidFill>
-                  <a:srgbClr val="000000"/>
-                </a:solidFill>
-                <a:latin typeface="Calibri"/>
-              </a:rPr>
-              <a:t>•  One trade-off: F7, {OrderID, City} -&gt; DriverID, now needs a trigger, which DA2 will add.</a:t>
-            </a:r>
-          </a:p>
-        </p:txBody>
-      </p:sp>
+        </p:spPr>
+      </p:pic>
     </p:spTree>
   </p:cSld>
   <p:clrMapOvr>
@@ -9253,7 +9566,7 @@
         </p:nvSpPr>
         <p:spPr>
           <a:xfrm>
-            <a:off x="457200" y="292608"/>
+            <a:off x="457200" y="237744"/>
             <a:ext cx="11338560" cy="566928"/>
           </a:xfrm>
           <a:prstGeom prst="rect">
@@ -9275,7 +9588,7 @@
                 </a:solidFill>
                 <a:latin typeface="Calibri"/>
               </a:rPr>
-              <a:t>11. What Comes Next</a:t>
+              <a:t>9. The Decomposition, End to End</a:t>
             </a:r>
           </a:p>
         </p:txBody>
@@ -9288,7 +9601,7 @@
         </p:nvSpPr>
         <p:spPr>
           <a:xfrm>
-            <a:off x="457200" y="950976"/>
+            <a:off x="457200" y="896112"/>
             <a:ext cx="11338560" cy="18288"/>
           </a:xfrm>
           <a:prstGeom prst="rect">
@@ -9332,8 +9645,8 @@
         </p:nvSpPr>
         <p:spPr>
           <a:xfrm>
-            <a:off x="640080" y="1133856"/>
-            <a:ext cx="10972800" cy="5449824"/>
+            <a:off x="457200" y="969264"/>
+            <a:ext cx="11338560" cy="384048"/>
           </a:xfrm>
           <a:prstGeom prst="rect">
             <a:avLst/>
@@ -9346,71 +9659,43 @@
           </a:bodyPr>
           <a:lstStyle/>
           <a:p>
-            <a:pPr>
-              <a:spcAft>
-                <a:spcPts val="900"/>
-              </a:spcAft>
-            </a:pPr>
-            <a:r>
-              <a:rPr sz="1700">
-                <a:solidFill>
-                  <a:srgbClr val="000000"/>
-                </a:solidFill>
-                <a:latin typeface="Calibri"/>
-              </a:rPr>
-              <a:t>•  DA2, due 18 September 2026</a:t>
-            </a:r>
-          </a:p>
-          <a:p>
-            <a:pPr lvl="1">
-              <a:spcAft>
-                <a:spcPts val="900"/>
-              </a:spcAft>
-            </a:pPr>
-            <a:r>
-              <a:rPr sz="1500">
+            <a:pPr algn="l"/>
+            <a:r>
+              <a:rPr sz="1350" b="0" i="1">
                 <a:solidFill>
                   <a:srgbClr val="444444"/>
                 </a:solidFill>
                 <a:latin typeface="Calibri"/>
               </a:rPr>
-              <a:t>-  Create the 17 tables in SQL with keys and constraints, load sample data, add the BCNF trigger, and write PL/SQL for receiving stock and dispatching orders.</a:t>
-            </a:r>
-          </a:p>
-          <a:p>
-            <a:pPr>
-              <a:spcAft>
-                <a:spcPts val="900"/>
-              </a:spcAft>
-            </a:pPr>
-            <a:r>
-              <a:rPr sz="1700">
-                <a:solidFill>
-                  <a:srgbClr val="000000"/>
-                </a:solidFill>
-                <a:latin typeface="Calibri"/>
-              </a:rPr>
-              <a:t>•  DA3, due 23 October 2026</a:t>
-            </a:r>
-          </a:p>
-          <a:p>
-            <a:pPr lvl="1">
-              <a:spcAft>
-                <a:spcPts val="900"/>
-              </a:spcAft>
-            </a:pPr>
-            <a:r>
-              <a:rPr sz="1500">
-                <a:solidFill>
-                  <a:srgbClr val="444444"/>
-                </a:solidFill>
-                <a:latin typeface="Calibri"/>
-              </a:rPr>
-              <a:t>-  Rebuild on a graph database (Neo4j). Tracing a delivery back through shipment, order, warehouse and supplier is a chain of hops, one line in a graph query but a fresh join for every step in SQL.</a:t>
-            </a:r>
-          </a:p>
-        </p:txBody>
-      </p:sp>
+              <a:t>every relation, every column, at every stage</a:t>
+            </a:r>
+          </a:p>
+        </p:txBody>
+      </p:sp>
+      <p:pic>
+        <p:nvPicPr>
+          <p:cNvPr id="5" name="Picture 4" descr="decomp_tree.png"/>
+          <p:cNvPicPr>
+            <a:picLocks noChangeAspect="1"/>
+          </p:cNvPicPr>
+          <p:nvPr/>
+        </p:nvPicPr>
+        <p:blipFill>
+          <a:blip r:embed="rId2"/>
+          <a:stretch>
+            <a:fillRect/>
+          </a:stretch>
+        </p:blipFill>
+        <p:spPr>
+          <a:xfrm>
+            <a:off x="1849336" y="1463040"/>
+            <a:ext cx="8493022" cy="5212079"/>
+          </a:xfrm>
+          <a:prstGeom prst="rect">
+            <a:avLst/>
+          </a:prstGeom>
+        </p:spPr>
+      </p:pic>
     </p:spTree>
   </p:cSld>
   <p:clrMapOvr>
@@ -9437,8 +9722,8 @@
         </p:nvSpPr>
         <p:spPr>
           <a:xfrm>
-            <a:off x="731520" y="2651760"/>
-            <a:ext cx="10698480" cy="1097280"/>
+            <a:off x="457200" y="237744"/>
+            <a:ext cx="11338560" cy="566928"/>
           </a:xfrm>
           <a:prstGeom prst="rect">
             <a:avLst/>
@@ -9451,15 +9736,15 @@
           </a:bodyPr>
           <a:lstStyle/>
           <a:p>
-            <a:pPr algn="ctr"/>
-            <a:r>
-              <a:rPr sz="4400" b="1" i="0">
-                <a:solidFill>
-                  <a:srgbClr val="000000"/>
-                </a:solidFill>
-                <a:latin typeface="Calibri"/>
-              </a:rPr>
-              <a:t>Thank You</a:t>
+            <a:pPr algn="l"/>
+            <a:r>
+              <a:rPr sz="2600" b="1" i="0">
+                <a:solidFill>
+                  <a:srgbClr val="000000"/>
+                </a:solidFill>
+                <a:latin typeface="Calibri"/>
+              </a:rPr>
+              <a:t>10. Final Schema, 20 Tables, All in BCNF</a:t>
             </a:r>
           </a:p>
         </p:txBody>
@@ -9472,8 +9757,8 @@
         </p:nvSpPr>
         <p:spPr>
           <a:xfrm>
-            <a:off x="4023360" y="3794760"/>
-            <a:ext cx="4114800" cy="18288"/>
+            <a:off x="457200" y="896112"/>
+            <a:ext cx="11338560" cy="18288"/>
           </a:xfrm>
           <a:prstGeom prst="rect">
             <a:avLst/>
@@ -9508,16 +9793,58 @@
           </a:p>
         </p:txBody>
       </p:sp>
-      <p:sp>
-        <p:nvSpPr>
-          <p:cNvPr id="4" name="TextBox 3"/>
+      <p:pic>
+        <p:nvPicPr>
+          <p:cNvPr id="4" name="Picture 3" descr="final_schema.png"/>
+          <p:cNvPicPr>
+            <a:picLocks noChangeAspect="1"/>
+          </p:cNvPicPr>
+          <p:nvPr/>
+        </p:nvPicPr>
+        <p:blipFill>
+          <a:blip r:embed="rId2"/>
+          <a:stretch>
+            <a:fillRect/>
+          </a:stretch>
+        </p:blipFill>
+        <p:spPr>
+          <a:xfrm>
+            <a:off x="335127" y="1294664"/>
+            <a:ext cx="11521440" cy="5164783"/>
+          </a:xfrm>
+          <a:prstGeom prst="rect">
+            <a:avLst/>
+          </a:prstGeom>
+        </p:spPr>
+      </p:pic>
+    </p:spTree>
+  </p:cSld>
+  <p:clrMapOvr>
+    <a:masterClrMapping/>
+  </p:clrMapOvr>
+</p:sld>
+</file>
+
+<file path=ppt/slides/slide34.xml><?xml version="1.0" encoding="utf-8"?>
+<p:sld xmlns:a="http://schemas.openxmlformats.org/drawingml/2006/main" xmlns:p="http://schemas.openxmlformats.org/presentationml/2006/main" xmlns:r="http://schemas.openxmlformats.org/officeDocument/2006/relationships">
+  <p:cSld>
+    <p:spTree>
+      <p:nvGrpSpPr>
+        <p:cNvPr id="1" name=""/>
+        <p:cNvGrpSpPr/>
+        <p:nvPr/>
+      </p:nvGrpSpPr>
+      <p:grpSpPr/>
+      <p:sp>
+        <p:nvSpPr>
+          <p:cNvPr id="2" name="TextBox 1"/>
           <p:cNvSpPr txBox="1"/>
           <p:nvPr/>
         </p:nvSpPr>
         <p:spPr>
           <a:xfrm>
-            <a:off x="731520" y="3977639"/>
-            <a:ext cx="10698480" cy="640080"/>
+            <a:off x="457200" y="292608"/>
+            <a:ext cx="11338560" cy="566928"/>
           </a:xfrm>
           <a:prstGeom prst="rect">
             <a:avLst/>
@@ -9530,7 +9857,518 @@
           </a:bodyPr>
           <a:lstStyle/>
           <a:p>
+            <a:pPr algn="l"/>
+            <a:r>
+              <a:rPr sz="2600" b="1" i="0">
+                <a:solidFill>
+                  <a:srgbClr val="000000"/>
+                </a:solidFill>
+                <a:latin typeface="Calibri"/>
+              </a:rPr>
+              <a:t>10. Why the Design Is Now Safe</a:t>
+            </a:r>
+          </a:p>
+        </p:txBody>
+      </p:sp>
+      <p:sp>
+        <p:nvSpPr>
+          <p:cNvPr id="3" name="Rectangle 2"/>
+          <p:cNvSpPr/>
+          <p:nvPr/>
+        </p:nvSpPr>
+        <p:spPr>
+          <a:xfrm>
+            <a:off x="457200" y="950976"/>
+            <a:ext cx="11338560" cy="18288"/>
+          </a:xfrm>
+          <a:prstGeom prst="rect">
+            <a:avLst/>
+          </a:prstGeom>
+          <a:solidFill>
+            <a:srgbClr val="000000"/>
+          </a:solidFill>
+          <a:ln>
+            <a:noFill/>
+          </a:ln>
+          <a:effectLst/>
+        </p:spPr>
+        <p:style>
+          <a:lnRef idx="1">
+            <a:schemeClr val="accent1"/>
+          </a:lnRef>
+          <a:fillRef idx="3">
+            <a:schemeClr val="accent1"/>
+          </a:fillRef>
+          <a:effectRef idx="2">
+            <a:schemeClr val="accent1"/>
+          </a:effectRef>
+          <a:fontRef idx="minor">
+            <a:schemeClr val="lt1"/>
+          </a:fontRef>
+        </p:style>
+        <p:txBody>
+          <a:bodyPr rtlCol="0" anchor="ctr"/>
+          <a:lstStyle/>
+          <a:p>
             <a:pPr algn="ctr"/>
+          </a:p>
+        </p:txBody>
+      </p:sp>
+      <p:sp>
+        <p:nvSpPr>
+          <p:cNvPr id="4" name="TextBox 3"/>
+          <p:cNvSpPr txBox="1"/>
+          <p:nvPr/>
+        </p:nvSpPr>
+        <p:spPr>
+          <a:xfrm>
+            <a:off x="640080" y="1133856"/>
+            <a:ext cx="10972800" cy="5449824"/>
+          </a:xfrm>
+          <a:prstGeom prst="rect">
+            <a:avLst/>
+          </a:prstGeom>
+          <a:noFill/>
+        </p:spPr>
+        <p:txBody>
+          <a:bodyPr wrap="square">
+            <a:spAutoFit/>
+          </a:bodyPr>
+          <a:lstStyle/>
+          <a:p>
+            <a:pPr>
+              <a:spcAft>
+                <a:spcPts val="900"/>
+              </a:spcAft>
+            </a:pPr>
+            <a:r>
+              <a:rPr sz="1600">
+                <a:solidFill>
+                  <a:srgbClr val="000000"/>
+                </a:solidFill>
+                <a:latin typeface="Calibri"/>
+              </a:rPr>
+              <a:t>•  Every fact is stored in exactly one place, so two rows can never disagree.</a:t>
+            </a:r>
+          </a:p>
+          <a:p>
+            <a:pPr>
+              <a:spcAft>
+                <a:spcPts val="900"/>
+              </a:spcAft>
+            </a:pPr>
+            <a:r>
+              <a:rPr sz="1600">
+                <a:solidFill>
+                  <a:srgbClr val="000000"/>
+                </a:solidFill>
+                <a:latin typeface="Calibri"/>
+              </a:rPr>
+              <a:t>•  Correcting a product name, an address or a city's state is a single-row edit.</a:t>
+            </a:r>
+          </a:p>
+          <a:p>
+            <a:pPr>
+              <a:spcAft>
+                <a:spcPts val="900"/>
+              </a:spcAft>
+            </a:pPr>
+            <a:r>
+              <a:rPr sz="1600">
+                <a:solidFill>
+                  <a:srgbClr val="000000"/>
+                </a:solidFill>
+                <a:latin typeface="Calibri"/>
+              </a:rPr>
+              <a:t>•  A supplier, product or customer can exist before appearing on any order.</a:t>
+            </a:r>
+          </a:p>
+          <a:p>
+            <a:pPr>
+              <a:spcAft>
+                <a:spcPts val="900"/>
+              </a:spcAft>
+            </a:pPr>
+            <a:r>
+              <a:rPr sz="1600">
+                <a:solidFill>
+                  <a:srgbClr val="000000"/>
+                </a:solidFill>
+                <a:latin typeface="Calibri"/>
+              </a:rPr>
+              <a:t>•  Deleting an order cannot wipe out the customer who placed it.</a:t>
+            </a:r>
+          </a:p>
+          <a:p>
+            <a:pPr>
+              <a:spcAft>
+                <a:spcPts val="900"/>
+              </a:spcAft>
+            </a:pPr>
+            <a:r>
+              <a:rPr sz="1600">
+                <a:solidFill>
+                  <a:srgbClr val="000000"/>
+                </a:solidFill>
+                <a:latin typeface="Calibri"/>
+              </a:rPr>
+              <a:t>•  TotalAmt is calculated, not stored, so it can never fall out of step.</a:t>
+            </a:r>
+          </a:p>
+          <a:p>
+            <a:pPr>
+              <a:spcAft>
+                <a:spcPts val="900"/>
+              </a:spcAft>
+            </a:pPr>
+            <a:r>
+              <a:rPr sz="1600">
+                <a:solidFill>
+                  <a:srgbClr val="000000"/>
+                </a:solidFill>
+                <a:latin typeface="Calibri"/>
+              </a:rPr>
+              <a:t>•  A movement is recorded once whether it is a shipment or a return.</a:t>
+            </a:r>
+          </a:p>
+          <a:p>
+            <a:pPr>
+              <a:spcAft>
+                <a:spcPts val="900"/>
+              </a:spcAft>
+            </a:pPr>
+            <a:r>
+              <a:rPr sz="1600">
+                <a:solidFill>
+                  <a:srgbClr val="000000"/>
+                </a:solidFill>
+                <a:latin typeface="Calibri"/>
+              </a:rPr>
+              <a:t>•  WAREHOUSE has two candidate keys now, WarehouseID and ManagerID, because MANAGES is 1:1. Both are keys, so it is still in BCNF.</a:t>
+            </a:r>
+          </a:p>
+          <a:p>
+            <a:pPr>
+              <a:spcAft>
+                <a:spcPts val="900"/>
+              </a:spcAft>
+            </a:pPr>
+            <a:r>
+              <a:rPr sz="1600">
+                <a:solidFill>
+                  <a:srgbClr val="000000"/>
+                </a:solidFill>
+                <a:latin typeface="Calibri"/>
+              </a:rPr>
+              <a:t>•  One trade-off: F7, {OrderID, City} -&gt; DriverID, now needs a trigger, which DA2 will add.</a:t>
+            </a:r>
+          </a:p>
+        </p:txBody>
+      </p:sp>
+    </p:spTree>
+  </p:cSld>
+  <p:clrMapOvr>
+    <a:masterClrMapping/>
+  </p:clrMapOvr>
+</p:sld>
+</file>
+
+<file path=ppt/slides/slide35.xml><?xml version="1.0" encoding="utf-8"?>
+<p:sld xmlns:a="http://schemas.openxmlformats.org/drawingml/2006/main" xmlns:p="http://schemas.openxmlformats.org/presentationml/2006/main" xmlns:r="http://schemas.openxmlformats.org/officeDocument/2006/relationships">
+  <p:cSld>
+    <p:spTree>
+      <p:nvGrpSpPr>
+        <p:cNvPr id="1" name=""/>
+        <p:cNvGrpSpPr/>
+        <p:nvPr/>
+      </p:nvGrpSpPr>
+      <p:grpSpPr/>
+      <p:sp>
+        <p:nvSpPr>
+          <p:cNvPr id="2" name="TextBox 1"/>
+          <p:cNvSpPr txBox="1"/>
+          <p:nvPr/>
+        </p:nvSpPr>
+        <p:spPr>
+          <a:xfrm>
+            <a:off x="457200" y="292608"/>
+            <a:ext cx="11338560" cy="566928"/>
+          </a:xfrm>
+          <a:prstGeom prst="rect">
+            <a:avLst/>
+          </a:prstGeom>
+          <a:noFill/>
+        </p:spPr>
+        <p:txBody>
+          <a:bodyPr wrap="square">
+            <a:spAutoFit/>
+          </a:bodyPr>
+          <a:lstStyle/>
+          <a:p>
+            <a:pPr algn="l"/>
+            <a:r>
+              <a:rPr sz="2600" b="1" i="0">
+                <a:solidFill>
+                  <a:srgbClr val="000000"/>
+                </a:solidFill>
+                <a:latin typeface="Calibri"/>
+              </a:rPr>
+              <a:t>11. What Comes Next</a:t>
+            </a:r>
+          </a:p>
+        </p:txBody>
+      </p:sp>
+      <p:sp>
+        <p:nvSpPr>
+          <p:cNvPr id="3" name="Rectangle 2"/>
+          <p:cNvSpPr/>
+          <p:nvPr/>
+        </p:nvSpPr>
+        <p:spPr>
+          <a:xfrm>
+            <a:off x="457200" y="950976"/>
+            <a:ext cx="11338560" cy="18288"/>
+          </a:xfrm>
+          <a:prstGeom prst="rect">
+            <a:avLst/>
+          </a:prstGeom>
+          <a:solidFill>
+            <a:srgbClr val="000000"/>
+          </a:solidFill>
+          <a:ln>
+            <a:noFill/>
+          </a:ln>
+          <a:effectLst/>
+        </p:spPr>
+        <p:style>
+          <a:lnRef idx="1">
+            <a:schemeClr val="accent1"/>
+          </a:lnRef>
+          <a:fillRef idx="3">
+            <a:schemeClr val="accent1"/>
+          </a:fillRef>
+          <a:effectRef idx="2">
+            <a:schemeClr val="accent1"/>
+          </a:effectRef>
+          <a:fontRef idx="minor">
+            <a:schemeClr val="lt1"/>
+          </a:fontRef>
+        </p:style>
+        <p:txBody>
+          <a:bodyPr rtlCol="0" anchor="ctr"/>
+          <a:lstStyle/>
+          <a:p>
+            <a:pPr algn="ctr"/>
+          </a:p>
+        </p:txBody>
+      </p:sp>
+      <p:sp>
+        <p:nvSpPr>
+          <p:cNvPr id="4" name="TextBox 3"/>
+          <p:cNvSpPr txBox="1"/>
+          <p:nvPr/>
+        </p:nvSpPr>
+        <p:spPr>
+          <a:xfrm>
+            <a:off x="640080" y="1133856"/>
+            <a:ext cx="10972800" cy="5449824"/>
+          </a:xfrm>
+          <a:prstGeom prst="rect">
+            <a:avLst/>
+          </a:prstGeom>
+          <a:noFill/>
+        </p:spPr>
+        <p:txBody>
+          <a:bodyPr wrap="square">
+            <a:spAutoFit/>
+          </a:bodyPr>
+          <a:lstStyle/>
+          <a:p>
+            <a:pPr>
+              <a:spcAft>
+                <a:spcPts val="900"/>
+              </a:spcAft>
+            </a:pPr>
+            <a:r>
+              <a:rPr sz="1700">
+                <a:solidFill>
+                  <a:srgbClr val="000000"/>
+                </a:solidFill>
+                <a:latin typeface="Calibri"/>
+              </a:rPr>
+              <a:t>•  DA2, due 18 September 2026</a:t>
+            </a:r>
+          </a:p>
+          <a:p>
+            <a:pPr lvl="1">
+              <a:spcAft>
+                <a:spcPts val="900"/>
+              </a:spcAft>
+            </a:pPr>
+            <a:r>
+              <a:rPr sz="1500">
+                <a:solidFill>
+                  <a:srgbClr val="444444"/>
+                </a:solidFill>
+                <a:latin typeface="Calibri"/>
+              </a:rPr>
+              <a:t>-  Create the 20 tables in SQL with keys and constraints, load sample data, add the BCNF trigger, and write PL/SQL for receiving stock and dispatching orders.</a:t>
+            </a:r>
+          </a:p>
+          <a:p>
+            <a:pPr>
+              <a:spcAft>
+                <a:spcPts val="900"/>
+              </a:spcAft>
+            </a:pPr>
+            <a:r>
+              <a:rPr sz="1700">
+                <a:solidFill>
+                  <a:srgbClr val="000000"/>
+                </a:solidFill>
+                <a:latin typeface="Calibri"/>
+              </a:rPr>
+              <a:t>•  DA3, due 23 October 2026</a:t>
+            </a:r>
+          </a:p>
+          <a:p>
+            <a:pPr lvl="1">
+              <a:spcAft>
+                <a:spcPts val="900"/>
+              </a:spcAft>
+            </a:pPr>
+            <a:r>
+              <a:rPr sz="1500">
+                <a:solidFill>
+                  <a:srgbClr val="444444"/>
+                </a:solidFill>
+                <a:latin typeface="Calibri"/>
+              </a:rPr>
+              <a:t>-  Rebuild on a graph database (Neo4j). Tracing a delivery back through shipment, order, warehouse and supplier is a chain of hops, one line in a graph query but a fresh join for every step in SQL.</a:t>
+            </a:r>
+          </a:p>
+        </p:txBody>
+      </p:sp>
+    </p:spTree>
+  </p:cSld>
+  <p:clrMapOvr>
+    <a:masterClrMapping/>
+  </p:clrMapOvr>
+</p:sld>
+</file>
+
+<file path=ppt/slides/slide36.xml><?xml version="1.0" encoding="utf-8"?>
+<p:sld xmlns:a="http://schemas.openxmlformats.org/drawingml/2006/main" xmlns:p="http://schemas.openxmlformats.org/presentationml/2006/main" xmlns:r="http://schemas.openxmlformats.org/officeDocument/2006/relationships">
+  <p:cSld>
+    <p:spTree>
+      <p:nvGrpSpPr>
+        <p:cNvPr id="1" name=""/>
+        <p:cNvGrpSpPr/>
+        <p:nvPr/>
+      </p:nvGrpSpPr>
+      <p:grpSpPr/>
+      <p:sp>
+        <p:nvSpPr>
+          <p:cNvPr id="2" name="TextBox 1"/>
+          <p:cNvSpPr txBox="1"/>
+          <p:nvPr/>
+        </p:nvSpPr>
+        <p:spPr>
+          <a:xfrm>
+            <a:off x="731520" y="2651760"/>
+            <a:ext cx="10698480" cy="1097280"/>
+          </a:xfrm>
+          <a:prstGeom prst="rect">
+            <a:avLst/>
+          </a:prstGeom>
+          <a:noFill/>
+        </p:spPr>
+        <p:txBody>
+          <a:bodyPr wrap="square">
+            <a:spAutoFit/>
+          </a:bodyPr>
+          <a:lstStyle/>
+          <a:p>
+            <a:pPr algn="ctr"/>
+            <a:r>
+              <a:rPr sz="4400" b="1" i="0">
+                <a:solidFill>
+                  <a:srgbClr val="000000"/>
+                </a:solidFill>
+                <a:latin typeface="Calibri"/>
+              </a:rPr>
+              <a:t>Thank You</a:t>
+            </a:r>
+          </a:p>
+        </p:txBody>
+      </p:sp>
+      <p:sp>
+        <p:nvSpPr>
+          <p:cNvPr id="3" name="Rectangle 2"/>
+          <p:cNvSpPr/>
+          <p:nvPr/>
+        </p:nvSpPr>
+        <p:spPr>
+          <a:xfrm>
+            <a:off x="4023360" y="3794760"/>
+            <a:ext cx="4114800" cy="18288"/>
+          </a:xfrm>
+          <a:prstGeom prst="rect">
+            <a:avLst/>
+          </a:prstGeom>
+          <a:solidFill>
+            <a:srgbClr val="000000"/>
+          </a:solidFill>
+          <a:ln>
+            <a:noFill/>
+          </a:ln>
+          <a:effectLst/>
+        </p:spPr>
+        <p:style>
+          <a:lnRef idx="1">
+            <a:schemeClr val="accent1"/>
+          </a:lnRef>
+          <a:fillRef idx="3">
+            <a:schemeClr val="accent1"/>
+          </a:fillRef>
+          <a:effectRef idx="2">
+            <a:schemeClr val="accent1"/>
+          </a:effectRef>
+          <a:fontRef idx="minor">
+            <a:schemeClr val="lt1"/>
+          </a:fontRef>
+        </p:style>
+        <p:txBody>
+          <a:bodyPr rtlCol="0" anchor="ctr"/>
+          <a:lstStyle/>
+          <a:p>
+            <a:pPr algn="ctr"/>
+          </a:p>
+        </p:txBody>
+      </p:sp>
+      <p:sp>
+        <p:nvSpPr>
+          <p:cNvPr id="4" name="TextBox 3"/>
+          <p:cNvSpPr txBox="1"/>
+          <p:nvPr/>
+        </p:nvSpPr>
+        <p:spPr>
+          <a:xfrm>
+            <a:off x="731520" y="3977639"/>
+            <a:ext cx="10698480" cy="640080"/>
+          </a:xfrm>
+          <a:prstGeom prst="rect">
+            <a:avLst/>
+          </a:prstGeom>
+          <a:noFill/>
+        </p:spPr>
+        <p:txBody>
+          <a:bodyPr wrap="square">
+            <a:spAutoFit/>
+          </a:bodyPr>
+          <a:lstStyle/>
+          <a:p>
+            <a:pPr algn="ctr"/>
             <a:r>
               <a:rPr sz="1900" b="0" i="1">
                 <a:solidFill>
@@ -9538,7 +10376,7 @@
                 </a:solidFill>
                 <a:latin typeface="Calibri"/>
               </a:rPr>
-              <a:t>7 entities, 7 relationships, 17 tables, all in BCNF</a:t>
+              <a:t>9 entities, 12 relationships, 20 tables, all in BCNF</a:t>
             </a:r>
           </a:p>
         </p:txBody>
@@ -9989,7 +10827,7 @@
                 </a:solidFill>
                 <a:latin typeface="Calibri"/>
               </a:rPr>
-              <a:t>•  In scope: 7 entities, namely warehouse, product, supplier, customer, orders, shipment and employee.</a:t>
+              <a:t>•  In scope: 9 entities, namely warehouse, product, supplier, customer, orders, shipment, return, inspection and employee.</a:t>
             </a:r>
           </a:p>
           <a:p>
@@ -10058,7 +10896,7 @@
                 </a:solidFill>
                 <a:latin typeface="Calibri"/>
               </a:rPr>
-              <a:t>2. The Seven Entities</a:t>
+              <a:t>2. The Nine Entities</a:t>
             </a:r>
           </a:p>
         </p:txBody>
@@ -10151,8 +10989,8 @@
           <p:nvPr/>
         </p:nvGraphicFramePr>
         <p:xfrm>
-          <a:off x="838047" y="2464308"/>
-          <a:ext cx="10515600" cy="3218688"/>
+          <a:off x="838047" y="2061972"/>
+          <a:ext cx="10515600" cy="4023360"/>
         </p:xfrm>
         <a:graphic>
           <a:graphicData uri="http://schemas.openxmlformats.org/drawingml/2006/table">
@@ -10172,7 +11010,7 @@
                     <a:lstStyle/>
                     <a:p>
                       <a:r>
-                        <a:rPr sz="1300" b="1">
+                        <a:rPr sz="1200" b="1">
                           <a:solidFill>
                             <a:srgbClr val="000000"/>
                           </a:solidFill>
@@ -10193,7 +11031,7 @@
                     <a:lstStyle/>
                     <a:p>
                       <a:r>
-                        <a:rPr sz="1300" b="1">
+                        <a:rPr sz="1200" b="1">
                           <a:solidFill>
                             <a:srgbClr val="000000"/>
                           </a:solidFill>
@@ -10214,7 +11052,7 @@
                     <a:lstStyle/>
                     <a:p>
                       <a:r>
-                        <a:rPr sz="1300" b="1">
+                        <a:rPr sz="1200" b="1">
                           <a:solidFill>
                             <a:srgbClr val="000000"/>
                           </a:solidFill>
@@ -10237,7 +11075,7 @@
                     <a:lstStyle/>
                     <a:p>
                       <a:r>
-                        <a:rPr sz="1200">
+                        <a:rPr sz="1100">
                           <a:solidFill>
                             <a:srgbClr val="000000"/>
                           </a:solidFill>
@@ -10258,7 +11096,7 @@
                     <a:lstStyle/>
                     <a:p>
                       <a:r>
-                        <a:rPr sz="1200">
+                        <a:rPr sz="1100">
                           <a:solidFill>
                             <a:srgbClr val="000000"/>
                           </a:solidFill>
@@ -10279,7 +11117,7 @@
                     <a:lstStyle/>
                     <a:p>
                       <a:r>
-                        <a:rPr sz="1200">
+                        <a:rPr sz="1100">
                           <a:solidFill>
                             <a:srgbClr val="000000"/>
                           </a:solidFill>
@@ -10302,7 +11140,7 @@
                     <a:lstStyle/>
                     <a:p>
                       <a:r>
-                        <a:rPr sz="1200">
+                        <a:rPr sz="1100">
                           <a:solidFill>
                             <a:srgbClr val="000000"/>
                           </a:solidFill>
@@ -10323,7 +11161,7 @@
                     <a:lstStyle/>
                     <a:p>
                       <a:r>
-                        <a:rPr sz="1200">
+                        <a:rPr sz="1100">
                           <a:solidFill>
                             <a:srgbClr val="000000"/>
                           </a:solidFill>
@@ -10344,7 +11182,7 @@
                     <a:lstStyle/>
                     <a:p>
                       <a:r>
-                        <a:rPr sz="1200">
+                        <a:rPr sz="1100">
                           <a:solidFill>
                             <a:srgbClr val="000000"/>
                           </a:solidFill>
@@ -10367,7 +11205,7 @@
                     <a:lstStyle/>
                     <a:p>
                       <a:r>
-                        <a:rPr sz="1200">
+                        <a:rPr sz="1100">
                           <a:solidFill>
                             <a:srgbClr val="000000"/>
                           </a:solidFill>
@@ -10388,7 +11226,7 @@
                     <a:lstStyle/>
                     <a:p>
                       <a:r>
-                        <a:rPr sz="1200">
+                        <a:rPr sz="1100">
                           <a:solidFill>
                             <a:srgbClr val="000000"/>
                           </a:solidFill>
@@ -10409,7 +11247,7 @@
                     <a:lstStyle/>
                     <a:p>
                       <a:r>
-                        <a:rPr sz="1200">
+                        <a:rPr sz="1100">
                           <a:solidFill>
                             <a:srgbClr val="000000"/>
                           </a:solidFill>
@@ -10432,7 +11270,7 @@
                     <a:lstStyle/>
                     <a:p>
                       <a:r>
-                        <a:rPr sz="1200">
+                        <a:rPr sz="1100">
                           <a:solidFill>
                             <a:srgbClr val="000000"/>
                           </a:solidFill>
@@ -10453,7 +11291,7 @@
                     <a:lstStyle/>
                     <a:p>
                       <a:r>
-                        <a:rPr sz="1200">
+                        <a:rPr sz="1100">
                           <a:solidFill>
                             <a:srgbClr val="000000"/>
                           </a:solidFill>
@@ -10474,7 +11312,7 @@
                     <a:lstStyle/>
                     <a:p>
                       <a:r>
-                        <a:rPr sz="1200">
+                        <a:rPr sz="1100">
                           <a:solidFill>
                             <a:srgbClr val="000000"/>
                           </a:solidFill>
@@ -10497,7 +11335,7 @@
                     <a:lstStyle/>
                     <a:p>
                       <a:r>
-                        <a:rPr sz="1200">
+                        <a:rPr sz="1100">
                           <a:solidFill>
                             <a:srgbClr val="000000"/>
                           </a:solidFill>
@@ -10518,7 +11356,7 @@
                     <a:lstStyle/>
                     <a:p>
                       <a:r>
-                        <a:rPr sz="1200">
+                        <a:rPr sz="1100">
                           <a:solidFill>
                             <a:srgbClr val="000000"/>
                           </a:solidFill>
@@ -10539,7 +11377,7 @@
                     <a:lstStyle/>
                     <a:p>
                       <a:r>
-                        <a:rPr sz="1200">
+                        <a:rPr sz="1100">
                           <a:solidFill>
                             <a:srgbClr val="000000"/>
                           </a:solidFill>
@@ -10562,7 +11400,7 @@
                     <a:lstStyle/>
                     <a:p>
                       <a:r>
-                        <a:rPr sz="1200">
+                        <a:rPr sz="1100">
                           <a:solidFill>
                             <a:srgbClr val="000000"/>
                           </a:solidFill>
@@ -10583,7 +11421,7 @@
                     <a:lstStyle/>
                     <a:p>
                       <a:r>
-                        <a:rPr sz="1200">
+                        <a:rPr sz="1100">
                           <a:solidFill>
                             <a:srgbClr val="000000"/>
                           </a:solidFill>
@@ -10604,7 +11442,7 @@
                     <a:lstStyle/>
                     <a:p>
                       <a:r>
-                        <a:rPr sz="1200">
+                        <a:rPr sz="1100">
                           <a:solidFill>
                             <a:srgbClr val="000000"/>
                           </a:solidFill>
@@ -10627,7 +11465,137 @@
                     <a:lstStyle/>
                     <a:p>
                       <a:r>
-                        <a:rPr sz="1200">
+                        <a:rPr sz="1100">
+                          <a:solidFill>
+                            <a:srgbClr val="000000"/>
+                          </a:solidFill>
+                        </a:rPr>
+                        <a:t>GOODS_RETURN</a:t>
+                      </a:r>
+                    </a:p>
+                  </a:txBody>
+                  <a:tcPr anchor="ctr">
+                    <a:solidFill>
+                      <a:srgbClr val="F4F4F4"/>
+                    </a:solidFill>
+                  </a:tcPr>
+                </a:tc>
+                <a:tc>
+                  <a:txBody>
+                    <a:bodyPr/>
+                    <a:lstStyle/>
+                    <a:p>
+                      <a:r>
+                        <a:rPr sz="1100">
+                          <a:solidFill>
+                            <a:srgbClr val="000000"/>
+                          </a:solidFill>
+                        </a:rPr>
+                        <a:t>ReturnID</a:t>
+                      </a:r>
+                    </a:p>
+                  </a:txBody>
+                  <a:tcPr anchor="ctr">
+                    <a:solidFill>
+                      <a:srgbClr val="F4F4F4"/>
+                    </a:solidFill>
+                  </a:tcPr>
+                </a:tc>
+                <a:tc>
+                  <a:txBody>
+                    <a:bodyPr/>
+                    <a:lstStyle/>
+                    <a:p>
+                      <a:r>
+                        <a:rPr sz="1100">
+                          <a:solidFill>
+                            <a:srgbClr val="000000"/>
+                          </a:solidFill>
+                        </a:rPr>
+                        <a:t>ReturnDate, Reason, RefundAmt, Status</a:t>
+                      </a:r>
+                    </a:p>
+                  </a:txBody>
+                  <a:tcPr anchor="ctr">
+                    <a:solidFill>
+                      <a:srgbClr val="F4F4F4"/>
+                    </a:solidFill>
+                  </a:tcPr>
+                </a:tc>
+              </a:tr>
+              <a:tr h="402336">
+                <a:tc>
+                  <a:txBody>
+                    <a:bodyPr/>
+                    <a:lstStyle/>
+                    <a:p>
+                      <a:r>
+                        <a:rPr sz="1100">
+                          <a:solidFill>
+                            <a:srgbClr val="000000"/>
+                          </a:solidFill>
+                        </a:rPr>
+                        <a:t>INSPECTION</a:t>
+                      </a:r>
+                    </a:p>
+                  </a:txBody>
+                  <a:tcPr anchor="ctr">
+                    <a:solidFill>
+                      <a:srgbClr val="FFFFFF"/>
+                    </a:solidFill>
+                  </a:tcPr>
+                </a:tc>
+                <a:tc>
+                  <a:txBody>
+                    <a:bodyPr/>
+                    <a:lstStyle/>
+                    <a:p>
+                      <a:r>
+                        <a:rPr sz="1100">
+                          <a:solidFill>
+                            <a:srgbClr val="000000"/>
+                          </a:solidFill>
+                        </a:rPr>
+                        <a:t>InspID</a:t>
+                      </a:r>
+                    </a:p>
+                  </a:txBody>
+                  <a:tcPr anchor="ctr">
+                    <a:solidFill>
+                      <a:srgbClr val="FFFFFF"/>
+                    </a:solidFill>
+                  </a:tcPr>
+                </a:tc>
+                <a:tc>
+                  <a:txBody>
+                    <a:bodyPr/>
+                    <a:lstStyle/>
+                    <a:p>
+                      <a:r>
+                        <a:rPr sz="1100">
+                          <a:solidFill>
+                            <a:srgbClr val="000000"/>
+                          </a:solidFill>
+                        </a:rPr>
+                        <a:t>InspDate, Result</a:t>
+                      </a:r>
+                    </a:p>
+                  </a:txBody>
+                  <a:tcPr anchor="ctr">
+                    <a:solidFill>
+                      <a:srgbClr val="FFFFFF"/>
+                    </a:solidFill>
+                  </a:tcPr>
+                </a:tc>
+              </a:tr>
+              <a:tr h="402336">
+                <a:tc>
+                  <a:txBody>
+                    <a:bodyPr/>
+                    <a:lstStyle/>
+                    <a:p>
+                      <a:r>
+                        <a:rPr sz="1100">
                           <a:solidFill>
                             <a:srgbClr val="000000"/>
                           </a:solidFill>
@@ -10648,7 +11616,7 @@
                     <a:lstStyle/>
                     <a:p>
                       <a:r>
-                        <a:rPr sz="1200">
+                        <a:rPr sz="1100">
                           <a:solidFill>
                             <a:srgbClr val="000000"/>
                           </a:solidFill>
@@ -10669,7 +11637,7 @@
                     <a:lstStyle/>
                     <a:p>
                       <a:r>
-                        <a:rPr sz="1200">
+                        <a:rPr sz="1100">
                           <a:solidFill>
                             <a:srgbClr val="000000"/>
                           </a:solidFill>
@@ -10737,7 +11705,7 @@
                 </a:solidFill>
                 <a:latin typeface="Calibri"/>
               </a:rPr>
-              <a:t>3. The Seven Relationships</a:t>
+              <a:t>3. The Twelve Relationships</a:t>
             </a:r>
           </a:p>
         </p:txBody>
@@ -10816,7 +11784,7 @@
                 </a:solidFill>
                 <a:latin typeface="Calibri"/>
               </a:rPr>
-              <a:t>1:N means one row links to many, M:N means many on both sides</a:t>
+              <a:t>1:1 means one row on each side, 1:N one to many, M:N many on both sides</a:t>
             </a:r>
           </a:p>
         </p:txBody>
@@ -10830,8 +11798,8 @@
           <p:nvPr/>
         </p:nvGraphicFramePr>
         <p:xfrm>
-          <a:off x="1798167" y="2464308"/>
-          <a:ext cx="8595360" cy="3218688"/>
+          <a:off x="1798167" y="1517904"/>
+          <a:ext cx="8595360" cy="5230368"/>
         </p:xfrm>
         <a:graphic>
           <a:graphicData uri="http://schemas.openxmlformats.org/drawingml/2006/table">
@@ -10841,8 +11809,8 @@
               </a:tblPr>
               <a:tblGrid>
                 <a:gridCol w="3108960"/>
-                <a:gridCol w="4023360"/>
-                <a:gridCol w="1463040"/>
+                <a:gridCol w="4206240"/>
+                <a:gridCol w="1280160"/>
               </a:tblGrid>
               <a:tr h="402336">
                 <a:tc>
@@ -10851,7 +11819,7 @@
                     <a:lstStyle/>
                     <a:p>
                       <a:r>
-                        <a:rPr sz="1400" b="1">
+                        <a:rPr sz="1150" b="1">
                           <a:solidFill>
                             <a:srgbClr val="000000"/>
                           </a:solidFill>
@@ -10872,7 +11840,7 @@
                     <a:lstStyle/>
                     <a:p>
                       <a:r>
-                        <a:rPr sz="1400" b="1">
+                        <a:rPr sz="1150" b="1">
                           <a:solidFill>
                             <a:srgbClr val="000000"/>
                           </a:solidFill>
@@ -10893,7 +11861,7 @@
                     <a:lstStyle/>
                     <a:p>
                       <a:r>
-                        <a:rPr sz="1400" b="1">
+                        <a:rPr sz="1150" b="1">
                           <a:solidFill>
                             <a:srgbClr val="000000"/>
                           </a:solidFill>
@@ -10916,7 +11884,7 @@
                     <a:lstStyle/>
                     <a:p>
                       <a:r>
-                        <a:rPr sz="1300">
+                        <a:rPr sz="1050">
                           <a:solidFill>
                             <a:srgbClr val="000000"/>
                           </a:solidFill>
@@ -10937,7 +11905,7 @@
                     <a:lstStyle/>
                     <a:p>
                       <a:r>
-                        <a:rPr sz="1300">
+                        <a:rPr sz="1050">
                           <a:solidFill>
                             <a:srgbClr val="000000"/>
                           </a:solidFill>
@@ -10958,7 +11926,7 @@
                     <a:lstStyle/>
                     <a:p>
                       <a:r>
-                        <a:rPr sz="1300">
+                        <a:rPr sz="1050">
                           <a:solidFill>
                             <a:srgbClr val="000000"/>
                           </a:solidFill>
@@ -10981,7 +11949,7 @@
                     <a:lstStyle/>
                     <a:p>
                       <a:r>
-                        <a:rPr sz="1300">
+                        <a:rPr sz="1050">
                           <a:solidFill>
                             <a:srgbClr val="000000"/>
                           </a:solidFill>
@@ -11002,7 +11970,7 @@
                     <a:lstStyle/>
                     <a:p>
                       <a:r>
-                        <a:rPr sz="1300">
+                        <a:rPr sz="1050">
                           <a:solidFill>
                             <a:srgbClr val="000000"/>
                           </a:solidFill>
@@ -11023,7 +11991,7 @@
                     <a:lstStyle/>
                     <a:p>
                       <a:r>
-                        <a:rPr sz="1300">
+                        <a:rPr sz="1050">
                           <a:solidFill>
                             <a:srgbClr val="000000"/>
                           </a:solidFill>
@@ -11046,7 +12014,7 @@
                     <a:lstStyle/>
                     <a:p>
                       <a:r>
-                        <a:rPr sz="1300">
+                        <a:rPr sz="1050">
                           <a:solidFill>
                             <a:srgbClr val="000000"/>
                           </a:solidFill>
@@ -11067,7 +12035,7 @@
                     <a:lstStyle/>
                     <a:p>
                       <a:r>
-                        <a:rPr sz="1300">
+                        <a:rPr sz="1050">
                           <a:solidFill>
                             <a:srgbClr val="000000"/>
                           </a:solidFill>
@@ -11088,7 +12056,7 @@
                     <a:lstStyle/>
                     <a:p>
                       <a:r>
-                        <a:rPr sz="1300">
+                        <a:rPr sz="1050">
                           <a:solidFill>
                             <a:srgbClr val="000000"/>
                           </a:solidFill>
@@ -11111,7 +12079,7 @@
                     <a:lstStyle/>
                     <a:p>
                       <a:r>
-                        <a:rPr sz="1300">
+                        <a:rPr sz="1050">
                           <a:solidFill>
                             <a:srgbClr val="000000"/>
                           </a:solidFill>
@@ -11132,7 +12100,7 @@
                     <a:lstStyle/>
                     <a:p>
                       <a:r>
-                        <a:rPr sz="1300">
+                        <a:rPr sz="1050">
                           <a:solidFill>
                             <a:srgbClr val="000000"/>
                           </a:solidFill>
@@ -11153,7 +12121,7 @@
                     <a:lstStyle/>
                     <a:p>
                       <a:r>
-                        <a:rPr sz="1300">
+                        <a:rPr sz="1050">
                           <a:solidFill>
                             <a:srgbClr val="000000"/>
                           </a:solidFill>
@@ -11176,7 +12144,7 @@
                     <a:lstStyle/>
                     <a:p>
                       <a:r>
-                        <a:rPr sz="1300">
+                        <a:rPr sz="1050">
                           <a:solidFill>
                             <a:srgbClr val="000000"/>
                           </a:solidFill>
@@ -11197,7 +12165,7 @@
                     <a:lstStyle/>
                     <a:p>
                       <a:r>
-                        <a:rPr sz="1300">
+                        <a:rPr sz="1050">
                           <a:solidFill>
                             <a:srgbClr val="000000"/>
                           </a:solidFill>
@@ -11218,7 +12186,7 @@
                     <a:lstStyle/>
                     <a:p>
                       <a:r>
-                        <a:rPr sz="1300">
+                        <a:rPr sz="1050">
                           <a:solidFill>
                             <a:srgbClr val="000000"/>
                           </a:solidFill>
@@ -11241,7 +12209,7 @@
                     <a:lstStyle/>
                     <a:p>
                       <a:r>
-                        <a:rPr sz="1300">
+                        <a:rPr sz="1050">
                           <a:solidFill>
                             <a:srgbClr val="000000"/>
                           </a:solidFill>
@@ -11262,7 +12230,7 @@
                     <a:lstStyle/>
                     <a:p>
                       <a:r>
-                        <a:rPr sz="1300">
+                        <a:rPr sz="1050">
                           <a:solidFill>
                             <a:srgbClr val="000000"/>
                           </a:solidFill>
@@ -11283,7 +12251,7 @@
                     <a:lstStyle/>
                     <a:p>
                       <a:r>
-                        <a:rPr sz="1300">
+                        <a:rPr sz="1050">
                           <a:solidFill>
                             <a:srgbClr val="000000"/>
                           </a:solidFill>
@@ -11306,7 +12274,7 @@
                     <a:lstStyle/>
                     <a:p>
                       <a:r>
-                        <a:rPr sz="1300">
+                        <a:rPr sz="1050">
                           <a:solidFill>
                             <a:srgbClr val="000000"/>
                           </a:solidFill>
@@ -11327,7 +12295,7 @@
                     <a:lstStyle/>
                     <a:p>
                       <a:r>
-                        <a:rPr sz="1300">
+                        <a:rPr sz="1050">
                           <a:solidFill>
                             <a:srgbClr val="000000"/>
                           </a:solidFill>
@@ -11348,7 +12316,7 @@
                     <a:lstStyle/>
                     <a:p>
                       <a:r>
-                        <a:rPr sz="1300">
+                        <a:rPr sz="1050">
                           <a:solidFill>
                             <a:srgbClr val="000000"/>
                           </a:solidFill>
@@ -11360,6 +12328,331 @@
                   <a:tcPr anchor="ctr">
                     <a:solidFill>
                       <a:srgbClr val="F4F4F4"/>
+                    </a:solidFill>
+                  </a:tcPr>
+                </a:tc>
+              </a:tr>
+              <a:tr h="402336">
+                <a:tc>
+                  <a:txBody>
+                    <a:bodyPr/>
+                    <a:lstStyle/>
+                    <a:p>
+                      <a:r>
+                        <a:rPr sz="1050">
+                          <a:solidFill>
+                            <a:srgbClr val="000000"/>
+                          </a:solidFill>
+                        </a:rPr>
+                        <a:t>MANAGES</a:t>
+                      </a:r>
+                    </a:p>
+                  </a:txBody>
+                  <a:tcPr anchor="ctr">
+                    <a:solidFill>
+                      <a:srgbClr val="FFFFFF"/>
+                    </a:solidFill>
+                  </a:tcPr>
+                </a:tc>
+                <a:tc>
+                  <a:txBody>
+                    <a:bodyPr/>
+                    <a:lstStyle/>
+                    <a:p>
+                      <a:r>
+                        <a:rPr sz="1050">
+                          <a:solidFill>
+                            <a:srgbClr val="000000"/>
+                          </a:solidFill>
+                        </a:rPr>
+                        <a:t>EMPLOYEE - WAREHOUSE</a:t>
+                      </a:r>
+                    </a:p>
+                  </a:txBody>
+                  <a:tcPr anchor="ctr">
+                    <a:solidFill>
+                      <a:srgbClr val="FFFFFF"/>
+                    </a:solidFill>
+                  </a:tcPr>
+                </a:tc>
+                <a:tc>
+                  <a:txBody>
+                    <a:bodyPr/>
+                    <a:lstStyle/>
+                    <a:p>
+                      <a:r>
+                        <a:rPr sz="1050">
+                          <a:solidFill>
+                            <a:srgbClr val="000000"/>
+                          </a:solidFill>
+                        </a:rPr>
+                        <a:t>1:1</a:t>
+                      </a:r>
+                    </a:p>
+                  </a:txBody>
+                  <a:tcPr anchor="ctr">
+                    <a:solidFill>
+                      <a:srgbClr val="FFFFFF"/>
+                    </a:solidFill>
+                  </a:tcPr>
+                </a:tc>
+              </a:tr>
+              <a:tr h="402336">
+                <a:tc>
+                  <a:txBody>
+                    <a:bodyPr/>
+                    <a:lstStyle/>
+                    <a:p>
+                      <a:r>
+                        <a:rPr sz="1050">
+                          <a:solidFill>
+                            <a:srgbClr val="000000"/>
+                          </a:solidFill>
+                        </a:rPr>
+                        <a:t>RETURNED_FOR</a:t>
+                      </a:r>
+                    </a:p>
+                  </a:txBody>
+                  <a:tcPr anchor="ctr">
+                    <a:solidFill>
+                      <a:srgbClr val="F4F4F4"/>
+                    </a:solidFill>
+                  </a:tcPr>
+                </a:tc>
+                <a:tc>
+                  <a:txBody>
+                    <a:bodyPr/>
+                    <a:lstStyle/>
+                    <a:p>
+                      <a:r>
+                        <a:rPr sz="1050">
+                          <a:solidFill>
+                            <a:srgbClr val="000000"/>
+                          </a:solidFill>
+                        </a:rPr>
+                        <a:t>ORDERS - GOODS_RETURN</a:t>
+                      </a:r>
+                    </a:p>
+                  </a:txBody>
+                  <a:tcPr anchor="ctr">
+                    <a:solidFill>
+                      <a:srgbClr val="F4F4F4"/>
+                    </a:solidFill>
+                  </a:tcPr>
+                </a:tc>
+                <a:tc>
+                  <a:txBody>
+                    <a:bodyPr/>
+                    <a:lstStyle/>
+                    <a:p>
+                      <a:r>
+                        <a:rPr sz="1050">
+                          <a:solidFill>
+                            <a:srgbClr val="000000"/>
+                          </a:solidFill>
+                        </a:rPr>
+                        <a:t>1:N</a:t>
+                      </a:r>
+                    </a:p>
+                  </a:txBody>
+                  <a:tcPr anchor="ctr">
+                    <a:solidFill>
+                      <a:srgbClr val="F4F4F4"/>
+                    </a:solidFill>
+                  </a:tcPr>
+                </a:tc>
+              </a:tr>
+              <a:tr h="402336">
+                <a:tc>
+                  <a:txBody>
+                    <a:bodyPr/>
+                    <a:lstStyle/>
+                    <a:p>
+                      <a:r>
+                        <a:rPr sz="1050">
+                          <a:solidFill>
+                            <a:srgbClr val="000000"/>
+                          </a:solidFill>
+                        </a:rPr>
+                        <a:t>RETURNED_TO</a:t>
+                      </a:r>
+                    </a:p>
+                  </a:txBody>
+                  <a:tcPr anchor="ctr">
+                    <a:solidFill>
+                      <a:srgbClr val="FFFFFF"/>
+                    </a:solidFill>
+                  </a:tcPr>
+                </a:tc>
+                <a:tc>
+                  <a:txBody>
+                    <a:bodyPr/>
+                    <a:lstStyle/>
+                    <a:p>
+                      <a:r>
+                        <a:rPr sz="1050">
+                          <a:solidFill>
+                            <a:srgbClr val="000000"/>
+                          </a:solidFill>
+                        </a:rPr>
+                        <a:t>WAREHOUSE - GOODS_RETURN</a:t>
+                      </a:r>
+                    </a:p>
+                  </a:txBody>
+                  <a:tcPr anchor="ctr">
+                    <a:solidFill>
+                      <a:srgbClr val="FFFFFF"/>
+                    </a:solidFill>
+                  </a:tcPr>
+                </a:tc>
+                <a:tc>
+                  <a:txBody>
+                    <a:bodyPr/>
+                    <a:lstStyle/>
+                    <a:p>
+                      <a:r>
+                        <a:rPr sz="1050">
+                          <a:solidFill>
+                            <a:srgbClr val="000000"/>
+                          </a:solidFill>
+                        </a:rPr>
+                        <a:t>1:N</a:t>
+                      </a:r>
+                    </a:p>
+                  </a:txBody>
+                  <a:tcPr anchor="ctr">
+                    <a:solidFill>
+                      <a:srgbClr val="FFFFFF"/>
+                    </a:solidFill>
+                  </a:tcPr>
+                </a:tc>
+              </a:tr>
+              <a:tr h="402336">
+                <a:tc>
+                  <a:txBody>
+                    <a:bodyPr/>
+                    <a:lstStyle/>
+                    <a:p>
+                      <a:r>
+                        <a:rPr sz="1050">
+                          <a:solidFill>
+                            <a:srgbClr val="000000"/>
+                          </a:solidFill>
+                        </a:rPr>
+                        <a:t>CHECKS_SUPPLIER</a:t>
+                      </a:r>
+                    </a:p>
+                  </a:txBody>
+                  <a:tcPr anchor="ctr">
+                    <a:solidFill>
+                      <a:srgbClr val="F4F4F4"/>
+                    </a:solidFill>
+                  </a:tcPr>
+                </a:tc>
+                <a:tc>
+                  <a:txBody>
+                    <a:bodyPr/>
+                    <a:lstStyle/>
+                    <a:p>
+                      <a:r>
+                        <a:rPr sz="1050">
+                          <a:solidFill>
+                            <a:srgbClr val="000000"/>
+                          </a:solidFill>
+                        </a:rPr>
+                        <a:t>INSPECTION - SUPPLIER</a:t>
+                      </a:r>
+                    </a:p>
+                  </a:txBody>
+                  <a:tcPr anchor="ctr">
+                    <a:solidFill>
+                      <a:srgbClr val="F4F4F4"/>
+                    </a:solidFill>
+                  </a:tcPr>
+                </a:tc>
+                <a:tc>
+                  <a:txBody>
+                    <a:bodyPr/>
+                    <a:lstStyle/>
+                    <a:p>
+                      <a:r>
+                        <a:rPr sz="1050">
+                          <a:solidFill>
+                            <a:srgbClr val="000000"/>
+                          </a:solidFill>
+                        </a:rPr>
+                        <a:t>N:1</a:t>
+                      </a:r>
+                    </a:p>
+                  </a:txBody>
+                  <a:tcPr anchor="ctr">
+                    <a:solidFill>
+                      <a:srgbClr val="F4F4F4"/>
+                    </a:solidFill>
+                  </a:tcPr>
+                </a:tc>
+              </a:tr>
+              <a:tr h="402336">
+                <a:tc>
+                  <a:txBody>
+                    <a:bodyPr/>
+                    <a:lstStyle/>
+                    <a:p>
+                      <a:r>
+                        <a:rPr sz="1050">
+                          <a:solidFill>
+                            <a:srgbClr val="000000"/>
+                          </a:solidFill>
+                        </a:rPr>
+                        <a:t>CHECKS_PRODUCT</a:t>
+                      </a:r>
+                    </a:p>
+                  </a:txBody>
+                  <a:tcPr anchor="ctr">
+                    <a:solidFill>
+                      <a:srgbClr val="FFFFFF"/>
+                    </a:solidFill>
+                  </a:tcPr>
+                </a:tc>
+                <a:tc>
+                  <a:txBody>
+                    <a:bodyPr/>
+                    <a:lstStyle/>
+                    <a:p>
+                      <a:r>
+                        <a:rPr sz="1050">
+                          <a:solidFill>
+                            <a:srgbClr val="000000"/>
+                          </a:solidFill>
+                        </a:rPr>
+                        <a:t>INSPECTION - PRODUCT</a:t>
+                      </a:r>
+                    </a:p>
+                  </a:txBody>
+                  <a:tcPr anchor="ctr">
+                    <a:solidFill>
+                      <a:srgbClr val="FFFFFF"/>
+                    </a:solidFill>
+                  </a:tcPr>
+                </a:tc>
+                <a:tc>
+                  <a:txBody>
+                    <a:bodyPr/>
+                    <a:lstStyle/>
+                    <a:p>
+                      <a:r>
+                        <a:rPr sz="1050">
+                          <a:solidFill>
+                            <a:srgbClr val="000000"/>
+                          </a:solidFill>
+                        </a:rPr>
+                        <a:t>N:1</a:t>
+                      </a:r>
+                    </a:p>
+                  </a:txBody>
+                  <a:tcPr anchor="ctr">
+                    <a:solidFill>
+                      <a:srgbClr val="FFFFFF"/>
                     </a:solidFill>
                   </a:tcPr>
                 </a:tc>
@@ -11465,9 +12758,44 @@
           </a:p>
         </p:txBody>
       </p:sp>
+      <p:sp>
+        <p:nvSpPr>
+          <p:cNvPr id="4" name="TextBox 3"/>
+          <p:cNvSpPr txBox="1"/>
+          <p:nvPr/>
+        </p:nvSpPr>
+        <p:spPr>
+          <a:xfrm>
+            <a:off x="457200" y="969264"/>
+            <a:ext cx="11338560" cy="384048"/>
+          </a:xfrm>
+          <a:prstGeom prst="rect">
+            <a:avLst/>
+          </a:prstGeom>
+          <a:noFill/>
+        </p:spPr>
+        <p:txBody>
+          <a:bodyPr wrap="square">
+            <a:spAutoFit/>
+          </a:bodyPr>
+          <a:lstStyle/>
+          <a:p>
+            <a:pPr algn="l"/>
+            <a:r>
+              <a:rPr sz="1350" b="0" i="1">
+                <a:solidFill>
+                  <a:srgbClr val="444444"/>
+                </a:solidFill>
+                <a:latin typeface="Calibri"/>
+              </a:rPr>
+              <a:t>MANAGES is the one 1:1 relationship; INSPECTION needs two links because plain ER cannot point at a pair</a:t>
+            </a:r>
+          </a:p>
+        </p:txBody>
+      </p:sp>
       <p:pic>
         <p:nvPicPr>
-          <p:cNvPr id="4" name="Picture 3" descr="er_model.png"/>
+          <p:cNvPr id="5" name="Picture 4" descr="er_model.png"/>
           <p:cNvPicPr>
             <a:picLocks noChangeAspect="1"/>
           </p:cNvPicPr>
@@ -11481,8 +12809,8 @@
         </p:blipFill>
         <p:spPr>
           <a:xfrm>
-            <a:off x="790278" y="1078992"/>
-            <a:ext cx="10611137" cy="5596127"/>
+            <a:off x="1139470" y="1463040"/>
+            <a:ext cx="9912753" cy="5212079"/>
           </a:xfrm>
           <a:prstGeom prst="rect">
             <a:avLst/>
@@ -11602,8 +12930,8 @@
         </p:blipFill>
         <p:spPr>
           <a:xfrm>
-            <a:off x="585312" y="1078992"/>
-            <a:ext cx="11021070" cy="5596127"/>
+            <a:off x="980252" y="1078992"/>
+            <a:ext cx="10231190" cy="5596127"/>
           </a:xfrm>
           <a:prstGeom prst="rect">
             <a:avLst/>

--- a/presentation/DA1_Presentation.pptx
+++ b/presentation/DA1_Presentation.pptx
@@ -3505,7 +3505,7 @@
                 </a:solidFill>
                 <a:latin typeface="Calibri"/>
               </a:rPr>
-              <a:t>-  PRODUCT existed; only some products need ShelfLifeDays and StorageTempC, so PERISHABLE_PRODUCT is a partial specialization.</a:t>
+              <a:t>-  PRODUCT existed; PERISHABLE_PRODUCT and HAZARDOUS_PRODUCT are partial (most products are neither) and overlapping (a vaccine is both), so that circle is marked o and not d.</a:t>
             </a:r>
           </a:p>
           <a:p>
@@ -4228,7 +4228,7 @@
                             <a:srgbClr val="000000"/>
                           </a:solidFill>
                         </a:rPr>
-                        <a:t>Specialization (partial)</a:t>
+                        <a:t>Specialization (partial, overlapping)</a:t>
                       </a:r>
                     </a:p>
                   </a:txBody>
@@ -4249,7 +4249,7 @@
                             <a:srgbClr val="000000"/>
                           </a:solidFill>
                         </a:rPr>
-                        <a:t>PRODUCT to PERISHABLE_PRODUCT</a:t>
+                        <a:t>PRODUCT to PERISHABLE_PRODUCT, HAZARDOUS_PRODUCT</a:t>
                       </a:r>
                     </a:p>
                   </a:txBody>
@@ -9744,7 +9744,7 @@
                 </a:solidFill>
                 <a:latin typeface="Calibri"/>
               </a:rPr>
-              <a:t>10. Final Schema, 20 Tables, All in BCNF</a:t>
+              <a:t>10. Final Schema, 21 Tables, All in BCNF</a:t>
             </a:r>
           </a:p>
         </p:txBody>
@@ -9809,8 +9809,8 @@
         </p:blipFill>
         <p:spPr>
           <a:xfrm>
-            <a:off x="335127" y="1294664"/>
-            <a:ext cx="11521440" cy="5164783"/>
+            <a:off x="518680" y="1078992"/>
+            <a:ext cx="11154334" cy="5596127"/>
           </a:xfrm>
           <a:prstGeom prst="rect">
             <a:avLst/>
@@ -10212,7 +10212,7 @@
                 </a:solidFill>
                 <a:latin typeface="Calibri"/>
               </a:rPr>
-              <a:t>-  Create the 20 tables in SQL with keys and constraints, load sample data, add the BCNF trigger, and write PL/SQL for receiving stock and dispatching orders.</a:t>
+              <a:t>-  Create the 21 tables in SQL with keys and constraints, load sample data, add the BCNF trigger, and write PL/SQL for receiving stock and dispatching orders.</a:t>
             </a:r>
           </a:p>
           <a:p>
@@ -10376,7 +10376,7 @@
                 </a:solidFill>
                 <a:latin typeface="Calibri"/>
               </a:rPr>
-              <a:t>9 entities, 12 relationships, 20 tables, all in BCNF</a:t>
+              <a:t>9 entities, 12 relationships, 21 tables, all in BCNF</a:t>
             </a:r>
           </a:p>
         </p:txBody>
@@ -12930,8 +12930,8 @@
         </p:blipFill>
         <p:spPr>
           <a:xfrm>
-            <a:off x="980252" y="1078992"/>
-            <a:ext cx="10231190" cy="5596127"/>
+            <a:off x="2105359" y="1078992"/>
+            <a:ext cx="7980975" cy="5596127"/>
           </a:xfrm>
           <a:prstGeom prst="rect">
             <a:avLst/>

--- a/presentation/DA1_Presentation.pptx
+++ b/presentation/DA1_Presentation.pptx
@@ -40,7 +40,6 @@
     <p:sldId id="288" r:id="rId39"/>
     <p:sldId id="289" r:id="rId40"/>
     <p:sldId id="290" r:id="rId41"/>
-    <p:sldId id="291" r:id="rId42"/>
   </p:sldIdLst>
   <p:sldSz cx="12191695" cy="6858000" type="screen4x3"/>
   <p:notesSz cx="6858000" cy="9144000"/>
@@ -3772,7 +3771,7 @@
                 </a:solidFill>
                 <a:latin typeface="Calibri"/>
               </a:rPr>
-              <a:t>•  So the whole SUPPLIER, SUPPLIES, PRODUCT arrangement is boxed and treated as one object, and INSPECTION joins the box.</a:t>
+              <a:t>•  So the whole SUPPLIER, SUPPLIES, PRODUCT arrangement is boxed and treated as one object, and INSPECTION joins the box. It is the rectangle at the top left of the EER model.</a:t>
             </a:r>
           </a:p>
           <a:p>
@@ -3818,127 +3817,6 @@
 </file>
 
 <file path=ppt/slides/slide12.xml><?xml version="1.0" encoding="utf-8"?>
-<p:sld xmlns:a="http://schemas.openxmlformats.org/drawingml/2006/main" xmlns:p="http://schemas.openxmlformats.org/presentationml/2006/main" xmlns:r="http://schemas.openxmlformats.org/officeDocument/2006/relationships">
-  <p:cSld>
-    <p:spTree>
-      <p:nvGrpSpPr>
-        <p:cNvPr id="1" name=""/>
-        <p:cNvGrpSpPr/>
-        <p:nvPr/>
-      </p:nvGrpSpPr>
-      <p:grpSpPr/>
-      <p:sp>
-        <p:nvSpPr>
-          <p:cNvPr id="2" name="TextBox 1"/>
-          <p:cNvSpPr txBox="1"/>
-          <p:nvPr/>
-        </p:nvSpPr>
-        <p:spPr>
-          <a:xfrm>
-            <a:off x="457200" y="237744"/>
-            <a:ext cx="11338560" cy="566928"/>
-          </a:xfrm>
-          <a:prstGeom prst="rect">
-            <a:avLst/>
-          </a:prstGeom>
-          <a:noFill/>
-        </p:spPr>
-        <p:txBody>
-          <a:bodyPr wrap="square">
-            <a:spAutoFit/>
-          </a:bodyPr>
-          <a:lstStyle/>
-          <a:p>
-            <a:pPr algn="l"/>
-            <a:r>
-              <a:rPr sz="2600" b="1" i="0">
-                <a:solidFill>
-                  <a:srgbClr val="000000"/>
-                </a:solidFill>
-                <a:latin typeface="Calibri"/>
-              </a:rPr>
-              <a:t>5. The Aggregation on Its Own</a:t>
-            </a:r>
-          </a:p>
-        </p:txBody>
-      </p:sp>
-      <p:sp>
-        <p:nvSpPr>
-          <p:cNvPr id="3" name="Rectangle 2"/>
-          <p:cNvSpPr/>
-          <p:nvPr/>
-        </p:nvSpPr>
-        <p:spPr>
-          <a:xfrm>
-            <a:off x="457200" y="896112"/>
-            <a:ext cx="11338560" cy="18288"/>
-          </a:xfrm>
-          <a:prstGeom prst="rect">
-            <a:avLst/>
-          </a:prstGeom>
-          <a:solidFill>
-            <a:srgbClr val="000000"/>
-          </a:solidFill>
-          <a:ln>
-            <a:noFill/>
-          </a:ln>
-          <a:effectLst/>
-        </p:spPr>
-        <p:style>
-          <a:lnRef idx="1">
-            <a:schemeClr val="accent1"/>
-          </a:lnRef>
-          <a:fillRef idx="3">
-            <a:schemeClr val="accent1"/>
-          </a:fillRef>
-          <a:effectRef idx="2">
-            <a:schemeClr val="accent1"/>
-          </a:effectRef>
-          <a:fontRef idx="minor">
-            <a:schemeClr val="lt1"/>
-          </a:fontRef>
-        </p:style>
-        <p:txBody>
-          <a:bodyPr rtlCol="0" anchor="ctr"/>
-          <a:lstStyle/>
-          <a:p>
-            <a:pPr algn="ctr"/>
-          </a:p>
-        </p:txBody>
-      </p:sp>
-      <p:pic>
-        <p:nvPicPr>
-          <p:cNvPr id="4" name="Picture 3" descr="eer_aggregation.png"/>
-          <p:cNvPicPr>
-            <a:picLocks noChangeAspect="1"/>
-          </p:cNvPicPr>
-          <p:nvPr/>
-        </p:nvPicPr>
-        <p:blipFill>
-          <a:blip r:embed="rId2"/>
-          <a:stretch>
-            <a:fillRect/>
-          </a:stretch>
-        </p:blipFill>
-        <p:spPr>
-          <a:xfrm>
-            <a:off x="2450524" y="1078992"/>
-            <a:ext cx="7290645" cy="5596127"/>
-          </a:xfrm>
-          <a:prstGeom prst="rect">
-            <a:avLst/>
-          </a:prstGeom>
-        </p:spPr>
-      </p:pic>
-    </p:spTree>
-  </p:cSld>
-  <p:clrMapOvr>
-    <a:masterClrMapping/>
-  </p:clrMapOvr>
-</p:sld>
-</file>
-
-<file path=ppt/slides/slide13.xml><?xml version="1.0" encoding="utf-8"?>
 <p:sld xmlns:a="http://schemas.openxmlformats.org/drawingml/2006/main" xmlns:p="http://schemas.openxmlformats.org/presentationml/2006/main" xmlns:r="http://schemas.openxmlformats.org/officeDocument/2006/relationships">
   <p:cSld>
     <p:spTree>
@@ -4580,7 +4458,7 @@
 </p:sld>
 </file>
 
-<file path=ppt/slides/slide14.xml><?xml version="1.0" encoding="utf-8"?>
+<file path=ppt/slides/slide13.xml><?xml version="1.0" encoding="utf-8"?>
 <p:sld xmlns:a="http://schemas.openxmlformats.org/drawingml/2006/main" xmlns:p="http://schemas.openxmlformats.org/presentationml/2006/main" xmlns:r="http://schemas.openxmlformats.org/officeDocument/2006/relationships">
   <p:cSld>
     <p:spTree>
@@ -4803,6 +4681,337 @@
                 <a:latin typeface="Calibri"/>
               </a:rPr>
               <a:t>•  It replaces the M:N CONTAINS relationship from the ER model.</a:t>
+            </a:r>
+          </a:p>
+        </p:txBody>
+      </p:sp>
+    </p:spTree>
+  </p:cSld>
+  <p:clrMapOvr>
+    <a:masterClrMapping/>
+  </p:clrMapOvr>
+</p:sld>
+</file>
+
+<file path=ppt/slides/slide14.xml><?xml version="1.0" encoding="utf-8"?>
+<p:sld xmlns:a="http://schemas.openxmlformats.org/drawingml/2006/main" xmlns:p="http://schemas.openxmlformats.org/presentationml/2006/main" xmlns:r="http://schemas.openxmlformats.org/officeDocument/2006/relationships">
+  <p:cSld>
+    <p:spTree>
+      <p:nvGrpSpPr>
+        <p:cNvPr id="1" name=""/>
+        <p:cNvGrpSpPr/>
+        <p:nvPr/>
+      </p:nvGrpSpPr>
+      <p:grpSpPr/>
+      <p:sp>
+        <p:nvSpPr>
+          <p:cNvPr id="2" name="TextBox 1"/>
+          <p:cNvSpPr txBox="1"/>
+          <p:nvPr/>
+        </p:nvSpPr>
+        <p:spPr>
+          <a:xfrm>
+            <a:off x="457200" y="292608"/>
+            <a:ext cx="11338560" cy="566928"/>
+          </a:xfrm>
+          <a:prstGeom prst="rect">
+            <a:avLst/>
+          </a:prstGeom>
+          <a:noFill/>
+        </p:spPr>
+        <p:txBody>
+          <a:bodyPr wrap="square">
+            <a:spAutoFit/>
+          </a:bodyPr>
+          <a:lstStyle/>
+          <a:p>
+            <a:pPr algn="l"/>
+            <a:r>
+              <a:rPr sz="2600" b="1" i="0">
+                <a:solidFill>
+                  <a:srgbClr val="000000"/>
+                </a:solidFill>
+                <a:latin typeface="Calibri"/>
+              </a:rPr>
+              <a:t>6. Turning the Model into Tables</a:t>
+            </a:r>
+          </a:p>
+        </p:txBody>
+      </p:sp>
+      <p:sp>
+        <p:nvSpPr>
+          <p:cNvPr id="3" name="Rectangle 2"/>
+          <p:cNvSpPr/>
+          <p:nvPr/>
+        </p:nvSpPr>
+        <p:spPr>
+          <a:xfrm>
+            <a:off x="457200" y="950976"/>
+            <a:ext cx="11338560" cy="18288"/>
+          </a:xfrm>
+          <a:prstGeom prst="rect">
+            <a:avLst/>
+          </a:prstGeom>
+          <a:solidFill>
+            <a:srgbClr val="000000"/>
+          </a:solidFill>
+          <a:ln>
+            <a:noFill/>
+          </a:ln>
+          <a:effectLst/>
+        </p:spPr>
+        <p:style>
+          <a:lnRef idx="1">
+            <a:schemeClr val="accent1"/>
+          </a:lnRef>
+          <a:fillRef idx="3">
+            <a:schemeClr val="accent1"/>
+          </a:fillRef>
+          <a:effectRef idx="2">
+            <a:schemeClr val="accent1"/>
+          </a:effectRef>
+          <a:fontRef idx="minor">
+            <a:schemeClr val="lt1"/>
+          </a:fontRef>
+        </p:style>
+        <p:txBody>
+          <a:bodyPr rtlCol="0" anchor="ctr"/>
+          <a:lstStyle/>
+          <a:p>
+            <a:pPr algn="ctr"/>
+          </a:p>
+        </p:txBody>
+      </p:sp>
+      <p:sp>
+        <p:nvSpPr>
+          <p:cNvPr id="4" name="TextBox 3"/>
+          <p:cNvSpPr txBox="1"/>
+          <p:nvPr/>
+        </p:nvSpPr>
+        <p:spPr>
+          <a:xfrm>
+            <a:off x="457200" y="1024128"/>
+            <a:ext cx="11338560" cy="384048"/>
+          </a:xfrm>
+          <a:prstGeom prst="rect">
+            <a:avLst/>
+          </a:prstGeom>
+          <a:noFill/>
+        </p:spPr>
+        <p:txBody>
+          <a:bodyPr wrap="square">
+            <a:spAutoFit/>
+          </a:bodyPr>
+          <a:lstStyle/>
+          <a:p>
+            <a:pPr algn="l"/>
+            <a:r>
+              <a:rPr sz="1350" b="0" i="1">
+                <a:solidFill>
+                  <a:srgbClr val="444444"/>
+                </a:solidFill>
+                <a:latin typeface="Calibri"/>
+              </a:rPr>
+              <a:t>the standard mapping rules</a:t>
+            </a:r>
+          </a:p>
+        </p:txBody>
+      </p:sp>
+      <p:sp>
+        <p:nvSpPr>
+          <p:cNvPr id="5" name="TextBox 4"/>
+          <p:cNvSpPr txBox="1"/>
+          <p:nvPr/>
+        </p:nvSpPr>
+        <p:spPr>
+          <a:xfrm>
+            <a:off x="640080" y="1517904"/>
+            <a:ext cx="10972800" cy="5065776"/>
+          </a:xfrm>
+          <a:prstGeom prst="rect">
+            <a:avLst/>
+          </a:prstGeom>
+          <a:noFill/>
+        </p:spPr>
+        <p:txBody>
+          <a:bodyPr wrap="square">
+            <a:spAutoFit/>
+          </a:bodyPr>
+          <a:lstStyle/>
+          <a:p>
+            <a:pPr>
+              <a:spcAft>
+                <a:spcPts val="900"/>
+              </a:spcAft>
+            </a:pPr>
+            <a:r>
+              <a:rPr sz="1600">
+                <a:solidFill>
+                  <a:srgbClr val="000000"/>
+                </a:solidFill>
+                <a:latin typeface="Calibri"/>
+              </a:rPr>
+              <a:t>•  Each entity becomes one table, and its key attribute becomes the primary key.</a:t>
+            </a:r>
+          </a:p>
+          <a:p>
+            <a:pPr>
+              <a:spcAft>
+                <a:spcPts val="900"/>
+              </a:spcAft>
+            </a:pPr>
+            <a:r>
+              <a:rPr sz="1600">
+                <a:solidFill>
+                  <a:srgbClr val="000000"/>
+                </a:solidFill>
+                <a:latin typeface="Calibri"/>
+              </a:rPr>
+              <a:t>•  Each 1:N relationship becomes a foreign key stored on the 'many' side.</a:t>
+            </a:r>
+          </a:p>
+          <a:p>
+            <a:pPr>
+              <a:spcAft>
+                <a:spcPts val="900"/>
+              </a:spcAft>
+            </a:pPr>
+            <a:r>
+              <a:rPr sz="1600">
+                <a:solidFill>
+                  <a:srgbClr val="000000"/>
+                </a:solidFill>
+                <a:latin typeface="Calibri"/>
+              </a:rPr>
+              <a:t>•  Each M:N relationship becomes a new table whose primary key is the two keys put together.</a:t>
+            </a:r>
+          </a:p>
+          <a:p>
+            <a:pPr>
+              <a:spcAft>
+                <a:spcPts val="900"/>
+              </a:spcAft>
+            </a:pPr>
+            <a:r>
+              <a:rPr sz="1600">
+                <a:solidFill>
+                  <a:srgbClr val="000000"/>
+                </a:solidFill>
+                <a:latin typeface="Calibri"/>
+              </a:rPr>
+              <a:t>•  Each multivalued attribute becomes its own small table.</a:t>
+            </a:r>
+          </a:p>
+          <a:p>
+            <a:pPr>
+              <a:spcAft>
+                <a:spcPts val="900"/>
+              </a:spcAft>
+            </a:pPr>
+            <a:r>
+              <a:rPr sz="1600">
+                <a:solidFill>
+                  <a:srgbClr val="000000"/>
+                </a:solidFill>
+                <a:latin typeface="Calibri"/>
+              </a:rPr>
+              <a:t>•  Each composite attribute becomes one column per part.</a:t>
+            </a:r>
+          </a:p>
+          <a:p>
+            <a:pPr>
+              <a:spcAft>
+                <a:spcPts val="900"/>
+              </a:spcAft>
+            </a:pPr>
+            <a:r>
+              <a:rPr sz="1600">
+                <a:solidFill>
+                  <a:srgbClr val="000000"/>
+                </a:solidFill>
+                <a:latin typeface="Calibri"/>
+              </a:rPr>
+              <a:t>•  A derived attribute is not stored at all, it is calculated when needed.</a:t>
+            </a:r>
+          </a:p>
+          <a:p>
+            <a:pPr>
+              <a:spcAft>
+                <a:spcPts val="900"/>
+              </a:spcAft>
+            </a:pPr>
+            <a:r>
+              <a:rPr sz="1600">
+                <a:solidFill>
+                  <a:srgbClr val="000000"/>
+                </a:solidFill>
+                <a:latin typeface="Calibri"/>
+              </a:rPr>
+              <a:t>•  A weak entity becomes a table keyed by its owner's key plus its own partial key.</a:t>
+            </a:r>
+          </a:p>
+          <a:p>
+            <a:pPr>
+              <a:spcAft>
+                <a:spcPts val="900"/>
+              </a:spcAft>
+            </a:pPr>
+            <a:r>
+              <a:rPr sz="1600">
+                <a:solidFill>
+                  <a:srgbClr val="000000"/>
+                </a:solidFill>
+                <a:latin typeface="Calibri"/>
+              </a:rPr>
+              <a:t>•  A specialization becomes one table per subclass, each sharing the superclass's key.</a:t>
+            </a:r>
+          </a:p>
+          <a:p>
+            <a:pPr>
+              <a:spcAft>
+                <a:spcPts val="900"/>
+              </a:spcAft>
+            </a:pPr>
+            <a:r>
+              <a:rPr sz="1600">
+                <a:solidFill>
+                  <a:srgbClr val="000000"/>
+                </a:solidFill>
+                <a:latin typeface="Calibri"/>
+              </a:rPr>
+              <a:t>•  A generalization is mapped the same way: one table for the superclass and one for each subclass, each subclass keyed by the superclass's key.</a:t>
+            </a:r>
+          </a:p>
+          <a:p>
+            <a:pPr>
+              <a:spcAft>
+                <a:spcPts val="900"/>
+              </a:spcAft>
+            </a:pPr>
+            <a:r>
+              <a:rPr sz="1600">
+                <a:solidFill>
+                  <a:srgbClr val="000000"/>
+                </a:solidFill>
+                <a:latin typeface="Calibri"/>
+              </a:rPr>
+              <a:t>•  Each 1:1 relationship becomes a foreign key on the side where taking part is compulsory, with a UNIQUE constraint so that one row cannot be claimed twice.</a:t>
+            </a:r>
+          </a:p>
+          <a:p>
+            <a:pPr>
+              <a:spcAft>
+                <a:spcPts val="900"/>
+              </a:spcAft>
+            </a:pPr>
+            <a:r>
+              <a:rPr sz="1600">
+                <a:solidFill>
+                  <a:srgbClr val="000000"/>
+                </a:solidFill>
+                <a:latin typeface="Calibri"/>
+              </a:rPr>
+              <a:t>•  An aggregation becomes a foreign key pointing at the primary key of the table the aggregated relationship produced.</a:t>
             </a:r>
           </a:p>
         </p:txBody>
@@ -4855,7 +5064,7 @@
                 </a:solidFill>
                 <a:latin typeface="Calibri"/>
               </a:rPr>
-              <a:t>6. Turning the Model into Tables</a:t>
+              <a:t>7. Why Sample Data Comes First</a:t>
             </a:r>
           </a:p>
         </p:txBody>
@@ -4934,7 +5143,7 @@
                 </a:solidFill>
                 <a:latin typeface="Calibri"/>
               </a:rPr>
-              <a:t>the standard mapping rules</a:t>
+              <a:t>the dependencies drive every split that follows</a:t>
             </a:r>
           </a:p>
         </p:txBody>
@@ -4967,13 +5176,29 @@
               </a:spcAft>
             </a:pPr>
             <a:r>
-              <a:rPr sz="1600">
-                <a:solidFill>
-                  <a:srgbClr val="000000"/>
-                </a:solidFill>
-                <a:latin typeface="Calibri"/>
-              </a:rPr>
-              <a:t>•  Each entity becomes one table, and its key attribute becomes the primary key.</a:t>
+              <a:rPr sz="1700">
+                <a:solidFill>
+                  <a:srgbClr val="000000"/>
+                </a:solidFill>
+                <a:latin typeface="Calibri"/>
+              </a:rPr>
+              <a:t>•  A functional dependency X -&gt; Y means: if you know X, then Y is fixed.</a:t>
+            </a:r>
+          </a:p>
+          <a:p>
+            <a:pPr lvl="1">
+              <a:spcAft>
+                <a:spcPts val="900"/>
+              </a:spcAft>
+            </a:pPr>
+            <a:r>
+              <a:rPr sz="1500">
+                <a:solidFill>
+                  <a:srgbClr val="444444"/>
+                </a:solidFill>
+                <a:latin typeface="Calibri"/>
+              </a:rPr>
+              <a:t>-  Example, CustID -&gt; CName: once the customer ID is known, the name is decided.</a:t>
             </a:r>
           </a:p>
           <a:p>
@@ -4983,13 +5208,13 @@
               </a:spcAft>
             </a:pPr>
             <a:r>
-              <a:rPr sz="1600">
-                <a:solidFill>
-                  <a:srgbClr val="000000"/>
-                </a:solidFill>
-                <a:latin typeface="Calibri"/>
-              </a:rPr>
-              <a:t>•  Each 1:N relationship becomes a foreign key stored on the 'many' side.</a:t>
+              <a:rPr sz="1700">
+                <a:solidFill>
+                  <a:srgbClr val="000000"/>
+                </a:solidFill>
+                <a:latin typeface="Calibri"/>
+              </a:rPr>
+              <a:t>•  Each normal form is a rule about which dependencies a table may contain, so the dependencies have to be settled before any splitting starts.</a:t>
             </a:r>
           </a:p>
           <a:p>
@@ -4999,13 +5224,13 @@
               </a:spcAft>
             </a:pPr>
             <a:r>
-              <a:rPr sz="1600">
-                <a:solidFill>
-                  <a:srgbClr val="000000"/>
-                </a:solidFill>
-                <a:latin typeface="Calibri"/>
-              </a:rPr>
-              <a:t>•  Each M:N relationship becomes a new table whose primary key is the two keys put together.</a:t>
+              <a:rPr sz="1700">
+                <a:solidFill>
+                  <a:srgbClr val="000000"/>
+                </a:solidFill>
+                <a:latin typeface="Calibri"/>
+              </a:rPr>
+              <a:t>•  Data cannot prove a dependency, but two rows can kill one: agree on X, disagree on Y, and X -&gt; Y is gone.</a:t>
             </a:r>
           </a:p>
           <a:p>
@@ -5015,125 +5240,13 @@
               </a:spcAft>
             </a:pPr>
             <a:r>
-              <a:rPr sz="1600">
-                <a:solidFill>
-                  <a:srgbClr val="000000"/>
-                </a:solidFill>
-                <a:latin typeface="Calibri"/>
-              </a:rPr>
-              <a:t>•  Each multivalued attribute becomes its own small table.</a:t>
-            </a:r>
-          </a:p>
-          <a:p>
-            <a:pPr>
-              <a:spcAft>
-                <a:spcPts val="900"/>
-              </a:spcAft>
-            </a:pPr>
-            <a:r>
-              <a:rPr sz="1600">
-                <a:solidFill>
-                  <a:srgbClr val="000000"/>
-                </a:solidFill>
-                <a:latin typeface="Calibri"/>
-              </a:rPr>
-              <a:t>•  Each composite attribute becomes one column per part.</a:t>
-            </a:r>
-          </a:p>
-          <a:p>
-            <a:pPr>
-              <a:spcAft>
-                <a:spcPts val="900"/>
-              </a:spcAft>
-            </a:pPr>
-            <a:r>
-              <a:rPr sz="1600">
-                <a:solidFill>
-                  <a:srgbClr val="000000"/>
-                </a:solidFill>
-                <a:latin typeface="Calibri"/>
-              </a:rPr>
-              <a:t>•  A derived attribute is not stored at all, it is calculated when needed.</a:t>
-            </a:r>
-          </a:p>
-          <a:p>
-            <a:pPr>
-              <a:spcAft>
-                <a:spcPts val="900"/>
-              </a:spcAft>
-            </a:pPr>
-            <a:r>
-              <a:rPr sz="1600">
-                <a:solidFill>
-                  <a:srgbClr val="000000"/>
-                </a:solidFill>
-                <a:latin typeface="Calibri"/>
-              </a:rPr>
-              <a:t>•  A weak entity becomes a table keyed by its owner's key plus its own partial key.</a:t>
-            </a:r>
-          </a:p>
-          <a:p>
-            <a:pPr>
-              <a:spcAft>
-                <a:spcPts val="900"/>
-              </a:spcAft>
-            </a:pPr>
-            <a:r>
-              <a:rPr sz="1600">
-                <a:solidFill>
-                  <a:srgbClr val="000000"/>
-                </a:solidFill>
-                <a:latin typeface="Calibri"/>
-              </a:rPr>
-              <a:t>•  A specialization becomes one table per subclass, each sharing the superclass's key.</a:t>
-            </a:r>
-          </a:p>
-          <a:p>
-            <a:pPr>
-              <a:spcAft>
-                <a:spcPts val="900"/>
-              </a:spcAft>
-            </a:pPr>
-            <a:r>
-              <a:rPr sz="1600">
-                <a:solidFill>
-                  <a:srgbClr val="000000"/>
-                </a:solidFill>
-                <a:latin typeface="Calibri"/>
-              </a:rPr>
-              <a:t>•  A generalization is mapped the same way: one table for the superclass and one for each subclass, each subclass keyed by the superclass's key.</a:t>
-            </a:r>
-          </a:p>
-          <a:p>
-            <a:pPr>
-              <a:spcAft>
-                <a:spcPts val="900"/>
-              </a:spcAft>
-            </a:pPr>
-            <a:r>
-              <a:rPr sz="1600">
-                <a:solidFill>
-                  <a:srgbClr val="000000"/>
-                </a:solidFill>
-                <a:latin typeface="Calibri"/>
-              </a:rPr>
-              <a:t>•  Each 1:1 relationship becomes a foreign key on the side where taking part is compulsory, with a UNIQUE constraint so that one row cannot be claimed twice.</a:t>
-            </a:r>
-          </a:p>
-          <a:p>
-            <a:pPr>
-              <a:spcAft>
-                <a:spcPts val="900"/>
-              </a:spcAft>
-            </a:pPr>
-            <a:r>
-              <a:rPr sz="1600">
-                <a:solidFill>
-                  <a:srgbClr val="000000"/>
-                </a:solidFill>
-                <a:latin typeface="Calibri"/>
-              </a:rPr>
-              <a:t>•  An aggregation becomes a foreign key pointing at the primary key of the table the aggregated relationship produced.</a:t>
+              <a:rPr sz="1700">
+                <a:solidFill>
+                  <a:srgbClr val="000000"/>
+                </a:solidFill>
+                <a:latin typeface="Calibri"/>
+              </a:rPr>
+              <a:t>•  So every relation gets at least five rows, and every candidate dependency is checked against them.</a:t>
             </a:r>
           </a:p>
         </p:txBody>
@@ -5164,7 +5277,7 @@
         </p:nvSpPr>
         <p:spPr>
           <a:xfrm>
-            <a:off x="457200" y="292608"/>
+            <a:off x="457200" y="237744"/>
             <a:ext cx="11338560" cy="566928"/>
           </a:xfrm>
           <a:prstGeom prst="rect">
@@ -5186,7 +5299,7 @@
                 </a:solidFill>
                 <a:latin typeface="Calibri"/>
               </a:rPr>
-              <a:t>7. Why Sample Data Comes First</a:t>
+              <a:t>7. The Sample Rows</a:t>
             </a:r>
           </a:p>
         </p:txBody>
@@ -5199,7 +5312,7 @@
         </p:nvSpPr>
         <p:spPr>
           <a:xfrm>
-            <a:off x="457200" y="950976"/>
+            <a:off x="457200" y="896112"/>
             <a:ext cx="11338560" cy="18288"/>
           </a:xfrm>
           <a:prstGeom prst="rect">
@@ -5243,7 +5356,7 @@
         </p:nvSpPr>
         <p:spPr>
           <a:xfrm>
-            <a:off x="457200" y="1024128"/>
+            <a:off x="457200" y="969264"/>
             <a:ext cx="11338560" cy="384048"/>
           </a:xfrm>
           <a:prstGeom prst="rect">
@@ -5265,242 +5378,7 @@
                 </a:solidFill>
                 <a:latin typeface="Calibri"/>
               </a:rPr>
-              <a:t>the dependencies drive every split that follows</a:t>
-            </a:r>
-          </a:p>
-        </p:txBody>
-      </p:sp>
-      <p:sp>
-        <p:nvSpPr>
-          <p:cNvPr id="5" name="TextBox 4"/>
-          <p:cNvSpPr txBox="1"/>
-          <p:nvPr/>
-        </p:nvSpPr>
-        <p:spPr>
-          <a:xfrm>
-            <a:off x="640080" y="1517904"/>
-            <a:ext cx="10972800" cy="5065776"/>
-          </a:xfrm>
-          <a:prstGeom prst="rect">
-            <a:avLst/>
-          </a:prstGeom>
-          <a:noFill/>
-        </p:spPr>
-        <p:txBody>
-          <a:bodyPr wrap="square">
-            <a:spAutoFit/>
-          </a:bodyPr>
-          <a:lstStyle/>
-          <a:p>
-            <a:pPr>
-              <a:spcAft>
-                <a:spcPts val="900"/>
-              </a:spcAft>
-            </a:pPr>
-            <a:r>
-              <a:rPr sz="1700">
-                <a:solidFill>
-                  <a:srgbClr val="000000"/>
-                </a:solidFill>
-                <a:latin typeface="Calibri"/>
-              </a:rPr>
-              <a:t>•  A functional dependency X -&gt; Y means: if you know X, then Y is fixed.</a:t>
-            </a:r>
-          </a:p>
-          <a:p>
-            <a:pPr lvl="1">
-              <a:spcAft>
-                <a:spcPts val="900"/>
-              </a:spcAft>
-            </a:pPr>
-            <a:r>
-              <a:rPr sz="1500">
-                <a:solidFill>
-                  <a:srgbClr val="444444"/>
-                </a:solidFill>
-                <a:latin typeface="Calibri"/>
-              </a:rPr>
-              <a:t>-  Example, CustID -&gt; CName: once the customer ID is known, the name is decided.</a:t>
-            </a:r>
-          </a:p>
-          <a:p>
-            <a:pPr>
-              <a:spcAft>
-                <a:spcPts val="900"/>
-              </a:spcAft>
-            </a:pPr>
-            <a:r>
-              <a:rPr sz="1700">
-                <a:solidFill>
-                  <a:srgbClr val="000000"/>
-                </a:solidFill>
-                <a:latin typeface="Calibri"/>
-              </a:rPr>
-              <a:t>•  Each normal form is a rule about which dependencies a table may contain, so the dependencies have to be settled before any splitting starts.</a:t>
-            </a:r>
-          </a:p>
-          <a:p>
-            <a:pPr>
-              <a:spcAft>
-                <a:spcPts val="900"/>
-              </a:spcAft>
-            </a:pPr>
-            <a:r>
-              <a:rPr sz="1700">
-                <a:solidFill>
-                  <a:srgbClr val="000000"/>
-                </a:solidFill>
-                <a:latin typeface="Calibri"/>
-              </a:rPr>
-              <a:t>•  Data cannot prove a dependency, but two rows can kill one: agree on X, disagree on Y, and X -&gt; Y is gone.</a:t>
-            </a:r>
-          </a:p>
-          <a:p>
-            <a:pPr>
-              <a:spcAft>
-                <a:spcPts val="900"/>
-              </a:spcAft>
-            </a:pPr>
-            <a:r>
-              <a:rPr sz="1700">
-                <a:solidFill>
-                  <a:srgbClr val="000000"/>
-                </a:solidFill>
-                <a:latin typeface="Calibri"/>
-              </a:rPr>
-              <a:t>•  So every relation gets at least five rows, and every candidate dependency is checked against them.</a:t>
-            </a:r>
-          </a:p>
-        </p:txBody>
-      </p:sp>
-    </p:spTree>
-  </p:cSld>
-  <p:clrMapOvr>
-    <a:masterClrMapping/>
-  </p:clrMapOvr>
-</p:sld>
-</file>
-
-<file path=ppt/slides/slide17.xml><?xml version="1.0" encoding="utf-8"?>
-<p:sld xmlns:a="http://schemas.openxmlformats.org/drawingml/2006/main" xmlns:p="http://schemas.openxmlformats.org/presentationml/2006/main" xmlns:r="http://schemas.openxmlformats.org/officeDocument/2006/relationships">
-  <p:cSld>
-    <p:spTree>
-      <p:nvGrpSpPr>
-        <p:cNvPr id="1" name=""/>
-        <p:cNvGrpSpPr/>
-        <p:nvPr/>
-      </p:nvGrpSpPr>
-      <p:grpSpPr/>
-      <p:sp>
-        <p:nvSpPr>
-          <p:cNvPr id="2" name="TextBox 1"/>
-          <p:cNvSpPr txBox="1"/>
-          <p:nvPr/>
-        </p:nvSpPr>
-        <p:spPr>
-          <a:xfrm>
-            <a:off x="457200" y="237744"/>
-            <a:ext cx="11338560" cy="566928"/>
-          </a:xfrm>
-          <a:prstGeom prst="rect">
-            <a:avLst/>
-          </a:prstGeom>
-          <a:noFill/>
-        </p:spPr>
-        <p:txBody>
-          <a:bodyPr wrap="square">
-            <a:spAutoFit/>
-          </a:bodyPr>
-          <a:lstStyle/>
-          <a:p>
-            <a:pPr algn="l"/>
-            <a:r>
-              <a:rPr sz="2600" b="1" i="0">
-                <a:solidFill>
-                  <a:srgbClr val="000000"/>
-                </a:solidFill>
-                <a:latin typeface="Calibri"/>
-              </a:rPr>
-              <a:t>7. The Sample Rows</a:t>
-            </a:r>
-          </a:p>
-        </p:txBody>
-      </p:sp>
-      <p:sp>
-        <p:nvSpPr>
-          <p:cNvPr id="3" name="Rectangle 2"/>
-          <p:cNvSpPr/>
-          <p:nvPr/>
-        </p:nvSpPr>
-        <p:spPr>
-          <a:xfrm>
-            <a:off x="457200" y="896112"/>
-            <a:ext cx="11338560" cy="18288"/>
-          </a:xfrm>
-          <a:prstGeom prst="rect">
-            <a:avLst/>
-          </a:prstGeom>
-          <a:solidFill>
-            <a:srgbClr val="000000"/>
-          </a:solidFill>
-          <a:ln>
-            <a:noFill/>
-          </a:ln>
-          <a:effectLst/>
-        </p:spPr>
-        <p:style>
-          <a:lnRef idx="1">
-            <a:schemeClr val="accent1"/>
-          </a:lnRef>
-          <a:fillRef idx="3">
-            <a:schemeClr val="accent1"/>
-          </a:fillRef>
-          <a:effectRef idx="2">
-            <a:schemeClr val="accent1"/>
-          </a:effectRef>
-          <a:fontRef idx="minor">
-            <a:schemeClr val="lt1"/>
-          </a:fontRef>
-        </p:style>
-        <p:txBody>
-          <a:bodyPr rtlCol="0" anchor="ctr"/>
-          <a:lstStyle/>
-          <a:p>
-            <a:pPr algn="ctr"/>
-          </a:p>
-        </p:txBody>
-      </p:sp>
-      <p:sp>
-        <p:nvSpPr>
-          <p:cNvPr id="4" name="TextBox 3"/>
-          <p:cNvSpPr txBox="1"/>
-          <p:nvPr/>
-        </p:nvSpPr>
-        <p:spPr>
-          <a:xfrm>
-            <a:off x="457200" y="969264"/>
-            <a:ext cx="11338560" cy="384048"/>
-          </a:xfrm>
-          <a:prstGeom prst="rect">
-            <a:avLst/>
-          </a:prstGeom>
-          <a:noFill/>
-        </p:spPr>
-        <p:txBody>
-          <a:bodyPr wrap="square">
-            <a:spAutoFit/>
-          </a:bodyPr>
-          <a:lstStyle/>
-          <a:p>
-            <a:pPr algn="l"/>
-            <a:r>
-              <a:rPr sz="1350" b="0" i="1">
-                <a:solidFill>
-                  <a:srgbClr val="444444"/>
-                </a:solidFill>
-                <a:latin typeface="Calibri"/>
-              </a:rPr>
-              <a:t>ORDER_LINE rows are numbered 1 to 7 from the top</a:t>
+              <a:t>ORDER_LINE rows are numbered 1 to 8 from the top, and joining the normalized tables gives them back exactly</a:t>
             </a:r>
           </a:p>
         </p:txBody>
@@ -5521,8 +5399,8 @@
         </p:blipFill>
         <p:spPr>
           <a:xfrm>
-            <a:off x="1111421" y="1463040"/>
-            <a:ext cx="9968851" cy="5212079"/>
+            <a:off x="875147" y="1463040"/>
+            <a:ext cx="10441399" cy="5212079"/>
           </a:xfrm>
           <a:prstGeom prst="rect">
             <a:avLst/>
@@ -5537,7 +5415,7 @@
 </p:sld>
 </file>
 
-<file path=ppt/slides/slide18.xml><?xml version="1.0" encoding="utf-8"?>
+<file path=ppt/slides/slide17.xml><?xml version="1.0" encoding="utf-8"?>
 <p:sld xmlns:a="http://schemas.openxmlformats.org/drawingml/2006/main" xmlns:p="http://schemas.openxmlformats.org/presentationml/2006/main" xmlns:r="http://schemas.openxmlformats.org/officeDocument/2006/relationships">
   <p:cSld>
     <p:spTree>
@@ -5847,7 +5725,7 @@
                             <a:srgbClr val="000000"/>
                           </a:solidFill>
                         </a:rPr>
-                        <a:t>CustID -&gt; CName, Street, City</a:t>
+                        <a:t>CustID -&gt; CName, Street, City, CustPhone</a:t>
                       </a:r>
                     </a:p>
                   </a:txBody>
@@ -5868,7 +5746,7 @@
                             <a:srgbClr val="000000"/>
                           </a:solidFill>
                         </a:rPr>
-                        <a:t>C-01 in rows 1, 2, 4; C-03 in rows 3, 6, 7</a:t>
+                        <a:t>C-01 in rows 1, 2, 4; C-03 in rows 3, 6, 7; C-05 in rows 5, 8</a:t>
                       </a:r>
                     </a:p>
                   </a:txBody>
@@ -6281,7 +6159,7 @@
 </p:sld>
 </file>
 
-<file path=ppt/slides/slide19.xml><?xml version="1.0" encoding="utf-8"?>
+<file path=ppt/slides/slide18.xml><?xml version="1.0" encoding="utf-8"?>
 <p:sld xmlns:a="http://schemas.openxmlformats.org/drawingml/2006/main" xmlns:p="http://schemas.openxmlformats.org/presentationml/2006/main" xmlns:r="http://schemas.openxmlformats.org/officeDocument/2006/relationships">
   <p:cSld>
     <p:spTree>
@@ -7025,6 +6903,222 @@
 </p:sld>
 </file>
 
+<file path=ppt/slides/slide19.xml><?xml version="1.0" encoding="utf-8"?>
+<p:sld xmlns:a="http://schemas.openxmlformats.org/drawingml/2006/main" xmlns:p="http://schemas.openxmlformats.org/presentationml/2006/main" xmlns:r="http://schemas.openxmlformats.org/officeDocument/2006/relationships">
+  <p:cSld>
+    <p:spTree>
+      <p:nvGrpSpPr>
+        <p:cNvPr id="1" name=""/>
+        <p:cNvGrpSpPr/>
+        <p:nvPr/>
+      </p:nvGrpSpPr>
+      <p:grpSpPr/>
+      <p:sp>
+        <p:nvSpPr>
+          <p:cNvPr id="2" name="TextBox 1"/>
+          <p:cNvSpPr txBox="1"/>
+          <p:nvPr/>
+        </p:nvSpPr>
+        <p:spPr>
+          <a:xfrm>
+            <a:off x="457200" y="292608"/>
+            <a:ext cx="11338560" cy="566928"/>
+          </a:xfrm>
+          <a:prstGeom prst="rect">
+            <a:avLst/>
+          </a:prstGeom>
+          <a:noFill/>
+        </p:spPr>
+        <p:txBody>
+          <a:bodyPr wrap="square">
+            <a:spAutoFit/>
+          </a:bodyPr>
+          <a:lstStyle/>
+          <a:p>
+            <a:pPr algn="l"/>
+            <a:r>
+              <a:rPr sz="2600" b="1" i="0">
+                <a:solidFill>
+                  <a:srgbClr val="000000"/>
+                </a:solidFill>
+                <a:latin typeface="Calibri"/>
+              </a:rPr>
+              <a:t>7. Candidate Keys</a:t>
+            </a:r>
+          </a:p>
+        </p:txBody>
+      </p:sp>
+      <p:sp>
+        <p:nvSpPr>
+          <p:cNvPr id="3" name="Rectangle 2"/>
+          <p:cNvSpPr/>
+          <p:nvPr/>
+        </p:nvSpPr>
+        <p:spPr>
+          <a:xfrm>
+            <a:off x="457200" y="950976"/>
+            <a:ext cx="11338560" cy="18288"/>
+          </a:xfrm>
+          <a:prstGeom prst="rect">
+            <a:avLst/>
+          </a:prstGeom>
+          <a:solidFill>
+            <a:srgbClr val="000000"/>
+          </a:solidFill>
+          <a:ln>
+            <a:noFill/>
+          </a:ln>
+          <a:effectLst/>
+        </p:spPr>
+        <p:style>
+          <a:lnRef idx="1">
+            <a:schemeClr val="accent1"/>
+          </a:lnRef>
+          <a:fillRef idx="3">
+            <a:schemeClr val="accent1"/>
+          </a:fillRef>
+          <a:effectRef idx="2">
+            <a:schemeClr val="accent1"/>
+          </a:effectRef>
+          <a:fontRef idx="minor">
+            <a:schemeClr val="lt1"/>
+          </a:fontRef>
+        </p:style>
+        <p:txBody>
+          <a:bodyPr rtlCol="0" anchor="ctr"/>
+          <a:lstStyle/>
+          <a:p>
+            <a:pPr algn="ctr"/>
+          </a:p>
+        </p:txBody>
+      </p:sp>
+      <p:sp>
+        <p:nvSpPr>
+          <p:cNvPr id="4" name="TextBox 3"/>
+          <p:cNvSpPr txBox="1"/>
+          <p:nvPr/>
+        </p:nvSpPr>
+        <p:spPr>
+          <a:xfrm>
+            <a:off x="640080" y="1133856"/>
+            <a:ext cx="10972800" cy="5449824"/>
+          </a:xfrm>
+          <a:prstGeom prst="rect">
+            <a:avLst/>
+          </a:prstGeom>
+          <a:noFill/>
+        </p:spPr>
+        <p:txBody>
+          <a:bodyPr wrap="square">
+            <a:spAutoFit/>
+          </a:bodyPr>
+          <a:lstStyle/>
+          <a:p>
+            <a:pPr>
+              <a:spcAft>
+                <a:spcPts val="900"/>
+              </a:spcAft>
+            </a:pPr>
+            <a:r>
+              <a:rPr sz="1600">
+                <a:solidFill>
+                  <a:srgbClr val="000000"/>
+                </a:solidFill>
+                <a:latin typeface="Calibri"/>
+              </a:rPr>
+              <a:t>•  ORDER_LINE: start from {OrderID, ProductID} and close it.</a:t>
+            </a:r>
+          </a:p>
+          <a:p>
+            <a:pPr lvl="1">
+              <a:spcAft>
+                <a:spcPts val="900"/>
+              </a:spcAft>
+            </a:pPr>
+            <a:r>
+              <a:rPr sz="1400">
+                <a:solidFill>
+                  <a:srgbClr val="444444"/>
+                </a:solidFill>
+                <a:latin typeface="Calibri"/>
+              </a:rPr>
+              <a:t>-  F1 adds OrderDate, Status, CustID. F2 adds CName, Street, City, CustPhone. F3 adds State. F4 adds PName, Category, Price. F5 adds Qty.</a:t>
+            </a:r>
+          </a:p>
+          <a:p>
+            <a:pPr lvl="1">
+              <a:spcAft>
+                <a:spcPts val="900"/>
+              </a:spcAft>
+            </a:pPr>
+            <a:r>
+              <a:rPr sz="1400">
+                <a:solidFill>
+                  <a:srgbClr val="444444"/>
+                </a:solidFill>
+                <a:latin typeface="Calibri"/>
+              </a:rPr>
+              <a:t>-  All fourteen columns are reached, and neither half works alone (N1, N2), so it is the only candidate key.</a:t>
+            </a:r>
+          </a:p>
+          <a:p>
+            <a:pPr>
+              <a:spcAft>
+                <a:spcPts val="900"/>
+              </a:spcAft>
+            </a:pPr>
+            <a:r>
+              <a:rPr sz="1600">
+                <a:solidFill>
+                  <a:srgbClr val="000000"/>
+                </a:solidFill>
+                <a:latin typeface="Calibri"/>
+              </a:rPr>
+              <a:t>•  DELIVERY_DUTY: two candidate keys, {OrderID, City} by F7 and {OrderID, DriverID} by F6.</a:t>
+            </a:r>
+          </a:p>
+          <a:p>
+            <a:pPr lvl="1">
+              <a:spcAft>
+                <a:spcPts val="900"/>
+              </a:spcAft>
+            </a:pPr>
+            <a:r>
+              <a:rPr sz="1400">
+                <a:solidFill>
+                  <a:srgbClr val="444444"/>
+                </a:solidFill>
+                <a:latin typeface="Calibri"/>
+              </a:rPr>
+              <a:t>-  That second key is exactly why it passes 3NF and still fails BCNF.</a:t>
+            </a:r>
+          </a:p>
+          <a:p>
+            <a:pPr>
+              <a:spcAft>
+                <a:spcPts val="900"/>
+              </a:spcAft>
+            </a:pPr>
+            <a:r>
+              <a:rPr sz="1600">
+                <a:solidFill>
+                  <a:srgbClr val="000000"/>
+                </a:solidFill>
+                <a:latin typeface="Calibri"/>
+              </a:rPr>
+              <a:t>•  SUPPLIER_PHONE: {SupplierID, Phone}, and Phone alone by F8.</a:t>
+            </a:r>
+          </a:p>
+        </p:txBody>
+      </p:sp>
+    </p:spTree>
+  </p:cSld>
+  <p:clrMapOvr>
+    <a:masterClrMapping/>
+  </p:clrMapOvr>
+</p:sld>
+</file>
+
 <file path=ppt/slides/slide2.xml><?xml version="1.0" encoding="utf-8"?>
 <p:sld xmlns:a="http://schemas.openxmlformats.org/drawingml/2006/main" xmlns:p="http://schemas.openxmlformats.org/presentationml/2006/main" xmlns:r="http://schemas.openxmlformats.org/officeDocument/2006/relationships">
   <p:cSld>
@@ -7313,7 +7407,7 @@
                 </a:solidFill>
                 <a:latin typeface="Calibri"/>
               </a:rPr>
-              <a:t>7. Candidate Keys</a:t>
+              <a:t>8. The Four Rules</a:t>
             </a:r>
           </a:p>
         </p:txBody>
@@ -7370,8 +7464,43 @@
         </p:nvSpPr>
         <p:spPr>
           <a:xfrm>
-            <a:off x="640080" y="1133856"/>
-            <a:ext cx="10972800" cy="5449824"/>
+            <a:off x="457200" y="1024128"/>
+            <a:ext cx="11338560" cy="384048"/>
+          </a:xfrm>
+          <a:prstGeom prst="rect">
+            <a:avLst/>
+          </a:prstGeom>
+          <a:noFill/>
+        </p:spPr>
+        <p:txBody>
+          <a:bodyPr wrap="square">
+            <a:spAutoFit/>
+          </a:bodyPr>
+          <a:lstStyle/>
+          <a:p>
+            <a:pPr algn="l"/>
+            <a:r>
+              <a:rPr sz="1350" b="0" i="1">
+                <a:solidFill>
+                  <a:srgbClr val="444444"/>
+                </a:solidFill>
+                <a:latin typeface="Calibri"/>
+              </a:rPr>
+              <a:t>start with one bad table, then split it one rule at a time</a:t>
+            </a:r>
+          </a:p>
+        </p:txBody>
+      </p:sp>
+      <p:sp>
+        <p:nvSpPr>
+          <p:cNvPr id="5" name="TextBox 4"/>
+          <p:cNvSpPr txBox="1"/>
+          <p:nvPr/>
+        </p:nvSpPr>
+        <p:spPr>
+          <a:xfrm>
+            <a:off x="640080" y="1517904"/>
+            <a:ext cx="10972800" cy="5065776"/>
           </a:xfrm>
           <a:prstGeom prst="rect">
             <a:avLst/>
@@ -7390,45 +7519,13 @@
               </a:spcAft>
             </a:pPr>
             <a:r>
-              <a:rPr sz="1600">
-                <a:solidFill>
-                  <a:srgbClr val="000000"/>
-                </a:solidFill>
-                <a:latin typeface="Calibri"/>
-              </a:rPr>
-              <a:t>•  ORDER_LINE: start from {OrderID, ProductID} and close it.</a:t>
-            </a:r>
-          </a:p>
-          <a:p>
-            <a:pPr lvl="1">
-              <a:spcAft>
-                <a:spcPts val="900"/>
-              </a:spcAft>
-            </a:pPr>
-            <a:r>
-              <a:rPr sz="1400">
-                <a:solidFill>
-                  <a:srgbClr val="444444"/>
-                </a:solidFill>
-                <a:latin typeface="Calibri"/>
-              </a:rPr>
-              <a:t>-  F1 adds OrderDate, Status, CustID. F2 adds CName, Street, City. F3 adds State. F4 adds PName, Category, Price. F5 adds Qty.</a:t>
-            </a:r>
-          </a:p>
-          <a:p>
-            <a:pPr lvl="1">
-              <a:spcAft>
-                <a:spcPts val="900"/>
-              </a:spcAft>
-            </a:pPr>
-            <a:r>
-              <a:rPr sz="1400">
-                <a:solidFill>
-                  <a:srgbClr val="444444"/>
-                </a:solidFill>
-                <a:latin typeface="Calibri"/>
-              </a:rPr>
-              <a:t>-  All thirteen columns are reached, and neither half works alone (N1, N2), so it is the only candidate key.</a:t>
+              <a:rPr sz="1700">
+                <a:solidFill>
+                  <a:srgbClr val="000000"/>
+                </a:solidFill>
+                <a:latin typeface="Calibri"/>
+              </a:rPr>
+              <a:t>•  1NF: every cell holds one value, and repeating groups move out.</a:t>
             </a:r>
           </a:p>
           <a:p>
@@ -7438,29 +7535,13 @@
               </a:spcAft>
             </a:pPr>
             <a:r>
-              <a:rPr sz="1600">
-                <a:solidFill>
-                  <a:srgbClr val="000000"/>
-                </a:solidFill>
-                <a:latin typeface="Calibri"/>
-              </a:rPr>
-              <a:t>•  DELIVERY_DUTY: two candidate keys, {OrderID, City} by F7 and {OrderID, DriverID} by F6.</a:t>
-            </a:r>
-          </a:p>
-          <a:p>
-            <a:pPr lvl="1">
-              <a:spcAft>
-                <a:spcPts val="900"/>
-              </a:spcAft>
-            </a:pPr>
-            <a:r>
-              <a:rPr sz="1400">
-                <a:solidFill>
-                  <a:srgbClr val="444444"/>
-                </a:solidFill>
-                <a:latin typeface="Calibri"/>
-              </a:rPr>
-              <a:t>-  That second key is exactly why it passes 3NF and still fails BCNF.</a:t>
+              <a:rPr sz="1700">
+                <a:solidFill>
+                  <a:srgbClr val="000000"/>
+                </a:solidFill>
+                <a:latin typeface="Calibri"/>
+              </a:rPr>
+              <a:t>•  2NF: no column depends on only part of the key.</a:t>
             </a:r>
           </a:p>
           <a:p>
@@ -7470,13 +7551,45 @@
               </a:spcAft>
             </a:pPr>
             <a:r>
-              <a:rPr sz="1600">
-                <a:solidFill>
-                  <a:srgbClr val="000000"/>
-                </a:solidFill>
-                <a:latin typeface="Calibri"/>
-              </a:rPr>
-              <a:t>•  SUPPLIER_PHONE: {SupplierID, Phone}, and Phone alone by F8.</a:t>
+              <a:rPr sz="1700">
+                <a:solidFill>
+                  <a:srgbClr val="000000"/>
+                </a:solidFill>
+                <a:latin typeface="Calibri"/>
+              </a:rPr>
+              <a:t>•  3NF: no ordinary column decides another ordinary column.</a:t>
+            </a:r>
+          </a:p>
+          <a:p>
+            <a:pPr>
+              <a:spcAft>
+                <a:spcPts val="900"/>
+              </a:spcAft>
+            </a:pPr>
+            <a:r>
+              <a:rPr sz="1700">
+                <a:solidFill>
+                  <a:srgbClr val="000000"/>
+                </a:solidFill>
+                <a:latin typeface="Calibri"/>
+              </a:rPr>
+              <a:t>•  BCNF: the left side of every dependency must be a key.</a:t>
+            </a:r>
+          </a:p>
+          <a:p>
+            <a:pPr>
+              <a:spcAft>
+                <a:spcPts val="900"/>
+              </a:spcAft>
+            </a:pPr>
+            <a:r>
+              <a:rPr sz="1700">
+                <a:solidFill>
+                  <a:srgbClr val="000000"/>
+                </a:solidFill>
+                <a:latin typeface="Calibri"/>
+              </a:rPr>
+              <a:t>•  Each step below names the dependency from section 7 that forces the split.</a:t>
             </a:r>
           </a:p>
         </p:txBody>
@@ -7529,7 +7642,7 @@
                 </a:solidFill>
                 <a:latin typeface="Calibri"/>
               </a:rPr>
-              <a:t>8. The Four Rules</a:t>
+              <a:t>8. Where we start, Unnormalized Form (UNF)</a:t>
             </a:r>
           </a:p>
         </p:txBody>
@@ -7586,43 +7699,8 @@
         </p:nvSpPr>
         <p:spPr>
           <a:xfrm>
-            <a:off x="457200" y="1024128"/>
-            <a:ext cx="11338560" cy="384048"/>
-          </a:xfrm>
-          <a:prstGeom prst="rect">
-            <a:avLst/>
-          </a:prstGeom>
-          <a:noFill/>
-        </p:spPr>
-        <p:txBody>
-          <a:bodyPr wrap="square">
-            <a:spAutoFit/>
-          </a:bodyPr>
-          <a:lstStyle/>
-          <a:p>
-            <a:pPr algn="l"/>
-            <a:r>
-              <a:rPr sz="1350" b="0" i="1">
-                <a:solidFill>
-                  <a:srgbClr val="444444"/>
-                </a:solidFill>
-                <a:latin typeface="Calibri"/>
-              </a:rPr>
-              <a:t>start with one bad table, then split it one rule at a time</a:t>
-            </a:r>
-          </a:p>
-        </p:txBody>
-      </p:sp>
-      <p:sp>
-        <p:nvSpPr>
-          <p:cNvPr id="5" name="TextBox 4"/>
-          <p:cNvSpPr txBox="1"/>
-          <p:nvPr/>
-        </p:nvSpPr>
-        <p:spPr>
-          <a:xfrm>
-            <a:off x="640080" y="1517904"/>
-            <a:ext cx="10972800" cy="5065776"/>
+            <a:off x="640080" y="1133856"/>
+            <a:ext cx="10972800" cy="5449824"/>
           </a:xfrm>
           <a:prstGeom prst="rect">
             <a:avLst/>
@@ -7641,13 +7719,13 @@
               </a:spcAft>
             </a:pPr>
             <a:r>
-              <a:rPr sz="1700">
-                <a:solidFill>
-                  <a:srgbClr val="000000"/>
-                </a:solidFill>
-                <a:latin typeface="Calibri"/>
-              </a:rPr>
-              <a:t>•  1NF: every cell holds one value, and repeating groups move out.</a:t>
+              <a:rPr sz="1600">
+                <a:solidFill>
+                  <a:srgbClr val="000000"/>
+                </a:solidFill>
+                <a:latin typeface="Calibri"/>
+              </a:rPr>
+              <a:t>•  One wide table, the way a clerk keeps it in a spreadsheet.</a:t>
             </a:r>
           </a:p>
           <a:p>
@@ -7657,13 +7735,13 @@
               </a:spcAft>
             </a:pPr>
             <a:r>
-              <a:rPr sz="1700">
-                <a:solidFill>
-                  <a:srgbClr val="000000"/>
-                </a:solidFill>
-                <a:latin typeface="Calibri"/>
-              </a:rPr>
-              <a:t>•  2NF: no column depends on only part of the key.</a:t>
+              <a:rPr sz="1600">
+                <a:solidFill>
+                  <a:srgbClr val="000000"/>
+                </a:solidFill>
+                <a:latin typeface="Calibri"/>
+              </a:rPr>
+              <a:t>•  Three cells hold lists: SupplierPhones, Items and Delivery.</a:t>
             </a:r>
           </a:p>
           <a:p>
@@ -7673,13 +7751,13 @@
               </a:spcAft>
             </a:pPr>
             <a:r>
-              <a:rPr sz="1700">
-                <a:solidFill>
-                  <a:srgbClr val="000000"/>
-                </a:solidFill>
-                <a:latin typeface="Calibri"/>
-              </a:rPr>
-              <a:t>•  3NF: no ordinary column decides another ordinary column.</a:t>
+              <a:rPr sz="1600">
+                <a:solidFill>
+                  <a:srgbClr val="000000"/>
+                </a:solidFill>
+                <a:latin typeface="Calibri"/>
+              </a:rPr>
+              <a:t>•  Customer details are copied onto every order row.</a:t>
             </a:r>
           </a:p>
           <a:p>
@@ -7689,29 +7767,13 @@
               </a:spcAft>
             </a:pPr>
             <a:r>
-              <a:rPr sz="1700">
-                <a:solidFill>
-                  <a:srgbClr val="000000"/>
-                </a:solidFill>
-                <a:latin typeface="Calibri"/>
-              </a:rPr>
-              <a:t>•  BCNF: the left side of every dependency must be a key.</a:t>
-            </a:r>
-          </a:p>
-          <a:p>
-            <a:pPr>
-              <a:spcAft>
-                <a:spcPts val="900"/>
-              </a:spcAft>
-            </a:pPr>
-            <a:r>
-              <a:rPr sz="1700">
-                <a:solidFill>
-                  <a:srgbClr val="000000"/>
-                </a:solidFill>
-                <a:latin typeface="Calibri"/>
-              </a:rPr>
-              <a:t>•  Each step below names the dependency from section 7 that forces the split.</a:t>
+              <a:rPr sz="1600">
+                <a:solidFill>
+                  <a:srgbClr val="000000"/>
+                </a:solidFill>
+                <a:latin typeface="Calibri"/>
+              </a:rPr>
+              <a:t>•  No atomic key, so no dependency can even be written down yet.</a:t>
             </a:r>
           </a:p>
         </p:txBody>
@@ -7742,7 +7804,7 @@
         </p:nvSpPr>
         <p:spPr>
           <a:xfrm>
-            <a:off x="457200" y="292608"/>
+            <a:off x="457200" y="237744"/>
             <a:ext cx="11338560" cy="566928"/>
           </a:xfrm>
           <a:prstGeom prst="rect">
@@ -7764,7 +7826,7 @@
                 </a:solidFill>
                 <a:latin typeface="Calibri"/>
               </a:rPr>
-              <a:t>8. Where we start, Unnormalized Form (UNF)</a:t>
+              <a:t>8. The Tables after UNF</a:t>
             </a:r>
           </a:p>
         </p:txBody>
@@ -7777,7 +7839,7 @@
         </p:nvSpPr>
         <p:spPr>
           <a:xfrm>
-            <a:off x="457200" y="950976"/>
+            <a:off x="457200" y="896112"/>
             <a:ext cx="11338560" cy="18288"/>
           </a:xfrm>
           <a:prstGeom prst="rect">
@@ -7813,93 +7875,30 @@
           </a:p>
         </p:txBody>
       </p:sp>
-      <p:sp>
-        <p:nvSpPr>
-          <p:cNvPr id="4" name="TextBox 3"/>
-          <p:cNvSpPr txBox="1"/>
+      <p:pic>
+        <p:nvPicPr>
+          <p:cNvPr id="4" name="Picture 3" descr="norm_unf.png"/>
+          <p:cNvPicPr>
+            <a:picLocks noChangeAspect="1"/>
+          </p:cNvPicPr>
           <p:nvPr/>
-        </p:nvSpPr>
-        <p:spPr>
-          <a:xfrm>
-            <a:off x="640080" y="1133856"/>
-            <a:ext cx="10972800" cy="5449824"/>
+        </p:nvPicPr>
+        <p:blipFill>
+          <a:blip r:embed="rId2"/>
+          <a:stretch>
+            <a:fillRect/>
+          </a:stretch>
+        </p:blipFill>
+        <p:spPr>
+          <a:xfrm>
+            <a:off x="335127" y="1589166"/>
+            <a:ext cx="11521440" cy="4575778"/>
           </a:xfrm>
           <a:prstGeom prst="rect">
             <a:avLst/>
           </a:prstGeom>
-          <a:noFill/>
-        </p:spPr>
-        <p:txBody>
-          <a:bodyPr wrap="square">
-            <a:spAutoFit/>
-          </a:bodyPr>
-          <a:lstStyle/>
-          <a:p>
-            <a:pPr>
-              <a:spcAft>
-                <a:spcPts val="900"/>
-              </a:spcAft>
-            </a:pPr>
-            <a:r>
-              <a:rPr sz="1600">
-                <a:solidFill>
-                  <a:srgbClr val="000000"/>
-                </a:solidFill>
-                <a:latin typeface="Calibri"/>
-              </a:rPr>
-              <a:t>•  One wide table, the way a clerk keeps it in a spreadsheet.</a:t>
-            </a:r>
-          </a:p>
-          <a:p>
-            <a:pPr>
-              <a:spcAft>
-                <a:spcPts val="900"/>
-              </a:spcAft>
-            </a:pPr>
-            <a:r>
-              <a:rPr sz="1600">
-                <a:solidFill>
-                  <a:srgbClr val="000000"/>
-                </a:solidFill>
-                <a:latin typeface="Calibri"/>
-              </a:rPr>
-              <a:t>•  Three cells hold lists: SupplierPhones, Items and Delivery.</a:t>
-            </a:r>
-          </a:p>
-          <a:p>
-            <a:pPr>
-              <a:spcAft>
-                <a:spcPts val="900"/>
-              </a:spcAft>
-            </a:pPr>
-            <a:r>
-              <a:rPr sz="1600">
-                <a:solidFill>
-                  <a:srgbClr val="000000"/>
-                </a:solidFill>
-                <a:latin typeface="Calibri"/>
-              </a:rPr>
-              <a:t>•  Customer details are copied onto every order row.</a:t>
-            </a:r>
-          </a:p>
-          <a:p>
-            <a:pPr>
-              <a:spcAft>
-                <a:spcPts val="900"/>
-              </a:spcAft>
-            </a:pPr>
-            <a:r>
-              <a:rPr sz="1600">
-                <a:solidFill>
-                  <a:srgbClr val="000000"/>
-                </a:solidFill>
-                <a:latin typeface="Calibri"/>
-              </a:rPr>
-              <a:t>•  No atomic key, so no dependency can even be written down yet.</a:t>
-            </a:r>
-          </a:p>
-        </p:txBody>
-      </p:sp>
+        </p:spPr>
+      </p:pic>
     </p:spTree>
   </p:cSld>
   <p:clrMapOvr>
@@ -7926,7 +7925,7 @@
         </p:nvSpPr>
         <p:spPr>
           <a:xfrm>
-            <a:off x="457200" y="237744"/>
+            <a:off x="457200" y="292608"/>
             <a:ext cx="11338560" cy="566928"/>
           </a:xfrm>
           <a:prstGeom prst="rect">
@@ -7948,7 +7947,7 @@
                 </a:solidFill>
                 <a:latin typeface="Calibri"/>
               </a:rPr>
-              <a:t>8. The Tables after UNF</a:t>
+              <a:t>8. First Normal Form (1NF)</a:t>
             </a:r>
           </a:p>
         </p:txBody>
@@ -7961,7 +7960,7 @@
         </p:nvSpPr>
         <p:spPr>
           <a:xfrm>
-            <a:off x="457200" y="896112"/>
+            <a:off x="457200" y="950976"/>
             <a:ext cx="11338560" cy="18288"/>
           </a:xfrm>
           <a:prstGeom prst="rect">
@@ -7997,30 +7996,109 @@
           </a:p>
         </p:txBody>
       </p:sp>
-      <p:pic>
-        <p:nvPicPr>
-          <p:cNvPr id="4" name="Picture 3" descr="norm_unf.png"/>
-          <p:cNvPicPr>
-            <a:picLocks noChangeAspect="1"/>
-          </p:cNvPicPr>
+      <p:sp>
+        <p:nvSpPr>
+          <p:cNvPr id="4" name="TextBox 3"/>
+          <p:cNvSpPr txBox="1"/>
           <p:nvPr/>
-        </p:nvPicPr>
-        <p:blipFill>
-          <a:blip r:embed="rId2"/>
-          <a:stretch>
-            <a:fillRect/>
-          </a:stretch>
-        </p:blipFill>
-        <p:spPr>
-          <a:xfrm>
-            <a:off x="335127" y="2295347"/>
-            <a:ext cx="11521440" cy="3163417"/>
+        </p:nvSpPr>
+        <p:spPr>
+          <a:xfrm>
+            <a:off x="640080" y="1133856"/>
+            <a:ext cx="10972800" cy="5449824"/>
           </a:xfrm>
           <a:prstGeom prst="rect">
             <a:avLst/>
           </a:prstGeom>
-        </p:spPr>
-      </p:pic>
+          <a:noFill/>
+        </p:spPr>
+        <p:txBody>
+          <a:bodyPr wrap="square">
+            <a:spAutoFit/>
+          </a:bodyPr>
+          <a:lstStyle/>
+          <a:p>
+            <a:pPr>
+              <a:spcAft>
+                <a:spcPts val="900"/>
+              </a:spcAft>
+            </a:pPr>
+            <a:r>
+              <a:rPr sz="1600">
+                <a:solidFill>
+                  <a:srgbClr val="000000"/>
+                </a:solidFill>
+                <a:latin typeface="Calibri"/>
+              </a:rPr>
+              <a:t>•  Rule: one value per cell, and repeating groups move out.</a:t>
+            </a:r>
+          </a:p>
+          <a:p>
+            <a:pPr>
+              <a:spcAft>
+                <a:spcPts val="900"/>
+              </a:spcAft>
+            </a:pPr>
+            <a:r>
+              <a:rPr sz="1600">
+                <a:solidFill>
+                  <a:srgbClr val="000000"/>
+                </a:solidFill>
+                <a:latin typeface="Calibri"/>
+              </a:rPr>
+              <a:t>•  Items become ORDER_ITEM, phones become SUPPLIER_PHONE, deliveries become DELIVERY_DUTY.</a:t>
+            </a:r>
+          </a:p>
+          <a:p>
+            <a:pPr>
+              <a:spcAft>
+                <a:spcPts val="900"/>
+              </a:spcAft>
+            </a:pPr>
+            <a:r>
+              <a:rPr sz="1600">
+                <a:solidFill>
+                  <a:srgbClr val="000000"/>
+                </a:solidFill>
+                <a:latin typeface="Calibri"/>
+              </a:rPr>
+              <a:t>•  ORDER_ITEM is keyed by OrderID + ProductID, because N1 and N2 rule out either column alone.</a:t>
+            </a:r>
+          </a:p>
+          <a:p>
+            <a:pPr>
+              <a:spcAft>
+                <a:spcPts val="900"/>
+              </a:spcAft>
+            </a:pPr>
+            <a:r>
+              <a:rPr sz="1600">
+                <a:solidFill>
+                  <a:srgbClr val="000000"/>
+                </a:solidFill>
+                <a:latin typeface="Calibri"/>
+              </a:rPr>
+              <a:t>•  DELIVERY_DUTY is keyed by OrderID + City, from F7.</a:t>
+            </a:r>
+          </a:p>
+          <a:p>
+            <a:pPr>
+              <a:spcAft>
+                <a:spcPts val="900"/>
+              </a:spcAft>
+            </a:pPr>
+            <a:r>
+              <a:rPr sz="1600">
+                <a:solidFill>
+                  <a:srgbClr val="000000"/>
+                </a:solidFill>
+                <a:latin typeface="Calibri"/>
+              </a:rPr>
+              <a:t>•  Still wrong: F4 means PName and Category repeat on every line for the same product.</a:t>
+            </a:r>
+          </a:p>
+        </p:txBody>
+      </p:sp>
     </p:spTree>
   </p:cSld>
   <p:clrMapOvr>
@@ -8047,7 +8125,7 @@
         </p:nvSpPr>
         <p:spPr>
           <a:xfrm>
-            <a:off x="457200" y="292608"/>
+            <a:off x="457200" y="237744"/>
             <a:ext cx="11338560" cy="566928"/>
           </a:xfrm>
           <a:prstGeom prst="rect">
@@ -8069,7 +8147,7 @@
                 </a:solidFill>
                 <a:latin typeface="Calibri"/>
               </a:rPr>
-              <a:t>8. First Normal Form (1NF)</a:t>
+              <a:t>8. The Tables after 1NF</a:t>
             </a:r>
           </a:p>
         </p:txBody>
@@ -8082,7 +8160,7 @@
         </p:nvSpPr>
         <p:spPr>
           <a:xfrm>
-            <a:off x="457200" y="950976"/>
+            <a:off x="457200" y="896112"/>
             <a:ext cx="11338560" cy="18288"/>
           </a:xfrm>
           <a:prstGeom prst="rect">
@@ -8118,109 +8196,30 @@
           </a:p>
         </p:txBody>
       </p:sp>
-      <p:sp>
-        <p:nvSpPr>
-          <p:cNvPr id="4" name="TextBox 3"/>
-          <p:cNvSpPr txBox="1"/>
+      <p:pic>
+        <p:nvPicPr>
+          <p:cNvPr id="4" name="Picture 3" descr="norm_1nf.png"/>
+          <p:cNvPicPr>
+            <a:picLocks noChangeAspect="1"/>
+          </p:cNvPicPr>
           <p:nvPr/>
-        </p:nvSpPr>
-        <p:spPr>
-          <a:xfrm>
-            <a:off x="640080" y="1133856"/>
-            <a:ext cx="10972800" cy="5449824"/>
+        </p:nvPicPr>
+        <p:blipFill>
+          <a:blip r:embed="rId2"/>
+          <a:stretch>
+            <a:fillRect/>
+          </a:stretch>
+        </p:blipFill>
+        <p:spPr>
+          <a:xfrm>
+            <a:off x="335127" y="1450222"/>
+            <a:ext cx="11521440" cy="4853667"/>
           </a:xfrm>
           <a:prstGeom prst="rect">
             <a:avLst/>
           </a:prstGeom>
-          <a:noFill/>
-        </p:spPr>
-        <p:txBody>
-          <a:bodyPr wrap="square">
-            <a:spAutoFit/>
-          </a:bodyPr>
-          <a:lstStyle/>
-          <a:p>
-            <a:pPr>
-              <a:spcAft>
-                <a:spcPts val="900"/>
-              </a:spcAft>
-            </a:pPr>
-            <a:r>
-              <a:rPr sz="1600">
-                <a:solidFill>
-                  <a:srgbClr val="000000"/>
-                </a:solidFill>
-                <a:latin typeface="Calibri"/>
-              </a:rPr>
-              <a:t>•  Rule: one value per cell, and repeating groups move out.</a:t>
-            </a:r>
-          </a:p>
-          <a:p>
-            <a:pPr>
-              <a:spcAft>
-                <a:spcPts val="900"/>
-              </a:spcAft>
-            </a:pPr>
-            <a:r>
-              <a:rPr sz="1600">
-                <a:solidFill>
-                  <a:srgbClr val="000000"/>
-                </a:solidFill>
-                <a:latin typeface="Calibri"/>
-              </a:rPr>
-              <a:t>•  Items become ORDER_ITEM, phones become SUPPLIER_PHONE, deliveries become DELIVERY_DUTY.</a:t>
-            </a:r>
-          </a:p>
-          <a:p>
-            <a:pPr>
-              <a:spcAft>
-                <a:spcPts val="900"/>
-              </a:spcAft>
-            </a:pPr>
-            <a:r>
-              <a:rPr sz="1600">
-                <a:solidFill>
-                  <a:srgbClr val="000000"/>
-                </a:solidFill>
-                <a:latin typeface="Calibri"/>
-              </a:rPr>
-              <a:t>•  ORDER_ITEM is keyed by OrderID + ProductID, because N1 and N2 rule out either column alone.</a:t>
-            </a:r>
-          </a:p>
-          <a:p>
-            <a:pPr>
-              <a:spcAft>
-                <a:spcPts val="900"/>
-              </a:spcAft>
-            </a:pPr>
-            <a:r>
-              <a:rPr sz="1600">
-                <a:solidFill>
-                  <a:srgbClr val="000000"/>
-                </a:solidFill>
-                <a:latin typeface="Calibri"/>
-              </a:rPr>
-              <a:t>•  DELIVERY_DUTY is keyed by OrderID + City, from F7.</a:t>
-            </a:r>
-          </a:p>
-          <a:p>
-            <a:pPr>
-              <a:spcAft>
-                <a:spcPts val="900"/>
-              </a:spcAft>
-            </a:pPr>
-            <a:r>
-              <a:rPr sz="1600">
-                <a:solidFill>
-                  <a:srgbClr val="000000"/>
-                </a:solidFill>
-                <a:latin typeface="Calibri"/>
-              </a:rPr>
-              <a:t>•  Still wrong: F4 means PName and Category repeat on every line for the same product.</a:t>
-            </a:r>
-          </a:p>
-        </p:txBody>
-      </p:sp>
+        </p:spPr>
+      </p:pic>
     </p:spTree>
   </p:cSld>
   <p:clrMapOvr>
@@ -8247,7 +8246,7 @@
         </p:nvSpPr>
         <p:spPr>
           <a:xfrm>
-            <a:off x="457200" y="237744"/>
+            <a:off x="457200" y="292608"/>
             <a:ext cx="11338560" cy="566928"/>
           </a:xfrm>
           <a:prstGeom prst="rect">
@@ -8269,7 +8268,7 @@
                 </a:solidFill>
                 <a:latin typeface="Calibri"/>
               </a:rPr>
-              <a:t>8. The Tables after 1NF</a:t>
+              <a:t>8. Second Normal Form (2NF)</a:t>
             </a:r>
           </a:p>
         </p:txBody>
@@ -8282,7 +8281,7 @@
         </p:nvSpPr>
         <p:spPr>
           <a:xfrm>
-            <a:off x="457200" y="896112"/>
+            <a:off x="457200" y="950976"/>
             <a:ext cx="11338560" cy="18288"/>
           </a:xfrm>
           <a:prstGeom prst="rect">
@@ -8318,30 +8317,109 @@
           </a:p>
         </p:txBody>
       </p:sp>
-      <p:pic>
-        <p:nvPicPr>
-          <p:cNvPr id="4" name="Picture 3" descr="norm_1nf.png"/>
-          <p:cNvPicPr>
-            <a:picLocks noChangeAspect="1"/>
-          </p:cNvPicPr>
+      <p:sp>
+        <p:nvSpPr>
+          <p:cNvPr id="4" name="TextBox 3"/>
+          <p:cNvSpPr txBox="1"/>
           <p:nvPr/>
-        </p:nvPicPr>
-        <p:blipFill>
-          <a:blip r:embed="rId2"/>
-          <a:stretch>
-            <a:fillRect/>
-          </a:stretch>
-        </p:blipFill>
-        <p:spPr>
-          <a:xfrm>
-            <a:off x="335127" y="1264569"/>
-            <a:ext cx="11521440" cy="5224973"/>
+        </p:nvSpPr>
+        <p:spPr>
+          <a:xfrm>
+            <a:off x="640080" y="1133856"/>
+            <a:ext cx="10972800" cy="5449824"/>
           </a:xfrm>
           <a:prstGeom prst="rect">
             <a:avLst/>
           </a:prstGeom>
-        </p:spPr>
-      </p:pic>
+          <a:noFill/>
+        </p:spPr>
+        <p:txBody>
+          <a:bodyPr wrap="square">
+            <a:spAutoFit/>
+          </a:bodyPr>
+          <a:lstStyle/>
+          <a:p>
+            <a:pPr>
+              <a:spcAft>
+                <a:spcPts val="900"/>
+              </a:spcAft>
+            </a:pPr>
+            <a:r>
+              <a:rPr sz="1600">
+                <a:solidFill>
+                  <a:srgbClr val="000000"/>
+                </a:solidFill>
+                <a:latin typeface="Calibri"/>
+              </a:rPr>
+              <a:t>•  Rule: no column may depend on only part of the key.</a:t>
+            </a:r>
+          </a:p>
+          <a:p>
+            <a:pPr>
+              <a:spcAft>
+                <a:spcPts val="900"/>
+              </a:spcAft>
+            </a:pPr>
+            <a:r>
+              <a:rPr sz="1600">
+                <a:solidFill>
+                  <a:srgbClr val="000000"/>
+                </a:solidFill>
+                <a:latin typeface="Calibri"/>
+              </a:rPr>
+              <a:t>•  ORDER_ITEM is keyed by {OrderID, ProductID}, but F4 fixes PName, Category and Price from ProductID alone.</a:t>
+            </a:r>
+          </a:p>
+          <a:p>
+            <a:pPr>
+              <a:spcAft>
+                <a:spcPts val="900"/>
+              </a:spcAft>
+            </a:pPr>
+            <a:r>
+              <a:rPr sz="1600">
+                <a:solidFill>
+                  <a:srgbClr val="000000"/>
+                </a:solidFill>
+                <a:latin typeface="Calibri"/>
+              </a:rPr>
+              <a:t>•  Those three move to PRODUCT, where Price becomes UnitPrice.</a:t>
+            </a:r>
+          </a:p>
+          <a:p>
+            <a:pPr>
+              <a:spcAft>
+                <a:spcPts val="900"/>
+              </a:spcAft>
+            </a:pPr>
+            <a:r>
+              <a:rPr sz="1600">
+                <a:solidFill>
+                  <a:srgbClr val="000000"/>
+                </a:solidFill>
+                <a:latin typeface="Calibri"/>
+              </a:rPr>
+              <a:t>•  Only Qty depends on the whole key (F5), so only Qty stays behind.</a:t>
+            </a:r>
+          </a:p>
+          <a:p>
+            <a:pPr>
+              <a:spcAft>
+                <a:spcPts val="900"/>
+              </a:spcAft>
+            </a:pPr>
+            <a:r>
+              <a:rPr sz="1600">
+                <a:solidFill>
+                  <a:srgbClr val="000000"/>
+                </a:solidFill>
+                <a:latin typeface="Calibri"/>
+              </a:rPr>
+              <a:t>•  Still wrong: F2 and F3 in ORDER_MASTER both start from a non-key column.</a:t>
+            </a:r>
+          </a:p>
+        </p:txBody>
+      </p:sp>
     </p:spTree>
   </p:cSld>
   <p:clrMapOvr>
@@ -8368,7 +8446,7 @@
         </p:nvSpPr>
         <p:spPr>
           <a:xfrm>
-            <a:off x="457200" y="292608"/>
+            <a:off x="457200" y="237744"/>
             <a:ext cx="11338560" cy="566928"/>
           </a:xfrm>
           <a:prstGeom prst="rect">
@@ -8390,7 +8468,7 @@
                 </a:solidFill>
                 <a:latin typeface="Calibri"/>
               </a:rPr>
-              <a:t>8. Second Normal Form (2NF)</a:t>
+              <a:t>8. The Tables after 2NF</a:t>
             </a:r>
           </a:p>
         </p:txBody>
@@ -8403,7 +8481,7 @@
         </p:nvSpPr>
         <p:spPr>
           <a:xfrm>
-            <a:off x="457200" y="950976"/>
+            <a:off x="457200" y="896112"/>
             <a:ext cx="11338560" cy="18288"/>
           </a:xfrm>
           <a:prstGeom prst="rect">
@@ -8439,109 +8517,30 @@
           </a:p>
         </p:txBody>
       </p:sp>
-      <p:sp>
-        <p:nvSpPr>
-          <p:cNvPr id="4" name="TextBox 3"/>
-          <p:cNvSpPr txBox="1"/>
+      <p:pic>
+        <p:nvPicPr>
+          <p:cNvPr id="4" name="Picture 3" descr="norm_2nf.png"/>
+          <p:cNvPicPr>
+            <a:picLocks noChangeAspect="1"/>
+          </p:cNvPicPr>
           <p:nvPr/>
-        </p:nvSpPr>
-        <p:spPr>
-          <a:xfrm>
-            <a:off x="640080" y="1133856"/>
-            <a:ext cx="10972800" cy="5449824"/>
+        </p:nvPicPr>
+        <p:blipFill>
+          <a:blip r:embed="rId2"/>
+          <a:stretch>
+            <a:fillRect/>
+          </a:stretch>
+        </p:blipFill>
+        <p:spPr>
+          <a:xfrm>
+            <a:off x="335127" y="1450222"/>
+            <a:ext cx="11521440" cy="4853667"/>
           </a:xfrm>
           <a:prstGeom prst="rect">
             <a:avLst/>
           </a:prstGeom>
-          <a:noFill/>
-        </p:spPr>
-        <p:txBody>
-          <a:bodyPr wrap="square">
-            <a:spAutoFit/>
-          </a:bodyPr>
-          <a:lstStyle/>
-          <a:p>
-            <a:pPr>
-              <a:spcAft>
-                <a:spcPts val="900"/>
-              </a:spcAft>
-            </a:pPr>
-            <a:r>
-              <a:rPr sz="1600">
-                <a:solidFill>
-                  <a:srgbClr val="000000"/>
-                </a:solidFill>
-                <a:latin typeface="Calibri"/>
-              </a:rPr>
-              <a:t>•  Rule: no column may depend on only part of the key.</a:t>
-            </a:r>
-          </a:p>
-          <a:p>
-            <a:pPr>
-              <a:spcAft>
-                <a:spcPts val="900"/>
-              </a:spcAft>
-            </a:pPr>
-            <a:r>
-              <a:rPr sz="1600">
-                <a:solidFill>
-                  <a:srgbClr val="000000"/>
-                </a:solidFill>
-                <a:latin typeface="Calibri"/>
-              </a:rPr>
-              <a:t>•  ORDER_ITEM is keyed by {OrderID, ProductID}, but F4 fixes PName, Category and Price from ProductID alone.</a:t>
-            </a:r>
-          </a:p>
-          <a:p>
-            <a:pPr>
-              <a:spcAft>
-                <a:spcPts val="900"/>
-              </a:spcAft>
-            </a:pPr>
-            <a:r>
-              <a:rPr sz="1600">
-                <a:solidFill>
-                  <a:srgbClr val="000000"/>
-                </a:solidFill>
-                <a:latin typeface="Calibri"/>
-              </a:rPr>
-              <a:t>•  Those three move to PRODUCT, where Price becomes UnitPrice.</a:t>
-            </a:r>
-          </a:p>
-          <a:p>
-            <a:pPr>
-              <a:spcAft>
-                <a:spcPts val="900"/>
-              </a:spcAft>
-            </a:pPr>
-            <a:r>
-              <a:rPr sz="1600">
-                <a:solidFill>
-                  <a:srgbClr val="000000"/>
-                </a:solidFill>
-                <a:latin typeface="Calibri"/>
-              </a:rPr>
-              <a:t>•  Only Qty depends on the whole key (F5), so only Qty stays behind.</a:t>
-            </a:r>
-          </a:p>
-          <a:p>
-            <a:pPr>
-              <a:spcAft>
-                <a:spcPts val="900"/>
-              </a:spcAft>
-            </a:pPr>
-            <a:r>
-              <a:rPr sz="1600">
-                <a:solidFill>
-                  <a:srgbClr val="000000"/>
-                </a:solidFill>
-                <a:latin typeface="Calibri"/>
-              </a:rPr>
-              <a:t>•  Still wrong: F2 and F3 in ORDER_MASTER both start from a non-key column.</a:t>
-            </a:r>
-          </a:p>
-        </p:txBody>
-      </p:sp>
+        </p:spPr>
+      </p:pic>
     </p:spTree>
   </p:cSld>
   <p:clrMapOvr>
@@ -8568,7 +8567,7 @@
         </p:nvSpPr>
         <p:spPr>
           <a:xfrm>
-            <a:off x="457200" y="237744"/>
+            <a:off x="457200" y="292608"/>
             <a:ext cx="11338560" cy="566928"/>
           </a:xfrm>
           <a:prstGeom prst="rect">
@@ -8590,7 +8589,7 @@
                 </a:solidFill>
                 <a:latin typeface="Calibri"/>
               </a:rPr>
-              <a:t>8. The Tables after 2NF</a:t>
+              <a:t>8. Third Normal Form (3NF)</a:t>
             </a:r>
           </a:p>
         </p:txBody>
@@ -8603,7 +8602,7 @@
         </p:nvSpPr>
         <p:spPr>
           <a:xfrm>
-            <a:off x="457200" y="896112"/>
+            <a:off x="457200" y="950976"/>
             <a:ext cx="11338560" cy="18288"/>
           </a:xfrm>
           <a:prstGeom prst="rect">
@@ -8639,30 +8638,109 @@
           </a:p>
         </p:txBody>
       </p:sp>
-      <p:pic>
-        <p:nvPicPr>
-          <p:cNvPr id="4" name="Picture 3" descr="norm_2nf.png"/>
-          <p:cNvPicPr>
-            <a:picLocks noChangeAspect="1"/>
-          </p:cNvPicPr>
+      <p:sp>
+        <p:nvSpPr>
+          <p:cNvPr id="4" name="TextBox 3"/>
+          <p:cNvSpPr txBox="1"/>
           <p:nvPr/>
-        </p:nvPicPr>
-        <p:blipFill>
-          <a:blip r:embed="rId2"/>
-          <a:stretch>
-            <a:fillRect/>
-          </a:stretch>
-        </p:blipFill>
-        <p:spPr>
-          <a:xfrm>
-            <a:off x="335127" y="1264569"/>
-            <a:ext cx="11521440" cy="5224973"/>
+        </p:nvSpPr>
+        <p:spPr>
+          <a:xfrm>
+            <a:off x="640080" y="1133856"/>
+            <a:ext cx="10972800" cy="5449824"/>
           </a:xfrm>
           <a:prstGeom prst="rect">
             <a:avLst/>
           </a:prstGeom>
-        </p:spPr>
-      </p:pic>
+          <a:noFill/>
+        </p:spPr>
+        <p:txBody>
+          <a:bodyPr wrap="square">
+            <a:spAutoFit/>
+          </a:bodyPr>
+          <a:lstStyle/>
+          <a:p>
+            <a:pPr>
+              <a:spcAft>
+                <a:spcPts val="900"/>
+              </a:spcAft>
+            </a:pPr>
+            <a:r>
+              <a:rPr sz="1600">
+                <a:solidFill>
+                  <a:srgbClr val="000000"/>
+                </a:solidFill>
+                <a:latin typeface="Calibri"/>
+              </a:rPr>
+              <a:t>•  Rule: no ordinary column may decide another ordinary column.</a:t>
+            </a:r>
+          </a:p>
+          <a:p>
+            <a:pPr>
+              <a:spcAft>
+                <a:spcPts val="900"/>
+              </a:spcAft>
+            </a:pPr>
+            <a:r>
+              <a:rPr sz="1600">
+                <a:solidFill>
+                  <a:srgbClr val="000000"/>
+                </a:solidFill>
+                <a:latin typeface="Calibri"/>
+              </a:rPr>
+              <a:t>•  F2 (CustID -&gt; CName, Street, City) becomes CUSTOMER.</a:t>
+            </a:r>
+          </a:p>
+          <a:p>
+            <a:pPr>
+              <a:spcAft>
+                <a:spcPts val="900"/>
+              </a:spcAft>
+            </a:pPr>
+            <a:r>
+              <a:rPr sz="1600">
+                <a:solidFill>
+                  <a:srgbClr val="000000"/>
+                </a:solidFill>
+                <a:latin typeface="Calibri"/>
+              </a:rPr>
+              <a:t>•  F3 (City -&gt; State) becomes CITY.</a:t>
+            </a:r>
+          </a:p>
+          <a:p>
+            <a:pPr>
+              <a:spcAft>
+                <a:spcPts val="900"/>
+              </a:spcAft>
+            </a:pPr>
+            <a:r>
+              <a:rPr sz="1600">
+                <a:solidFill>
+                  <a:srgbClr val="000000"/>
+                </a:solidFill>
+                <a:latin typeface="Calibri"/>
+              </a:rPr>
+              <a:t>•  What is left of ORDER_MASTER becomes ORDERS, keeping CustID as a foreign key.</a:t>
+            </a:r>
+          </a:p>
+          <a:p>
+            <a:pPr>
+              <a:spcAft>
+                <a:spcPts val="900"/>
+              </a:spcAft>
+            </a:pPr>
+            <a:r>
+              <a:rPr sz="1600">
+                <a:solidFill>
+                  <a:srgbClr val="000000"/>
+                </a:solidFill>
+                <a:latin typeface="Calibri"/>
+              </a:rPr>
+              <a:t>•  Still wrong: DELIVERY_DUTY passes 3NF only because every column of it belongs to some key.</a:t>
+            </a:r>
+          </a:p>
+        </p:txBody>
+      </p:sp>
     </p:spTree>
   </p:cSld>
   <p:clrMapOvr>
@@ -8689,7 +8767,7 @@
         </p:nvSpPr>
         <p:spPr>
           <a:xfrm>
-            <a:off x="457200" y="292608"/>
+            <a:off x="457200" y="237744"/>
             <a:ext cx="11338560" cy="566928"/>
           </a:xfrm>
           <a:prstGeom prst="rect">
@@ -8711,7 +8789,7 @@
                 </a:solidFill>
                 <a:latin typeface="Calibri"/>
               </a:rPr>
-              <a:t>8. Third Normal Form (3NF)</a:t>
+              <a:t>8. The Tables after 3NF</a:t>
             </a:r>
           </a:p>
         </p:txBody>
@@ -8724,7 +8802,7 @@
         </p:nvSpPr>
         <p:spPr>
           <a:xfrm>
-            <a:off x="457200" y="950976"/>
+            <a:off x="457200" y="896112"/>
             <a:ext cx="11338560" cy="18288"/>
           </a:xfrm>
           <a:prstGeom prst="rect">
@@ -8760,109 +8838,30 @@
           </a:p>
         </p:txBody>
       </p:sp>
-      <p:sp>
-        <p:nvSpPr>
-          <p:cNvPr id="4" name="TextBox 3"/>
-          <p:cNvSpPr txBox="1"/>
+      <p:pic>
+        <p:nvPicPr>
+          <p:cNvPr id="4" name="Picture 3" descr="norm_3nf.png"/>
+          <p:cNvPicPr>
+            <a:picLocks noChangeAspect="1"/>
+          </p:cNvPicPr>
           <p:nvPr/>
-        </p:nvSpPr>
-        <p:spPr>
-          <a:xfrm>
-            <a:off x="640080" y="1133856"/>
-            <a:ext cx="10972800" cy="5449824"/>
+        </p:nvPicPr>
+        <p:blipFill>
+          <a:blip r:embed="rId2"/>
+          <a:stretch>
+            <a:fillRect/>
+          </a:stretch>
+        </p:blipFill>
+        <p:spPr>
+          <a:xfrm>
+            <a:off x="335127" y="1514952"/>
+            <a:ext cx="11521440" cy="4724207"/>
           </a:xfrm>
           <a:prstGeom prst="rect">
             <a:avLst/>
           </a:prstGeom>
-          <a:noFill/>
-        </p:spPr>
-        <p:txBody>
-          <a:bodyPr wrap="square">
-            <a:spAutoFit/>
-          </a:bodyPr>
-          <a:lstStyle/>
-          <a:p>
-            <a:pPr>
-              <a:spcAft>
-                <a:spcPts val="900"/>
-              </a:spcAft>
-            </a:pPr>
-            <a:r>
-              <a:rPr sz="1600">
-                <a:solidFill>
-                  <a:srgbClr val="000000"/>
-                </a:solidFill>
-                <a:latin typeface="Calibri"/>
-              </a:rPr>
-              <a:t>•  Rule: no ordinary column may decide another ordinary column.</a:t>
-            </a:r>
-          </a:p>
-          <a:p>
-            <a:pPr>
-              <a:spcAft>
-                <a:spcPts val="900"/>
-              </a:spcAft>
-            </a:pPr>
-            <a:r>
-              <a:rPr sz="1600">
-                <a:solidFill>
-                  <a:srgbClr val="000000"/>
-                </a:solidFill>
-                <a:latin typeface="Calibri"/>
-              </a:rPr>
-              <a:t>•  F2 (CustID -&gt; CName, Street, City) becomes CUSTOMER.</a:t>
-            </a:r>
-          </a:p>
-          <a:p>
-            <a:pPr>
-              <a:spcAft>
-                <a:spcPts val="900"/>
-              </a:spcAft>
-            </a:pPr>
-            <a:r>
-              <a:rPr sz="1600">
-                <a:solidFill>
-                  <a:srgbClr val="000000"/>
-                </a:solidFill>
-                <a:latin typeface="Calibri"/>
-              </a:rPr>
-              <a:t>•  F3 (City -&gt; State) becomes CITY.</a:t>
-            </a:r>
-          </a:p>
-          <a:p>
-            <a:pPr>
-              <a:spcAft>
-                <a:spcPts val="900"/>
-              </a:spcAft>
-            </a:pPr>
-            <a:r>
-              <a:rPr sz="1600">
-                <a:solidFill>
-                  <a:srgbClr val="000000"/>
-                </a:solidFill>
-                <a:latin typeface="Calibri"/>
-              </a:rPr>
-              <a:t>•  What is left of ORDER_MASTER becomes ORDERS, keeping CustID as a foreign key.</a:t>
-            </a:r>
-          </a:p>
-          <a:p>
-            <a:pPr>
-              <a:spcAft>
-                <a:spcPts val="900"/>
-              </a:spcAft>
-            </a:pPr>
-            <a:r>
-              <a:rPr sz="1600">
-                <a:solidFill>
-                  <a:srgbClr val="000000"/>
-                </a:solidFill>
-                <a:latin typeface="Calibri"/>
-              </a:rPr>
-              <a:t>•  Still wrong: DELIVERY_DUTY passes 3NF only because every column of it belongs to some key.</a:t>
-            </a:r>
-          </a:p>
-        </p:txBody>
-      </p:sp>
+        </p:spPr>
+      </p:pic>
     </p:spTree>
   </p:cSld>
   <p:clrMapOvr>
@@ -8889,7 +8888,7 @@
         </p:nvSpPr>
         <p:spPr>
           <a:xfrm>
-            <a:off x="457200" y="237744"/>
+            <a:off x="457200" y="292608"/>
             <a:ext cx="11338560" cy="566928"/>
           </a:xfrm>
           <a:prstGeom prst="rect">
@@ -8911,7 +8910,7 @@
                 </a:solidFill>
                 <a:latin typeface="Calibri"/>
               </a:rPr>
-              <a:t>8. The Tables after 3NF</a:t>
+              <a:t>8. Boyce-Codd Normal Form (BCNF)</a:t>
             </a:r>
           </a:p>
         </p:txBody>
@@ -8924,7 +8923,7 @@
         </p:nvSpPr>
         <p:spPr>
           <a:xfrm>
-            <a:off x="457200" y="896112"/>
+            <a:off x="457200" y="950976"/>
             <a:ext cx="11338560" cy="18288"/>
           </a:xfrm>
           <a:prstGeom prst="rect">
@@ -8960,30 +8959,125 @@
           </a:p>
         </p:txBody>
       </p:sp>
-      <p:pic>
-        <p:nvPicPr>
-          <p:cNvPr id="4" name="Picture 3" descr="norm_3nf.png"/>
-          <p:cNvPicPr>
-            <a:picLocks noChangeAspect="1"/>
-          </p:cNvPicPr>
+      <p:sp>
+        <p:nvSpPr>
+          <p:cNvPr id="4" name="TextBox 3"/>
+          <p:cNvSpPr txBox="1"/>
           <p:nvPr/>
-        </p:nvPicPr>
-        <p:blipFill>
-          <a:blip r:embed="rId2"/>
-          <a:stretch>
-            <a:fillRect/>
-          </a:stretch>
-        </p:blipFill>
-        <p:spPr>
-          <a:xfrm>
-            <a:off x="335127" y="1339429"/>
-            <a:ext cx="11521440" cy="5075253"/>
+        </p:nvSpPr>
+        <p:spPr>
+          <a:xfrm>
+            <a:off x="640080" y="1133856"/>
+            <a:ext cx="10972800" cy="5449824"/>
           </a:xfrm>
           <a:prstGeom prst="rect">
             <a:avLst/>
           </a:prstGeom>
-        </p:spPr>
-      </p:pic>
+          <a:noFill/>
+        </p:spPr>
+        <p:txBody>
+          <a:bodyPr wrap="square">
+            <a:spAutoFit/>
+          </a:bodyPr>
+          <a:lstStyle/>
+          <a:p>
+            <a:pPr>
+              <a:spcAft>
+                <a:spcPts val="900"/>
+              </a:spcAft>
+            </a:pPr>
+            <a:r>
+              <a:rPr sz="1600">
+                <a:solidFill>
+                  <a:srgbClr val="000000"/>
+                </a:solidFill>
+                <a:latin typeface="Calibri"/>
+              </a:rPr>
+              <a:t>•  Rule: the left side of every dependency must be a key.</a:t>
+            </a:r>
+          </a:p>
+          <a:p>
+            <a:pPr>
+              <a:spcAft>
+                <a:spcPts val="900"/>
+              </a:spcAft>
+            </a:pPr>
+            <a:r>
+              <a:rPr sz="1600">
+                <a:solidFill>
+                  <a:srgbClr val="000000"/>
+                </a:solidFill>
+                <a:latin typeface="Calibri"/>
+              </a:rPr>
+              <a:t>•  DELIVERY_DUTY has two candidate keys, {OrderID, City} and {OrderID, DriverID}, so F7 is fine.</a:t>
+            </a:r>
+          </a:p>
+          <a:p>
+            <a:pPr>
+              <a:spcAft>
+                <a:spcPts val="900"/>
+              </a:spcAft>
+            </a:pPr>
+            <a:r>
+              <a:rPr sz="1600">
+                <a:solidFill>
+                  <a:srgbClr val="000000"/>
+                </a:solidFill>
+                <a:latin typeface="Calibri"/>
+              </a:rPr>
+              <a:t>•  F6 (DriverID -&gt; City) is not, because DriverID is not a key on its own.</a:t>
+            </a:r>
+          </a:p>
+          <a:p>
+            <a:pPr>
+              <a:spcAft>
+                <a:spcPts val="900"/>
+              </a:spcAft>
+            </a:pPr>
+            <a:r>
+              <a:rPr sz="1600">
+                <a:solidFill>
+                  <a:srgbClr val="000000"/>
+                </a:solidFill>
+                <a:latin typeface="Calibri"/>
+              </a:rPr>
+              <a:t>•  'D-09 covers Mumbai' therefore sits on three rows, and two of them can be made to disagree.</a:t>
+            </a:r>
+          </a:p>
+          <a:p>
+            <a:pPr>
+              <a:spcAft>
+                <a:spcPts val="900"/>
+              </a:spcAft>
+            </a:pPr>
+            <a:r>
+              <a:rPr sz="1600">
+                <a:solidFill>
+                  <a:srgbClr val="000000"/>
+                </a:solidFill>
+                <a:latin typeface="Calibri"/>
+              </a:rPr>
+              <a:t>•  Splitting on F6 gives DRIVER_CITY and ORDER_DRIVER, and the join on DriverID returns the original rows.</a:t>
+            </a:r>
+          </a:p>
+          <a:p>
+            <a:pPr>
+              <a:spcAft>
+                <a:spcPts val="900"/>
+              </a:spcAft>
+            </a:pPr>
+            <a:r>
+              <a:rPr sz="1600">
+                <a:solidFill>
+                  <a:srgbClr val="000000"/>
+                </a:solidFill>
+                <a:latin typeface="Calibri"/>
+              </a:rPr>
+              <a:t>•  Every table is now in BCNF.</a:t>
+            </a:r>
+          </a:p>
+        </p:txBody>
+      </p:sp>
     </p:spTree>
   </p:cSld>
   <p:clrMapOvr>
@@ -9229,7 +9323,7 @@
         </p:nvSpPr>
         <p:spPr>
           <a:xfrm>
-            <a:off x="457200" y="292608"/>
+            <a:off x="457200" y="237744"/>
             <a:ext cx="11338560" cy="566928"/>
           </a:xfrm>
           <a:prstGeom prst="rect">
@@ -9251,7 +9345,7 @@
                 </a:solidFill>
                 <a:latin typeface="Calibri"/>
               </a:rPr>
-              <a:t>8. Boyce-Codd Normal Form (BCNF)</a:t>
+              <a:t>8. The Tables after BCNF</a:t>
             </a:r>
           </a:p>
         </p:txBody>
@@ -9264,7 +9358,7 @@
         </p:nvSpPr>
         <p:spPr>
           <a:xfrm>
-            <a:off x="457200" y="950976"/>
+            <a:off x="457200" y="896112"/>
             <a:ext cx="11338560" cy="18288"/>
           </a:xfrm>
           <a:prstGeom prst="rect">
@@ -9300,125 +9394,30 @@
           </a:p>
         </p:txBody>
       </p:sp>
-      <p:sp>
-        <p:nvSpPr>
-          <p:cNvPr id="4" name="TextBox 3"/>
-          <p:cNvSpPr txBox="1"/>
+      <p:pic>
+        <p:nvPicPr>
+          <p:cNvPr id="4" name="Picture 3" descr="norm_bcnf.png"/>
+          <p:cNvPicPr>
+            <a:picLocks noChangeAspect="1"/>
+          </p:cNvPicPr>
           <p:nvPr/>
-        </p:nvSpPr>
-        <p:spPr>
-          <a:xfrm>
-            <a:off x="640080" y="1133856"/>
-            <a:ext cx="10972800" cy="5449824"/>
+        </p:nvPicPr>
+        <p:blipFill>
+          <a:blip r:embed="rId2"/>
+          <a:stretch>
+            <a:fillRect/>
+          </a:stretch>
+        </p:blipFill>
+        <p:spPr>
+          <a:xfrm>
+            <a:off x="335127" y="1506277"/>
+            <a:ext cx="11521440" cy="4741557"/>
           </a:xfrm>
           <a:prstGeom prst="rect">
             <a:avLst/>
           </a:prstGeom>
-          <a:noFill/>
-        </p:spPr>
-        <p:txBody>
-          <a:bodyPr wrap="square">
-            <a:spAutoFit/>
-          </a:bodyPr>
-          <a:lstStyle/>
-          <a:p>
-            <a:pPr>
-              <a:spcAft>
-                <a:spcPts val="900"/>
-              </a:spcAft>
-            </a:pPr>
-            <a:r>
-              <a:rPr sz="1600">
-                <a:solidFill>
-                  <a:srgbClr val="000000"/>
-                </a:solidFill>
-                <a:latin typeface="Calibri"/>
-              </a:rPr>
-              <a:t>•  Rule: the left side of every dependency must be a key.</a:t>
-            </a:r>
-          </a:p>
-          <a:p>
-            <a:pPr>
-              <a:spcAft>
-                <a:spcPts val="900"/>
-              </a:spcAft>
-            </a:pPr>
-            <a:r>
-              <a:rPr sz="1600">
-                <a:solidFill>
-                  <a:srgbClr val="000000"/>
-                </a:solidFill>
-                <a:latin typeface="Calibri"/>
-              </a:rPr>
-              <a:t>•  DELIVERY_DUTY has two candidate keys, {OrderID, City} and {OrderID, DriverID}, so F7 is fine.</a:t>
-            </a:r>
-          </a:p>
-          <a:p>
-            <a:pPr>
-              <a:spcAft>
-                <a:spcPts val="900"/>
-              </a:spcAft>
-            </a:pPr>
-            <a:r>
-              <a:rPr sz="1600">
-                <a:solidFill>
-                  <a:srgbClr val="000000"/>
-                </a:solidFill>
-                <a:latin typeface="Calibri"/>
-              </a:rPr>
-              <a:t>•  F6 (DriverID -&gt; City) is not, because DriverID is not a key on its own.</a:t>
-            </a:r>
-          </a:p>
-          <a:p>
-            <a:pPr>
-              <a:spcAft>
-                <a:spcPts val="900"/>
-              </a:spcAft>
-            </a:pPr>
-            <a:r>
-              <a:rPr sz="1600">
-                <a:solidFill>
-                  <a:srgbClr val="000000"/>
-                </a:solidFill>
-                <a:latin typeface="Calibri"/>
-              </a:rPr>
-              <a:t>•  'D-09 covers Mumbai' therefore sits on three rows, and two of them can be made to disagree.</a:t>
-            </a:r>
-          </a:p>
-          <a:p>
-            <a:pPr>
-              <a:spcAft>
-                <a:spcPts val="900"/>
-              </a:spcAft>
-            </a:pPr>
-            <a:r>
-              <a:rPr sz="1600">
-                <a:solidFill>
-                  <a:srgbClr val="000000"/>
-                </a:solidFill>
-                <a:latin typeface="Calibri"/>
-              </a:rPr>
-              <a:t>•  Splitting on F6 gives DRIVER_CITY and ORDER_DRIVER, and the join on DriverID returns the original rows.</a:t>
-            </a:r>
-          </a:p>
-          <a:p>
-            <a:pPr>
-              <a:spcAft>
-                <a:spcPts val="900"/>
-              </a:spcAft>
-            </a:pPr>
-            <a:r>
-              <a:rPr sz="1600">
-                <a:solidFill>
-                  <a:srgbClr val="000000"/>
-                </a:solidFill>
-                <a:latin typeface="Calibri"/>
-              </a:rPr>
-              <a:t>•  Every table is now in BCNF.</a:t>
-            </a:r>
-          </a:p>
-        </p:txBody>
-      </p:sp>
+        </p:spPr>
+      </p:pic>
     </p:spTree>
   </p:cSld>
   <p:clrMapOvr>
@@ -9467,7 +9466,7 @@
                 </a:solidFill>
                 <a:latin typeface="Calibri"/>
               </a:rPr>
-              <a:t>8. The Tables after BCNF</a:t>
+              <a:t>9. The Decomposition, End to End</a:t>
             </a:r>
           </a:p>
         </p:txBody>
@@ -9516,9 +9515,44 @@
           </a:p>
         </p:txBody>
       </p:sp>
+      <p:sp>
+        <p:nvSpPr>
+          <p:cNvPr id="4" name="TextBox 3"/>
+          <p:cNvSpPr txBox="1"/>
+          <p:nvPr/>
+        </p:nvSpPr>
+        <p:spPr>
+          <a:xfrm>
+            <a:off x="457200" y="969264"/>
+            <a:ext cx="11338560" cy="384048"/>
+          </a:xfrm>
+          <a:prstGeom prst="rect">
+            <a:avLst/>
+          </a:prstGeom>
+          <a:noFill/>
+        </p:spPr>
+        <p:txBody>
+          <a:bodyPr wrap="square">
+            <a:spAutoFit/>
+          </a:bodyPr>
+          <a:lstStyle/>
+          <a:p>
+            <a:pPr algn="l"/>
+            <a:r>
+              <a:rPr sz="1350" b="0" i="1">
+                <a:solidFill>
+                  <a:srgbClr val="444444"/>
+                </a:solidFill>
+                <a:latin typeface="Calibri"/>
+              </a:rPr>
+              <a:t>every relation, every column, at every stage</a:t>
+            </a:r>
+          </a:p>
+        </p:txBody>
+      </p:sp>
       <p:pic>
         <p:nvPicPr>
-          <p:cNvPr id="4" name="Picture 3" descr="norm_bcnf.png"/>
+          <p:cNvPr id="5" name="Picture 4" descr="decomp_tree.png"/>
           <p:cNvPicPr>
             <a:picLocks noChangeAspect="1"/>
           </p:cNvPicPr>
@@ -9532,8 +9566,8 @@
         </p:blipFill>
         <p:spPr>
           <a:xfrm>
-            <a:off x="335127" y="1320001"/>
-            <a:ext cx="11521440" cy="5114108"/>
+            <a:off x="1849336" y="1463040"/>
+            <a:ext cx="8493022" cy="5212079"/>
           </a:xfrm>
           <a:prstGeom prst="rect">
             <a:avLst/>
@@ -9588,7 +9622,7 @@
                 </a:solidFill>
                 <a:latin typeface="Calibri"/>
               </a:rPr>
-              <a:t>9. The Decomposition, End to End</a:t>
+              <a:t>10. Final Schema, 21 Tables, All in BCNF</a:t>
             </a:r>
           </a:p>
         </p:txBody>
@@ -9637,44 +9671,9 @@
           </a:p>
         </p:txBody>
       </p:sp>
-      <p:sp>
-        <p:nvSpPr>
-          <p:cNvPr id="4" name="TextBox 3"/>
-          <p:cNvSpPr txBox="1"/>
-          <p:nvPr/>
-        </p:nvSpPr>
-        <p:spPr>
-          <a:xfrm>
-            <a:off x="457200" y="969264"/>
-            <a:ext cx="11338560" cy="384048"/>
-          </a:xfrm>
-          <a:prstGeom prst="rect">
-            <a:avLst/>
-          </a:prstGeom>
-          <a:noFill/>
-        </p:spPr>
-        <p:txBody>
-          <a:bodyPr wrap="square">
-            <a:spAutoFit/>
-          </a:bodyPr>
-          <a:lstStyle/>
-          <a:p>
-            <a:pPr algn="l"/>
-            <a:r>
-              <a:rPr sz="1350" b="0" i="1">
-                <a:solidFill>
-                  <a:srgbClr val="444444"/>
-                </a:solidFill>
-                <a:latin typeface="Calibri"/>
-              </a:rPr>
-              <a:t>every relation, every column, at every stage</a:t>
-            </a:r>
-          </a:p>
-        </p:txBody>
-      </p:sp>
       <p:pic>
         <p:nvPicPr>
-          <p:cNvPr id="5" name="Picture 4" descr="decomp_tree.png"/>
+          <p:cNvPr id="4" name="Picture 3" descr="final_schema.png"/>
           <p:cNvPicPr>
             <a:picLocks noChangeAspect="1"/>
           </p:cNvPicPr>
@@ -9688,8 +9687,8 @@
         </p:blipFill>
         <p:spPr>
           <a:xfrm>
-            <a:off x="1849336" y="1463040"/>
-            <a:ext cx="8493022" cy="5212079"/>
+            <a:off x="518680" y="1078992"/>
+            <a:ext cx="11154334" cy="5596127"/>
           </a:xfrm>
           <a:prstGeom prst="rect">
             <a:avLst/>
@@ -9722,7 +9721,7 @@
         </p:nvSpPr>
         <p:spPr>
           <a:xfrm>
-            <a:off x="457200" y="237744"/>
+            <a:off x="457200" y="292608"/>
             <a:ext cx="11338560" cy="566928"/>
           </a:xfrm>
           <a:prstGeom prst="rect">
@@ -9744,7 +9743,7 @@
                 </a:solidFill>
                 <a:latin typeface="Calibri"/>
               </a:rPr>
-              <a:t>10. Final Schema, 21 Tables, All in BCNF</a:t>
+              <a:t>10. Why the Design Is Now Safe</a:t>
             </a:r>
           </a:p>
         </p:txBody>
@@ -9757,7 +9756,7 @@
         </p:nvSpPr>
         <p:spPr>
           <a:xfrm>
-            <a:off x="457200" y="896112"/>
+            <a:off x="457200" y="950976"/>
             <a:ext cx="11338560" cy="18288"/>
           </a:xfrm>
           <a:prstGeom prst="rect">
@@ -9793,30 +9792,157 @@
           </a:p>
         </p:txBody>
       </p:sp>
-      <p:pic>
-        <p:nvPicPr>
-          <p:cNvPr id="4" name="Picture 3" descr="final_schema.png"/>
-          <p:cNvPicPr>
-            <a:picLocks noChangeAspect="1"/>
-          </p:cNvPicPr>
+      <p:sp>
+        <p:nvSpPr>
+          <p:cNvPr id="4" name="TextBox 3"/>
+          <p:cNvSpPr txBox="1"/>
           <p:nvPr/>
-        </p:nvPicPr>
-        <p:blipFill>
-          <a:blip r:embed="rId2"/>
-          <a:stretch>
-            <a:fillRect/>
-          </a:stretch>
-        </p:blipFill>
-        <p:spPr>
-          <a:xfrm>
-            <a:off x="518680" y="1078992"/>
-            <a:ext cx="11154334" cy="5596127"/>
+        </p:nvSpPr>
+        <p:spPr>
+          <a:xfrm>
+            <a:off x="640080" y="1133856"/>
+            <a:ext cx="10972800" cy="5449824"/>
           </a:xfrm>
           <a:prstGeom prst="rect">
             <a:avLst/>
           </a:prstGeom>
-        </p:spPr>
-      </p:pic>
+          <a:noFill/>
+        </p:spPr>
+        <p:txBody>
+          <a:bodyPr wrap="square">
+            <a:spAutoFit/>
+          </a:bodyPr>
+          <a:lstStyle/>
+          <a:p>
+            <a:pPr>
+              <a:spcAft>
+                <a:spcPts val="900"/>
+              </a:spcAft>
+            </a:pPr>
+            <a:r>
+              <a:rPr sz="1600">
+                <a:solidFill>
+                  <a:srgbClr val="000000"/>
+                </a:solidFill>
+                <a:latin typeface="Calibri"/>
+              </a:rPr>
+              <a:t>•  Every fact is stored in exactly one place, so two rows can never disagree.</a:t>
+            </a:r>
+          </a:p>
+          <a:p>
+            <a:pPr>
+              <a:spcAft>
+                <a:spcPts val="900"/>
+              </a:spcAft>
+            </a:pPr>
+            <a:r>
+              <a:rPr sz="1600">
+                <a:solidFill>
+                  <a:srgbClr val="000000"/>
+                </a:solidFill>
+                <a:latin typeface="Calibri"/>
+              </a:rPr>
+              <a:t>•  Correcting a product name, an address or a city's state is a single-row edit.</a:t>
+            </a:r>
+          </a:p>
+          <a:p>
+            <a:pPr>
+              <a:spcAft>
+                <a:spcPts val="900"/>
+              </a:spcAft>
+            </a:pPr>
+            <a:r>
+              <a:rPr sz="1600">
+                <a:solidFill>
+                  <a:srgbClr val="000000"/>
+                </a:solidFill>
+                <a:latin typeface="Calibri"/>
+              </a:rPr>
+              <a:t>•  A supplier, product or customer can exist before appearing on any order.</a:t>
+            </a:r>
+          </a:p>
+          <a:p>
+            <a:pPr>
+              <a:spcAft>
+                <a:spcPts val="900"/>
+              </a:spcAft>
+            </a:pPr>
+            <a:r>
+              <a:rPr sz="1600">
+                <a:solidFill>
+                  <a:srgbClr val="000000"/>
+                </a:solidFill>
+                <a:latin typeface="Calibri"/>
+              </a:rPr>
+              <a:t>•  Deleting an order cannot wipe out the customer who placed it.</a:t>
+            </a:r>
+          </a:p>
+          <a:p>
+            <a:pPr>
+              <a:spcAft>
+                <a:spcPts val="900"/>
+              </a:spcAft>
+            </a:pPr>
+            <a:r>
+              <a:rPr sz="1600">
+                <a:solidFill>
+                  <a:srgbClr val="000000"/>
+                </a:solidFill>
+                <a:latin typeface="Calibri"/>
+              </a:rPr>
+              <a:t>•  TotalAmt is calculated, not stored, so it can never fall out of step.</a:t>
+            </a:r>
+          </a:p>
+          <a:p>
+            <a:pPr>
+              <a:spcAft>
+                <a:spcPts val="900"/>
+              </a:spcAft>
+            </a:pPr>
+            <a:r>
+              <a:rPr sz="1600">
+                <a:solidFill>
+                  <a:srgbClr val="000000"/>
+                </a:solidFill>
+                <a:latin typeface="Calibri"/>
+              </a:rPr>
+              <a:t>•  A movement is recorded once whether it is a shipment or a return.</a:t>
+            </a:r>
+          </a:p>
+          <a:p>
+            <a:pPr>
+              <a:spcAft>
+                <a:spcPts val="900"/>
+              </a:spcAft>
+            </a:pPr>
+            <a:r>
+              <a:rPr sz="1600">
+                <a:solidFill>
+                  <a:srgbClr val="000000"/>
+                </a:solidFill>
+                <a:latin typeface="Calibri"/>
+              </a:rPr>
+              <a:t>•  WAREHOUSE has two candidate keys now, WarehouseID and ManagerID, because MANAGES is 1:1. Both are keys, so it is still in BCNF.</a:t>
+            </a:r>
+          </a:p>
+          <a:p>
+            <a:pPr>
+              <a:spcAft>
+                <a:spcPts val="900"/>
+              </a:spcAft>
+            </a:pPr>
+            <a:r>
+              <a:rPr sz="1600">
+                <a:solidFill>
+                  <a:srgbClr val="000000"/>
+                </a:solidFill>
+                <a:latin typeface="Calibri"/>
+              </a:rPr>
+              <a:t>•  One trade-off: F7, {OrderID, City} -&gt; DriverID, now needs a trigger, which DA2 will add.</a:t>
+            </a:r>
+          </a:p>
+        </p:txBody>
+      </p:sp>
     </p:spTree>
   </p:cSld>
   <p:clrMapOvr>
@@ -9865,7 +9991,7 @@
                 </a:solidFill>
                 <a:latin typeface="Calibri"/>
               </a:rPr>
-              <a:t>10. Why the Design Is Now Safe</a:t>
+              <a:t>11. What Comes Next</a:t>
             </a:r>
           </a:p>
         </p:txBody>
@@ -9942,13 +10068,29 @@
               </a:spcAft>
             </a:pPr>
             <a:r>
-              <a:rPr sz="1600">
-                <a:solidFill>
-                  <a:srgbClr val="000000"/>
-                </a:solidFill>
-                <a:latin typeface="Calibri"/>
-              </a:rPr>
-              <a:t>•  Every fact is stored in exactly one place, so two rows can never disagree.</a:t>
+              <a:rPr sz="1700">
+                <a:solidFill>
+                  <a:srgbClr val="000000"/>
+                </a:solidFill>
+                <a:latin typeface="Calibri"/>
+              </a:rPr>
+              <a:t>•  DA2, due 18 September 2026</a:t>
+            </a:r>
+          </a:p>
+          <a:p>
+            <a:pPr lvl="1">
+              <a:spcAft>
+                <a:spcPts val="900"/>
+              </a:spcAft>
+            </a:pPr>
+            <a:r>
+              <a:rPr sz="1500">
+                <a:solidFill>
+                  <a:srgbClr val="444444"/>
+                </a:solidFill>
+                <a:latin typeface="Calibri"/>
+              </a:rPr>
+              <a:t>-  Create the 21 tables in SQL with keys and constraints, load sample data, add the BCNF trigger, and write PL/SQL for receiving stock and dispatching orders.</a:t>
             </a:r>
           </a:p>
           <a:p>
@@ -9958,109 +10100,29 @@
               </a:spcAft>
             </a:pPr>
             <a:r>
-              <a:rPr sz="1600">
-                <a:solidFill>
-                  <a:srgbClr val="000000"/>
-                </a:solidFill>
-                <a:latin typeface="Calibri"/>
-              </a:rPr>
-              <a:t>•  Correcting a product name, an address or a city's state is a single-row edit.</a:t>
-            </a:r>
-          </a:p>
-          <a:p>
-            <a:pPr>
+              <a:rPr sz="1700">
+                <a:solidFill>
+                  <a:srgbClr val="000000"/>
+                </a:solidFill>
+                <a:latin typeface="Calibri"/>
+              </a:rPr>
+              <a:t>•  DA3, due 23 October 2026</a:t>
+            </a:r>
+          </a:p>
+          <a:p>
+            <a:pPr lvl="1">
               <a:spcAft>
                 <a:spcPts val="900"/>
               </a:spcAft>
             </a:pPr>
             <a:r>
-              <a:rPr sz="1600">
-                <a:solidFill>
-                  <a:srgbClr val="000000"/>
-                </a:solidFill>
-                <a:latin typeface="Calibri"/>
-              </a:rPr>
-              <a:t>•  A supplier, product or customer can exist before appearing on any order.</a:t>
-            </a:r>
-          </a:p>
-          <a:p>
-            <a:pPr>
-              <a:spcAft>
-                <a:spcPts val="900"/>
-              </a:spcAft>
-            </a:pPr>
-            <a:r>
-              <a:rPr sz="1600">
-                <a:solidFill>
-                  <a:srgbClr val="000000"/>
-                </a:solidFill>
-                <a:latin typeface="Calibri"/>
-              </a:rPr>
-              <a:t>•  Deleting an order cannot wipe out the customer who placed it.</a:t>
-            </a:r>
-          </a:p>
-          <a:p>
-            <a:pPr>
-              <a:spcAft>
-                <a:spcPts val="900"/>
-              </a:spcAft>
-            </a:pPr>
-            <a:r>
-              <a:rPr sz="1600">
-                <a:solidFill>
-                  <a:srgbClr val="000000"/>
-                </a:solidFill>
-                <a:latin typeface="Calibri"/>
-              </a:rPr>
-              <a:t>•  TotalAmt is calculated, not stored, so it can never fall out of step.</a:t>
-            </a:r>
-          </a:p>
-          <a:p>
-            <a:pPr>
-              <a:spcAft>
-                <a:spcPts val="900"/>
-              </a:spcAft>
-            </a:pPr>
-            <a:r>
-              <a:rPr sz="1600">
-                <a:solidFill>
-                  <a:srgbClr val="000000"/>
-                </a:solidFill>
-                <a:latin typeface="Calibri"/>
-              </a:rPr>
-              <a:t>•  A movement is recorded once whether it is a shipment or a return.</a:t>
-            </a:r>
-          </a:p>
-          <a:p>
-            <a:pPr>
-              <a:spcAft>
-                <a:spcPts val="900"/>
-              </a:spcAft>
-            </a:pPr>
-            <a:r>
-              <a:rPr sz="1600">
-                <a:solidFill>
-                  <a:srgbClr val="000000"/>
-                </a:solidFill>
-                <a:latin typeface="Calibri"/>
-              </a:rPr>
-              <a:t>•  WAREHOUSE has two candidate keys now, WarehouseID and ManagerID, because MANAGES is 1:1. Both are keys, so it is still in BCNF.</a:t>
-            </a:r>
-          </a:p>
-          <a:p>
-            <a:pPr>
-              <a:spcAft>
-                <a:spcPts val="900"/>
-              </a:spcAft>
-            </a:pPr>
-            <a:r>
-              <a:rPr sz="1600">
-                <a:solidFill>
-                  <a:srgbClr val="000000"/>
-                </a:solidFill>
-                <a:latin typeface="Calibri"/>
-              </a:rPr>
-              <a:t>•  One trade-off: F7, {OrderID, City} -&gt; DriverID, now needs a trigger, which DA2 will add.</a:t>
+              <a:rPr sz="1500">
+                <a:solidFill>
+                  <a:srgbClr val="444444"/>
+                </a:solidFill>
+                <a:latin typeface="Calibri"/>
+              </a:rPr>
+              <a:t>-  Rebuild on a graph database (Neo4j). Tracing a delivery back through shipment, order, warehouse and supplier is a chain of hops, one line in a graph query but a fresh join for every step in SQL.</a:t>
             </a:r>
           </a:p>
         </p:txBody>
@@ -10074,190 +10136,6 @@
 </file>
 
 <file path=ppt/slides/slide35.xml><?xml version="1.0" encoding="utf-8"?>
-<p:sld xmlns:a="http://schemas.openxmlformats.org/drawingml/2006/main" xmlns:p="http://schemas.openxmlformats.org/presentationml/2006/main" xmlns:r="http://schemas.openxmlformats.org/officeDocument/2006/relationships">
-  <p:cSld>
-    <p:spTree>
-      <p:nvGrpSpPr>
-        <p:cNvPr id="1" name=""/>
-        <p:cNvGrpSpPr/>
-        <p:nvPr/>
-      </p:nvGrpSpPr>
-      <p:grpSpPr/>
-      <p:sp>
-        <p:nvSpPr>
-          <p:cNvPr id="2" name="TextBox 1"/>
-          <p:cNvSpPr txBox="1"/>
-          <p:nvPr/>
-        </p:nvSpPr>
-        <p:spPr>
-          <a:xfrm>
-            <a:off x="457200" y="292608"/>
-            <a:ext cx="11338560" cy="566928"/>
-          </a:xfrm>
-          <a:prstGeom prst="rect">
-            <a:avLst/>
-          </a:prstGeom>
-          <a:noFill/>
-        </p:spPr>
-        <p:txBody>
-          <a:bodyPr wrap="square">
-            <a:spAutoFit/>
-          </a:bodyPr>
-          <a:lstStyle/>
-          <a:p>
-            <a:pPr algn="l"/>
-            <a:r>
-              <a:rPr sz="2600" b="1" i="0">
-                <a:solidFill>
-                  <a:srgbClr val="000000"/>
-                </a:solidFill>
-                <a:latin typeface="Calibri"/>
-              </a:rPr>
-              <a:t>11. What Comes Next</a:t>
-            </a:r>
-          </a:p>
-        </p:txBody>
-      </p:sp>
-      <p:sp>
-        <p:nvSpPr>
-          <p:cNvPr id="3" name="Rectangle 2"/>
-          <p:cNvSpPr/>
-          <p:nvPr/>
-        </p:nvSpPr>
-        <p:spPr>
-          <a:xfrm>
-            <a:off x="457200" y="950976"/>
-            <a:ext cx="11338560" cy="18288"/>
-          </a:xfrm>
-          <a:prstGeom prst="rect">
-            <a:avLst/>
-          </a:prstGeom>
-          <a:solidFill>
-            <a:srgbClr val="000000"/>
-          </a:solidFill>
-          <a:ln>
-            <a:noFill/>
-          </a:ln>
-          <a:effectLst/>
-        </p:spPr>
-        <p:style>
-          <a:lnRef idx="1">
-            <a:schemeClr val="accent1"/>
-          </a:lnRef>
-          <a:fillRef idx="3">
-            <a:schemeClr val="accent1"/>
-          </a:fillRef>
-          <a:effectRef idx="2">
-            <a:schemeClr val="accent1"/>
-          </a:effectRef>
-          <a:fontRef idx="minor">
-            <a:schemeClr val="lt1"/>
-          </a:fontRef>
-        </p:style>
-        <p:txBody>
-          <a:bodyPr rtlCol="0" anchor="ctr"/>
-          <a:lstStyle/>
-          <a:p>
-            <a:pPr algn="ctr"/>
-          </a:p>
-        </p:txBody>
-      </p:sp>
-      <p:sp>
-        <p:nvSpPr>
-          <p:cNvPr id="4" name="TextBox 3"/>
-          <p:cNvSpPr txBox="1"/>
-          <p:nvPr/>
-        </p:nvSpPr>
-        <p:spPr>
-          <a:xfrm>
-            <a:off x="640080" y="1133856"/>
-            <a:ext cx="10972800" cy="5449824"/>
-          </a:xfrm>
-          <a:prstGeom prst="rect">
-            <a:avLst/>
-          </a:prstGeom>
-          <a:noFill/>
-        </p:spPr>
-        <p:txBody>
-          <a:bodyPr wrap="square">
-            <a:spAutoFit/>
-          </a:bodyPr>
-          <a:lstStyle/>
-          <a:p>
-            <a:pPr>
-              <a:spcAft>
-                <a:spcPts val="900"/>
-              </a:spcAft>
-            </a:pPr>
-            <a:r>
-              <a:rPr sz="1700">
-                <a:solidFill>
-                  <a:srgbClr val="000000"/>
-                </a:solidFill>
-                <a:latin typeface="Calibri"/>
-              </a:rPr>
-              <a:t>•  DA2, due 18 September 2026</a:t>
-            </a:r>
-          </a:p>
-          <a:p>
-            <a:pPr lvl="1">
-              <a:spcAft>
-                <a:spcPts val="900"/>
-              </a:spcAft>
-            </a:pPr>
-            <a:r>
-              <a:rPr sz="1500">
-                <a:solidFill>
-                  <a:srgbClr val="444444"/>
-                </a:solidFill>
-                <a:latin typeface="Calibri"/>
-              </a:rPr>
-              <a:t>-  Create the 21 tables in SQL with keys and constraints, load sample data, add the BCNF trigger, and write PL/SQL for receiving stock and dispatching orders.</a:t>
-            </a:r>
-          </a:p>
-          <a:p>
-            <a:pPr>
-              <a:spcAft>
-                <a:spcPts val="900"/>
-              </a:spcAft>
-            </a:pPr>
-            <a:r>
-              <a:rPr sz="1700">
-                <a:solidFill>
-                  <a:srgbClr val="000000"/>
-                </a:solidFill>
-                <a:latin typeface="Calibri"/>
-              </a:rPr>
-              <a:t>•  DA3, due 23 October 2026</a:t>
-            </a:r>
-          </a:p>
-          <a:p>
-            <a:pPr lvl="1">
-              <a:spcAft>
-                <a:spcPts val="900"/>
-              </a:spcAft>
-            </a:pPr>
-            <a:r>
-              <a:rPr sz="1500">
-                <a:solidFill>
-                  <a:srgbClr val="444444"/>
-                </a:solidFill>
-                <a:latin typeface="Calibri"/>
-              </a:rPr>
-              <a:t>-  Rebuild on a graph database (Neo4j). Tracing a delivery back through shipment, order, warehouse and supplier is a chain of hops, one line in a graph query but a fresh join for every step in SQL.</a:t>
-            </a:r>
-          </a:p>
-        </p:txBody>
-      </p:sp>
-    </p:spTree>
-  </p:cSld>
-  <p:clrMapOvr>
-    <a:masterClrMapping/>
-  </p:clrMapOvr>
-</p:sld>
-</file>
-
-<file path=ppt/slides/slide36.xml><?xml version="1.0" encoding="utf-8"?>
 <p:sld xmlns:a="http://schemas.openxmlformats.org/drawingml/2006/main" xmlns:p="http://schemas.openxmlformats.org/presentationml/2006/main" xmlns:r="http://schemas.openxmlformats.org/officeDocument/2006/relationships">
   <p:cSld>
     <p:spTree>
@@ -11317,7 +11195,7 @@
                             <a:srgbClr val="000000"/>
                           </a:solidFill>
                         </a:rPr>
-                        <a:t>CName, Address (Street + City + Pincode), Phone</a:t>
+                        <a:t>CName, Address (Street + City), Phone</a:t>
                       </a:r>
                     </a:p>
                   </a:txBody>
@@ -12930,8 +12808,8 @@
         </p:blipFill>
         <p:spPr>
           <a:xfrm>
-            <a:off x="2105359" y="1078992"/>
-            <a:ext cx="7980975" cy="5596127"/>
+            <a:off x="2130447" y="1078992"/>
+            <a:ext cx="7930799" cy="5596127"/>
           </a:xfrm>
           <a:prstGeom prst="rect">
             <a:avLst/>
